--- a/U5/Clase 8/U5 - Clase 8 - Versionado de código.pptx
+++ b/U5/Clase 8/U5 - Clase 8 - Versionado de código.pptx
@@ -1,35 +1,35 @@
 
 <file path=ppt/presentation.xml><?xml version="1.0" encoding="utf-8"?>
-<p:presentation xmlns:a="http://schemas.openxmlformats.org/drawingml/2006/main" xmlns:r="http://schemas.openxmlformats.org/officeDocument/2006/relationships" xmlns:mc="http://schemas.openxmlformats.org/markup-compatibility/2006" xmlns:mv="urn:schemas-microsoft-com:mac:vml" xmlns:p="http://schemas.openxmlformats.org/presentationml/2006/main" xmlns:c="http://schemas.openxmlformats.org/drawingml/2006/chart" xmlns:dgm="http://schemas.openxmlformats.org/drawingml/2006/diagram" xmlns:o="urn:schemas-microsoft-com:office:office" xmlns:v="urn:schemas-microsoft-com:vml" xmlns:pvml="urn:schemas-microsoft-com:office:powerpoint" xmlns:com="http://schemas.openxmlformats.org/drawingml/2006/compatibility" xmlns:p14="http://schemas.microsoft.com/office/powerpoint/2010/main" xmlns:p15="http://schemas.microsoft.com/office/powerpoint/2012/main" xmlns:ahyp="http://schemas.microsoft.com/office/drawing/2018/hyperlinkcolor" autoCompressPictures="0" embedTrueTypeFonts="1" strictFirstAndLastChars="0" saveSubsetFonts="1">
+<p:presentation xmlns:a="http://schemas.openxmlformats.org/drawingml/2006/main" xmlns:r="http://schemas.openxmlformats.org/officeDocument/2006/relationships" xmlns:p="http://schemas.openxmlformats.org/presentationml/2006/main" strictFirstAndLastChars="0" embedTrueTypeFonts="1" saveSubsetFonts="1" autoCompressPictures="0">
   <p:sldMasterIdLst>
-    <p:sldMasterId id="2147483648" r:id="rId3"/>
+    <p:sldMasterId id="2147483648" r:id="rId1"/>
   </p:sldMasterIdLst>
   <p:notesMasterIdLst>
-    <p:notesMasterId r:id="rId4"/>
+    <p:notesMasterId r:id="rId10"/>
   </p:notesMasterIdLst>
   <p:sldIdLst>
-    <p:sldId id="256" r:id="rId5"/>
-    <p:sldId id="257" r:id="rId6"/>
-    <p:sldId id="258" r:id="rId7"/>
-    <p:sldId id="259" r:id="rId8"/>
-    <p:sldId id="260" r:id="rId9"/>
-    <p:sldId id="261" r:id="rId10"/>
-    <p:sldId id="262" r:id="rId11"/>
-    <p:sldId id="263" r:id="rId12"/>
+    <p:sldId id="256" r:id="rId2"/>
+    <p:sldId id="257" r:id="rId3"/>
+    <p:sldId id="258" r:id="rId4"/>
+    <p:sldId id="259" r:id="rId5"/>
+    <p:sldId id="260" r:id="rId6"/>
+    <p:sldId id="261" r:id="rId7"/>
+    <p:sldId id="262" r:id="rId8"/>
+    <p:sldId id="263" r:id="rId9"/>
   </p:sldIdLst>
-  <p:sldSz cy="6858000" cx="9906000"/>
+  <p:sldSz cx="9906000" cy="6858000" type="A4"/>
   <p:notesSz cx="6858000" cy="9144000"/>
   <p:embeddedFontLst>
     <p:embeddedFont>
-      <p:font typeface="Roboto"/>
-      <p:regular r:id="rId13"/>
-      <p:bold r:id="rId14"/>
-      <p:italic r:id="rId15"/>
-      <p:boldItalic r:id="rId16"/>
+      <p:font typeface="Roboto" panose="02000000000000000000" pitchFamily="2" charset="0"/>
+      <p:regular r:id="rId11"/>
+      <p:bold r:id="rId12"/>
+      <p:italic r:id="rId13"/>
+      <p:boldItalic r:id="rId14"/>
     </p:embeddedFont>
   </p:embeddedFontLst>
   <p:defaultTextStyle>
-    <a:defPPr lvl="0" marR="0" rtl="0" algn="l">
+    <a:defPPr marR="0" lvl="0" algn="l" rtl="0">
       <a:lnSpc>
         <a:spcPct val="100000"/>
       </a:lnSpc>
@@ -40,7 +40,7 @@
         <a:spcPts val="0"/>
       </a:spcAft>
     </a:defPPr>
-    <a:lvl1pPr lvl="0" marR="0" rtl="0" algn="l">
+    <a:lvl1pPr marR="0" lvl="0" algn="l" rtl="0">
       <a:lnSpc>
         <a:spcPct val="100000"/>
       </a:lnSpc>
@@ -54,7 +54,7 @@
         <a:srgbClr val="000000"/>
       </a:buClr>
       <a:buFont typeface="Arial"/>
-      <a:defRPr b="0" i="0" sz="1400" u="none" cap="none" strike="noStrike">
+      <a:defRPr sz="1400" b="0" i="0" u="none" strike="noStrike" cap="none">
         <a:solidFill>
           <a:srgbClr val="000000"/>
         </a:solidFill>
@@ -64,7 +64,7 @@
         <a:sym typeface="Arial"/>
       </a:defRPr>
     </a:lvl1pPr>
-    <a:lvl2pPr lvl="1" marR="0" rtl="0" algn="l">
+    <a:lvl2pPr marR="0" lvl="1" algn="l" rtl="0">
       <a:lnSpc>
         <a:spcPct val="100000"/>
       </a:lnSpc>
@@ -78,7 +78,7 @@
         <a:srgbClr val="000000"/>
       </a:buClr>
       <a:buFont typeface="Arial"/>
-      <a:defRPr b="0" i="0" sz="1400" u="none" cap="none" strike="noStrike">
+      <a:defRPr sz="1400" b="0" i="0" u="none" strike="noStrike" cap="none">
         <a:solidFill>
           <a:srgbClr val="000000"/>
         </a:solidFill>
@@ -88,7 +88,7 @@
         <a:sym typeface="Arial"/>
       </a:defRPr>
     </a:lvl2pPr>
-    <a:lvl3pPr lvl="2" marR="0" rtl="0" algn="l">
+    <a:lvl3pPr marR="0" lvl="2" algn="l" rtl="0">
       <a:lnSpc>
         <a:spcPct val="100000"/>
       </a:lnSpc>
@@ -102,7 +102,7 @@
         <a:srgbClr val="000000"/>
       </a:buClr>
       <a:buFont typeface="Arial"/>
-      <a:defRPr b="0" i="0" sz="1400" u="none" cap="none" strike="noStrike">
+      <a:defRPr sz="1400" b="0" i="0" u="none" strike="noStrike" cap="none">
         <a:solidFill>
           <a:srgbClr val="000000"/>
         </a:solidFill>
@@ -112,7 +112,7 @@
         <a:sym typeface="Arial"/>
       </a:defRPr>
     </a:lvl3pPr>
-    <a:lvl4pPr lvl="3" marR="0" rtl="0" algn="l">
+    <a:lvl4pPr marR="0" lvl="3" algn="l" rtl="0">
       <a:lnSpc>
         <a:spcPct val="100000"/>
       </a:lnSpc>
@@ -126,7 +126,7 @@
         <a:srgbClr val="000000"/>
       </a:buClr>
       <a:buFont typeface="Arial"/>
-      <a:defRPr b="0" i="0" sz="1400" u="none" cap="none" strike="noStrike">
+      <a:defRPr sz="1400" b="0" i="0" u="none" strike="noStrike" cap="none">
         <a:solidFill>
           <a:srgbClr val="000000"/>
         </a:solidFill>
@@ -136,7 +136,7 @@
         <a:sym typeface="Arial"/>
       </a:defRPr>
     </a:lvl4pPr>
-    <a:lvl5pPr lvl="4" marR="0" rtl="0" algn="l">
+    <a:lvl5pPr marR="0" lvl="4" algn="l" rtl="0">
       <a:lnSpc>
         <a:spcPct val="100000"/>
       </a:lnSpc>
@@ -150,7 +150,7 @@
         <a:srgbClr val="000000"/>
       </a:buClr>
       <a:buFont typeface="Arial"/>
-      <a:defRPr b="0" i="0" sz="1400" u="none" cap="none" strike="noStrike">
+      <a:defRPr sz="1400" b="0" i="0" u="none" strike="noStrike" cap="none">
         <a:solidFill>
           <a:srgbClr val="000000"/>
         </a:solidFill>
@@ -160,7 +160,7 @@
         <a:sym typeface="Arial"/>
       </a:defRPr>
     </a:lvl5pPr>
-    <a:lvl6pPr lvl="5" marR="0" rtl="0" algn="l">
+    <a:lvl6pPr marR="0" lvl="5" algn="l" rtl="0">
       <a:lnSpc>
         <a:spcPct val="100000"/>
       </a:lnSpc>
@@ -174,7 +174,7 @@
         <a:srgbClr val="000000"/>
       </a:buClr>
       <a:buFont typeface="Arial"/>
-      <a:defRPr b="0" i="0" sz="1400" u="none" cap="none" strike="noStrike">
+      <a:defRPr sz="1400" b="0" i="0" u="none" strike="noStrike" cap="none">
         <a:solidFill>
           <a:srgbClr val="000000"/>
         </a:solidFill>
@@ -184,7 +184,7 @@
         <a:sym typeface="Arial"/>
       </a:defRPr>
     </a:lvl6pPr>
-    <a:lvl7pPr lvl="6" marR="0" rtl="0" algn="l">
+    <a:lvl7pPr marR="0" lvl="6" algn="l" rtl="0">
       <a:lnSpc>
         <a:spcPct val="100000"/>
       </a:lnSpc>
@@ -198,7 +198,7 @@
         <a:srgbClr val="000000"/>
       </a:buClr>
       <a:buFont typeface="Arial"/>
-      <a:defRPr b="0" i="0" sz="1400" u="none" cap="none" strike="noStrike">
+      <a:defRPr sz="1400" b="0" i="0" u="none" strike="noStrike" cap="none">
         <a:solidFill>
           <a:srgbClr val="000000"/>
         </a:solidFill>
@@ -208,7 +208,7 @@
         <a:sym typeface="Arial"/>
       </a:defRPr>
     </a:lvl7pPr>
-    <a:lvl8pPr lvl="7" marR="0" rtl="0" algn="l">
+    <a:lvl8pPr marR="0" lvl="7" algn="l" rtl="0">
       <a:lnSpc>
         <a:spcPct val="100000"/>
       </a:lnSpc>
@@ -222,7 +222,7 @@
         <a:srgbClr val="000000"/>
       </a:buClr>
       <a:buFont typeface="Arial"/>
-      <a:defRPr b="0" i="0" sz="1400" u="none" cap="none" strike="noStrike">
+      <a:defRPr sz="1400" b="0" i="0" u="none" strike="noStrike" cap="none">
         <a:solidFill>
           <a:srgbClr val="000000"/>
         </a:solidFill>
@@ -232,7 +232,7 @@
         <a:sym typeface="Arial"/>
       </a:defRPr>
     </a:lvl8pPr>
-    <a:lvl9pPr lvl="8" marR="0" rtl="0" algn="l">
+    <a:lvl9pPr marR="0" lvl="8" algn="l" rtl="0">
       <a:lnSpc>
         <a:spcPct val="100000"/>
       </a:lnSpc>
@@ -246,7 +246,7 @@
         <a:srgbClr val="000000"/>
       </a:buClr>
       <a:buFont typeface="Arial"/>
-      <a:defRPr b="0" i="0" sz="1400" u="none" cap="none" strike="noStrike">
+      <a:defRPr sz="1400" b="0" i="0" u="none" strike="noStrike" cap="none">
         <a:solidFill>
           <a:srgbClr val="000000"/>
         </a:solidFill>
@@ -259,25 +259,26 @@
   </p:defaultTextStyle>
   <p:extLst>
     <p:ext uri="GoogleSlidesCustomDataVersion2">
-      <go:slidesCustomData xmlns:go="http://customooxmlschemas.google.com/" r:id="rId17" roundtripDataSignature="AMtx7mhoFc16nsOdDmz3pEwOYjmucdRS9Q=="/>
+      <go:slidesCustomData xmlns:go="http://customooxmlschemas.google.com/" xmlns:ahyp="http://schemas.microsoft.com/office/drawing/2018/hyperlinkcolor" xmlns:p15="http://schemas.microsoft.com/office/powerpoint/2012/main" xmlns:p14="http://schemas.microsoft.com/office/powerpoint/2010/main" xmlns:com="http://schemas.openxmlformats.org/drawingml/2006/compatibility" xmlns:pvml="urn:schemas-microsoft-com:office:powerpoint" xmlns:v="urn:schemas-microsoft-com:vml" xmlns:o="urn:schemas-microsoft-com:office:office" xmlns:dgm="http://schemas.openxmlformats.org/drawingml/2006/diagram" xmlns:c="http://schemas.openxmlformats.org/drawingml/2006/chart" xmlns:mv="urn:schemas-microsoft-com:mac:vml" xmlns:mc="http://schemas.openxmlformats.org/markup-compatibility/2006" xmlns="" r:id="rId17" roundtripDataSignature="AMtx7mhoFc16nsOdDmz3pEwOYjmucdRS9Q=="/>
     </p:ext>
   </p:extLst>
 </p:presentation>
 </file>
 
 <file path=ppt/notesMasters/notesMaster1.xml><?xml version="1.0" encoding="utf-8"?>
-<p:notesMaster xmlns:a="http://schemas.openxmlformats.org/drawingml/2006/main" xmlns:r="http://schemas.openxmlformats.org/officeDocument/2006/relationships" xmlns:mc="http://schemas.openxmlformats.org/markup-compatibility/2006" xmlns:mv="urn:schemas-microsoft-com:mac:vml" xmlns:p="http://schemas.openxmlformats.org/presentationml/2006/main" xmlns:c="http://schemas.openxmlformats.org/drawingml/2006/chart" xmlns:dgm="http://schemas.openxmlformats.org/drawingml/2006/diagram" xmlns:o="urn:schemas-microsoft-com:office:office" xmlns:v="urn:schemas-microsoft-com:vml" xmlns:pvml="urn:schemas-microsoft-com:office:powerpoint" xmlns:com="http://schemas.openxmlformats.org/drawingml/2006/compatibility" xmlns:p14="http://schemas.microsoft.com/office/powerpoint/2010/main" xmlns:p15="http://schemas.microsoft.com/office/powerpoint/2012/main" xmlns:ahyp="http://schemas.microsoft.com/office/drawing/2018/hyperlinkcolor">
+<p:notesMaster xmlns:a="http://schemas.openxmlformats.org/drawingml/2006/main" xmlns:r="http://schemas.openxmlformats.org/officeDocument/2006/relationships" xmlns:p="http://schemas.openxmlformats.org/presentationml/2006/main">
   <p:cSld>
     <p:bg>
       <p:bgPr>
         <a:solidFill>
           <a:schemeClr val="lt1"/>
         </a:solidFill>
+        <a:effectLst/>
       </p:bgPr>
     </p:bg>
     <p:spTree>
       <p:nvGrpSpPr>
-        <p:cNvPr id="2" name="Shape 2"/>
+        <p:cNvPr id="1" name="Shape 2"/>
         <p:cNvGrpSpPr/>
         <p:nvPr/>
       </p:nvGrpSpPr>
@@ -292,9 +293,11 @@
       <p:sp>
         <p:nvSpPr>
           <p:cNvPr id="3" name="Google Shape;3;n"/>
-          <p:cNvSpPr txBox="1"/>
+          <p:cNvSpPr txBox="1">
+            <a:spLocks noGrp="1"/>
+          </p:cNvSpPr>
           <p:nvPr>
-            <p:ph idx="2" type="hdr"/>
+            <p:ph type="hdr" idx="2"/>
           </p:nvPr>
         </p:nvSpPr>
         <p:spPr>
@@ -311,20 +314,20 @@
           </a:ln>
         </p:spPr>
         <p:txBody>
-          <a:bodyPr anchorCtr="0" anchor="t" bIns="45700" lIns="91425" spcFirstLastPara="1" rIns="91425" wrap="square" tIns="45700">
+          <a:bodyPr spcFirstLastPara="1" wrap="square" lIns="91425" tIns="45700" rIns="91425" bIns="45700" anchor="t" anchorCtr="0">
             <a:noAutofit/>
           </a:bodyPr>
           <a:lstStyle>
-            <a:lvl1pPr lvl="0" marR="0" rtl="0" algn="l">
-              <a:spcBef>
-                <a:spcPts val="0"/>
-              </a:spcBef>
-              <a:spcAft>
-                <a:spcPts val="0"/>
-              </a:spcAft>
-              <a:buSzPts val="1400"/>
-              <a:buNone/>
-              <a:defRPr b="0" i="0" sz="1200" u="none" cap="none" strike="noStrike">
+            <a:lvl1pPr marR="0" lvl="0" algn="l" rtl="0">
+              <a:spcBef>
+                <a:spcPts val="0"/>
+              </a:spcBef>
+              <a:spcAft>
+                <a:spcPts val="0"/>
+              </a:spcAft>
+              <a:buSzPts val="1400"/>
+              <a:buNone/>
+              <a:defRPr sz="1200" b="0" i="0" u="none" strike="noStrike" cap="none">
                 <a:solidFill>
                   <a:schemeClr val="dk1"/>
                 </a:solidFill>
@@ -334,16 +337,16 @@
                 <a:sym typeface="Calibri"/>
               </a:defRPr>
             </a:lvl1pPr>
-            <a:lvl2pPr lvl="1" marR="0" rtl="0" algn="l">
-              <a:spcBef>
-                <a:spcPts val="0"/>
-              </a:spcBef>
-              <a:spcAft>
-                <a:spcPts val="0"/>
-              </a:spcAft>
-              <a:buSzPts val="1400"/>
-              <a:buNone/>
-              <a:defRPr b="0" i="0" sz="1800" u="none" cap="none" strike="noStrike">
+            <a:lvl2pPr marR="0" lvl="1" algn="l" rtl="0">
+              <a:spcBef>
+                <a:spcPts val="0"/>
+              </a:spcBef>
+              <a:spcAft>
+                <a:spcPts val="0"/>
+              </a:spcAft>
+              <a:buSzPts val="1400"/>
+              <a:buNone/>
+              <a:defRPr sz="1800" b="0" i="0" u="none" strike="noStrike" cap="none">
                 <a:solidFill>
                   <a:schemeClr val="dk1"/>
                 </a:solidFill>
@@ -353,16 +356,16 @@
                 <a:sym typeface="Calibri"/>
               </a:defRPr>
             </a:lvl2pPr>
-            <a:lvl3pPr lvl="2" marR="0" rtl="0" algn="l">
-              <a:spcBef>
-                <a:spcPts val="0"/>
-              </a:spcBef>
-              <a:spcAft>
-                <a:spcPts val="0"/>
-              </a:spcAft>
-              <a:buSzPts val="1400"/>
-              <a:buNone/>
-              <a:defRPr b="0" i="0" sz="1800" u="none" cap="none" strike="noStrike">
+            <a:lvl3pPr marR="0" lvl="2" algn="l" rtl="0">
+              <a:spcBef>
+                <a:spcPts val="0"/>
+              </a:spcBef>
+              <a:spcAft>
+                <a:spcPts val="0"/>
+              </a:spcAft>
+              <a:buSzPts val="1400"/>
+              <a:buNone/>
+              <a:defRPr sz="1800" b="0" i="0" u="none" strike="noStrike" cap="none">
                 <a:solidFill>
                   <a:schemeClr val="dk1"/>
                 </a:solidFill>
@@ -372,16 +375,16 @@
                 <a:sym typeface="Calibri"/>
               </a:defRPr>
             </a:lvl3pPr>
-            <a:lvl4pPr lvl="3" marR="0" rtl="0" algn="l">
-              <a:spcBef>
-                <a:spcPts val="0"/>
-              </a:spcBef>
-              <a:spcAft>
-                <a:spcPts val="0"/>
-              </a:spcAft>
-              <a:buSzPts val="1400"/>
-              <a:buNone/>
-              <a:defRPr b="0" i="0" sz="1800" u="none" cap="none" strike="noStrike">
+            <a:lvl4pPr marR="0" lvl="3" algn="l" rtl="0">
+              <a:spcBef>
+                <a:spcPts val="0"/>
+              </a:spcBef>
+              <a:spcAft>
+                <a:spcPts val="0"/>
+              </a:spcAft>
+              <a:buSzPts val="1400"/>
+              <a:buNone/>
+              <a:defRPr sz="1800" b="0" i="0" u="none" strike="noStrike" cap="none">
                 <a:solidFill>
                   <a:schemeClr val="dk1"/>
                 </a:solidFill>
@@ -391,16 +394,16 @@
                 <a:sym typeface="Calibri"/>
               </a:defRPr>
             </a:lvl4pPr>
-            <a:lvl5pPr lvl="4" marR="0" rtl="0" algn="l">
-              <a:spcBef>
-                <a:spcPts val="0"/>
-              </a:spcBef>
-              <a:spcAft>
-                <a:spcPts val="0"/>
-              </a:spcAft>
-              <a:buSzPts val="1400"/>
-              <a:buNone/>
-              <a:defRPr b="0" i="0" sz="1800" u="none" cap="none" strike="noStrike">
+            <a:lvl5pPr marR="0" lvl="4" algn="l" rtl="0">
+              <a:spcBef>
+                <a:spcPts val="0"/>
+              </a:spcBef>
+              <a:spcAft>
+                <a:spcPts val="0"/>
+              </a:spcAft>
+              <a:buSzPts val="1400"/>
+              <a:buNone/>
+              <a:defRPr sz="1800" b="0" i="0" u="none" strike="noStrike" cap="none">
                 <a:solidFill>
                   <a:schemeClr val="dk1"/>
                 </a:solidFill>
@@ -410,16 +413,16 @@
                 <a:sym typeface="Calibri"/>
               </a:defRPr>
             </a:lvl5pPr>
-            <a:lvl6pPr lvl="5" marR="0" rtl="0" algn="l">
-              <a:spcBef>
-                <a:spcPts val="0"/>
-              </a:spcBef>
-              <a:spcAft>
-                <a:spcPts val="0"/>
-              </a:spcAft>
-              <a:buSzPts val="1400"/>
-              <a:buNone/>
-              <a:defRPr b="0" i="0" sz="1800" u="none" cap="none" strike="noStrike">
+            <a:lvl6pPr marR="0" lvl="5" algn="l" rtl="0">
+              <a:spcBef>
+                <a:spcPts val="0"/>
+              </a:spcBef>
+              <a:spcAft>
+                <a:spcPts val="0"/>
+              </a:spcAft>
+              <a:buSzPts val="1400"/>
+              <a:buNone/>
+              <a:defRPr sz="1800" b="0" i="0" u="none" strike="noStrike" cap="none">
                 <a:solidFill>
                   <a:schemeClr val="dk1"/>
                 </a:solidFill>
@@ -429,16 +432,16 @@
                 <a:sym typeface="Calibri"/>
               </a:defRPr>
             </a:lvl6pPr>
-            <a:lvl7pPr lvl="6" marR="0" rtl="0" algn="l">
-              <a:spcBef>
-                <a:spcPts val="0"/>
-              </a:spcBef>
-              <a:spcAft>
-                <a:spcPts val="0"/>
-              </a:spcAft>
-              <a:buSzPts val="1400"/>
-              <a:buNone/>
-              <a:defRPr b="0" i="0" sz="1800" u="none" cap="none" strike="noStrike">
+            <a:lvl7pPr marR="0" lvl="6" algn="l" rtl="0">
+              <a:spcBef>
+                <a:spcPts val="0"/>
+              </a:spcBef>
+              <a:spcAft>
+                <a:spcPts val="0"/>
+              </a:spcAft>
+              <a:buSzPts val="1400"/>
+              <a:buNone/>
+              <a:defRPr sz="1800" b="0" i="0" u="none" strike="noStrike" cap="none">
                 <a:solidFill>
                   <a:schemeClr val="dk1"/>
                 </a:solidFill>
@@ -448,16 +451,16 @@
                 <a:sym typeface="Calibri"/>
               </a:defRPr>
             </a:lvl7pPr>
-            <a:lvl8pPr lvl="7" marR="0" rtl="0" algn="l">
-              <a:spcBef>
-                <a:spcPts val="0"/>
-              </a:spcBef>
-              <a:spcAft>
-                <a:spcPts val="0"/>
-              </a:spcAft>
-              <a:buSzPts val="1400"/>
-              <a:buNone/>
-              <a:defRPr b="0" i="0" sz="1800" u="none" cap="none" strike="noStrike">
+            <a:lvl8pPr marR="0" lvl="7" algn="l" rtl="0">
+              <a:spcBef>
+                <a:spcPts val="0"/>
+              </a:spcBef>
+              <a:spcAft>
+                <a:spcPts val="0"/>
+              </a:spcAft>
+              <a:buSzPts val="1400"/>
+              <a:buNone/>
+              <a:defRPr sz="1800" b="0" i="0" u="none" strike="noStrike" cap="none">
                 <a:solidFill>
                   <a:schemeClr val="dk1"/>
                 </a:solidFill>
@@ -467,16 +470,16 @@
                 <a:sym typeface="Calibri"/>
               </a:defRPr>
             </a:lvl8pPr>
-            <a:lvl9pPr lvl="8" marR="0" rtl="0" algn="l">
-              <a:spcBef>
-                <a:spcPts val="0"/>
-              </a:spcBef>
-              <a:spcAft>
-                <a:spcPts val="0"/>
-              </a:spcAft>
-              <a:buSzPts val="1400"/>
-              <a:buNone/>
-              <a:defRPr b="0" i="0" sz="1800" u="none" cap="none" strike="noStrike">
+            <a:lvl9pPr marR="0" lvl="8" algn="l" rtl="0">
+              <a:spcBef>
+                <a:spcPts val="0"/>
+              </a:spcBef>
+              <a:spcAft>
+                <a:spcPts val="0"/>
+              </a:spcAft>
+              <a:buSzPts val="1400"/>
+              <a:buNone/>
+              <a:defRPr sz="1800" b="0" i="0" u="none" strike="noStrike" cap="none">
                 <a:solidFill>
                   <a:schemeClr val="dk1"/>
                 </a:solidFill>
@@ -487,15 +490,19 @@
               </a:defRPr>
             </a:lvl9pPr>
           </a:lstStyle>
-          <a:p/>
+          <a:p>
+            <a:endParaRPr/>
+          </a:p>
         </p:txBody>
       </p:sp>
       <p:sp>
         <p:nvSpPr>
           <p:cNvPr id="4" name="Google Shape;4;n"/>
-          <p:cNvSpPr txBox="1"/>
+          <p:cNvSpPr txBox="1">
+            <a:spLocks noGrp="1"/>
+          </p:cNvSpPr>
           <p:nvPr>
-            <p:ph idx="10" type="dt"/>
+            <p:ph type="dt" idx="10"/>
           </p:nvPr>
         </p:nvSpPr>
         <p:spPr>
@@ -512,20 +519,20 @@
           </a:ln>
         </p:spPr>
         <p:txBody>
-          <a:bodyPr anchorCtr="0" anchor="t" bIns="45700" lIns="91425" spcFirstLastPara="1" rIns="91425" wrap="square" tIns="45700">
+          <a:bodyPr spcFirstLastPara="1" wrap="square" lIns="91425" tIns="45700" rIns="91425" bIns="45700" anchor="t" anchorCtr="0">
             <a:noAutofit/>
           </a:bodyPr>
           <a:lstStyle>
-            <a:lvl1pPr lvl="0" marR="0" rtl="0" algn="r">
-              <a:spcBef>
-                <a:spcPts val="0"/>
-              </a:spcBef>
-              <a:spcAft>
-                <a:spcPts val="0"/>
-              </a:spcAft>
-              <a:buSzPts val="1400"/>
-              <a:buNone/>
-              <a:defRPr b="0" i="0" sz="1200" u="none" cap="none" strike="noStrike">
+            <a:lvl1pPr marR="0" lvl="0" algn="r" rtl="0">
+              <a:spcBef>
+                <a:spcPts val="0"/>
+              </a:spcBef>
+              <a:spcAft>
+                <a:spcPts val="0"/>
+              </a:spcAft>
+              <a:buSzPts val="1400"/>
+              <a:buNone/>
+              <a:defRPr sz="1200" b="0" i="0" u="none" strike="noStrike" cap="none">
                 <a:solidFill>
                   <a:schemeClr val="dk1"/>
                 </a:solidFill>
@@ -535,16 +542,16 @@
                 <a:sym typeface="Calibri"/>
               </a:defRPr>
             </a:lvl1pPr>
-            <a:lvl2pPr lvl="1" marR="0" rtl="0" algn="l">
-              <a:spcBef>
-                <a:spcPts val="0"/>
-              </a:spcBef>
-              <a:spcAft>
-                <a:spcPts val="0"/>
-              </a:spcAft>
-              <a:buSzPts val="1400"/>
-              <a:buNone/>
-              <a:defRPr b="0" i="0" sz="1800" u="none" cap="none" strike="noStrike">
+            <a:lvl2pPr marR="0" lvl="1" algn="l" rtl="0">
+              <a:spcBef>
+                <a:spcPts val="0"/>
+              </a:spcBef>
+              <a:spcAft>
+                <a:spcPts val="0"/>
+              </a:spcAft>
+              <a:buSzPts val="1400"/>
+              <a:buNone/>
+              <a:defRPr sz="1800" b="0" i="0" u="none" strike="noStrike" cap="none">
                 <a:solidFill>
                   <a:schemeClr val="dk1"/>
                 </a:solidFill>
@@ -554,16 +561,16 @@
                 <a:sym typeface="Calibri"/>
               </a:defRPr>
             </a:lvl2pPr>
-            <a:lvl3pPr lvl="2" marR="0" rtl="0" algn="l">
-              <a:spcBef>
-                <a:spcPts val="0"/>
-              </a:spcBef>
-              <a:spcAft>
-                <a:spcPts val="0"/>
-              </a:spcAft>
-              <a:buSzPts val="1400"/>
-              <a:buNone/>
-              <a:defRPr b="0" i="0" sz="1800" u="none" cap="none" strike="noStrike">
+            <a:lvl3pPr marR="0" lvl="2" algn="l" rtl="0">
+              <a:spcBef>
+                <a:spcPts val="0"/>
+              </a:spcBef>
+              <a:spcAft>
+                <a:spcPts val="0"/>
+              </a:spcAft>
+              <a:buSzPts val="1400"/>
+              <a:buNone/>
+              <a:defRPr sz="1800" b="0" i="0" u="none" strike="noStrike" cap="none">
                 <a:solidFill>
                   <a:schemeClr val="dk1"/>
                 </a:solidFill>
@@ -573,16 +580,16 @@
                 <a:sym typeface="Calibri"/>
               </a:defRPr>
             </a:lvl3pPr>
-            <a:lvl4pPr lvl="3" marR="0" rtl="0" algn="l">
-              <a:spcBef>
-                <a:spcPts val="0"/>
-              </a:spcBef>
-              <a:spcAft>
-                <a:spcPts val="0"/>
-              </a:spcAft>
-              <a:buSzPts val="1400"/>
-              <a:buNone/>
-              <a:defRPr b="0" i="0" sz="1800" u="none" cap="none" strike="noStrike">
+            <a:lvl4pPr marR="0" lvl="3" algn="l" rtl="0">
+              <a:spcBef>
+                <a:spcPts val="0"/>
+              </a:spcBef>
+              <a:spcAft>
+                <a:spcPts val="0"/>
+              </a:spcAft>
+              <a:buSzPts val="1400"/>
+              <a:buNone/>
+              <a:defRPr sz="1800" b="0" i="0" u="none" strike="noStrike" cap="none">
                 <a:solidFill>
                   <a:schemeClr val="dk1"/>
                 </a:solidFill>
@@ -592,16 +599,16 @@
                 <a:sym typeface="Calibri"/>
               </a:defRPr>
             </a:lvl4pPr>
-            <a:lvl5pPr lvl="4" marR="0" rtl="0" algn="l">
-              <a:spcBef>
-                <a:spcPts val="0"/>
-              </a:spcBef>
-              <a:spcAft>
-                <a:spcPts val="0"/>
-              </a:spcAft>
-              <a:buSzPts val="1400"/>
-              <a:buNone/>
-              <a:defRPr b="0" i="0" sz="1800" u="none" cap="none" strike="noStrike">
+            <a:lvl5pPr marR="0" lvl="4" algn="l" rtl="0">
+              <a:spcBef>
+                <a:spcPts val="0"/>
+              </a:spcBef>
+              <a:spcAft>
+                <a:spcPts val="0"/>
+              </a:spcAft>
+              <a:buSzPts val="1400"/>
+              <a:buNone/>
+              <a:defRPr sz="1800" b="0" i="0" u="none" strike="noStrike" cap="none">
                 <a:solidFill>
                   <a:schemeClr val="dk1"/>
                 </a:solidFill>
@@ -611,16 +618,16 @@
                 <a:sym typeface="Calibri"/>
               </a:defRPr>
             </a:lvl5pPr>
-            <a:lvl6pPr lvl="5" marR="0" rtl="0" algn="l">
-              <a:spcBef>
-                <a:spcPts val="0"/>
-              </a:spcBef>
-              <a:spcAft>
-                <a:spcPts val="0"/>
-              </a:spcAft>
-              <a:buSzPts val="1400"/>
-              <a:buNone/>
-              <a:defRPr b="0" i="0" sz="1800" u="none" cap="none" strike="noStrike">
+            <a:lvl6pPr marR="0" lvl="5" algn="l" rtl="0">
+              <a:spcBef>
+                <a:spcPts val="0"/>
+              </a:spcBef>
+              <a:spcAft>
+                <a:spcPts val="0"/>
+              </a:spcAft>
+              <a:buSzPts val="1400"/>
+              <a:buNone/>
+              <a:defRPr sz="1800" b="0" i="0" u="none" strike="noStrike" cap="none">
                 <a:solidFill>
                   <a:schemeClr val="dk1"/>
                 </a:solidFill>
@@ -630,16 +637,16 @@
                 <a:sym typeface="Calibri"/>
               </a:defRPr>
             </a:lvl6pPr>
-            <a:lvl7pPr lvl="6" marR="0" rtl="0" algn="l">
-              <a:spcBef>
-                <a:spcPts val="0"/>
-              </a:spcBef>
-              <a:spcAft>
-                <a:spcPts val="0"/>
-              </a:spcAft>
-              <a:buSzPts val="1400"/>
-              <a:buNone/>
-              <a:defRPr b="0" i="0" sz="1800" u="none" cap="none" strike="noStrike">
+            <a:lvl7pPr marR="0" lvl="6" algn="l" rtl="0">
+              <a:spcBef>
+                <a:spcPts val="0"/>
+              </a:spcBef>
+              <a:spcAft>
+                <a:spcPts val="0"/>
+              </a:spcAft>
+              <a:buSzPts val="1400"/>
+              <a:buNone/>
+              <a:defRPr sz="1800" b="0" i="0" u="none" strike="noStrike" cap="none">
                 <a:solidFill>
                   <a:schemeClr val="dk1"/>
                 </a:solidFill>
@@ -649,16 +656,16 @@
                 <a:sym typeface="Calibri"/>
               </a:defRPr>
             </a:lvl7pPr>
-            <a:lvl8pPr lvl="7" marR="0" rtl="0" algn="l">
-              <a:spcBef>
-                <a:spcPts val="0"/>
-              </a:spcBef>
-              <a:spcAft>
-                <a:spcPts val="0"/>
-              </a:spcAft>
-              <a:buSzPts val="1400"/>
-              <a:buNone/>
-              <a:defRPr b="0" i="0" sz="1800" u="none" cap="none" strike="noStrike">
+            <a:lvl8pPr marR="0" lvl="7" algn="l" rtl="0">
+              <a:spcBef>
+                <a:spcPts val="0"/>
+              </a:spcBef>
+              <a:spcAft>
+                <a:spcPts val="0"/>
+              </a:spcAft>
+              <a:buSzPts val="1400"/>
+              <a:buNone/>
+              <a:defRPr sz="1800" b="0" i="0" u="none" strike="noStrike" cap="none">
                 <a:solidFill>
                   <a:schemeClr val="dk1"/>
                 </a:solidFill>
@@ -668,16 +675,16 @@
                 <a:sym typeface="Calibri"/>
               </a:defRPr>
             </a:lvl8pPr>
-            <a:lvl9pPr lvl="8" marR="0" rtl="0" algn="l">
-              <a:spcBef>
-                <a:spcPts val="0"/>
-              </a:spcBef>
-              <a:spcAft>
-                <a:spcPts val="0"/>
-              </a:spcAft>
-              <a:buSzPts val="1400"/>
-              <a:buNone/>
-              <a:defRPr b="0" i="0" sz="1800" u="none" cap="none" strike="noStrike">
+            <a:lvl9pPr marR="0" lvl="8" algn="l" rtl="0">
+              <a:spcBef>
+                <a:spcPts val="0"/>
+              </a:spcBef>
+              <a:spcAft>
+                <a:spcPts val="0"/>
+              </a:spcAft>
+              <a:buSzPts val="1400"/>
+              <a:buNone/>
+              <a:defRPr sz="1800" b="0" i="0" u="none" strike="noStrike" cap="none">
                 <a:solidFill>
                   <a:schemeClr val="dk1"/>
                 </a:solidFill>
@@ -688,15 +695,19 @@
               </a:defRPr>
             </a:lvl9pPr>
           </a:lstStyle>
-          <a:p/>
+          <a:p>
+            <a:endParaRPr/>
+          </a:p>
         </p:txBody>
       </p:sp>
       <p:sp>
         <p:nvSpPr>
           <p:cNvPr id="5" name="Google Shape;5;n"/>
-          <p:cNvSpPr/>
+          <p:cNvSpPr>
+            <a:spLocks noGrp="1" noRot="1" noChangeAspect="1"/>
+          </p:cNvSpPr>
           <p:nvPr>
-            <p:ph idx="3" type="sldImg"/>
+            <p:ph type="sldImg" idx="3"/>
           </p:nvPr>
         </p:nvSpPr>
         <p:spPr>
@@ -705,9 +716,13 @@
             <a:ext cx="4457700" cy="3086100"/>
           </a:xfrm>
           <a:custGeom>
-            <a:rect b="b" l="l" r="r" t="t"/>
+            <a:avLst/>
+            <a:gdLst/>
+            <a:ahLst/>
+            <a:cxnLst/>
+            <a:rect l="l" t="t" r="r" b="b"/>
             <a:pathLst>
-              <a:path extrusionOk="0" h="120000" w="120000">
+              <a:path w="120000" h="120000" extrusionOk="0">
                 <a:moveTo>
                   <a:pt x="0" y="0"/>
                 </a:moveTo>
@@ -725,23 +740,25 @@
             </a:pathLst>
           </a:custGeom>
           <a:noFill/>
-          <a:ln cap="flat" cmpd="sng" w="12700">
+          <a:ln w="12700" cap="flat" cmpd="sng">
             <a:solidFill>
               <a:srgbClr val="000000"/>
             </a:solidFill>
             <a:prstDash val="solid"/>
             <a:round/>
-            <a:headEnd len="sm" w="sm" type="none"/>
-            <a:tailEnd len="sm" w="sm" type="none"/>
+            <a:headEnd type="none" w="sm" len="sm"/>
+            <a:tailEnd type="none" w="sm" len="sm"/>
           </a:ln>
         </p:spPr>
       </p:sp>
       <p:sp>
         <p:nvSpPr>
           <p:cNvPr id="6" name="Google Shape;6;n"/>
-          <p:cNvSpPr txBox="1"/>
+          <p:cNvSpPr txBox="1">
+            <a:spLocks noGrp="1"/>
+          </p:cNvSpPr>
           <p:nvPr>
-            <p:ph idx="1" type="body"/>
+            <p:ph type="body" idx="1"/>
           </p:nvPr>
         </p:nvSpPr>
         <p:spPr>
@@ -758,20 +775,20 @@
           </a:ln>
         </p:spPr>
         <p:txBody>
-          <a:bodyPr anchorCtr="0" anchor="t" bIns="45700" lIns="91425" spcFirstLastPara="1" rIns="91425" wrap="square" tIns="45700">
+          <a:bodyPr spcFirstLastPara="1" wrap="square" lIns="91425" tIns="45700" rIns="91425" bIns="45700" anchor="t" anchorCtr="0">
             <a:noAutofit/>
           </a:bodyPr>
           <a:lstStyle>
-            <a:lvl1pPr indent="-228600" lvl="0" marL="457200" marR="0" rtl="0" algn="l">
-              <a:spcBef>
-                <a:spcPts val="0"/>
-              </a:spcBef>
-              <a:spcAft>
-                <a:spcPts val="0"/>
-              </a:spcAft>
-              <a:buSzPts val="1400"/>
-              <a:buNone/>
-              <a:defRPr b="0" i="0" sz="1200" u="none" cap="none" strike="noStrike">
+            <a:lvl1pPr marL="457200" marR="0" lvl="0" indent="-228600" algn="l" rtl="0">
+              <a:spcBef>
+                <a:spcPts val="0"/>
+              </a:spcBef>
+              <a:spcAft>
+                <a:spcPts val="0"/>
+              </a:spcAft>
+              <a:buSzPts val="1400"/>
+              <a:buNone/>
+              <a:defRPr sz="1200" b="0" i="0" u="none" strike="noStrike" cap="none">
                 <a:solidFill>
                   <a:schemeClr val="dk1"/>
                 </a:solidFill>
@@ -781,16 +798,16 @@
                 <a:sym typeface="Calibri"/>
               </a:defRPr>
             </a:lvl1pPr>
-            <a:lvl2pPr indent="-228600" lvl="1" marL="914400" marR="0" rtl="0" algn="l">
-              <a:spcBef>
-                <a:spcPts val="0"/>
-              </a:spcBef>
-              <a:spcAft>
-                <a:spcPts val="0"/>
-              </a:spcAft>
-              <a:buSzPts val="1400"/>
-              <a:buNone/>
-              <a:defRPr b="0" i="0" sz="1200" u="none" cap="none" strike="noStrike">
+            <a:lvl2pPr marL="914400" marR="0" lvl="1" indent="-228600" algn="l" rtl="0">
+              <a:spcBef>
+                <a:spcPts val="0"/>
+              </a:spcBef>
+              <a:spcAft>
+                <a:spcPts val="0"/>
+              </a:spcAft>
+              <a:buSzPts val="1400"/>
+              <a:buNone/>
+              <a:defRPr sz="1200" b="0" i="0" u="none" strike="noStrike" cap="none">
                 <a:solidFill>
                   <a:schemeClr val="dk1"/>
                 </a:solidFill>
@@ -800,16 +817,16 @@
                 <a:sym typeface="Calibri"/>
               </a:defRPr>
             </a:lvl2pPr>
-            <a:lvl3pPr indent="-228600" lvl="2" marL="1371600" marR="0" rtl="0" algn="l">
-              <a:spcBef>
-                <a:spcPts val="0"/>
-              </a:spcBef>
-              <a:spcAft>
-                <a:spcPts val="0"/>
-              </a:spcAft>
-              <a:buSzPts val="1400"/>
-              <a:buNone/>
-              <a:defRPr b="0" i="0" sz="1200" u="none" cap="none" strike="noStrike">
+            <a:lvl3pPr marL="1371600" marR="0" lvl="2" indent="-228600" algn="l" rtl="0">
+              <a:spcBef>
+                <a:spcPts val="0"/>
+              </a:spcBef>
+              <a:spcAft>
+                <a:spcPts val="0"/>
+              </a:spcAft>
+              <a:buSzPts val="1400"/>
+              <a:buNone/>
+              <a:defRPr sz="1200" b="0" i="0" u="none" strike="noStrike" cap="none">
                 <a:solidFill>
                   <a:schemeClr val="dk1"/>
                 </a:solidFill>
@@ -819,16 +836,16 @@
                 <a:sym typeface="Calibri"/>
               </a:defRPr>
             </a:lvl3pPr>
-            <a:lvl4pPr indent="-228600" lvl="3" marL="1828800" marR="0" rtl="0" algn="l">
-              <a:spcBef>
-                <a:spcPts val="0"/>
-              </a:spcBef>
-              <a:spcAft>
-                <a:spcPts val="0"/>
-              </a:spcAft>
-              <a:buSzPts val="1400"/>
-              <a:buNone/>
-              <a:defRPr b="0" i="0" sz="1200" u="none" cap="none" strike="noStrike">
+            <a:lvl4pPr marL="1828800" marR="0" lvl="3" indent="-228600" algn="l" rtl="0">
+              <a:spcBef>
+                <a:spcPts val="0"/>
+              </a:spcBef>
+              <a:spcAft>
+                <a:spcPts val="0"/>
+              </a:spcAft>
+              <a:buSzPts val="1400"/>
+              <a:buNone/>
+              <a:defRPr sz="1200" b="0" i="0" u="none" strike="noStrike" cap="none">
                 <a:solidFill>
                   <a:schemeClr val="dk1"/>
                 </a:solidFill>
@@ -838,16 +855,16 @@
                 <a:sym typeface="Calibri"/>
               </a:defRPr>
             </a:lvl4pPr>
-            <a:lvl5pPr indent="-228600" lvl="4" marL="2286000" marR="0" rtl="0" algn="l">
-              <a:spcBef>
-                <a:spcPts val="0"/>
-              </a:spcBef>
-              <a:spcAft>
-                <a:spcPts val="0"/>
-              </a:spcAft>
-              <a:buSzPts val="1400"/>
-              <a:buNone/>
-              <a:defRPr b="0" i="0" sz="1200" u="none" cap="none" strike="noStrike">
+            <a:lvl5pPr marL="2286000" marR="0" lvl="4" indent="-228600" algn="l" rtl="0">
+              <a:spcBef>
+                <a:spcPts val="0"/>
+              </a:spcBef>
+              <a:spcAft>
+                <a:spcPts val="0"/>
+              </a:spcAft>
+              <a:buSzPts val="1400"/>
+              <a:buNone/>
+              <a:defRPr sz="1200" b="0" i="0" u="none" strike="noStrike" cap="none">
                 <a:solidFill>
                   <a:schemeClr val="dk1"/>
                 </a:solidFill>
@@ -857,16 +874,16 @@
                 <a:sym typeface="Calibri"/>
               </a:defRPr>
             </a:lvl5pPr>
-            <a:lvl6pPr indent="-228600" lvl="5" marL="2743200" marR="0" rtl="0" algn="l">
-              <a:spcBef>
-                <a:spcPts val="0"/>
-              </a:spcBef>
-              <a:spcAft>
-                <a:spcPts val="0"/>
-              </a:spcAft>
-              <a:buSzPts val="1400"/>
-              <a:buNone/>
-              <a:defRPr b="0" i="0" sz="1200" u="none" cap="none" strike="noStrike">
+            <a:lvl6pPr marL="2743200" marR="0" lvl="5" indent="-228600" algn="l" rtl="0">
+              <a:spcBef>
+                <a:spcPts val="0"/>
+              </a:spcBef>
+              <a:spcAft>
+                <a:spcPts val="0"/>
+              </a:spcAft>
+              <a:buSzPts val="1400"/>
+              <a:buNone/>
+              <a:defRPr sz="1200" b="0" i="0" u="none" strike="noStrike" cap="none">
                 <a:solidFill>
                   <a:schemeClr val="dk1"/>
                 </a:solidFill>
@@ -876,16 +893,16 @@
                 <a:sym typeface="Calibri"/>
               </a:defRPr>
             </a:lvl6pPr>
-            <a:lvl7pPr indent="-228600" lvl="6" marL="3200400" marR="0" rtl="0" algn="l">
-              <a:spcBef>
-                <a:spcPts val="0"/>
-              </a:spcBef>
-              <a:spcAft>
-                <a:spcPts val="0"/>
-              </a:spcAft>
-              <a:buSzPts val="1400"/>
-              <a:buNone/>
-              <a:defRPr b="0" i="0" sz="1200" u="none" cap="none" strike="noStrike">
+            <a:lvl7pPr marL="3200400" marR="0" lvl="6" indent="-228600" algn="l" rtl="0">
+              <a:spcBef>
+                <a:spcPts val="0"/>
+              </a:spcBef>
+              <a:spcAft>
+                <a:spcPts val="0"/>
+              </a:spcAft>
+              <a:buSzPts val="1400"/>
+              <a:buNone/>
+              <a:defRPr sz="1200" b="0" i="0" u="none" strike="noStrike" cap="none">
                 <a:solidFill>
                   <a:schemeClr val="dk1"/>
                 </a:solidFill>
@@ -895,16 +912,16 @@
                 <a:sym typeface="Calibri"/>
               </a:defRPr>
             </a:lvl7pPr>
-            <a:lvl8pPr indent="-228600" lvl="7" marL="3657600" marR="0" rtl="0" algn="l">
-              <a:spcBef>
-                <a:spcPts val="0"/>
-              </a:spcBef>
-              <a:spcAft>
-                <a:spcPts val="0"/>
-              </a:spcAft>
-              <a:buSzPts val="1400"/>
-              <a:buNone/>
-              <a:defRPr b="0" i="0" sz="1200" u="none" cap="none" strike="noStrike">
+            <a:lvl8pPr marL="3657600" marR="0" lvl="7" indent="-228600" algn="l" rtl="0">
+              <a:spcBef>
+                <a:spcPts val="0"/>
+              </a:spcBef>
+              <a:spcAft>
+                <a:spcPts val="0"/>
+              </a:spcAft>
+              <a:buSzPts val="1400"/>
+              <a:buNone/>
+              <a:defRPr sz="1200" b="0" i="0" u="none" strike="noStrike" cap="none">
                 <a:solidFill>
                   <a:schemeClr val="dk1"/>
                 </a:solidFill>
@@ -914,16 +931,16 @@
                 <a:sym typeface="Calibri"/>
               </a:defRPr>
             </a:lvl8pPr>
-            <a:lvl9pPr indent="-228600" lvl="8" marL="4114800" marR="0" rtl="0" algn="l">
-              <a:spcBef>
-                <a:spcPts val="0"/>
-              </a:spcBef>
-              <a:spcAft>
-                <a:spcPts val="0"/>
-              </a:spcAft>
-              <a:buSzPts val="1400"/>
-              <a:buNone/>
-              <a:defRPr b="0" i="0" sz="1200" u="none" cap="none" strike="noStrike">
+            <a:lvl9pPr marL="4114800" marR="0" lvl="8" indent="-228600" algn="l" rtl="0">
+              <a:spcBef>
+                <a:spcPts val="0"/>
+              </a:spcBef>
+              <a:spcAft>
+                <a:spcPts val="0"/>
+              </a:spcAft>
+              <a:buSzPts val="1400"/>
+              <a:buNone/>
+              <a:defRPr sz="1200" b="0" i="0" u="none" strike="noStrike" cap="none">
                 <a:solidFill>
                   <a:schemeClr val="dk1"/>
                 </a:solidFill>
@@ -934,15 +951,19 @@
               </a:defRPr>
             </a:lvl9pPr>
           </a:lstStyle>
-          <a:p/>
+          <a:p>
+            <a:endParaRPr/>
+          </a:p>
         </p:txBody>
       </p:sp>
       <p:sp>
         <p:nvSpPr>
           <p:cNvPr id="7" name="Google Shape;7;n"/>
-          <p:cNvSpPr txBox="1"/>
+          <p:cNvSpPr txBox="1">
+            <a:spLocks noGrp="1"/>
+          </p:cNvSpPr>
           <p:nvPr>
-            <p:ph idx="11" type="ftr"/>
+            <p:ph type="ftr" idx="11"/>
           </p:nvPr>
         </p:nvSpPr>
         <p:spPr>
@@ -959,20 +980,20 @@
           </a:ln>
         </p:spPr>
         <p:txBody>
-          <a:bodyPr anchorCtr="0" anchor="b" bIns="45700" lIns="91425" spcFirstLastPara="1" rIns="91425" wrap="square" tIns="45700">
+          <a:bodyPr spcFirstLastPara="1" wrap="square" lIns="91425" tIns="45700" rIns="91425" bIns="45700" anchor="b" anchorCtr="0">
             <a:noAutofit/>
           </a:bodyPr>
           <a:lstStyle>
-            <a:lvl1pPr lvl="0" marR="0" rtl="0" algn="l">
-              <a:spcBef>
-                <a:spcPts val="0"/>
-              </a:spcBef>
-              <a:spcAft>
-                <a:spcPts val="0"/>
-              </a:spcAft>
-              <a:buSzPts val="1400"/>
-              <a:buNone/>
-              <a:defRPr b="0" i="0" sz="1200" u="none" cap="none" strike="noStrike">
+            <a:lvl1pPr marR="0" lvl="0" algn="l" rtl="0">
+              <a:spcBef>
+                <a:spcPts val="0"/>
+              </a:spcBef>
+              <a:spcAft>
+                <a:spcPts val="0"/>
+              </a:spcAft>
+              <a:buSzPts val="1400"/>
+              <a:buNone/>
+              <a:defRPr sz="1200" b="0" i="0" u="none" strike="noStrike" cap="none">
                 <a:solidFill>
                   <a:schemeClr val="dk1"/>
                 </a:solidFill>
@@ -982,16 +1003,16 @@
                 <a:sym typeface="Calibri"/>
               </a:defRPr>
             </a:lvl1pPr>
-            <a:lvl2pPr lvl="1" marR="0" rtl="0" algn="l">
-              <a:spcBef>
-                <a:spcPts val="0"/>
-              </a:spcBef>
-              <a:spcAft>
-                <a:spcPts val="0"/>
-              </a:spcAft>
-              <a:buSzPts val="1400"/>
-              <a:buNone/>
-              <a:defRPr b="0" i="0" sz="1800" u="none" cap="none" strike="noStrike">
+            <a:lvl2pPr marR="0" lvl="1" algn="l" rtl="0">
+              <a:spcBef>
+                <a:spcPts val="0"/>
+              </a:spcBef>
+              <a:spcAft>
+                <a:spcPts val="0"/>
+              </a:spcAft>
+              <a:buSzPts val="1400"/>
+              <a:buNone/>
+              <a:defRPr sz="1800" b="0" i="0" u="none" strike="noStrike" cap="none">
                 <a:solidFill>
                   <a:schemeClr val="dk1"/>
                 </a:solidFill>
@@ -1001,16 +1022,16 @@
                 <a:sym typeface="Calibri"/>
               </a:defRPr>
             </a:lvl2pPr>
-            <a:lvl3pPr lvl="2" marR="0" rtl="0" algn="l">
-              <a:spcBef>
-                <a:spcPts val="0"/>
-              </a:spcBef>
-              <a:spcAft>
-                <a:spcPts val="0"/>
-              </a:spcAft>
-              <a:buSzPts val="1400"/>
-              <a:buNone/>
-              <a:defRPr b="0" i="0" sz="1800" u="none" cap="none" strike="noStrike">
+            <a:lvl3pPr marR="0" lvl="2" algn="l" rtl="0">
+              <a:spcBef>
+                <a:spcPts val="0"/>
+              </a:spcBef>
+              <a:spcAft>
+                <a:spcPts val="0"/>
+              </a:spcAft>
+              <a:buSzPts val="1400"/>
+              <a:buNone/>
+              <a:defRPr sz="1800" b="0" i="0" u="none" strike="noStrike" cap="none">
                 <a:solidFill>
                   <a:schemeClr val="dk1"/>
                 </a:solidFill>
@@ -1020,16 +1041,16 @@
                 <a:sym typeface="Calibri"/>
               </a:defRPr>
             </a:lvl3pPr>
-            <a:lvl4pPr lvl="3" marR="0" rtl="0" algn="l">
-              <a:spcBef>
-                <a:spcPts val="0"/>
-              </a:spcBef>
-              <a:spcAft>
-                <a:spcPts val="0"/>
-              </a:spcAft>
-              <a:buSzPts val="1400"/>
-              <a:buNone/>
-              <a:defRPr b="0" i="0" sz="1800" u="none" cap="none" strike="noStrike">
+            <a:lvl4pPr marR="0" lvl="3" algn="l" rtl="0">
+              <a:spcBef>
+                <a:spcPts val="0"/>
+              </a:spcBef>
+              <a:spcAft>
+                <a:spcPts val="0"/>
+              </a:spcAft>
+              <a:buSzPts val="1400"/>
+              <a:buNone/>
+              <a:defRPr sz="1800" b="0" i="0" u="none" strike="noStrike" cap="none">
                 <a:solidFill>
                   <a:schemeClr val="dk1"/>
                 </a:solidFill>
@@ -1039,16 +1060,16 @@
                 <a:sym typeface="Calibri"/>
               </a:defRPr>
             </a:lvl4pPr>
-            <a:lvl5pPr lvl="4" marR="0" rtl="0" algn="l">
-              <a:spcBef>
-                <a:spcPts val="0"/>
-              </a:spcBef>
-              <a:spcAft>
-                <a:spcPts val="0"/>
-              </a:spcAft>
-              <a:buSzPts val="1400"/>
-              <a:buNone/>
-              <a:defRPr b="0" i="0" sz="1800" u="none" cap="none" strike="noStrike">
+            <a:lvl5pPr marR="0" lvl="4" algn="l" rtl="0">
+              <a:spcBef>
+                <a:spcPts val="0"/>
+              </a:spcBef>
+              <a:spcAft>
+                <a:spcPts val="0"/>
+              </a:spcAft>
+              <a:buSzPts val="1400"/>
+              <a:buNone/>
+              <a:defRPr sz="1800" b="0" i="0" u="none" strike="noStrike" cap="none">
                 <a:solidFill>
                   <a:schemeClr val="dk1"/>
                 </a:solidFill>
@@ -1058,16 +1079,16 @@
                 <a:sym typeface="Calibri"/>
               </a:defRPr>
             </a:lvl5pPr>
-            <a:lvl6pPr lvl="5" marR="0" rtl="0" algn="l">
-              <a:spcBef>
-                <a:spcPts val="0"/>
-              </a:spcBef>
-              <a:spcAft>
-                <a:spcPts val="0"/>
-              </a:spcAft>
-              <a:buSzPts val="1400"/>
-              <a:buNone/>
-              <a:defRPr b="0" i="0" sz="1800" u="none" cap="none" strike="noStrike">
+            <a:lvl6pPr marR="0" lvl="5" algn="l" rtl="0">
+              <a:spcBef>
+                <a:spcPts val="0"/>
+              </a:spcBef>
+              <a:spcAft>
+                <a:spcPts val="0"/>
+              </a:spcAft>
+              <a:buSzPts val="1400"/>
+              <a:buNone/>
+              <a:defRPr sz="1800" b="0" i="0" u="none" strike="noStrike" cap="none">
                 <a:solidFill>
                   <a:schemeClr val="dk1"/>
                 </a:solidFill>
@@ -1077,16 +1098,16 @@
                 <a:sym typeface="Calibri"/>
               </a:defRPr>
             </a:lvl6pPr>
-            <a:lvl7pPr lvl="6" marR="0" rtl="0" algn="l">
-              <a:spcBef>
-                <a:spcPts val="0"/>
-              </a:spcBef>
-              <a:spcAft>
-                <a:spcPts val="0"/>
-              </a:spcAft>
-              <a:buSzPts val="1400"/>
-              <a:buNone/>
-              <a:defRPr b="0" i="0" sz="1800" u="none" cap="none" strike="noStrike">
+            <a:lvl7pPr marR="0" lvl="6" algn="l" rtl="0">
+              <a:spcBef>
+                <a:spcPts val="0"/>
+              </a:spcBef>
+              <a:spcAft>
+                <a:spcPts val="0"/>
+              </a:spcAft>
+              <a:buSzPts val="1400"/>
+              <a:buNone/>
+              <a:defRPr sz="1800" b="0" i="0" u="none" strike="noStrike" cap="none">
                 <a:solidFill>
                   <a:schemeClr val="dk1"/>
                 </a:solidFill>
@@ -1096,16 +1117,16 @@
                 <a:sym typeface="Calibri"/>
               </a:defRPr>
             </a:lvl7pPr>
-            <a:lvl8pPr lvl="7" marR="0" rtl="0" algn="l">
-              <a:spcBef>
-                <a:spcPts val="0"/>
-              </a:spcBef>
-              <a:spcAft>
-                <a:spcPts val="0"/>
-              </a:spcAft>
-              <a:buSzPts val="1400"/>
-              <a:buNone/>
-              <a:defRPr b="0" i="0" sz="1800" u="none" cap="none" strike="noStrike">
+            <a:lvl8pPr marR="0" lvl="7" algn="l" rtl="0">
+              <a:spcBef>
+                <a:spcPts val="0"/>
+              </a:spcBef>
+              <a:spcAft>
+                <a:spcPts val="0"/>
+              </a:spcAft>
+              <a:buSzPts val="1400"/>
+              <a:buNone/>
+              <a:defRPr sz="1800" b="0" i="0" u="none" strike="noStrike" cap="none">
                 <a:solidFill>
                   <a:schemeClr val="dk1"/>
                 </a:solidFill>
@@ -1115,16 +1136,16 @@
                 <a:sym typeface="Calibri"/>
               </a:defRPr>
             </a:lvl8pPr>
-            <a:lvl9pPr lvl="8" marR="0" rtl="0" algn="l">
-              <a:spcBef>
-                <a:spcPts val="0"/>
-              </a:spcBef>
-              <a:spcAft>
-                <a:spcPts val="0"/>
-              </a:spcAft>
-              <a:buSzPts val="1400"/>
-              <a:buNone/>
-              <a:defRPr b="0" i="0" sz="1800" u="none" cap="none" strike="noStrike">
+            <a:lvl9pPr marR="0" lvl="8" algn="l" rtl="0">
+              <a:spcBef>
+                <a:spcPts val="0"/>
+              </a:spcBef>
+              <a:spcAft>
+                <a:spcPts val="0"/>
+              </a:spcAft>
+              <a:buSzPts val="1400"/>
+              <a:buNone/>
+              <a:defRPr sz="1800" b="0" i="0" u="none" strike="noStrike" cap="none">
                 <a:solidFill>
                   <a:schemeClr val="dk1"/>
                 </a:solidFill>
@@ -1135,15 +1156,19 @@
               </a:defRPr>
             </a:lvl9pPr>
           </a:lstStyle>
-          <a:p/>
+          <a:p>
+            <a:endParaRPr/>
+          </a:p>
         </p:txBody>
       </p:sp>
       <p:sp>
         <p:nvSpPr>
           <p:cNvPr id="8" name="Google Shape;8;n"/>
-          <p:cNvSpPr txBox="1"/>
+          <p:cNvSpPr txBox="1">
+            <a:spLocks noGrp="1"/>
+          </p:cNvSpPr>
           <p:nvPr>
-            <p:ph idx="12" type="sldNum"/>
+            <p:ph type="sldNum" idx="12"/>
           </p:nvPr>
         </p:nvSpPr>
         <p:spPr>
@@ -1160,12 +1185,12 @@
           </a:ln>
         </p:spPr>
         <p:txBody>
-          <a:bodyPr anchorCtr="0" anchor="b" bIns="45700" lIns="91425" spcFirstLastPara="1" rIns="91425" wrap="square" tIns="45700">
+          <a:bodyPr spcFirstLastPara="1" wrap="square" lIns="91425" tIns="45700" rIns="91425" bIns="45700" anchor="b" anchorCtr="0">
             <a:noAutofit/>
           </a:bodyPr>
           <a:lstStyle/>
           <a:p>
-            <a:pPr indent="0" lvl="0" marL="0" marR="0" rtl="0" algn="r">
+            <a:pPr marL="0" marR="0" lvl="0" indent="0" algn="r" rtl="0">
               <a:spcBef>
                 <a:spcPts val="0"/>
               </a:spcBef>
@@ -1175,7 +1200,7 @@
               <a:buNone/>
             </a:pPr>
             <a:fld id="{00000000-1234-1234-1234-123412341234}" type="slidenum">
-              <a:rPr b="0" i="0" lang="en-US" sz="1200" u="none" cap="none" strike="noStrike">
+              <a:rPr lang="en-US" sz="1200" b="0" i="0" u="none" strike="noStrike" cap="none">
                 <a:solidFill>
                   <a:schemeClr val="dk1"/>
                 </a:solidFill>
@@ -1186,7 +1211,7 @@
               </a:rPr>
               <a:t>‹#›</a:t>
             </a:fld>
-            <a:endParaRPr b="0" i="0" sz="1200" u="none" cap="none" strike="noStrike">
+            <a:endParaRPr sz="1200" b="0" i="0" u="none" strike="noStrike" cap="none">
               <a:solidFill>
                 <a:schemeClr val="dk1"/>
               </a:solidFill>
@@ -1200,9 +1225,9 @@
       </p:sp>
     </p:spTree>
   </p:cSld>
-  <p:clrMap accent1="accent1" accent2="accent2" accent3="accent3" accent4="accent4" accent5="accent5" accent6="accent6" bg1="lt1" bg2="dk2" tx1="dk1" tx2="lt2" folHlink="folHlink" hlink="hlink"/>
+  <p:clrMap bg1="lt1" tx1="dk1" bg2="dk2" tx2="lt2" accent1="accent1" accent2="accent2" accent3="accent3" accent4="accent4" accent5="accent5" accent6="accent6" hlink="hlink" folHlink="folHlink"/>
   <p:notesStyle>
-    <a:defPPr lvl="0" marR="0" rtl="0" algn="l">
+    <a:defPPr marR="0" lvl="0" algn="l" rtl="0">
       <a:lnSpc>
         <a:spcPct val="100000"/>
       </a:lnSpc>
@@ -1213,7 +1238,7 @@
         <a:spcPts val="0"/>
       </a:spcAft>
     </a:defPPr>
-    <a:lvl1pPr lvl="0" marR="0" rtl="0" algn="l">
+    <a:lvl1pPr marR="0" lvl="0" algn="l" rtl="0">
       <a:lnSpc>
         <a:spcPct val="100000"/>
       </a:lnSpc>
@@ -1227,7 +1252,7 @@
         <a:srgbClr val="000000"/>
       </a:buClr>
       <a:buFont typeface="Arial"/>
-      <a:defRPr b="0" i="0" sz="1400" u="none" cap="none" strike="noStrike">
+      <a:defRPr sz="1400" b="0" i="0" u="none" strike="noStrike" cap="none">
         <a:solidFill>
           <a:srgbClr val="000000"/>
         </a:solidFill>
@@ -1237,7 +1262,7 @@
         <a:sym typeface="Arial"/>
       </a:defRPr>
     </a:lvl1pPr>
-    <a:lvl2pPr lvl="1" marR="0" rtl="0" algn="l">
+    <a:lvl2pPr marR="0" lvl="1" algn="l" rtl="0">
       <a:lnSpc>
         <a:spcPct val="100000"/>
       </a:lnSpc>
@@ -1251,7 +1276,7 @@
         <a:srgbClr val="000000"/>
       </a:buClr>
       <a:buFont typeface="Arial"/>
-      <a:defRPr b="0" i="0" sz="1400" u="none" cap="none" strike="noStrike">
+      <a:defRPr sz="1400" b="0" i="0" u="none" strike="noStrike" cap="none">
         <a:solidFill>
           <a:srgbClr val="000000"/>
         </a:solidFill>
@@ -1261,7 +1286,7 @@
         <a:sym typeface="Arial"/>
       </a:defRPr>
     </a:lvl2pPr>
-    <a:lvl3pPr lvl="2" marR="0" rtl="0" algn="l">
+    <a:lvl3pPr marR="0" lvl="2" algn="l" rtl="0">
       <a:lnSpc>
         <a:spcPct val="100000"/>
       </a:lnSpc>
@@ -1275,7 +1300,7 @@
         <a:srgbClr val="000000"/>
       </a:buClr>
       <a:buFont typeface="Arial"/>
-      <a:defRPr b="0" i="0" sz="1400" u="none" cap="none" strike="noStrike">
+      <a:defRPr sz="1400" b="0" i="0" u="none" strike="noStrike" cap="none">
         <a:solidFill>
           <a:srgbClr val="000000"/>
         </a:solidFill>
@@ -1285,7 +1310,7 @@
         <a:sym typeface="Arial"/>
       </a:defRPr>
     </a:lvl3pPr>
-    <a:lvl4pPr lvl="3" marR="0" rtl="0" algn="l">
+    <a:lvl4pPr marR="0" lvl="3" algn="l" rtl="0">
       <a:lnSpc>
         <a:spcPct val="100000"/>
       </a:lnSpc>
@@ -1299,7 +1324,7 @@
         <a:srgbClr val="000000"/>
       </a:buClr>
       <a:buFont typeface="Arial"/>
-      <a:defRPr b="0" i="0" sz="1400" u="none" cap="none" strike="noStrike">
+      <a:defRPr sz="1400" b="0" i="0" u="none" strike="noStrike" cap="none">
         <a:solidFill>
           <a:srgbClr val="000000"/>
         </a:solidFill>
@@ -1309,7 +1334,7 @@
         <a:sym typeface="Arial"/>
       </a:defRPr>
     </a:lvl4pPr>
-    <a:lvl5pPr lvl="4" marR="0" rtl="0" algn="l">
+    <a:lvl5pPr marR="0" lvl="4" algn="l" rtl="0">
       <a:lnSpc>
         <a:spcPct val="100000"/>
       </a:lnSpc>
@@ -1323,7 +1348,7 @@
         <a:srgbClr val="000000"/>
       </a:buClr>
       <a:buFont typeface="Arial"/>
-      <a:defRPr b="0" i="0" sz="1400" u="none" cap="none" strike="noStrike">
+      <a:defRPr sz="1400" b="0" i="0" u="none" strike="noStrike" cap="none">
         <a:solidFill>
           <a:srgbClr val="000000"/>
         </a:solidFill>
@@ -1333,7 +1358,7 @@
         <a:sym typeface="Arial"/>
       </a:defRPr>
     </a:lvl5pPr>
-    <a:lvl6pPr lvl="5" marR="0" rtl="0" algn="l">
+    <a:lvl6pPr marR="0" lvl="5" algn="l" rtl="0">
       <a:lnSpc>
         <a:spcPct val="100000"/>
       </a:lnSpc>
@@ -1347,7 +1372,7 @@
         <a:srgbClr val="000000"/>
       </a:buClr>
       <a:buFont typeface="Arial"/>
-      <a:defRPr b="0" i="0" sz="1400" u="none" cap="none" strike="noStrike">
+      <a:defRPr sz="1400" b="0" i="0" u="none" strike="noStrike" cap="none">
         <a:solidFill>
           <a:srgbClr val="000000"/>
         </a:solidFill>
@@ -1357,7 +1382,7 @@
         <a:sym typeface="Arial"/>
       </a:defRPr>
     </a:lvl6pPr>
-    <a:lvl7pPr lvl="6" marR="0" rtl="0" algn="l">
+    <a:lvl7pPr marR="0" lvl="6" algn="l" rtl="0">
       <a:lnSpc>
         <a:spcPct val="100000"/>
       </a:lnSpc>
@@ -1371,7 +1396,7 @@
         <a:srgbClr val="000000"/>
       </a:buClr>
       <a:buFont typeface="Arial"/>
-      <a:defRPr b="0" i="0" sz="1400" u="none" cap="none" strike="noStrike">
+      <a:defRPr sz="1400" b="0" i="0" u="none" strike="noStrike" cap="none">
         <a:solidFill>
           <a:srgbClr val="000000"/>
         </a:solidFill>
@@ -1381,7 +1406,7 @@
         <a:sym typeface="Arial"/>
       </a:defRPr>
     </a:lvl7pPr>
-    <a:lvl8pPr lvl="7" marR="0" rtl="0" algn="l">
+    <a:lvl8pPr marR="0" lvl="7" algn="l" rtl="0">
       <a:lnSpc>
         <a:spcPct val="100000"/>
       </a:lnSpc>
@@ -1395,7 +1420,7 @@
         <a:srgbClr val="000000"/>
       </a:buClr>
       <a:buFont typeface="Arial"/>
-      <a:defRPr b="0" i="0" sz="1400" u="none" cap="none" strike="noStrike">
+      <a:defRPr sz="1400" b="0" i="0" u="none" strike="noStrike" cap="none">
         <a:solidFill>
           <a:srgbClr val="000000"/>
         </a:solidFill>
@@ -1405,7 +1430,7 @@
         <a:sym typeface="Arial"/>
       </a:defRPr>
     </a:lvl8pPr>
-    <a:lvl9pPr lvl="8" marR="0" rtl="0" algn="l">
+    <a:lvl9pPr marR="0" lvl="8" algn="l" rtl="0">
       <a:lnSpc>
         <a:spcPct val="100000"/>
       </a:lnSpc>
@@ -1419,7 +1444,7 @@
         <a:srgbClr val="000000"/>
       </a:buClr>
       <a:buFont typeface="Arial"/>
-      <a:defRPr b="0" i="0" sz="1400" u="none" cap="none" strike="noStrike">
+      <a:defRPr sz="1400" b="0" i="0" u="none" strike="noStrike" cap="none">
         <a:solidFill>
           <a:srgbClr val="000000"/>
         </a:solidFill>
@@ -1434,11 +1459,11 @@
 </file>
 
 <file path=ppt/notesSlides/notesSlide1.xml><?xml version="1.0" encoding="utf-8"?>
-<p:notes xmlns:a="http://schemas.openxmlformats.org/drawingml/2006/main" xmlns:r="http://schemas.openxmlformats.org/officeDocument/2006/relationships" xmlns:mc="http://schemas.openxmlformats.org/markup-compatibility/2006" xmlns:mv="urn:schemas-microsoft-com:mac:vml" xmlns:p="http://schemas.openxmlformats.org/presentationml/2006/main" xmlns:c="http://schemas.openxmlformats.org/drawingml/2006/chart" xmlns:dgm="http://schemas.openxmlformats.org/drawingml/2006/diagram" xmlns:o="urn:schemas-microsoft-com:office:office" xmlns:v="urn:schemas-microsoft-com:vml" xmlns:pvml="urn:schemas-microsoft-com:office:powerpoint" xmlns:com="http://schemas.openxmlformats.org/drawingml/2006/compatibility" xmlns:p14="http://schemas.microsoft.com/office/powerpoint/2010/main" xmlns:p15="http://schemas.microsoft.com/office/powerpoint/2012/main" xmlns:ahyp="http://schemas.microsoft.com/office/drawing/2018/hyperlinkcolor" showMasterPhAnim="0" showMasterSp="0">
+<p:notes xmlns:a="http://schemas.openxmlformats.org/drawingml/2006/main" xmlns:r="http://schemas.openxmlformats.org/officeDocument/2006/relationships" xmlns:p="http://schemas.openxmlformats.org/presentationml/2006/main" showMasterSp="0" showMasterPhAnim="0">
   <p:cSld>
     <p:spTree>
       <p:nvGrpSpPr>
-        <p:cNvPr id="84" name="Shape 84"/>
+        <p:cNvPr id="1" name="Shape 84"/>
         <p:cNvGrpSpPr/>
         <p:nvPr/>
       </p:nvGrpSpPr>
@@ -1453,9 +1478,11 @@
       <p:sp>
         <p:nvSpPr>
           <p:cNvPr id="85" name="Google Shape;85;p1:notes"/>
-          <p:cNvSpPr/>
+          <p:cNvSpPr>
+            <a:spLocks noGrp="1" noRot="1" noChangeAspect="1"/>
+          </p:cNvSpPr>
           <p:nvPr>
-            <p:ph idx="2" type="sldImg"/>
+            <p:ph type="sldImg" idx="2"/>
           </p:nvPr>
         </p:nvSpPr>
         <p:spPr>
@@ -1464,9 +1491,13 @@
             <a:ext cx="4457700" cy="3086100"/>
           </a:xfrm>
           <a:custGeom>
-            <a:rect b="b" l="l" r="r" t="t"/>
+            <a:avLst/>
+            <a:gdLst/>
+            <a:ahLst/>
+            <a:cxnLst/>
+            <a:rect l="l" t="t" r="r" b="b"/>
             <a:pathLst>
-              <a:path extrusionOk="0" h="120000" w="120000">
+              <a:path w="120000" h="120000" extrusionOk="0">
                 <a:moveTo>
                   <a:pt x="0" y="0"/>
                 </a:moveTo>
@@ -1484,23 +1515,25 @@
             </a:pathLst>
           </a:custGeom>
           <a:noFill/>
-          <a:ln cap="flat" cmpd="sng" w="12700">
+          <a:ln w="12700" cap="flat" cmpd="sng">
             <a:solidFill>
               <a:srgbClr val="000000"/>
             </a:solidFill>
             <a:prstDash val="solid"/>
             <a:round/>
-            <a:headEnd len="sm" w="sm" type="none"/>
-            <a:tailEnd len="sm" w="sm" type="none"/>
+            <a:headEnd type="none" w="sm" len="sm"/>
+            <a:tailEnd type="none" w="sm" len="sm"/>
           </a:ln>
         </p:spPr>
       </p:sp>
       <p:sp>
         <p:nvSpPr>
           <p:cNvPr id="86" name="Google Shape;86;p1:notes"/>
-          <p:cNvSpPr txBox="1"/>
+          <p:cNvSpPr txBox="1">
+            <a:spLocks noGrp="1"/>
+          </p:cNvSpPr>
           <p:nvPr>
-            <p:ph idx="1" type="body"/>
+            <p:ph type="body" idx="1"/>
           </p:nvPr>
         </p:nvSpPr>
         <p:spPr>
@@ -1517,12 +1550,12 @@
           </a:ln>
         </p:spPr>
         <p:txBody>
-          <a:bodyPr anchorCtr="0" anchor="t" bIns="45700" lIns="91425" spcFirstLastPara="1" rIns="91425" wrap="square" tIns="45700">
+          <a:bodyPr spcFirstLastPara="1" wrap="square" lIns="91425" tIns="45700" rIns="91425" bIns="45700" anchor="t" anchorCtr="0">
             <a:noAutofit/>
           </a:bodyPr>
           <a:lstStyle/>
           <a:p>
-            <a:pPr indent="0" lvl="0" marL="0" rtl="0" algn="l">
+            <a:pPr marL="0" lvl="0" indent="0" algn="l" rtl="0">
               <a:spcBef>
                 <a:spcPts val="0"/>
               </a:spcBef>
@@ -1531,9 +1564,6 @@
               </a:spcAft>
               <a:buNone/>
             </a:pPr>
-            <a:r>
-              <a:t/>
-            </a:r>
             <a:endParaRPr/>
           </a:p>
         </p:txBody>
@@ -1541,9 +1571,11 @@
       <p:sp>
         <p:nvSpPr>
           <p:cNvPr id="87" name="Google Shape;87;p1:notes"/>
-          <p:cNvSpPr txBox="1"/>
+          <p:cNvSpPr txBox="1">
+            <a:spLocks noGrp="1"/>
+          </p:cNvSpPr>
           <p:nvPr>
-            <p:ph idx="12" type="sldNum"/>
+            <p:ph type="sldNum" idx="12"/>
           </p:nvPr>
         </p:nvSpPr>
         <p:spPr>
@@ -1560,12 +1592,12 @@
           </a:ln>
         </p:spPr>
         <p:txBody>
-          <a:bodyPr anchorCtr="0" anchor="b" bIns="45700" lIns="91425" spcFirstLastPara="1" rIns="91425" wrap="square" tIns="45700">
+          <a:bodyPr spcFirstLastPara="1" wrap="square" lIns="91425" tIns="45700" rIns="91425" bIns="45700" anchor="b" anchorCtr="0">
             <a:noAutofit/>
           </a:bodyPr>
           <a:lstStyle/>
           <a:p>
-            <a:pPr indent="0" lvl="0" marL="0" rtl="0" algn="r">
+            <a:pPr marL="0" lvl="0" indent="0" algn="r" rtl="0">
               <a:spcBef>
                 <a:spcPts val="0"/>
               </a:spcBef>
@@ -1576,7 +1608,7 @@
             </a:pPr>
             <a:fld id="{00000000-1234-1234-1234-123412341234}" type="slidenum">
               <a:rPr lang="en-US"/>
-              <a:t>‹#›</a:t>
+              <a:t>1</a:t>
             </a:fld>
             <a:endParaRPr/>
           </a:p>
@@ -1591,11 +1623,11 @@
 </file>
 
 <file path=ppt/notesSlides/notesSlide2.xml><?xml version="1.0" encoding="utf-8"?>
-<p:notes xmlns:a="http://schemas.openxmlformats.org/drawingml/2006/main" xmlns:r="http://schemas.openxmlformats.org/officeDocument/2006/relationships" xmlns:mc="http://schemas.openxmlformats.org/markup-compatibility/2006" xmlns:mv="urn:schemas-microsoft-com:mac:vml" xmlns:p="http://schemas.openxmlformats.org/presentationml/2006/main" xmlns:c="http://schemas.openxmlformats.org/drawingml/2006/chart" xmlns:dgm="http://schemas.openxmlformats.org/drawingml/2006/diagram" xmlns:o="urn:schemas-microsoft-com:office:office" xmlns:v="urn:schemas-microsoft-com:vml" xmlns:pvml="urn:schemas-microsoft-com:office:powerpoint" xmlns:com="http://schemas.openxmlformats.org/drawingml/2006/compatibility" xmlns:p14="http://schemas.microsoft.com/office/powerpoint/2010/main" xmlns:p15="http://schemas.microsoft.com/office/powerpoint/2012/main" xmlns:ahyp="http://schemas.microsoft.com/office/drawing/2018/hyperlinkcolor" showMasterPhAnim="0" showMasterSp="0">
+<p:notes xmlns:a="http://schemas.openxmlformats.org/drawingml/2006/main" xmlns:r="http://schemas.openxmlformats.org/officeDocument/2006/relationships" xmlns:p="http://schemas.openxmlformats.org/presentationml/2006/main" showMasterSp="0" showMasterPhAnim="0">
   <p:cSld>
     <p:spTree>
       <p:nvGrpSpPr>
-        <p:cNvPr id="93" name="Shape 93"/>
+        <p:cNvPr id="1" name="Shape 93"/>
         <p:cNvGrpSpPr/>
         <p:nvPr/>
       </p:nvGrpSpPr>
@@ -1610,9 +1642,11 @@
       <p:sp>
         <p:nvSpPr>
           <p:cNvPr id="94" name="Google Shape;94;p2:notes"/>
-          <p:cNvSpPr txBox="1"/>
+          <p:cNvSpPr txBox="1">
+            <a:spLocks noGrp="1"/>
+          </p:cNvSpPr>
           <p:nvPr>
-            <p:ph idx="1" type="body"/>
+            <p:ph type="body" idx="1"/>
           </p:nvPr>
         </p:nvSpPr>
         <p:spPr>
@@ -1625,12 +1659,12 @@
           </a:prstGeom>
         </p:spPr>
         <p:txBody>
-          <a:bodyPr anchorCtr="0" anchor="t" bIns="45700" lIns="91425" spcFirstLastPara="1" rIns="91425" wrap="square" tIns="45700">
+          <a:bodyPr spcFirstLastPara="1" wrap="square" lIns="91425" tIns="45700" rIns="91425" bIns="45700" anchor="t" anchorCtr="0">
             <a:noAutofit/>
           </a:bodyPr>
           <a:lstStyle/>
           <a:p>
-            <a:pPr indent="0" lvl="0" marL="0" rtl="0" algn="l">
+            <a:pPr marL="0" lvl="0" indent="0" algn="l" rtl="0">
               <a:spcBef>
                 <a:spcPts val="0"/>
               </a:spcBef>
@@ -1639,9 +1673,6 @@
               </a:spcAft>
               <a:buNone/>
             </a:pPr>
-            <a:r>
-              <a:t/>
-            </a:r>
             <a:endParaRPr/>
           </a:p>
         </p:txBody>
@@ -1649,9 +1680,11 @@
       <p:sp>
         <p:nvSpPr>
           <p:cNvPr id="95" name="Google Shape;95;p2:notes"/>
-          <p:cNvSpPr/>
+          <p:cNvSpPr>
+            <a:spLocks noGrp="1" noRot="1" noChangeAspect="1"/>
+          </p:cNvSpPr>
           <p:nvPr>
-            <p:ph idx="2" type="sldImg"/>
+            <p:ph type="sldImg" idx="2"/>
           </p:nvPr>
         </p:nvSpPr>
         <p:spPr>
@@ -1660,9 +1693,13 @@
             <a:ext cx="4457700" cy="3086100"/>
           </a:xfrm>
           <a:custGeom>
-            <a:rect b="b" l="l" r="r" t="t"/>
+            <a:avLst/>
+            <a:gdLst/>
+            <a:ahLst/>
+            <a:cxnLst/>
+            <a:rect l="l" t="t" r="r" b="b"/>
             <a:pathLst>
-              <a:path extrusionOk="0" h="120000" w="120000">
+              <a:path w="120000" h="120000" extrusionOk="0">
                 <a:moveTo>
                   <a:pt x="0" y="0"/>
                 </a:moveTo>
@@ -1690,11 +1727,11 @@
 </file>
 
 <file path=ppt/notesSlides/notesSlide3.xml><?xml version="1.0" encoding="utf-8"?>
-<p:notes xmlns:a="http://schemas.openxmlformats.org/drawingml/2006/main" xmlns:r="http://schemas.openxmlformats.org/officeDocument/2006/relationships" xmlns:mc="http://schemas.openxmlformats.org/markup-compatibility/2006" xmlns:mv="urn:schemas-microsoft-com:mac:vml" xmlns:p="http://schemas.openxmlformats.org/presentationml/2006/main" xmlns:c="http://schemas.openxmlformats.org/drawingml/2006/chart" xmlns:dgm="http://schemas.openxmlformats.org/drawingml/2006/diagram" xmlns:o="urn:schemas-microsoft-com:office:office" xmlns:v="urn:schemas-microsoft-com:vml" xmlns:pvml="urn:schemas-microsoft-com:office:powerpoint" xmlns:com="http://schemas.openxmlformats.org/drawingml/2006/compatibility" xmlns:p14="http://schemas.microsoft.com/office/powerpoint/2010/main" xmlns:p15="http://schemas.microsoft.com/office/powerpoint/2012/main" xmlns:ahyp="http://schemas.microsoft.com/office/drawing/2018/hyperlinkcolor" showMasterPhAnim="0" showMasterSp="0">
+<p:notes xmlns:a="http://schemas.openxmlformats.org/drawingml/2006/main" xmlns:r="http://schemas.openxmlformats.org/officeDocument/2006/relationships" xmlns:p="http://schemas.openxmlformats.org/presentationml/2006/main" showMasterSp="0" showMasterPhAnim="0">
   <p:cSld>
     <p:spTree>
       <p:nvGrpSpPr>
-        <p:cNvPr id="105" name="Shape 105"/>
+        <p:cNvPr id="1" name="Shape 105"/>
         <p:cNvGrpSpPr/>
         <p:nvPr/>
       </p:nvGrpSpPr>
@@ -1709,9 +1746,11 @@
       <p:sp>
         <p:nvSpPr>
           <p:cNvPr id="106" name="Google Shape;106;g3107cd3a3df_0_0:notes"/>
-          <p:cNvSpPr txBox="1"/>
+          <p:cNvSpPr txBox="1">
+            <a:spLocks noGrp="1"/>
+          </p:cNvSpPr>
           <p:nvPr>
-            <p:ph idx="1" type="body"/>
+            <p:ph type="body" idx="1"/>
           </p:nvPr>
         </p:nvSpPr>
         <p:spPr>
@@ -1724,12 +1763,12 @@
           </a:prstGeom>
         </p:spPr>
         <p:txBody>
-          <a:bodyPr anchorCtr="0" anchor="t" bIns="45700" lIns="91425" spcFirstLastPara="1" rIns="91425" wrap="square" tIns="45700">
+          <a:bodyPr spcFirstLastPara="1" wrap="square" lIns="91425" tIns="45700" rIns="91425" bIns="45700" anchor="t" anchorCtr="0">
             <a:noAutofit/>
           </a:bodyPr>
           <a:lstStyle/>
           <a:p>
-            <a:pPr indent="0" lvl="0" marL="0" rtl="0" algn="l">
+            <a:pPr marL="0" lvl="0" indent="0" algn="l" rtl="0">
               <a:spcBef>
                 <a:spcPts val="0"/>
               </a:spcBef>
@@ -1738,9 +1777,6 @@
               </a:spcAft>
               <a:buNone/>
             </a:pPr>
-            <a:r>
-              <a:t/>
-            </a:r>
             <a:endParaRPr/>
           </a:p>
         </p:txBody>
@@ -1748,9 +1784,11 @@
       <p:sp>
         <p:nvSpPr>
           <p:cNvPr id="107" name="Google Shape;107;g3107cd3a3df_0_0:notes"/>
-          <p:cNvSpPr/>
+          <p:cNvSpPr>
+            <a:spLocks noGrp="1" noRot="1" noChangeAspect="1"/>
+          </p:cNvSpPr>
           <p:nvPr>
-            <p:ph idx="2" type="sldImg"/>
+            <p:ph type="sldImg" idx="2"/>
           </p:nvPr>
         </p:nvSpPr>
         <p:spPr>
@@ -1759,9 +1797,13 @@
             <a:ext cx="4457700" cy="3086100"/>
           </a:xfrm>
           <a:custGeom>
-            <a:rect b="b" l="l" r="r" t="t"/>
+            <a:avLst/>
+            <a:gdLst/>
+            <a:ahLst/>
+            <a:cxnLst/>
+            <a:rect l="l" t="t" r="r" b="b"/>
             <a:pathLst>
-              <a:path extrusionOk="0" h="120000" w="120000">
+              <a:path w="120000" h="120000" extrusionOk="0">
                 <a:moveTo>
                   <a:pt x="0" y="0"/>
                 </a:moveTo>
@@ -1789,11 +1831,11 @@
 </file>
 
 <file path=ppt/notesSlides/notesSlide4.xml><?xml version="1.0" encoding="utf-8"?>
-<p:notes xmlns:a="http://schemas.openxmlformats.org/drawingml/2006/main" xmlns:r="http://schemas.openxmlformats.org/officeDocument/2006/relationships" xmlns:mc="http://schemas.openxmlformats.org/markup-compatibility/2006" xmlns:mv="urn:schemas-microsoft-com:mac:vml" xmlns:p="http://schemas.openxmlformats.org/presentationml/2006/main" xmlns:c="http://schemas.openxmlformats.org/drawingml/2006/chart" xmlns:dgm="http://schemas.openxmlformats.org/drawingml/2006/diagram" xmlns:o="urn:schemas-microsoft-com:office:office" xmlns:v="urn:schemas-microsoft-com:vml" xmlns:pvml="urn:schemas-microsoft-com:office:powerpoint" xmlns:com="http://schemas.openxmlformats.org/drawingml/2006/compatibility" xmlns:p14="http://schemas.microsoft.com/office/powerpoint/2010/main" xmlns:p15="http://schemas.microsoft.com/office/powerpoint/2012/main" xmlns:ahyp="http://schemas.microsoft.com/office/drawing/2018/hyperlinkcolor" showMasterPhAnim="0" showMasterSp="0">
+<p:notes xmlns:a="http://schemas.openxmlformats.org/drawingml/2006/main" xmlns:r="http://schemas.openxmlformats.org/officeDocument/2006/relationships" xmlns:p="http://schemas.openxmlformats.org/presentationml/2006/main" showMasterSp="0" showMasterPhAnim="0">
   <p:cSld>
     <p:spTree>
       <p:nvGrpSpPr>
-        <p:cNvPr id="122" name="Shape 122"/>
+        <p:cNvPr id="1" name="Shape 122"/>
         <p:cNvGrpSpPr/>
         <p:nvPr/>
       </p:nvGrpSpPr>
@@ -1808,9 +1850,11 @@
       <p:sp>
         <p:nvSpPr>
           <p:cNvPr id="123" name="Google Shape;123;g3107cd3a3df_0_62:notes"/>
-          <p:cNvSpPr txBox="1"/>
+          <p:cNvSpPr txBox="1">
+            <a:spLocks noGrp="1"/>
+          </p:cNvSpPr>
           <p:nvPr>
-            <p:ph idx="1" type="body"/>
+            <p:ph type="body" idx="1"/>
           </p:nvPr>
         </p:nvSpPr>
         <p:spPr>
@@ -1823,12 +1867,12 @@
           </a:prstGeom>
         </p:spPr>
         <p:txBody>
-          <a:bodyPr anchorCtr="0" anchor="t" bIns="45700" lIns="91425" spcFirstLastPara="1" rIns="91425" wrap="square" tIns="45700">
+          <a:bodyPr spcFirstLastPara="1" wrap="square" lIns="91425" tIns="45700" rIns="91425" bIns="45700" anchor="t" anchorCtr="0">
             <a:noAutofit/>
           </a:bodyPr>
           <a:lstStyle/>
           <a:p>
-            <a:pPr indent="0" lvl="0" marL="0" rtl="0" algn="l">
+            <a:pPr marL="0" lvl="0" indent="0" algn="l" rtl="0">
               <a:spcBef>
                 <a:spcPts val="0"/>
               </a:spcBef>
@@ -1837,9 +1881,6 @@
               </a:spcAft>
               <a:buNone/>
             </a:pPr>
-            <a:r>
-              <a:t/>
-            </a:r>
             <a:endParaRPr/>
           </a:p>
         </p:txBody>
@@ -1847,9 +1888,11 @@
       <p:sp>
         <p:nvSpPr>
           <p:cNvPr id="124" name="Google Shape;124;g3107cd3a3df_0_62:notes"/>
-          <p:cNvSpPr/>
+          <p:cNvSpPr>
+            <a:spLocks noGrp="1" noRot="1" noChangeAspect="1"/>
+          </p:cNvSpPr>
           <p:nvPr>
-            <p:ph idx="2" type="sldImg"/>
+            <p:ph type="sldImg" idx="2"/>
           </p:nvPr>
         </p:nvSpPr>
         <p:spPr>
@@ -1858,9 +1901,13 @@
             <a:ext cx="4457700" cy="3086100"/>
           </a:xfrm>
           <a:custGeom>
-            <a:rect b="b" l="l" r="r" t="t"/>
+            <a:avLst/>
+            <a:gdLst/>
+            <a:ahLst/>
+            <a:cxnLst/>
+            <a:rect l="l" t="t" r="r" b="b"/>
             <a:pathLst>
-              <a:path extrusionOk="0" h="120000" w="120000">
+              <a:path w="120000" h="120000" extrusionOk="0">
                 <a:moveTo>
                   <a:pt x="0" y="0"/>
                 </a:moveTo>
@@ -1888,11 +1935,11 @@
 </file>
 
 <file path=ppt/notesSlides/notesSlide5.xml><?xml version="1.0" encoding="utf-8"?>
-<p:notes xmlns:a="http://schemas.openxmlformats.org/drawingml/2006/main" xmlns:r="http://schemas.openxmlformats.org/officeDocument/2006/relationships" xmlns:mc="http://schemas.openxmlformats.org/markup-compatibility/2006" xmlns:mv="urn:schemas-microsoft-com:mac:vml" xmlns:p="http://schemas.openxmlformats.org/presentationml/2006/main" xmlns:c="http://schemas.openxmlformats.org/drawingml/2006/chart" xmlns:dgm="http://schemas.openxmlformats.org/drawingml/2006/diagram" xmlns:o="urn:schemas-microsoft-com:office:office" xmlns:v="urn:schemas-microsoft-com:vml" xmlns:pvml="urn:schemas-microsoft-com:office:powerpoint" xmlns:com="http://schemas.openxmlformats.org/drawingml/2006/compatibility" xmlns:p14="http://schemas.microsoft.com/office/powerpoint/2010/main" xmlns:p15="http://schemas.microsoft.com/office/powerpoint/2012/main" xmlns:ahyp="http://schemas.microsoft.com/office/drawing/2018/hyperlinkcolor" showMasterPhAnim="0" showMasterSp="0">
+<p:notes xmlns:a="http://schemas.openxmlformats.org/drawingml/2006/main" xmlns:r="http://schemas.openxmlformats.org/officeDocument/2006/relationships" xmlns:p="http://schemas.openxmlformats.org/presentationml/2006/main" showMasterSp="0" showMasterPhAnim="0">
   <p:cSld>
     <p:spTree>
       <p:nvGrpSpPr>
-        <p:cNvPr id="141" name="Shape 141"/>
+        <p:cNvPr id="1" name="Shape 141"/>
         <p:cNvGrpSpPr/>
         <p:nvPr/>
       </p:nvGrpSpPr>
@@ -1907,9 +1954,11 @@
       <p:sp>
         <p:nvSpPr>
           <p:cNvPr id="142" name="Google Shape;142;g3107cd3a3df_0_27:notes"/>
-          <p:cNvSpPr txBox="1"/>
+          <p:cNvSpPr txBox="1">
+            <a:spLocks noGrp="1"/>
+          </p:cNvSpPr>
           <p:nvPr>
-            <p:ph idx="1" type="body"/>
+            <p:ph type="body" idx="1"/>
           </p:nvPr>
         </p:nvSpPr>
         <p:spPr>
@@ -1922,12 +1971,12 @@
           </a:prstGeom>
         </p:spPr>
         <p:txBody>
-          <a:bodyPr anchorCtr="0" anchor="t" bIns="45700" lIns="91425" spcFirstLastPara="1" rIns="91425" wrap="square" tIns="45700">
+          <a:bodyPr spcFirstLastPara="1" wrap="square" lIns="91425" tIns="45700" rIns="91425" bIns="45700" anchor="t" anchorCtr="0">
             <a:noAutofit/>
           </a:bodyPr>
           <a:lstStyle/>
           <a:p>
-            <a:pPr indent="0" lvl="0" marL="0" rtl="0" algn="l">
+            <a:pPr marL="0" lvl="0" indent="0" algn="l" rtl="0">
               <a:spcBef>
                 <a:spcPts val="0"/>
               </a:spcBef>
@@ -1936,9 +1985,6 @@
               </a:spcAft>
               <a:buNone/>
             </a:pPr>
-            <a:r>
-              <a:t/>
-            </a:r>
             <a:endParaRPr/>
           </a:p>
         </p:txBody>
@@ -1946,9 +1992,11 @@
       <p:sp>
         <p:nvSpPr>
           <p:cNvPr id="143" name="Google Shape;143;g3107cd3a3df_0_27:notes"/>
-          <p:cNvSpPr/>
+          <p:cNvSpPr>
+            <a:spLocks noGrp="1" noRot="1" noChangeAspect="1"/>
+          </p:cNvSpPr>
           <p:nvPr>
-            <p:ph idx="2" type="sldImg"/>
+            <p:ph type="sldImg" idx="2"/>
           </p:nvPr>
         </p:nvSpPr>
         <p:spPr>
@@ -1957,9 +2005,13 @@
             <a:ext cx="4457700" cy="3086100"/>
           </a:xfrm>
           <a:custGeom>
-            <a:rect b="b" l="l" r="r" t="t"/>
+            <a:avLst/>
+            <a:gdLst/>
+            <a:ahLst/>
+            <a:cxnLst/>
+            <a:rect l="l" t="t" r="r" b="b"/>
             <a:pathLst>
-              <a:path extrusionOk="0" h="120000" w="120000">
+              <a:path w="120000" h="120000" extrusionOk="0">
                 <a:moveTo>
                   <a:pt x="0" y="0"/>
                 </a:moveTo>
@@ -1987,11 +2039,11 @@
 </file>
 
 <file path=ppt/notesSlides/notesSlide6.xml><?xml version="1.0" encoding="utf-8"?>
-<p:notes xmlns:a="http://schemas.openxmlformats.org/drawingml/2006/main" xmlns:r="http://schemas.openxmlformats.org/officeDocument/2006/relationships" xmlns:mc="http://schemas.openxmlformats.org/markup-compatibility/2006" xmlns:mv="urn:schemas-microsoft-com:mac:vml" xmlns:p="http://schemas.openxmlformats.org/presentationml/2006/main" xmlns:c="http://schemas.openxmlformats.org/drawingml/2006/chart" xmlns:dgm="http://schemas.openxmlformats.org/drawingml/2006/diagram" xmlns:o="urn:schemas-microsoft-com:office:office" xmlns:v="urn:schemas-microsoft-com:vml" xmlns:pvml="urn:schemas-microsoft-com:office:powerpoint" xmlns:com="http://schemas.openxmlformats.org/drawingml/2006/compatibility" xmlns:p14="http://schemas.microsoft.com/office/powerpoint/2010/main" xmlns:p15="http://schemas.microsoft.com/office/powerpoint/2012/main" xmlns:ahyp="http://schemas.microsoft.com/office/drawing/2018/hyperlinkcolor" showMasterPhAnim="0" showMasterSp="0">
+<p:notes xmlns:a="http://schemas.openxmlformats.org/drawingml/2006/main" xmlns:r="http://schemas.openxmlformats.org/officeDocument/2006/relationships" xmlns:p="http://schemas.openxmlformats.org/presentationml/2006/main" showMasterSp="0" showMasterPhAnim="0">
   <p:cSld>
     <p:spTree>
       <p:nvGrpSpPr>
-        <p:cNvPr id="158" name="Shape 158"/>
+        <p:cNvPr id="1" name="Shape 158"/>
         <p:cNvGrpSpPr/>
         <p:nvPr/>
       </p:nvGrpSpPr>
@@ -2006,9 +2058,11 @@
       <p:sp>
         <p:nvSpPr>
           <p:cNvPr id="159" name="Google Shape;159;g3107cd3a3df_0_6:notes"/>
-          <p:cNvSpPr txBox="1"/>
+          <p:cNvSpPr txBox="1">
+            <a:spLocks noGrp="1"/>
+          </p:cNvSpPr>
           <p:nvPr>
-            <p:ph idx="1" type="body"/>
+            <p:ph type="body" idx="1"/>
           </p:nvPr>
         </p:nvSpPr>
         <p:spPr>
@@ -2021,12 +2075,12 @@
           </a:prstGeom>
         </p:spPr>
         <p:txBody>
-          <a:bodyPr anchorCtr="0" anchor="t" bIns="45700" lIns="91425" spcFirstLastPara="1" rIns="91425" wrap="square" tIns="45700">
+          <a:bodyPr spcFirstLastPara="1" wrap="square" lIns="91425" tIns="45700" rIns="91425" bIns="45700" anchor="t" anchorCtr="0">
             <a:noAutofit/>
           </a:bodyPr>
           <a:lstStyle/>
           <a:p>
-            <a:pPr indent="0" lvl="0" marL="0" rtl="0" algn="l">
+            <a:pPr marL="0" lvl="0" indent="0" algn="l" rtl="0">
               <a:spcBef>
                 <a:spcPts val="0"/>
               </a:spcBef>
@@ -2035,9 +2089,6 @@
               </a:spcAft>
               <a:buNone/>
             </a:pPr>
-            <a:r>
-              <a:t/>
-            </a:r>
             <a:endParaRPr/>
           </a:p>
         </p:txBody>
@@ -2045,9 +2096,11 @@
       <p:sp>
         <p:nvSpPr>
           <p:cNvPr id="160" name="Google Shape;160;g3107cd3a3df_0_6:notes"/>
-          <p:cNvSpPr/>
+          <p:cNvSpPr>
+            <a:spLocks noGrp="1" noRot="1" noChangeAspect="1"/>
+          </p:cNvSpPr>
           <p:nvPr>
-            <p:ph idx="2" type="sldImg"/>
+            <p:ph type="sldImg" idx="2"/>
           </p:nvPr>
         </p:nvSpPr>
         <p:spPr>
@@ -2056,9 +2109,13 @@
             <a:ext cx="4457700" cy="3086100"/>
           </a:xfrm>
           <a:custGeom>
-            <a:rect b="b" l="l" r="r" t="t"/>
+            <a:avLst/>
+            <a:gdLst/>
+            <a:ahLst/>
+            <a:cxnLst/>
+            <a:rect l="l" t="t" r="r" b="b"/>
             <a:pathLst>
-              <a:path extrusionOk="0" h="120000" w="120000">
+              <a:path w="120000" h="120000" extrusionOk="0">
                 <a:moveTo>
                   <a:pt x="0" y="0"/>
                 </a:moveTo>
@@ -2086,11 +2143,11 @@
 </file>
 
 <file path=ppt/notesSlides/notesSlide7.xml><?xml version="1.0" encoding="utf-8"?>
-<p:notes xmlns:a="http://schemas.openxmlformats.org/drawingml/2006/main" xmlns:r="http://schemas.openxmlformats.org/officeDocument/2006/relationships" xmlns:mc="http://schemas.openxmlformats.org/markup-compatibility/2006" xmlns:mv="urn:schemas-microsoft-com:mac:vml" xmlns:p="http://schemas.openxmlformats.org/presentationml/2006/main" xmlns:c="http://schemas.openxmlformats.org/drawingml/2006/chart" xmlns:dgm="http://schemas.openxmlformats.org/drawingml/2006/diagram" xmlns:o="urn:schemas-microsoft-com:office:office" xmlns:v="urn:schemas-microsoft-com:vml" xmlns:pvml="urn:schemas-microsoft-com:office:powerpoint" xmlns:com="http://schemas.openxmlformats.org/drawingml/2006/compatibility" xmlns:p14="http://schemas.microsoft.com/office/powerpoint/2010/main" xmlns:p15="http://schemas.microsoft.com/office/powerpoint/2012/main" xmlns:ahyp="http://schemas.microsoft.com/office/drawing/2018/hyperlinkcolor" showMasterPhAnim="0" showMasterSp="0">
+<p:notes xmlns:a="http://schemas.openxmlformats.org/drawingml/2006/main" xmlns:r="http://schemas.openxmlformats.org/officeDocument/2006/relationships" xmlns:p="http://schemas.openxmlformats.org/presentationml/2006/main" showMasterSp="0" showMasterPhAnim="0">
   <p:cSld>
     <p:spTree>
       <p:nvGrpSpPr>
-        <p:cNvPr id="175" name="Shape 175"/>
+        <p:cNvPr id="1" name="Shape 175"/>
         <p:cNvGrpSpPr/>
         <p:nvPr/>
       </p:nvGrpSpPr>
@@ -2105,9 +2162,11 @@
       <p:sp>
         <p:nvSpPr>
           <p:cNvPr id="176" name="Google Shape;176;g2d589ce2f85_0_6:notes"/>
-          <p:cNvSpPr txBox="1"/>
+          <p:cNvSpPr txBox="1">
+            <a:spLocks noGrp="1"/>
+          </p:cNvSpPr>
           <p:nvPr>
-            <p:ph idx="1" type="body"/>
+            <p:ph type="body" idx="1"/>
           </p:nvPr>
         </p:nvSpPr>
         <p:spPr>
@@ -2120,12 +2179,12 @@
           </a:prstGeom>
         </p:spPr>
         <p:txBody>
-          <a:bodyPr anchorCtr="0" anchor="t" bIns="45700" lIns="91425" spcFirstLastPara="1" rIns="91425" wrap="square" tIns="45700">
+          <a:bodyPr spcFirstLastPara="1" wrap="square" lIns="91425" tIns="45700" rIns="91425" bIns="45700" anchor="t" anchorCtr="0">
             <a:noAutofit/>
           </a:bodyPr>
           <a:lstStyle/>
           <a:p>
-            <a:pPr indent="0" lvl="0" marL="0" rtl="0" algn="l">
+            <a:pPr marL="0" lvl="0" indent="0" algn="l" rtl="0">
               <a:spcBef>
                 <a:spcPts val="0"/>
               </a:spcBef>
@@ -2134,9 +2193,6 @@
               </a:spcAft>
               <a:buNone/>
             </a:pPr>
-            <a:r>
-              <a:t/>
-            </a:r>
             <a:endParaRPr/>
           </a:p>
         </p:txBody>
@@ -2144,9 +2200,11 @@
       <p:sp>
         <p:nvSpPr>
           <p:cNvPr id="177" name="Google Shape;177;g2d589ce2f85_0_6:notes"/>
-          <p:cNvSpPr/>
+          <p:cNvSpPr>
+            <a:spLocks noGrp="1" noRot="1" noChangeAspect="1"/>
+          </p:cNvSpPr>
           <p:nvPr>
-            <p:ph idx="2" type="sldImg"/>
+            <p:ph type="sldImg" idx="2"/>
           </p:nvPr>
         </p:nvSpPr>
         <p:spPr>
@@ -2155,9 +2213,13 @@
             <a:ext cx="4457700" cy="3086100"/>
           </a:xfrm>
           <a:custGeom>
-            <a:rect b="b" l="l" r="r" t="t"/>
+            <a:avLst/>
+            <a:gdLst/>
+            <a:ahLst/>
+            <a:cxnLst/>
+            <a:rect l="l" t="t" r="r" b="b"/>
             <a:pathLst>
-              <a:path extrusionOk="0" h="120000" w="120000">
+              <a:path w="120000" h="120000" extrusionOk="0">
                 <a:moveTo>
                   <a:pt x="0" y="0"/>
                 </a:moveTo>
@@ -2185,11 +2247,11 @@
 </file>
 
 <file path=ppt/notesSlides/notesSlide8.xml><?xml version="1.0" encoding="utf-8"?>
-<p:notes xmlns:a="http://schemas.openxmlformats.org/drawingml/2006/main" xmlns:r="http://schemas.openxmlformats.org/officeDocument/2006/relationships" xmlns:mc="http://schemas.openxmlformats.org/markup-compatibility/2006" xmlns:mv="urn:schemas-microsoft-com:mac:vml" xmlns:p="http://schemas.openxmlformats.org/presentationml/2006/main" xmlns:c="http://schemas.openxmlformats.org/drawingml/2006/chart" xmlns:dgm="http://schemas.openxmlformats.org/drawingml/2006/diagram" xmlns:o="urn:schemas-microsoft-com:office:office" xmlns:v="urn:schemas-microsoft-com:vml" xmlns:pvml="urn:schemas-microsoft-com:office:powerpoint" xmlns:com="http://schemas.openxmlformats.org/drawingml/2006/compatibility" xmlns:p14="http://schemas.microsoft.com/office/powerpoint/2010/main" xmlns:p15="http://schemas.microsoft.com/office/powerpoint/2012/main" xmlns:ahyp="http://schemas.microsoft.com/office/drawing/2018/hyperlinkcolor" showMasterPhAnim="0" showMasterSp="0">
+<p:notes xmlns:a="http://schemas.openxmlformats.org/drawingml/2006/main" xmlns:r="http://schemas.openxmlformats.org/officeDocument/2006/relationships" xmlns:p="http://schemas.openxmlformats.org/presentationml/2006/main" showMasterSp="0" showMasterPhAnim="0">
   <p:cSld>
     <p:spTree>
       <p:nvGrpSpPr>
-        <p:cNvPr id="183" name="Shape 183"/>
+        <p:cNvPr id="1" name="Shape 183"/>
         <p:cNvGrpSpPr/>
         <p:nvPr/>
       </p:nvGrpSpPr>
@@ -2204,9 +2266,11 @@
       <p:sp>
         <p:nvSpPr>
           <p:cNvPr id="184" name="Google Shape;184;p3:notes"/>
-          <p:cNvSpPr/>
+          <p:cNvSpPr>
+            <a:spLocks noGrp="1" noRot="1" noChangeAspect="1"/>
+          </p:cNvSpPr>
           <p:nvPr>
-            <p:ph idx="2" type="sldImg"/>
+            <p:ph type="sldImg" idx="2"/>
           </p:nvPr>
         </p:nvSpPr>
         <p:spPr>
@@ -2215,9 +2279,13 @@
             <a:ext cx="4457700" cy="3086100"/>
           </a:xfrm>
           <a:custGeom>
-            <a:rect b="b" l="l" r="r" t="t"/>
+            <a:avLst/>
+            <a:gdLst/>
+            <a:ahLst/>
+            <a:cxnLst/>
+            <a:rect l="l" t="t" r="r" b="b"/>
             <a:pathLst>
-              <a:path extrusionOk="0" h="120000" w="120000">
+              <a:path w="120000" h="120000" extrusionOk="0">
                 <a:moveTo>
                   <a:pt x="0" y="0"/>
                 </a:moveTo>
@@ -2235,23 +2303,25 @@
             </a:pathLst>
           </a:custGeom>
           <a:noFill/>
-          <a:ln cap="flat" cmpd="sng" w="12700">
+          <a:ln w="12700" cap="flat" cmpd="sng">
             <a:solidFill>
               <a:srgbClr val="000000"/>
             </a:solidFill>
             <a:prstDash val="solid"/>
             <a:round/>
-            <a:headEnd len="sm" w="sm" type="none"/>
-            <a:tailEnd len="sm" w="sm" type="none"/>
+            <a:headEnd type="none" w="sm" len="sm"/>
+            <a:tailEnd type="none" w="sm" len="sm"/>
           </a:ln>
         </p:spPr>
       </p:sp>
       <p:sp>
         <p:nvSpPr>
           <p:cNvPr id="185" name="Google Shape;185;p3:notes"/>
-          <p:cNvSpPr txBox="1"/>
+          <p:cNvSpPr txBox="1">
+            <a:spLocks noGrp="1"/>
+          </p:cNvSpPr>
           <p:nvPr>
-            <p:ph idx="1" type="body"/>
+            <p:ph type="body" idx="1"/>
           </p:nvPr>
         </p:nvSpPr>
         <p:spPr>
@@ -2268,12 +2338,12 @@
           </a:ln>
         </p:spPr>
         <p:txBody>
-          <a:bodyPr anchorCtr="0" anchor="t" bIns="45700" lIns="91425" spcFirstLastPara="1" rIns="91425" wrap="square" tIns="45700">
+          <a:bodyPr spcFirstLastPara="1" wrap="square" lIns="91425" tIns="45700" rIns="91425" bIns="45700" anchor="t" anchorCtr="0">
             <a:noAutofit/>
           </a:bodyPr>
           <a:lstStyle/>
           <a:p>
-            <a:pPr indent="0" lvl="0" marL="0" rtl="0" algn="l">
+            <a:pPr marL="0" lvl="0" indent="0" algn="l" rtl="0">
               <a:spcBef>
                 <a:spcPts val="0"/>
               </a:spcBef>
@@ -2282,9 +2352,6 @@
               </a:spcAft>
               <a:buNone/>
             </a:pPr>
-            <a:r>
-              <a:t/>
-            </a:r>
             <a:endParaRPr/>
           </a:p>
         </p:txBody>
@@ -2292,9 +2359,11 @@
       <p:sp>
         <p:nvSpPr>
           <p:cNvPr id="186" name="Google Shape;186;p3:notes"/>
-          <p:cNvSpPr txBox="1"/>
+          <p:cNvSpPr txBox="1">
+            <a:spLocks noGrp="1"/>
+          </p:cNvSpPr>
           <p:nvPr>
-            <p:ph idx="12" type="sldNum"/>
+            <p:ph type="sldNum" idx="12"/>
           </p:nvPr>
         </p:nvSpPr>
         <p:spPr>
@@ -2311,12 +2380,12 @@
           </a:ln>
         </p:spPr>
         <p:txBody>
-          <a:bodyPr anchorCtr="0" anchor="b" bIns="45700" lIns="91425" spcFirstLastPara="1" rIns="91425" wrap="square" tIns="45700">
+          <a:bodyPr spcFirstLastPara="1" wrap="square" lIns="91425" tIns="45700" rIns="91425" bIns="45700" anchor="b" anchorCtr="0">
             <a:noAutofit/>
           </a:bodyPr>
           <a:lstStyle/>
           <a:p>
-            <a:pPr indent="0" lvl="0" marL="0" marR="0" rtl="0" algn="r">
+            <a:pPr marL="0" marR="0" lvl="0" indent="0" algn="r" rtl="0">
               <a:lnSpc>
                 <a:spcPct val="100000"/>
               </a:lnSpc>
@@ -2334,7 +2403,7 @@
               <a:buNone/>
             </a:pPr>
             <a:fld id="{00000000-1234-1234-1234-123412341234}" type="slidenum">
-              <a:rPr b="0" i="0" lang="en-US" sz="1200" u="none" cap="none" strike="noStrike">
+              <a:rPr lang="en-US" sz="1200" b="0" i="0" u="none" strike="noStrike" cap="none">
                 <a:solidFill>
                   <a:srgbClr val="000000"/>
                 </a:solidFill>
@@ -2343,9 +2412,9 @@
                 <a:cs typeface="Calibri"/>
                 <a:sym typeface="Calibri"/>
               </a:rPr>
-              <a:t>‹#›</a:t>
+              <a:t>8</a:t>
             </a:fld>
-            <a:endParaRPr b="0" i="0" sz="1200" u="none" cap="none" strike="noStrike">
+            <a:endParaRPr sz="1200" b="0" i="0" u="none" strike="noStrike" cap="none">
               <a:solidFill>
                 <a:srgbClr val="000000"/>
               </a:solidFill>
@@ -2366,11 +2435,11 @@
 </file>
 
 <file path=ppt/slideLayouts/slideLayout1.xml><?xml version="1.0" encoding="utf-8"?>
-<p:sldLayout xmlns:a="http://schemas.openxmlformats.org/drawingml/2006/main" xmlns:r="http://schemas.openxmlformats.org/officeDocument/2006/relationships" xmlns:mc="http://schemas.openxmlformats.org/markup-compatibility/2006" xmlns:mv="urn:schemas-microsoft-com:mac:vml" xmlns:p="http://schemas.openxmlformats.org/presentationml/2006/main" xmlns:c="http://schemas.openxmlformats.org/drawingml/2006/chart" xmlns:dgm="http://schemas.openxmlformats.org/drawingml/2006/diagram" xmlns:o="urn:schemas-microsoft-com:office:office" xmlns:v="urn:schemas-microsoft-com:vml" xmlns:pvml="urn:schemas-microsoft-com:office:powerpoint" xmlns:com="http://schemas.openxmlformats.org/drawingml/2006/compatibility" xmlns:p14="http://schemas.microsoft.com/office/powerpoint/2010/main" xmlns:p15="http://schemas.microsoft.com/office/powerpoint/2012/main" xmlns:ahyp="http://schemas.microsoft.com/office/drawing/2018/hyperlinkcolor" matchingName="Title Slide" type="title">
+<p:sldLayout xmlns:a="http://schemas.openxmlformats.org/drawingml/2006/main" xmlns:r="http://schemas.openxmlformats.org/officeDocument/2006/relationships" xmlns:p="http://schemas.openxmlformats.org/presentationml/2006/main" matchingName="Title Slide" type="title">
   <p:cSld name="TITLE">
     <p:spTree>
       <p:nvGrpSpPr>
-        <p:cNvPr id="15" name="Shape 15"/>
+        <p:cNvPr id="1" name="Shape 15"/>
         <p:cNvGrpSpPr/>
         <p:nvPr/>
       </p:nvGrpSpPr>
@@ -2385,7 +2454,9 @@
       <p:sp>
         <p:nvSpPr>
           <p:cNvPr id="16" name="Google Shape;16;p5"/>
-          <p:cNvSpPr txBox="1"/>
+          <p:cNvSpPr txBox="1">
+            <a:spLocks noGrp="1"/>
+          </p:cNvSpPr>
           <p:nvPr>
             <p:ph type="ctrTitle"/>
           </p:nvPr>
@@ -2404,7 +2475,7 @@
           </a:ln>
         </p:spPr>
         <p:txBody>
-          <a:bodyPr anchorCtr="0" anchor="b" bIns="45700" lIns="91425" spcFirstLastPara="1" rIns="91425" wrap="square" tIns="45700">
+          <a:bodyPr spcFirstLastPara="1" wrap="square" lIns="91425" tIns="45700" rIns="91425" bIns="45700" anchor="b" anchorCtr="0">
             <a:normAutofit/>
           </a:bodyPr>
           <a:lstStyle>
@@ -2515,15 +2586,19 @@
               <a:defRPr/>
             </a:lvl9pPr>
           </a:lstStyle>
-          <a:p/>
+          <a:p>
+            <a:endParaRPr/>
+          </a:p>
         </p:txBody>
       </p:sp>
       <p:sp>
         <p:nvSpPr>
           <p:cNvPr id="17" name="Google Shape;17;p5"/>
-          <p:cNvSpPr txBox="1"/>
+          <p:cNvSpPr txBox="1">
+            <a:spLocks noGrp="1"/>
+          </p:cNvSpPr>
           <p:nvPr>
-            <p:ph idx="1" type="subTitle"/>
+            <p:ph type="subTitle" idx="1"/>
           </p:nvPr>
         </p:nvSpPr>
         <p:spPr>
@@ -2540,7 +2615,7 @@
           </a:ln>
         </p:spPr>
         <p:txBody>
-          <a:bodyPr anchorCtr="0" anchor="t" bIns="45700" lIns="91425" spcFirstLastPara="1" rIns="91425" wrap="square" tIns="45700">
+          <a:bodyPr spcFirstLastPara="1" wrap="square" lIns="91425" tIns="45700" rIns="91425" bIns="45700" anchor="t" anchorCtr="0">
             <a:normAutofit/>
           </a:bodyPr>
           <a:lstStyle>
@@ -2698,15 +2773,19 @@
               <a:defRPr sz="1600"/>
             </a:lvl9pPr>
           </a:lstStyle>
-          <a:p/>
+          <a:p>
+            <a:endParaRPr/>
+          </a:p>
         </p:txBody>
       </p:sp>
       <p:sp>
         <p:nvSpPr>
           <p:cNvPr id="18" name="Google Shape;18;p5"/>
-          <p:cNvSpPr txBox="1"/>
+          <p:cNvSpPr txBox="1">
+            <a:spLocks noGrp="1"/>
+          </p:cNvSpPr>
           <p:nvPr>
-            <p:ph idx="10" type="dt"/>
+            <p:ph type="dt" idx="10"/>
           </p:nvPr>
         </p:nvSpPr>
         <p:spPr>
@@ -2723,7 +2802,7 @@
           </a:ln>
         </p:spPr>
         <p:txBody>
-          <a:bodyPr anchorCtr="0" anchor="ctr" bIns="45700" lIns="91425" spcFirstLastPara="1" rIns="91425" wrap="square" tIns="45700">
+          <a:bodyPr spcFirstLastPara="1" wrap="square" lIns="91425" tIns="45700" rIns="91425" bIns="45700" anchor="ctr" anchorCtr="0">
             <a:noAutofit/>
           </a:bodyPr>
           <a:lstStyle>
@@ -2827,15 +2906,19 @@
               <a:defRPr/>
             </a:lvl9pPr>
           </a:lstStyle>
-          <a:p/>
+          <a:p>
+            <a:endParaRPr/>
+          </a:p>
         </p:txBody>
       </p:sp>
       <p:sp>
         <p:nvSpPr>
           <p:cNvPr id="19" name="Google Shape;19;p5"/>
-          <p:cNvSpPr txBox="1"/>
+          <p:cNvSpPr txBox="1">
+            <a:spLocks noGrp="1"/>
+          </p:cNvSpPr>
           <p:nvPr>
-            <p:ph idx="11" type="ftr"/>
+            <p:ph type="ftr" idx="11"/>
           </p:nvPr>
         </p:nvSpPr>
         <p:spPr>
@@ -2852,7 +2935,7 @@
           </a:ln>
         </p:spPr>
         <p:txBody>
-          <a:bodyPr anchorCtr="0" anchor="ctr" bIns="45700" lIns="91425" spcFirstLastPara="1" rIns="91425" wrap="square" tIns="45700">
+          <a:bodyPr spcFirstLastPara="1" wrap="square" lIns="91425" tIns="45700" rIns="91425" bIns="45700" anchor="ctr" anchorCtr="0">
             <a:noAutofit/>
           </a:bodyPr>
           <a:lstStyle>
@@ -2956,15 +3039,19 @@
               <a:defRPr/>
             </a:lvl9pPr>
           </a:lstStyle>
-          <a:p/>
+          <a:p>
+            <a:endParaRPr/>
+          </a:p>
         </p:txBody>
       </p:sp>
       <p:sp>
         <p:nvSpPr>
           <p:cNvPr id="20" name="Google Shape;20;p5"/>
-          <p:cNvSpPr txBox="1"/>
+          <p:cNvSpPr txBox="1">
+            <a:spLocks noGrp="1"/>
+          </p:cNvSpPr>
           <p:nvPr>
-            <p:ph idx="12" type="sldNum"/>
+            <p:ph type="sldNum" idx="12"/>
           </p:nvPr>
         </p:nvSpPr>
         <p:spPr>
@@ -2981,67 +3068,67 @@
           </a:ln>
         </p:spPr>
         <p:txBody>
-          <a:bodyPr anchorCtr="0" anchor="ctr" bIns="45700" lIns="91425" spcFirstLastPara="1" rIns="91425" wrap="square" tIns="45700">
+          <a:bodyPr spcFirstLastPara="1" wrap="square" lIns="91425" tIns="45700" rIns="91425" bIns="45700" anchor="ctr" anchorCtr="0">
             <a:noAutofit/>
           </a:bodyPr>
           <a:lstStyle>
-            <a:lvl1pPr indent="0" lvl="0" marL="0" algn="r">
+            <a:lvl1pPr marL="0" lvl="0" indent="0" algn="r">
               <a:spcBef>
                 <a:spcPts val="0"/>
               </a:spcBef>
               <a:buNone/>
               <a:defRPr/>
             </a:lvl1pPr>
-            <a:lvl2pPr indent="0" lvl="1" marL="0" algn="r">
+            <a:lvl2pPr marL="0" lvl="1" indent="0" algn="r">
               <a:spcBef>
                 <a:spcPts val="0"/>
               </a:spcBef>
               <a:buNone/>
               <a:defRPr/>
             </a:lvl2pPr>
-            <a:lvl3pPr indent="0" lvl="2" marL="0" algn="r">
+            <a:lvl3pPr marL="0" lvl="2" indent="0" algn="r">
               <a:spcBef>
                 <a:spcPts val="0"/>
               </a:spcBef>
               <a:buNone/>
               <a:defRPr/>
             </a:lvl3pPr>
-            <a:lvl4pPr indent="0" lvl="3" marL="0" algn="r">
+            <a:lvl4pPr marL="0" lvl="3" indent="0" algn="r">
               <a:spcBef>
                 <a:spcPts val="0"/>
               </a:spcBef>
               <a:buNone/>
               <a:defRPr/>
             </a:lvl4pPr>
-            <a:lvl5pPr indent="0" lvl="4" marL="0" algn="r">
+            <a:lvl5pPr marL="0" lvl="4" indent="0" algn="r">
               <a:spcBef>
                 <a:spcPts val="0"/>
               </a:spcBef>
               <a:buNone/>
               <a:defRPr/>
             </a:lvl5pPr>
-            <a:lvl6pPr indent="0" lvl="5" marL="0" algn="r">
+            <a:lvl6pPr marL="0" lvl="5" indent="0" algn="r">
               <a:spcBef>
                 <a:spcPts val="0"/>
               </a:spcBef>
               <a:buNone/>
               <a:defRPr/>
             </a:lvl6pPr>
-            <a:lvl7pPr indent="0" lvl="6" marL="0" algn="r">
+            <a:lvl7pPr marL="0" lvl="6" indent="0" algn="r">
               <a:spcBef>
                 <a:spcPts val="0"/>
               </a:spcBef>
               <a:buNone/>
               <a:defRPr/>
             </a:lvl7pPr>
-            <a:lvl8pPr indent="0" lvl="7" marL="0" algn="r">
+            <a:lvl8pPr marL="0" lvl="7" indent="0" algn="r">
               <a:spcBef>
                 <a:spcPts val="0"/>
               </a:spcBef>
               <a:buNone/>
               <a:defRPr/>
             </a:lvl8pPr>
-            <a:lvl9pPr indent="0" lvl="8" marL="0" algn="r">
+            <a:lvl9pPr marL="0" lvl="8" indent="0" algn="r">
               <a:spcBef>
                 <a:spcPts val="0"/>
               </a:spcBef>
@@ -3050,7 +3137,7 @@
             </a:lvl9pPr>
           </a:lstStyle>
           <a:p>
-            <a:pPr indent="0" lvl="0" marL="0" rtl="0" algn="r">
+            <a:pPr marL="0" lvl="0" indent="0" algn="r" rtl="0">
               <a:spcBef>
                 <a:spcPts val="0"/>
               </a:spcBef>
@@ -3076,11 +3163,11 @@
 </file>
 
 <file path=ppt/slideLayouts/slideLayout10.xml><?xml version="1.0" encoding="utf-8"?>
-<p:sldLayout xmlns:a="http://schemas.openxmlformats.org/drawingml/2006/main" xmlns:r="http://schemas.openxmlformats.org/officeDocument/2006/relationships" xmlns:mc="http://schemas.openxmlformats.org/markup-compatibility/2006" xmlns:mv="urn:schemas-microsoft-com:mac:vml" xmlns:p="http://schemas.openxmlformats.org/presentationml/2006/main" xmlns:c="http://schemas.openxmlformats.org/drawingml/2006/chart" xmlns:dgm="http://schemas.openxmlformats.org/drawingml/2006/diagram" xmlns:o="urn:schemas-microsoft-com:office:office" xmlns:v="urn:schemas-microsoft-com:vml" xmlns:pvml="urn:schemas-microsoft-com:office:powerpoint" xmlns:com="http://schemas.openxmlformats.org/drawingml/2006/compatibility" xmlns:p14="http://schemas.microsoft.com/office/powerpoint/2010/main" xmlns:p15="http://schemas.microsoft.com/office/powerpoint/2012/main" xmlns:ahyp="http://schemas.microsoft.com/office/drawing/2018/hyperlinkcolor" matchingName="Title and Vertical Text" type="vertTx">
+<p:sldLayout xmlns:a="http://schemas.openxmlformats.org/drawingml/2006/main" xmlns:r="http://schemas.openxmlformats.org/officeDocument/2006/relationships" xmlns:p="http://schemas.openxmlformats.org/presentationml/2006/main" matchingName="Title and Vertical Text" type="vertTx">
   <p:cSld name="VERTICAL_TEXT">
     <p:spTree>
       <p:nvGrpSpPr>
-        <p:cNvPr id="72" name="Shape 72"/>
+        <p:cNvPr id="1" name="Shape 72"/>
         <p:cNvGrpSpPr/>
         <p:nvPr/>
       </p:nvGrpSpPr>
@@ -3095,7 +3182,9 @@
       <p:sp>
         <p:nvSpPr>
           <p:cNvPr id="73" name="Google Shape;73;p14"/>
-          <p:cNvSpPr txBox="1"/>
+          <p:cNvSpPr txBox="1">
+            <a:spLocks noGrp="1"/>
+          </p:cNvSpPr>
           <p:nvPr>
             <p:ph type="title"/>
           </p:nvPr>
@@ -3114,7 +3203,7 @@
           </a:ln>
         </p:spPr>
         <p:txBody>
-          <a:bodyPr anchorCtr="0" anchor="ctr" bIns="45700" lIns="91425" spcFirstLastPara="1" rIns="91425" wrap="square" tIns="45700">
+          <a:bodyPr spcFirstLastPara="1" wrap="square" lIns="91425" tIns="45700" rIns="91425" bIns="45700" anchor="ctr" anchorCtr="0">
             <a:normAutofit/>
           </a:bodyPr>
           <a:lstStyle>
@@ -3224,15 +3313,19 @@
               <a:defRPr/>
             </a:lvl9pPr>
           </a:lstStyle>
-          <a:p/>
+          <a:p>
+            <a:endParaRPr/>
+          </a:p>
         </p:txBody>
       </p:sp>
       <p:sp>
         <p:nvSpPr>
           <p:cNvPr id="74" name="Google Shape;74;p14"/>
-          <p:cNvSpPr txBox="1"/>
+          <p:cNvSpPr txBox="1">
+            <a:spLocks noGrp="1"/>
+          </p:cNvSpPr>
           <p:nvPr>
-            <p:ph idx="1" type="body"/>
+            <p:ph type="body" idx="1"/>
           </p:nvPr>
         </p:nvSpPr>
         <p:spPr>
@@ -3249,11 +3342,11 @@
           </a:ln>
         </p:spPr>
         <p:txBody>
-          <a:bodyPr anchorCtr="0" anchor="t" bIns="45700" lIns="91425" spcFirstLastPara="1" rIns="91425" wrap="square" tIns="45700">
+          <a:bodyPr spcFirstLastPara="1" wrap="square" lIns="91425" tIns="45700" rIns="91425" bIns="45700" anchor="t" anchorCtr="0">
             <a:normAutofit/>
           </a:bodyPr>
           <a:lstStyle>
-            <a:lvl1pPr indent="-342900" lvl="0" marL="457200" algn="l">
+            <a:lvl1pPr marL="457200" lvl="0" indent="-342900" algn="l">
               <a:lnSpc>
                 <a:spcPct val="90000"/>
               </a:lnSpc>
@@ -3270,7 +3363,7 @@
               <a:buChar char="•"/>
               <a:defRPr/>
             </a:lvl1pPr>
-            <a:lvl2pPr indent="-342900" lvl="1" marL="914400" algn="l">
+            <a:lvl2pPr marL="914400" lvl="1" indent="-342900" algn="l">
               <a:lnSpc>
                 <a:spcPct val="90000"/>
               </a:lnSpc>
@@ -3287,7 +3380,7 @@
               <a:buChar char="•"/>
               <a:defRPr/>
             </a:lvl2pPr>
-            <a:lvl3pPr indent="-342900" lvl="2" marL="1371600" algn="l">
+            <a:lvl3pPr marL="1371600" lvl="2" indent="-342900" algn="l">
               <a:lnSpc>
                 <a:spcPct val="90000"/>
               </a:lnSpc>
@@ -3304,7 +3397,7 @@
               <a:buChar char="•"/>
               <a:defRPr/>
             </a:lvl3pPr>
-            <a:lvl4pPr indent="-342900" lvl="3" marL="1828800" algn="l">
+            <a:lvl4pPr marL="1828800" lvl="3" indent="-342900" algn="l">
               <a:lnSpc>
                 <a:spcPct val="90000"/>
               </a:lnSpc>
@@ -3321,7 +3414,7 @@
               <a:buChar char="•"/>
               <a:defRPr/>
             </a:lvl4pPr>
-            <a:lvl5pPr indent="-342900" lvl="4" marL="2286000" algn="l">
+            <a:lvl5pPr marL="2286000" lvl="4" indent="-342900" algn="l">
               <a:lnSpc>
                 <a:spcPct val="90000"/>
               </a:lnSpc>
@@ -3338,7 +3431,7 @@
               <a:buChar char="•"/>
               <a:defRPr/>
             </a:lvl5pPr>
-            <a:lvl6pPr indent="-342900" lvl="5" marL="2743200" algn="l">
+            <a:lvl6pPr marL="2743200" lvl="5" indent="-342900" algn="l">
               <a:lnSpc>
                 <a:spcPct val="90000"/>
               </a:lnSpc>
@@ -3355,7 +3448,7 @@
               <a:buChar char="•"/>
               <a:defRPr/>
             </a:lvl6pPr>
-            <a:lvl7pPr indent="-342900" lvl="6" marL="3200400" algn="l">
+            <a:lvl7pPr marL="3200400" lvl="6" indent="-342900" algn="l">
               <a:lnSpc>
                 <a:spcPct val="90000"/>
               </a:lnSpc>
@@ -3372,7 +3465,7 @@
               <a:buChar char="•"/>
               <a:defRPr/>
             </a:lvl7pPr>
-            <a:lvl8pPr indent="-342900" lvl="7" marL="3657600" algn="l">
+            <a:lvl8pPr marL="3657600" lvl="7" indent="-342900" algn="l">
               <a:lnSpc>
                 <a:spcPct val="90000"/>
               </a:lnSpc>
@@ -3389,7 +3482,7 @@
               <a:buChar char="•"/>
               <a:defRPr/>
             </a:lvl8pPr>
-            <a:lvl9pPr indent="-342900" lvl="8" marL="4114800" algn="l">
+            <a:lvl9pPr marL="4114800" lvl="8" indent="-342900" algn="l">
               <a:lnSpc>
                 <a:spcPct val="90000"/>
               </a:lnSpc>
@@ -3407,15 +3500,19 @@
               <a:defRPr/>
             </a:lvl9pPr>
           </a:lstStyle>
-          <a:p/>
+          <a:p>
+            <a:endParaRPr/>
+          </a:p>
         </p:txBody>
       </p:sp>
       <p:sp>
         <p:nvSpPr>
           <p:cNvPr id="75" name="Google Shape;75;p14"/>
-          <p:cNvSpPr txBox="1"/>
+          <p:cNvSpPr txBox="1">
+            <a:spLocks noGrp="1"/>
+          </p:cNvSpPr>
           <p:nvPr>
-            <p:ph idx="10" type="dt"/>
+            <p:ph type="dt" idx="10"/>
           </p:nvPr>
         </p:nvSpPr>
         <p:spPr>
@@ -3432,7 +3529,7 @@
           </a:ln>
         </p:spPr>
         <p:txBody>
-          <a:bodyPr anchorCtr="0" anchor="ctr" bIns="45700" lIns="91425" spcFirstLastPara="1" rIns="91425" wrap="square" tIns="45700">
+          <a:bodyPr spcFirstLastPara="1" wrap="square" lIns="91425" tIns="45700" rIns="91425" bIns="45700" anchor="ctr" anchorCtr="0">
             <a:noAutofit/>
           </a:bodyPr>
           <a:lstStyle>
@@ -3536,15 +3633,19 @@
               <a:defRPr/>
             </a:lvl9pPr>
           </a:lstStyle>
-          <a:p/>
+          <a:p>
+            <a:endParaRPr/>
+          </a:p>
         </p:txBody>
       </p:sp>
       <p:sp>
         <p:nvSpPr>
           <p:cNvPr id="76" name="Google Shape;76;p14"/>
-          <p:cNvSpPr txBox="1"/>
+          <p:cNvSpPr txBox="1">
+            <a:spLocks noGrp="1"/>
+          </p:cNvSpPr>
           <p:nvPr>
-            <p:ph idx="11" type="ftr"/>
+            <p:ph type="ftr" idx="11"/>
           </p:nvPr>
         </p:nvSpPr>
         <p:spPr>
@@ -3561,7 +3662,7 @@
           </a:ln>
         </p:spPr>
         <p:txBody>
-          <a:bodyPr anchorCtr="0" anchor="ctr" bIns="45700" lIns="91425" spcFirstLastPara="1" rIns="91425" wrap="square" tIns="45700">
+          <a:bodyPr spcFirstLastPara="1" wrap="square" lIns="91425" tIns="45700" rIns="91425" bIns="45700" anchor="ctr" anchorCtr="0">
             <a:noAutofit/>
           </a:bodyPr>
           <a:lstStyle>
@@ -3665,15 +3766,19 @@
               <a:defRPr/>
             </a:lvl9pPr>
           </a:lstStyle>
-          <a:p/>
+          <a:p>
+            <a:endParaRPr/>
+          </a:p>
         </p:txBody>
       </p:sp>
       <p:sp>
         <p:nvSpPr>
           <p:cNvPr id="77" name="Google Shape;77;p14"/>
-          <p:cNvSpPr txBox="1"/>
+          <p:cNvSpPr txBox="1">
+            <a:spLocks noGrp="1"/>
+          </p:cNvSpPr>
           <p:nvPr>
-            <p:ph idx="12" type="sldNum"/>
+            <p:ph type="sldNum" idx="12"/>
           </p:nvPr>
         </p:nvSpPr>
         <p:spPr>
@@ -3690,67 +3795,67 @@
           </a:ln>
         </p:spPr>
         <p:txBody>
-          <a:bodyPr anchorCtr="0" anchor="ctr" bIns="45700" lIns="91425" spcFirstLastPara="1" rIns="91425" wrap="square" tIns="45700">
+          <a:bodyPr spcFirstLastPara="1" wrap="square" lIns="91425" tIns="45700" rIns="91425" bIns="45700" anchor="ctr" anchorCtr="0">
             <a:noAutofit/>
           </a:bodyPr>
           <a:lstStyle>
-            <a:lvl1pPr indent="0" lvl="0" marL="0" algn="r">
+            <a:lvl1pPr marL="0" lvl="0" indent="0" algn="r">
               <a:spcBef>
                 <a:spcPts val="0"/>
               </a:spcBef>
               <a:buNone/>
               <a:defRPr/>
             </a:lvl1pPr>
-            <a:lvl2pPr indent="0" lvl="1" marL="0" algn="r">
+            <a:lvl2pPr marL="0" lvl="1" indent="0" algn="r">
               <a:spcBef>
                 <a:spcPts val="0"/>
               </a:spcBef>
               <a:buNone/>
               <a:defRPr/>
             </a:lvl2pPr>
-            <a:lvl3pPr indent="0" lvl="2" marL="0" algn="r">
+            <a:lvl3pPr marL="0" lvl="2" indent="0" algn="r">
               <a:spcBef>
                 <a:spcPts val="0"/>
               </a:spcBef>
               <a:buNone/>
               <a:defRPr/>
             </a:lvl3pPr>
-            <a:lvl4pPr indent="0" lvl="3" marL="0" algn="r">
+            <a:lvl4pPr marL="0" lvl="3" indent="0" algn="r">
               <a:spcBef>
                 <a:spcPts val="0"/>
               </a:spcBef>
               <a:buNone/>
               <a:defRPr/>
             </a:lvl4pPr>
-            <a:lvl5pPr indent="0" lvl="4" marL="0" algn="r">
+            <a:lvl5pPr marL="0" lvl="4" indent="0" algn="r">
               <a:spcBef>
                 <a:spcPts val="0"/>
               </a:spcBef>
               <a:buNone/>
               <a:defRPr/>
             </a:lvl5pPr>
-            <a:lvl6pPr indent="0" lvl="5" marL="0" algn="r">
+            <a:lvl6pPr marL="0" lvl="5" indent="0" algn="r">
               <a:spcBef>
                 <a:spcPts val="0"/>
               </a:spcBef>
               <a:buNone/>
               <a:defRPr/>
             </a:lvl6pPr>
-            <a:lvl7pPr indent="0" lvl="6" marL="0" algn="r">
+            <a:lvl7pPr marL="0" lvl="6" indent="0" algn="r">
               <a:spcBef>
                 <a:spcPts val="0"/>
               </a:spcBef>
               <a:buNone/>
               <a:defRPr/>
             </a:lvl7pPr>
-            <a:lvl8pPr indent="0" lvl="7" marL="0" algn="r">
+            <a:lvl8pPr marL="0" lvl="7" indent="0" algn="r">
               <a:spcBef>
                 <a:spcPts val="0"/>
               </a:spcBef>
               <a:buNone/>
               <a:defRPr/>
             </a:lvl8pPr>
-            <a:lvl9pPr indent="0" lvl="8" marL="0" algn="r">
+            <a:lvl9pPr marL="0" lvl="8" indent="0" algn="r">
               <a:spcBef>
                 <a:spcPts val="0"/>
               </a:spcBef>
@@ -3759,7 +3864,7 @@
             </a:lvl9pPr>
           </a:lstStyle>
           <a:p>
-            <a:pPr indent="0" lvl="0" marL="0" rtl="0" algn="r">
+            <a:pPr marL="0" lvl="0" indent="0" algn="r" rtl="0">
               <a:spcBef>
                 <a:spcPts val="0"/>
               </a:spcBef>
@@ -3785,11 +3890,11 @@
 </file>
 
 <file path=ppt/slideLayouts/slideLayout11.xml><?xml version="1.0" encoding="utf-8"?>
-<p:sldLayout xmlns:a="http://schemas.openxmlformats.org/drawingml/2006/main" xmlns:r="http://schemas.openxmlformats.org/officeDocument/2006/relationships" xmlns:mc="http://schemas.openxmlformats.org/markup-compatibility/2006" xmlns:mv="urn:schemas-microsoft-com:mac:vml" xmlns:p="http://schemas.openxmlformats.org/presentationml/2006/main" xmlns:c="http://schemas.openxmlformats.org/drawingml/2006/chart" xmlns:dgm="http://schemas.openxmlformats.org/drawingml/2006/diagram" xmlns:o="urn:schemas-microsoft-com:office:office" xmlns:v="urn:schemas-microsoft-com:vml" xmlns:pvml="urn:schemas-microsoft-com:office:powerpoint" xmlns:com="http://schemas.openxmlformats.org/drawingml/2006/compatibility" xmlns:p14="http://schemas.microsoft.com/office/powerpoint/2010/main" xmlns:p15="http://schemas.microsoft.com/office/powerpoint/2012/main" xmlns:ahyp="http://schemas.microsoft.com/office/drawing/2018/hyperlinkcolor" matchingName="Vertical Title and Text" type="vertTitleAndTx">
+<p:sldLayout xmlns:a="http://schemas.openxmlformats.org/drawingml/2006/main" xmlns:r="http://schemas.openxmlformats.org/officeDocument/2006/relationships" xmlns:p="http://schemas.openxmlformats.org/presentationml/2006/main" matchingName="Vertical Title and Text" type="vertTitleAndTx">
   <p:cSld name="VERTICAL_TITLE_AND_VERTICAL_TEXT">
     <p:spTree>
       <p:nvGrpSpPr>
-        <p:cNvPr id="78" name="Shape 78"/>
+        <p:cNvPr id="1" name="Shape 78"/>
         <p:cNvGrpSpPr/>
         <p:nvPr/>
       </p:nvGrpSpPr>
@@ -3804,7 +3909,9 @@
       <p:sp>
         <p:nvSpPr>
           <p:cNvPr id="79" name="Google Shape;79;p15"/>
-          <p:cNvSpPr txBox="1"/>
+          <p:cNvSpPr txBox="1">
+            <a:spLocks noGrp="1"/>
+          </p:cNvSpPr>
           <p:nvPr>
             <p:ph type="title"/>
           </p:nvPr>
@@ -3823,7 +3930,7 @@
           </a:ln>
         </p:spPr>
         <p:txBody>
-          <a:bodyPr anchorCtr="0" anchor="ctr" bIns="45700" lIns="91425" spcFirstLastPara="1" rIns="91425" wrap="square" tIns="45700">
+          <a:bodyPr spcFirstLastPara="1" wrap="square" lIns="91425" tIns="45700" rIns="91425" bIns="45700" anchor="ctr" anchorCtr="0">
             <a:normAutofit/>
           </a:bodyPr>
           <a:lstStyle>
@@ -3933,15 +4040,19 @@
               <a:defRPr/>
             </a:lvl9pPr>
           </a:lstStyle>
-          <a:p/>
+          <a:p>
+            <a:endParaRPr/>
+          </a:p>
         </p:txBody>
       </p:sp>
       <p:sp>
         <p:nvSpPr>
           <p:cNvPr id="80" name="Google Shape;80;p15"/>
-          <p:cNvSpPr txBox="1"/>
+          <p:cNvSpPr txBox="1">
+            <a:spLocks noGrp="1"/>
+          </p:cNvSpPr>
           <p:nvPr>
-            <p:ph idx="1" type="body"/>
+            <p:ph type="body" idx="1"/>
           </p:nvPr>
         </p:nvSpPr>
         <p:spPr>
@@ -3958,11 +4069,11 @@
           </a:ln>
         </p:spPr>
         <p:txBody>
-          <a:bodyPr anchorCtr="0" anchor="t" bIns="45700" lIns="91425" spcFirstLastPara="1" rIns="91425" wrap="square" tIns="45700">
+          <a:bodyPr spcFirstLastPara="1" wrap="square" lIns="91425" tIns="45700" rIns="91425" bIns="45700" anchor="t" anchorCtr="0">
             <a:normAutofit/>
           </a:bodyPr>
           <a:lstStyle>
-            <a:lvl1pPr indent="-342900" lvl="0" marL="457200" algn="l">
+            <a:lvl1pPr marL="457200" lvl="0" indent="-342900" algn="l">
               <a:lnSpc>
                 <a:spcPct val="90000"/>
               </a:lnSpc>
@@ -3979,7 +4090,7 @@
               <a:buChar char="•"/>
               <a:defRPr/>
             </a:lvl1pPr>
-            <a:lvl2pPr indent="-342900" lvl="1" marL="914400" algn="l">
+            <a:lvl2pPr marL="914400" lvl="1" indent="-342900" algn="l">
               <a:lnSpc>
                 <a:spcPct val="90000"/>
               </a:lnSpc>
@@ -3996,7 +4107,7 @@
               <a:buChar char="•"/>
               <a:defRPr/>
             </a:lvl2pPr>
-            <a:lvl3pPr indent="-342900" lvl="2" marL="1371600" algn="l">
+            <a:lvl3pPr marL="1371600" lvl="2" indent="-342900" algn="l">
               <a:lnSpc>
                 <a:spcPct val="90000"/>
               </a:lnSpc>
@@ -4013,7 +4124,7 @@
               <a:buChar char="•"/>
               <a:defRPr/>
             </a:lvl3pPr>
-            <a:lvl4pPr indent="-342900" lvl="3" marL="1828800" algn="l">
+            <a:lvl4pPr marL="1828800" lvl="3" indent="-342900" algn="l">
               <a:lnSpc>
                 <a:spcPct val="90000"/>
               </a:lnSpc>
@@ -4030,7 +4141,7 @@
               <a:buChar char="•"/>
               <a:defRPr/>
             </a:lvl4pPr>
-            <a:lvl5pPr indent="-342900" lvl="4" marL="2286000" algn="l">
+            <a:lvl5pPr marL="2286000" lvl="4" indent="-342900" algn="l">
               <a:lnSpc>
                 <a:spcPct val="90000"/>
               </a:lnSpc>
@@ -4047,7 +4158,7 @@
               <a:buChar char="•"/>
               <a:defRPr/>
             </a:lvl5pPr>
-            <a:lvl6pPr indent="-342900" lvl="5" marL="2743200" algn="l">
+            <a:lvl6pPr marL="2743200" lvl="5" indent="-342900" algn="l">
               <a:lnSpc>
                 <a:spcPct val="90000"/>
               </a:lnSpc>
@@ -4064,7 +4175,7 @@
               <a:buChar char="•"/>
               <a:defRPr/>
             </a:lvl6pPr>
-            <a:lvl7pPr indent="-342900" lvl="6" marL="3200400" algn="l">
+            <a:lvl7pPr marL="3200400" lvl="6" indent="-342900" algn="l">
               <a:lnSpc>
                 <a:spcPct val="90000"/>
               </a:lnSpc>
@@ -4081,7 +4192,7 @@
               <a:buChar char="•"/>
               <a:defRPr/>
             </a:lvl7pPr>
-            <a:lvl8pPr indent="-342900" lvl="7" marL="3657600" algn="l">
+            <a:lvl8pPr marL="3657600" lvl="7" indent="-342900" algn="l">
               <a:lnSpc>
                 <a:spcPct val="90000"/>
               </a:lnSpc>
@@ -4098,7 +4209,7 @@
               <a:buChar char="•"/>
               <a:defRPr/>
             </a:lvl8pPr>
-            <a:lvl9pPr indent="-342900" lvl="8" marL="4114800" algn="l">
+            <a:lvl9pPr marL="4114800" lvl="8" indent="-342900" algn="l">
               <a:lnSpc>
                 <a:spcPct val="90000"/>
               </a:lnSpc>
@@ -4116,15 +4227,19 @@
               <a:defRPr/>
             </a:lvl9pPr>
           </a:lstStyle>
-          <a:p/>
+          <a:p>
+            <a:endParaRPr/>
+          </a:p>
         </p:txBody>
       </p:sp>
       <p:sp>
         <p:nvSpPr>
           <p:cNvPr id="81" name="Google Shape;81;p15"/>
-          <p:cNvSpPr txBox="1"/>
+          <p:cNvSpPr txBox="1">
+            <a:spLocks noGrp="1"/>
+          </p:cNvSpPr>
           <p:nvPr>
-            <p:ph idx="10" type="dt"/>
+            <p:ph type="dt" idx="10"/>
           </p:nvPr>
         </p:nvSpPr>
         <p:spPr>
@@ -4141,7 +4256,7 @@
           </a:ln>
         </p:spPr>
         <p:txBody>
-          <a:bodyPr anchorCtr="0" anchor="ctr" bIns="45700" lIns="91425" spcFirstLastPara="1" rIns="91425" wrap="square" tIns="45700">
+          <a:bodyPr spcFirstLastPara="1" wrap="square" lIns="91425" tIns="45700" rIns="91425" bIns="45700" anchor="ctr" anchorCtr="0">
             <a:noAutofit/>
           </a:bodyPr>
           <a:lstStyle>
@@ -4245,15 +4360,19 @@
               <a:defRPr/>
             </a:lvl9pPr>
           </a:lstStyle>
-          <a:p/>
+          <a:p>
+            <a:endParaRPr/>
+          </a:p>
         </p:txBody>
       </p:sp>
       <p:sp>
         <p:nvSpPr>
           <p:cNvPr id="82" name="Google Shape;82;p15"/>
-          <p:cNvSpPr txBox="1"/>
+          <p:cNvSpPr txBox="1">
+            <a:spLocks noGrp="1"/>
+          </p:cNvSpPr>
           <p:nvPr>
-            <p:ph idx="11" type="ftr"/>
+            <p:ph type="ftr" idx="11"/>
           </p:nvPr>
         </p:nvSpPr>
         <p:spPr>
@@ -4270,7 +4389,7 @@
           </a:ln>
         </p:spPr>
         <p:txBody>
-          <a:bodyPr anchorCtr="0" anchor="ctr" bIns="45700" lIns="91425" spcFirstLastPara="1" rIns="91425" wrap="square" tIns="45700">
+          <a:bodyPr spcFirstLastPara="1" wrap="square" lIns="91425" tIns="45700" rIns="91425" bIns="45700" anchor="ctr" anchorCtr="0">
             <a:noAutofit/>
           </a:bodyPr>
           <a:lstStyle>
@@ -4374,15 +4493,19 @@
               <a:defRPr/>
             </a:lvl9pPr>
           </a:lstStyle>
-          <a:p/>
+          <a:p>
+            <a:endParaRPr/>
+          </a:p>
         </p:txBody>
       </p:sp>
       <p:sp>
         <p:nvSpPr>
           <p:cNvPr id="83" name="Google Shape;83;p15"/>
-          <p:cNvSpPr txBox="1"/>
+          <p:cNvSpPr txBox="1">
+            <a:spLocks noGrp="1"/>
+          </p:cNvSpPr>
           <p:nvPr>
-            <p:ph idx="12" type="sldNum"/>
+            <p:ph type="sldNum" idx="12"/>
           </p:nvPr>
         </p:nvSpPr>
         <p:spPr>
@@ -4399,67 +4522,67 @@
           </a:ln>
         </p:spPr>
         <p:txBody>
-          <a:bodyPr anchorCtr="0" anchor="ctr" bIns="45700" lIns="91425" spcFirstLastPara="1" rIns="91425" wrap="square" tIns="45700">
+          <a:bodyPr spcFirstLastPara="1" wrap="square" lIns="91425" tIns="45700" rIns="91425" bIns="45700" anchor="ctr" anchorCtr="0">
             <a:noAutofit/>
           </a:bodyPr>
           <a:lstStyle>
-            <a:lvl1pPr indent="0" lvl="0" marL="0" algn="r">
+            <a:lvl1pPr marL="0" lvl="0" indent="0" algn="r">
               <a:spcBef>
                 <a:spcPts val="0"/>
               </a:spcBef>
               <a:buNone/>
               <a:defRPr/>
             </a:lvl1pPr>
-            <a:lvl2pPr indent="0" lvl="1" marL="0" algn="r">
+            <a:lvl2pPr marL="0" lvl="1" indent="0" algn="r">
               <a:spcBef>
                 <a:spcPts val="0"/>
               </a:spcBef>
               <a:buNone/>
               <a:defRPr/>
             </a:lvl2pPr>
-            <a:lvl3pPr indent="0" lvl="2" marL="0" algn="r">
+            <a:lvl3pPr marL="0" lvl="2" indent="0" algn="r">
               <a:spcBef>
                 <a:spcPts val="0"/>
               </a:spcBef>
               <a:buNone/>
               <a:defRPr/>
             </a:lvl3pPr>
-            <a:lvl4pPr indent="0" lvl="3" marL="0" algn="r">
+            <a:lvl4pPr marL="0" lvl="3" indent="0" algn="r">
               <a:spcBef>
                 <a:spcPts val="0"/>
               </a:spcBef>
               <a:buNone/>
               <a:defRPr/>
             </a:lvl4pPr>
-            <a:lvl5pPr indent="0" lvl="4" marL="0" algn="r">
+            <a:lvl5pPr marL="0" lvl="4" indent="0" algn="r">
               <a:spcBef>
                 <a:spcPts val="0"/>
               </a:spcBef>
               <a:buNone/>
               <a:defRPr/>
             </a:lvl5pPr>
-            <a:lvl6pPr indent="0" lvl="5" marL="0" algn="r">
+            <a:lvl6pPr marL="0" lvl="5" indent="0" algn="r">
               <a:spcBef>
                 <a:spcPts val="0"/>
               </a:spcBef>
               <a:buNone/>
               <a:defRPr/>
             </a:lvl6pPr>
-            <a:lvl7pPr indent="0" lvl="6" marL="0" algn="r">
+            <a:lvl7pPr marL="0" lvl="6" indent="0" algn="r">
               <a:spcBef>
                 <a:spcPts val="0"/>
               </a:spcBef>
               <a:buNone/>
               <a:defRPr/>
             </a:lvl7pPr>
-            <a:lvl8pPr indent="0" lvl="7" marL="0" algn="r">
+            <a:lvl8pPr marL="0" lvl="7" indent="0" algn="r">
               <a:spcBef>
                 <a:spcPts val="0"/>
               </a:spcBef>
               <a:buNone/>
               <a:defRPr/>
             </a:lvl8pPr>
-            <a:lvl9pPr indent="0" lvl="8" marL="0" algn="r">
+            <a:lvl9pPr marL="0" lvl="8" indent="0" algn="r">
               <a:spcBef>
                 <a:spcPts val="0"/>
               </a:spcBef>
@@ -4468,7 +4591,7 @@
             </a:lvl9pPr>
           </a:lstStyle>
           <a:p>
-            <a:pPr indent="0" lvl="0" marL="0" rtl="0" algn="r">
+            <a:pPr marL="0" lvl="0" indent="0" algn="r" rtl="0">
               <a:spcBef>
                 <a:spcPts val="0"/>
               </a:spcBef>
@@ -4494,11 +4617,11 @@
 </file>
 
 <file path=ppt/slideLayouts/slideLayout2.xml><?xml version="1.0" encoding="utf-8"?>
-<p:sldLayout xmlns:a="http://schemas.openxmlformats.org/drawingml/2006/main" xmlns:r="http://schemas.openxmlformats.org/officeDocument/2006/relationships" xmlns:mc="http://schemas.openxmlformats.org/markup-compatibility/2006" xmlns:mv="urn:schemas-microsoft-com:mac:vml" xmlns:p="http://schemas.openxmlformats.org/presentationml/2006/main" xmlns:c="http://schemas.openxmlformats.org/drawingml/2006/chart" xmlns:dgm="http://schemas.openxmlformats.org/drawingml/2006/diagram" xmlns:o="urn:schemas-microsoft-com:office:office" xmlns:v="urn:schemas-microsoft-com:vml" xmlns:pvml="urn:schemas-microsoft-com:office:powerpoint" xmlns:com="http://schemas.openxmlformats.org/drawingml/2006/compatibility" xmlns:p14="http://schemas.microsoft.com/office/powerpoint/2010/main" xmlns:p15="http://schemas.microsoft.com/office/powerpoint/2012/main" xmlns:ahyp="http://schemas.microsoft.com/office/drawing/2018/hyperlinkcolor" matchingName="Title and Content" type="obj">
+<p:sldLayout xmlns:a="http://schemas.openxmlformats.org/drawingml/2006/main" xmlns:r="http://schemas.openxmlformats.org/officeDocument/2006/relationships" xmlns:p="http://schemas.openxmlformats.org/presentationml/2006/main" matchingName="Title and Content" type="obj">
   <p:cSld name="OBJECT">
     <p:spTree>
       <p:nvGrpSpPr>
-        <p:cNvPr id="21" name="Shape 21"/>
+        <p:cNvPr id="1" name="Shape 21"/>
         <p:cNvGrpSpPr/>
         <p:nvPr/>
       </p:nvGrpSpPr>
@@ -4513,7 +4636,9 @@
       <p:sp>
         <p:nvSpPr>
           <p:cNvPr id="22" name="Google Shape;22;p6"/>
-          <p:cNvSpPr txBox="1"/>
+          <p:cNvSpPr txBox="1">
+            <a:spLocks noGrp="1"/>
+          </p:cNvSpPr>
           <p:nvPr>
             <p:ph type="title"/>
           </p:nvPr>
@@ -4532,7 +4657,7 @@
           </a:ln>
         </p:spPr>
         <p:txBody>
-          <a:bodyPr anchorCtr="0" anchor="ctr" bIns="45700" lIns="91425" spcFirstLastPara="1" rIns="91425" wrap="square" tIns="45700">
+          <a:bodyPr spcFirstLastPara="1" wrap="square" lIns="91425" tIns="45700" rIns="91425" bIns="45700" anchor="ctr" anchorCtr="0">
             <a:normAutofit/>
           </a:bodyPr>
           <a:lstStyle>
@@ -4642,15 +4767,19 @@
               <a:defRPr/>
             </a:lvl9pPr>
           </a:lstStyle>
-          <a:p/>
+          <a:p>
+            <a:endParaRPr/>
+          </a:p>
         </p:txBody>
       </p:sp>
       <p:sp>
         <p:nvSpPr>
           <p:cNvPr id="23" name="Google Shape;23;p6"/>
-          <p:cNvSpPr txBox="1"/>
+          <p:cNvSpPr txBox="1">
+            <a:spLocks noGrp="1"/>
+          </p:cNvSpPr>
           <p:nvPr>
-            <p:ph idx="1" type="body"/>
+            <p:ph type="body" idx="1"/>
           </p:nvPr>
         </p:nvSpPr>
         <p:spPr>
@@ -4667,11 +4796,11 @@
           </a:ln>
         </p:spPr>
         <p:txBody>
-          <a:bodyPr anchorCtr="0" anchor="t" bIns="45700" lIns="91425" spcFirstLastPara="1" rIns="91425" wrap="square" tIns="45700">
+          <a:bodyPr spcFirstLastPara="1" wrap="square" lIns="91425" tIns="45700" rIns="91425" bIns="45700" anchor="t" anchorCtr="0">
             <a:normAutofit/>
           </a:bodyPr>
           <a:lstStyle>
-            <a:lvl1pPr indent="-342900" lvl="0" marL="457200" algn="l">
+            <a:lvl1pPr marL="457200" lvl="0" indent="-342900" algn="l">
               <a:lnSpc>
                 <a:spcPct val="90000"/>
               </a:lnSpc>
@@ -4688,7 +4817,7 @@
               <a:buChar char="•"/>
               <a:defRPr/>
             </a:lvl1pPr>
-            <a:lvl2pPr indent="-342900" lvl="1" marL="914400" algn="l">
+            <a:lvl2pPr marL="914400" lvl="1" indent="-342900" algn="l">
               <a:lnSpc>
                 <a:spcPct val="90000"/>
               </a:lnSpc>
@@ -4705,7 +4834,7 @@
               <a:buChar char="•"/>
               <a:defRPr/>
             </a:lvl2pPr>
-            <a:lvl3pPr indent="-342900" lvl="2" marL="1371600" algn="l">
+            <a:lvl3pPr marL="1371600" lvl="2" indent="-342900" algn="l">
               <a:lnSpc>
                 <a:spcPct val="90000"/>
               </a:lnSpc>
@@ -4722,7 +4851,7 @@
               <a:buChar char="•"/>
               <a:defRPr/>
             </a:lvl3pPr>
-            <a:lvl4pPr indent="-342900" lvl="3" marL="1828800" algn="l">
+            <a:lvl4pPr marL="1828800" lvl="3" indent="-342900" algn="l">
               <a:lnSpc>
                 <a:spcPct val="90000"/>
               </a:lnSpc>
@@ -4739,7 +4868,7 @@
               <a:buChar char="•"/>
               <a:defRPr/>
             </a:lvl4pPr>
-            <a:lvl5pPr indent="-342900" lvl="4" marL="2286000" algn="l">
+            <a:lvl5pPr marL="2286000" lvl="4" indent="-342900" algn="l">
               <a:lnSpc>
                 <a:spcPct val="90000"/>
               </a:lnSpc>
@@ -4756,7 +4885,7 @@
               <a:buChar char="•"/>
               <a:defRPr/>
             </a:lvl5pPr>
-            <a:lvl6pPr indent="-342900" lvl="5" marL="2743200" algn="l">
+            <a:lvl6pPr marL="2743200" lvl="5" indent="-342900" algn="l">
               <a:lnSpc>
                 <a:spcPct val="90000"/>
               </a:lnSpc>
@@ -4773,7 +4902,7 @@
               <a:buChar char="•"/>
               <a:defRPr/>
             </a:lvl6pPr>
-            <a:lvl7pPr indent="-342900" lvl="6" marL="3200400" algn="l">
+            <a:lvl7pPr marL="3200400" lvl="6" indent="-342900" algn="l">
               <a:lnSpc>
                 <a:spcPct val="90000"/>
               </a:lnSpc>
@@ -4790,7 +4919,7 @@
               <a:buChar char="•"/>
               <a:defRPr/>
             </a:lvl7pPr>
-            <a:lvl8pPr indent="-342900" lvl="7" marL="3657600" algn="l">
+            <a:lvl8pPr marL="3657600" lvl="7" indent="-342900" algn="l">
               <a:lnSpc>
                 <a:spcPct val="90000"/>
               </a:lnSpc>
@@ -4807,7 +4936,7 @@
               <a:buChar char="•"/>
               <a:defRPr/>
             </a:lvl8pPr>
-            <a:lvl9pPr indent="-342900" lvl="8" marL="4114800" algn="l">
+            <a:lvl9pPr marL="4114800" lvl="8" indent="-342900" algn="l">
               <a:lnSpc>
                 <a:spcPct val="90000"/>
               </a:lnSpc>
@@ -4825,15 +4954,19 @@
               <a:defRPr/>
             </a:lvl9pPr>
           </a:lstStyle>
-          <a:p/>
+          <a:p>
+            <a:endParaRPr/>
+          </a:p>
         </p:txBody>
       </p:sp>
       <p:sp>
         <p:nvSpPr>
           <p:cNvPr id="24" name="Google Shape;24;p6"/>
-          <p:cNvSpPr txBox="1"/>
+          <p:cNvSpPr txBox="1">
+            <a:spLocks noGrp="1"/>
+          </p:cNvSpPr>
           <p:nvPr>
-            <p:ph idx="10" type="dt"/>
+            <p:ph type="dt" idx="10"/>
           </p:nvPr>
         </p:nvSpPr>
         <p:spPr>
@@ -4850,7 +4983,7 @@
           </a:ln>
         </p:spPr>
         <p:txBody>
-          <a:bodyPr anchorCtr="0" anchor="ctr" bIns="45700" lIns="91425" spcFirstLastPara="1" rIns="91425" wrap="square" tIns="45700">
+          <a:bodyPr spcFirstLastPara="1" wrap="square" lIns="91425" tIns="45700" rIns="91425" bIns="45700" anchor="ctr" anchorCtr="0">
             <a:noAutofit/>
           </a:bodyPr>
           <a:lstStyle>
@@ -4954,15 +5087,19 @@
               <a:defRPr/>
             </a:lvl9pPr>
           </a:lstStyle>
-          <a:p/>
+          <a:p>
+            <a:endParaRPr/>
+          </a:p>
         </p:txBody>
       </p:sp>
       <p:sp>
         <p:nvSpPr>
           <p:cNvPr id="25" name="Google Shape;25;p6"/>
-          <p:cNvSpPr txBox="1"/>
+          <p:cNvSpPr txBox="1">
+            <a:spLocks noGrp="1"/>
+          </p:cNvSpPr>
           <p:nvPr>
-            <p:ph idx="11" type="ftr"/>
+            <p:ph type="ftr" idx="11"/>
           </p:nvPr>
         </p:nvSpPr>
         <p:spPr>
@@ -4979,7 +5116,7 @@
           </a:ln>
         </p:spPr>
         <p:txBody>
-          <a:bodyPr anchorCtr="0" anchor="ctr" bIns="45700" lIns="91425" spcFirstLastPara="1" rIns="91425" wrap="square" tIns="45700">
+          <a:bodyPr spcFirstLastPara="1" wrap="square" lIns="91425" tIns="45700" rIns="91425" bIns="45700" anchor="ctr" anchorCtr="0">
             <a:noAutofit/>
           </a:bodyPr>
           <a:lstStyle>
@@ -5083,15 +5220,19 @@
               <a:defRPr/>
             </a:lvl9pPr>
           </a:lstStyle>
-          <a:p/>
+          <a:p>
+            <a:endParaRPr/>
+          </a:p>
         </p:txBody>
       </p:sp>
       <p:sp>
         <p:nvSpPr>
           <p:cNvPr id="26" name="Google Shape;26;p6"/>
-          <p:cNvSpPr txBox="1"/>
+          <p:cNvSpPr txBox="1">
+            <a:spLocks noGrp="1"/>
+          </p:cNvSpPr>
           <p:nvPr>
-            <p:ph idx="12" type="sldNum"/>
+            <p:ph type="sldNum" idx="12"/>
           </p:nvPr>
         </p:nvSpPr>
         <p:spPr>
@@ -5108,67 +5249,67 @@
           </a:ln>
         </p:spPr>
         <p:txBody>
-          <a:bodyPr anchorCtr="0" anchor="ctr" bIns="45700" lIns="91425" spcFirstLastPara="1" rIns="91425" wrap="square" tIns="45700">
+          <a:bodyPr spcFirstLastPara="1" wrap="square" lIns="91425" tIns="45700" rIns="91425" bIns="45700" anchor="ctr" anchorCtr="0">
             <a:noAutofit/>
           </a:bodyPr>
           <a:lstStyle>
-            <a:lvl1pPr indent="0" lvl="0" marL="0" algn="r">
+            <a:lvl1pPr marL="0" lvl="0" indent="0" algn="r">
               <a:spcBef>
                 <a:spcPts val="0"/>
               </a:spcBef>
               <a:buNone/>
               <a:defRPr/>
             </a:lvl1pPr>
-            <a:lvl2pPr indent="0" lvl="1" marL="0" algn="r">
+            <a:lvl2pPr marL="0" lvl="1" indent="0" algn="r">
               <a:spcBef>
                 <a:spcPts val="0"/>
               </a:spcBef>
               <a:buNone/>
               <a:defRPr/>
             </a:lvl2pPr>
-            <a:lvl3pPr indent="0" lvl="2" marL="0" algn="r">
+            <a:lvl3pPr marL="0" lvl="2" indent="0" algn="r">
               <a:spcBef>
                 <a:spcPts val="0"/>
               </a:spcBef>
               <a:buNone/>
               <a:defRPr/>
             </a:lvl3pPr>
-            <a:lvl4pPr indent="0" lvl="3" marL="0" algn="r">
+            <a:lvl4pPr marL="0" lvl="3" indent="0" algn="r">
               <a:spcBef>
                 <a:spcPts val="0"/>
               </a:spcBef>
               <a:buNone/>
               <a:defRPr/>
             </a:lvl4pPr>
-            <a:lvl5pPr indent="0" lvl="4" marL="0" algn="r">
+            <a:lvl5pPr marL="0" lvl="4" indent="0" algn="r">
               <a:spcBef>
                 <a:spcPts val="0"/>
               </a:spcBef>
               <a:buNone/>
               <a:defRPr/>
             </a:lvl5pPr>
-            <a:lvl6pPr indent="0" lvl="5" marL="0" algn="r">
+            <a:lvl6pPr marL="0" lvl="5" indent="0" algn="r">
               <a:spcBef>
                 <a:spcPts val="0"/>
               </a:spcBef>
               <a:buNone/>
               <a:defRPr/>
             </a:lvl6pPr>
-            <a:lvl7pPr indent="0" lvl="6" marL="0" algn="r">
+            <a:lvl7pPr marL="0" lvl="6" indent="0" algn="r">
               <a:spcBef>
                 <a:spcPts val="0"/>
               </a:spcBef>
               <a:buNone/>
               <a:defRPr/>
             </a:lvl7pPr>
-            <a:lvl8pPr indent="0" lvl="7" marL="0" algn="r">
+            <a:lvl8pPr marL="0" lvl="7" indent="0" algn="r">
               <a:spcBef>
                 <a:spcPts val="0"/>
               </a:spcBef>
               <a:buNone/>
               <a:defRPr/>
             </a:lvl8pPr>
-            <a:lvl9pPr indent="0" lvl="8" marL="0" algn="r">
+            <a:lvl9pPr marL="0" lvl="8" indent="0" algn="r">
               <a:spcBef>
                 <a:spcPts val="0"/>
               </a:spcBef>
@@ -5177,7 +5318,7 @@
             </a:lvl9pPr>
           </a:lstStyle>
           <a:p>
-            <a:pPr indent="0" lvl="0" marL="0" rtl="0" algn="r">
+            <a:pPr marL="0" lvl="0" indent="0" algn="r" rtl="0">
               <a:spcBef>
                 <a:spcPts val="0"/>
               </a:spcBef>
@@ -5203,11 +5344,11 @@
 </file>
 
 <file path=ppt/slideLayouts/slideLayout3.xml><?xml version="1.0" encoding="utf-8"?>
-<p:sldLayout xmlns:a="http://schemas.openxmlformats.org/drawingml/2006/main" xmlns:r="http://schemas.openxmlformats.org/officeDocument/2006/relationships" xmlns:mc="http://schemas.openxmlformats.org/markup-compatibility/2006" xmlns:mv="urn:schemas-microsoft-com:mac:vml" xmlns:p="http://schemas.openxmlformats.org/presentationml/2006/main" xmlns:c="http://schemas.openxmlformats.org/drawingml/2006/chart" xmlns:dgm="http://schemas.openxmlformats.org/drawingml/2006/diagram" xmlns:o="urn:schemas-microsoft-com:office:office" xmlns:v="urn:schemas-microsoft-com:vml" xmlns:pvml="urn:schemas-microsoft-com:office:powerpoint" xmlns:com="http://schemas.openxmlformats.org/drawingml/2006/compatibility" xmlns:p14="http://schemas.microsoft.com/office/powerpoint/2010/main" xmlns:p15="http://schemas.microsoft.com/office/powerpoint/2012/main" xmlns:ahyp="http://schemas.microsoft.com/office/drawing/2018/hyperlinkcolor" matchingName="Section Header" type="secHead">
+<p:sldLayout xmlns:a="http://schemas.openxmlformats.org/drawingml/2006/main" xmlns:r="http://schemas.openxmlformats.org/officeDocument/2006/relationships" xmlns:p="http://schemas.openxmlformats.org/presentationml/2006/main" matchingName="Section Header" type="secHead">
   <p:cSld name="SECTION_HEADER">
     <p:spTree>
       <p:nvGrpSpPr>
-        <p:cNvPr id="27" name="Shape 27"/>
+        <p:cNvPr id="1" name="Shape 27"/>
         <p:cNvGrpSpPr/>
         <p:nvPr/>
       </p:nvGrpSpPr>
@@ -5222,7 +5363,9 @@
       <p:sp>
         <p:nvSpPr>
           <p:cNvPr id="28" name="Google Shape;28;p7"/>
-          <p:cNvSpPr txBox="1"/>
+          <p:cNvSpPr txBox="1">
+            <a:spLocks noGrp="1"/>
+          </p:cNvSpPr>
           <p:nvPr>
             <p:ph type="title"/>
           </p:nvPr>
@@ -5241,7 +5384,7 @@
           </a:ln>
         </p:spPr>
         <p:txBody>
-          <a:bodyPr anchorCtr="0" anchor="b" bIns="45700" lIns="91425" spcFirstLastPara="1" rIns="91425" wrap="square" tIns="45700">
+          <a:bodyPr spcFirstLastPara="1" wrap="square" lIns="91425" tIns="45700" rIns="91425" bIns="45700" anchor="b" anchorCtr="0">
             <a:normAutofit/>
           </a:bodyPr>
           <a:lstStyle>
@@ -5352,15 +5495,19 @@
               <a:defRPr/>
             </a:lvl9pPr>
           </a:lstStyle>
-          <a:p/>
+          <a:p>
+            <a:endParaRPr/>
+          </a:p>
         </p:txBody>
       </p:sp>
       <p:sp>
         <p:nvSpPr>
           <p:cNvPr id="29" name="Google Shape;29;p7"/>
-          <p:cNvSpPr txBox="1"/>
+          <p:cNvSpPr txBox="1">
+            <a:spLocks noGrp="1"/>
+          </p:cNvSpPr>
           <p:nvPr>
-            <p:ph idx="1" type="body"/>
+            <p:ph type="body" idx="1"/>
           </p:nvPr>
         </p:nvSpPr>
         <p:spPr>
@@ -5377,11 +5524,11 @@
           </a:ln>
         </p:spPr>
         <p:txBody>
-          <a:bodyPr anchorCtr="0" anchor="t" bIns="45700" lIns="91425" spcFirstLastPara="1" rIns="91425" wrap="square" tIns="45700">
+          <a:bodyPr spcFirstLastPara="1" wrap="square" lIns="91425" tIns="45700" rIns="91425" bIns="45700" anchor="t" anchorCtr="0">
             <a:normAutofit/>
           </a:bodyPr>
           <a:lstStyle>
-            <a:lvl1pPr indent="-228600" lvl="0" marL="457200" algn="l">
+            <a:lvl1pPr marL="457200" lvl="0" indent="-228600" algn="l">
               <a:lnSpc>
                 <a:spcPct val="90000"/>
               </a:lnSpc>
@@ -5402,7 +5549,7 @@
                 </a:solidFill>
               </a:defRPr>
             </a:lvl1pPr>
-            <a:lvl2pPr indent="-228600" lvl="1" marL="914400" algn="l">
+            <a:lvl2pPr marL="914400" lvl="1" indent="-228600" algn="l">
               <a:lnSpc>
                 <a:spcPct val="90000"/>
               </a:lnSpc>
@@ -5423,7 +5570,7 @@
                 </a:solidFill>
               </a:defRPr>
             </a:lvl2pPr>
-            <a:lvl3pPr indent="-228600" lvl="2" marL="1371600" algn="l">
+            <a:lvl3pPr marL="1371600" lvl="2" indent="-228600" algn="l">
               <a:lnSpc>
                 <a:spcPct val="90000"/>
               </a:lnSpc>
@@ -5444,7 +5591,7 @@
                 </a:solidFill>
               </a:defRPr>
             </a:lvl3pPr>
-            <a:lvl4pPr indent="-228600" lvl="3" marL="1828800" algn="l">
+            <a:lvl4pPr marL="1828800" lvl="3" indent="-228600" algn="l">
               <a:lnSpc>
                 <a:spcPct val="90000"/>
               </a:lnSpc>
@@ -5465,7 +5612,7 @@
                 </a:solidFill>
               </a:defRPr>
             </a:lvl4pPr>
-            <a:lvl5pPr indent="-228600" lvl="4" marL="2286000" algn="l">
+            <a:lvl5pPr marL="2286000" lvl="4" indent="-228600" algn="l">
               <a:lnSpc>
                 <a:spcPct val="90000"/>
               </a:lnSpc>
@@ -5486,7 +5633,7 @@
                 </a:solidFill>
               </a:defRPr>
             </a:lvl5pPr>
-            <a:lvl6pPr indent="-228600" lvl="5" marL="2743200" algn="l">
+            <a:lvl6pPr marL="2743200" lvl="5" indent="-228600" algn="l">
               <a:lnSpc>
                 <a:spcPct val="90000"/>
               </a:lnSpc>
@@ -5507,7 +5654,7 @@
                 </a:solidFill>
               </a:defRPr>
             </a:lvl6pPr>
-            <a:lvl7pPr indent="-228600" lvl="6" marL="3200400" algn="l">
+            <a:lvl7pPr marL="3200400" lvl="6" indent="-228600" algn="l">
               <a:lnSpc>
                 <a:spcPct val="90000"/>
               </a:lnSpc>
@@ -5528,7 +5675,7 @@
                 </a:solidFill>
               </a:defRPr>
             </a:lvl7pPr>
-            <a:lvl8pPr indent="-228600" lvl="7" marL="3657600" algn="l">
+            <a:lvl8pPr marL="3657600" lvl="7" indent="-228600" algn="l">
               <a:lnSpc>
                 <a:spcPct val="90000"/>
               </a:lnSpc>
@@ -5549,7 +5696,7 @@
                 </a:solidFill>
               </a:defRPr>
             </a:lvl8pPr>
-            <a:lvl9pPr indent="-228600" lvl="8" marL="4114800" algn="l">
+            <a:lvl9pPr marL="4114800" lvl="8" indent="-228600" algn="l">
               <a:lnSpc>
                 <a:spcPct val="90000"/>
               </a:lnSpc>
@@ -5571,15 +5718,19 @@
               </a:defRPr>
             </a:lvl9pPr>
           </a:lstStyle>
-          <a:p/>
+          <a:p>
+            <a:endParaRPr/>
+          </a:p>
         </p:txBody>
       </p:sp>
       <p:sp>
         <p:nvSpPr>
           <p:cNvPr id="30" name="Google Shape;30;p7"/>
-          <p:cNvSpPr txBox="1"/>
+          <p:cNvSpPr txBox="1">
+            <a:spLocks noGrp="1"/>
+          </p:cNvSpPr>
           <p:nvPr>
-            <p:ph idx="10" type="dt"/>
+            <p:ph type="dt" idx="10"/>
           </p:nvPr>
         </p:nvSpPr>
         <p:spPr>
@@ -5596,7 +5747,7 @@
           </a:ln>
         </p:spPr>
         <p:txBody>
-          <a:bodyPr anchorCtr="0" anchor="ctr" bIns="45700" lIns="91425" spcFirstLastPara="1" rIns="91425" wrap="square" tIns="45700">
+          <a:bodyPr spcFirstLastPara="1" wrap="square" lIns="91425" tIns="45700" rIns="91425" bIns="45700" anchor="ctr" anchorCtr="0">
             <a:noAutofit/>
           </a:bodyPr>
           <a:lstStyle>
@@ -5700,15 +5851,19 @@
               <a:defRPr/>
             </a:lvl9pPr>
           </a:lstStyle>
-          <a:p/>
+          <a:p>
+            <a:endParaRPr/>
+          </a:p>
         </p:txBody>
       </p:sp>
       <p:sp>
         <p:nvSpPr>
           <p:cNvPr id="31" name="Google Shape;31;p7"/>
-          <p:cNvSpPr txBox="1"/>
+          <p:cNvSpPr txBox="1">
+            <a:spLocks noGrp="1"/>
+          </p:cNvSpPr>
           <p:nvPr>
-            <p:ph idx="11" type="ftr"/>
+            <p:ph type="ftr" idx="11"/>
           </p:nvPr>
         </p:nvSpPr>
         <p:spPr>
@@ -5725,7 +5880,7 @@
           </a:ln>
         </p:spPr>
         <p:txBody>
-          <a:bodyPr anchorCtr="0" anchor="ctr" bIns="45700" lIns="91425" spcFirstLastPara="1" rIns="91425" wrap="square" tIns="45700">
+          <a:bodyPr spcFirstLastPara="1" wrap="square" lIns="91425" tIns="45700" rIns="91425" bIns="45700" anchor="ctr" anchorCtr="0">
             <a:noAutofit/>
           </a:bodyPr>
           <a:lstStyle>
@@ -5829,15 +5984,19 @@
               <a:defRPr/>
             </a:lvl9pPr>
           </a:lstStyle>
-          <a:p/>
+          <a:p>
+            <a:endParaRPr/>
+          </a:p>
         </p:txBody>
       </p:sp>
       <p:sp>
         <p:nvSpPr>
           <p:cNvPr id="32" name="Google Shape;32;p7"/>
-          <p:cNvSpPr txBox="1"/>
+          <p:cNvSpPr txBox="1">
+            <a:spLocks noGrp="1"/>
+          </p:cNvSpPr>
           <p:nvPr>
-            <p:ph idx="12" type="sldNum"/>
+            <p:ph type="sldNum" idx="12"/>
           </p:nvPr>
         </p:nvSpPr>
         <p:spPr>
@@ -5854,67 +6013,67 @@
           </a:ln>
         </p:spPr>
         <p:txBody>
-          <a:bodyPr anchorCtr="0" anchor="ctr" bIns="45700" lIns="91425" spcFirstLastPara="1" rIns="91425" wrap="square" tIns="45700">
+          <a:bodyPr spcFirstLastPara="1" wrap="square" lIns="91425" tIns="45700" rIns="91425" bIns="45700" anchor="ctr" anchorCtr="0">
             <a:noAutofit/>
           </a:bodyPr>
           <a:lstStyle>
-            <a:lvl1pPr indent="0" lvl="0" marL="0" algn="r">
+            <a:lvl1pPr marL="0" lvl="0" indent="0" algn="r">
               <a:spcBef>
                 <a:spcPts val="0"/>
               </a:spcBef>
               <a:buNone/>
               <a:defRPr/>
             </a:lvl1pPr>
-            <a:lvl2pPr indent="0" lvl="1" marL="0" algn="r">
+            <a:lvl2pPr marL="0" lvl="1" indent="0" algn="r">
               <a:spcBef>
                 <a:spcPts val="0"/>
               </a:spcBef>
               <a:buNone/>
               <a:defRPr/>
             </a:lvl2pPr>
-            <a:lvl3pPr indent="0" lvl="2" marL="0" algn="r">
+            <a:lvl3pPr marL="0" lvl="2" indent="0" algn="r">
               <a:spcBef>
                 <a:spcPts val="0"/>
               </a:spcBef>
               <a:buNone/>
               <a:defRPr/>
             </a:lvl3pPr>
-            <a:lvl4pPr indent="0" lvl="3" marL="0" algn="r">
+            <a:lvl4pPr marL="0" lvl="3" indent="0" algn="r">
               <a:spcBef>
                 <a:spcPts val="0"/>
               </a:spcBef>
               <a:buNone/>
               <a:defRPr/>
             </a:lvl4pPr>
-            <a:lvl5pPr indent="0" lvl="4" marL="0" algn="r">
+            <a:lvl5pPr marL="0" lvl="4" indent="0" algn="r">
               <a:spcBef>
                 <a:spcPts val="0"/>
               </a:spcBef>
               <a:buNone/>
               <a:defRPr/>
             </a:lvl5pPr>
-            <a:lvl6pPr indent="0" lvl="5" marL="0" algn="r">
+            <a:lvl6pPr marL="0" lvl="5" indent="0" algn="r">
               <a:spcBef>
                 <a:spcPts val="0"/>
               </a:spcBef>
               <a:buNone/>
               <a:defRPr/>
             </a:lvl6pPr>
-            <a:lvl7pPr indent="0" lvl="6" marL="0" algn="r">
+            <a:lvl7pPr marL="0" lvl="6" indent="0" algn="r">
               <a:spcBef>
                 <a:spcPts val="0"/>
               </a:spcBef>
               <a:buNone/>
               <a:defRPr/>
             </a:lvl7pPr>
-            <a:lvl8pPr indent="0" lvl="7" marL="0" algn="r">
+            <a:lvl8pPr marL="0" lvl="7" indent="0" algn="r">
               <a:spcBef>
                 <a:spcPts val="0"/>
               </a:spcBef>
               <a:buNone/>
               <a:defRPr/>
             </a:lvl8pPr>
-            <a:lvl9pPr indent="0" lvl="8" marL="0" algn="r">
+            <a:lvl9pPr marL="0" lvl="8" indent="0" algn="r">
               <a:spcBef>
                 <a:spcPts val="0"/>
               </a:spcBef>
@@ -5923,7 +6082,7 @@
             </a:lvl9pPr>
           </a:lstStyle>
           <a:p>
-            <a:pPr indent="0" lvl="0" marL="0" rtl="0" algn="r">
+            <a:pPr marL="0" lvl="0" indent="0" algn="r" rtl="0">
               <a:spcBef>
                 <a:spcPts val="0"/>
               </a:spcBef>
@@ -5949,11 +6108,11 @@
 </file>
 
 <file path=ppt/slideLayouts/slideLayout4.xml><?xml version="1.0" encoding="utf-8"?>
-<p:sldLayout xmlns:a="http://schemas.openxmlformats.org/drawingml/2006/main" xmlns:r="http://schemas.openxmlformats.org/officeDocument/2006/relationships" xmlns:mc="http://schemas.openxmlformats.org/markup-compatibility/2006" xmlns:mv="urn:schemas-microsoft-com:mac:vml" xmlns:p="http://schemas.openxmlformats.org/presentationml/2006/main" xmlns:c="http://schemas.openxmlformats.org/drawingml/2006/chart" xmlns:dgm="http://schemas.openxmlformats.org/drawingml/2006/diagram" xmlns:o="urn:schemas-microsoft-com:office:office" xmlns:v="urn:schemas-microsoft-com:vml" xmlns:pvml="urn:schemas-microsoft-com:office:powerpoint" xmlns:com="http://schemas.openxmlformats.org/drawingml/2006/compatibility" xmlns:p14="http://schemas.microsoft.com/office/powerpoint/2010/main" xmlns:p15="http://schemas.microsoft.com/office/powerpoint/2012/main" xmlns:ahyp="http://schemas.microsoft.com/office/drawing/2018/hyperlinkcolor" matchingName="Two Content" type="twoObj">
+<p:sldLayout xmlns:a="http://schemas.openxmlformats.org/drawingml/2006/main" xmlns:r="http://schemas.openxmlformats.org/officeDocument/2006/relationships" xmlns:p="http://schemas.openxmlformats.org/presentationml/2006/main" matchingName="Two Content" type="twoObj">
   <p:cSld name="TWO_OBJECTS">
     <p:spTree>
       <p:nvGrpSpPr>
-        <p:cNvPr id="33" name="Shape 33"/>
+        <p:cNvPr id="1" name="Shape 33"/>
         <p:cNvGrpSpPr/>
         <p:nvPr/>
       </p:nvGrpSpPr>
@@ -5968,7 +6127,9 @@
       <p:sp>
         <p:nvSpPr>
           <p:cNvPr id="34" name="Google Shape;34;p8"/>
-          <p:cNvSpPr txBox="1"/>
+          <p:cNvSpPr txBox="1">
+            <a:spLocks noGrp="1"/>
+          </p:cNvSpPr>
           <p:nvPr>
             <p:ph type="title"/>
           </p:nvPr>
@@ -5987,7 +6148,7 @@
           </a:ln>
         </p:spPr>
         <p:txBody>
-          <a:bodyPr anchorCtr="0" anchor="ctr" bIns="45700" lIns="91425" spcFirstLastPara="1" rIns="91425" wrap="square" tIns="45700">
+          <a:bodyPr spcFirstLastPara="1" wrap="square" lIns="91425" tIns="45700" rIns="91425" bIns="45700" anchor="ctr" anchorCtr="0">
             <a:normAutofit/>
           </a:bodyPr>
           <a:lstStyle>
@@ -6097,15 +6258,19 @@
               <a:defRPr/>
             </a:lvl9pPr>
           </a:lstStyle>
-          <a:p/>
+          <a:p>
+            <a:endParaRPr/>
+          </a:p>
         </p:txBody>
       </p:sp>
       <p:sp>
         <p:nvSpPr>
           <p:cNvPr id="35" name="Google Shape;35;p8"/>
-          <p:cNvSpPr txBox="1"/>
+          <p:cNvSpPr txBox="1">
+            <a:spLocks noGrp="1"/>
+          </p:cNvSpPr>
           <p:nvPr>
-            <p:ph idx="1" type="body"/>
+            <p:ph type="body" idx="1"/>
           </p:nvPr>
         </p:nvSpPr>
         <p:spPr>
@@ -6122,11 +6287,11 @@
           </a:ln>
         </p:spPr>
         <p:txBody>
-          <a:bodyPr anchorCtr="0" anchor="t" bIns="45700" lIns="91425" spcFirstLastPara="1" rIns="91425" wrap="square" tIns="45700">
+          <a:bodyPr spcFirstLastPara="1" wrap="square" lIns="91425" tIns="45700" rIns="91425" bIns="45700" anchor="t" anchorCtr="0">
             <a:normAutofit/>
           </a:bodyPr>
           <a:lstStyle>
-            <a:lvl1pPr indent="-342900" lvl="0" marL="457200" algn="l">
+            <a:lvl1pPr marL="457200" lvl="0" indent="-342900" algn="l">
               <a:lnSpc>
                 <a:spcPct val="90000"/>
               </a:lnSpc>
@@ -6143,7 +6308,7 @@
               <a:buChar char="•"/>
               <a:defRPr/>
             </a:lvl1pPr>
-            <a:lvl2pPr indent="-342900" lvl="1" marL="914400" algn="l">
+            <a:lvl2pPr marL="914400" lvl="1" indent="-342900" algn="l">
               <a:lnSpc>
                 <a:spcPct val="90000"/>
               </a:lnSpc>
@@ -6160,7 +6325,7 @@
               <a:buChar char="•"/>
               <a:defRPr/>
             </a:lvl2pPr>
-            <a:lvl3pPr indent="-342900" lvl="2" marL="1371600" algn="l">
+            <a:lvl3pPr marL="1371600" lvl="2" indent="-342900" algn="l">
               <a:lnSpc>
                 <a:spcPct val="90000"/>
               </a:lnSpc>
@@ -6177,7 +6342,7 @@
               <a:buChar char="•"/>
               <a:defRPr/>
             </a:lvl3pPr>
-            <a:lvl4pPr indent="-342900" lvl="3" marL="1828800" algn="l">
+            <a:lvl4pPr marL="1828800" lvl="3" indent="-342900" algn="l">
               <a:lnSpc>
                 <a:spcPct val="90000"/>
               </a:lnSpc>
@@ -6194,7 +6359,7 @@
               <a:buChar char="•"/>
               <a:defRPr/>
             </a:lvl4pPr>
-            <a:lvl5pPr indent="-342900" lvl="4" marL="2286000" algn="l">
+            <a:lvl5pPr marL="2286000" lvl="4" indent="-342900" algn="l">
               <a:lnSpc>
                 <a:spcPct val="90000"/>
               </a:lnSpc>
@@ -6211,7 +6376,7 @@
               <a:buChar char="•"/>
               <a:defRPr/>
             </a:lvl5pPr>
-            <a:lvl6pPr indent="-342900" lvl="5" marL="2743200" algn="l">
+            <a:lvl6pPr marL="2743200" lvl="5" indent="-342900" algn="l">
               <a:lnSpc>
                 <a:spcPct val="90000"/>
               </a:lnSpc>
@@ -6228,7 +6393,7 @@
               <a:buChar char="•"/>
               <a:defRPr/>
             </a:lvl6pPr>
-            <a:lvl7pPr indent="-342900" lvl="6" marL="3200400" algn="l">
+            <a:lvl7pPr marL="3200400" lvl="6" indent="-342900" algn="l">
               <a:lnSpc>
                 <a:spcPct val="90000"/>
               </a:lnSpc>
@@ -6245,7 +6410,7 @@
               <a:buChar char="•"/>
               <a:defRPr/>
             </a:lvl7pPr>
-            <a:lvl8pPr indent="-342900" lvl="7" marL="3657600" algn="l">
+            <a:lvl8pPr marL="3657600" lvl="7" indent="-342900" algn="l">
               <a:lnSpc>
                 <a:spcPct val="90000"/>
               </a:lnSpc>
@@ -6262,7 +6427,7 @@
               <a:buChar char="•"/>
               <a:defRPr/>
             </a:lvl8pPr>
-            <a:lvl9pPr indent="-342900" lvl="8" marL="4114800" algn="l">
+            <a:lvl9pPr marL="4114800" lvl="8" indent="-342900" algn="l">
               <a:lnSpc>
                 <a:spcPct val="90000"/>
               </a:lnSpc>
@@ -6280,15 +6445,19 @@
               <a:defRPr/>
             </a:lvl9pPr>
           </a:lstStyle>
-          <a:p/>
+          <a:p>
+            <a:endParaRPr/>
+          </a:p>
         </p:txBody>
       </p:sp>
       <p:sp>
         <p:nvSpPr>
           <p:cNvPr id="36" name="Google Shape;36;p8"/>
-          <p:cNvSpPr txBox="1"/>
+          <p:cNvSpPr txBox="1">
+            <a:spLocks noGrp="1"/>
+          </p:cNvSpPr>
           <p:nvPr>
-            <p:ph idx="2" type="body"/>
+            <p:ph type="body" idx="2"/>
           </p:nvPr>
         </p:nvSpPr>
         <p:spPr>
@@ -6305,11 +6474,11 @@
           </a:ln>
         </p:spPr>
         <p:txBody>
-          <a:bodyPr anchorCtr="0" anchor="t" bIns="45700" lIns="91425" spcFirstLastPara="1" rIns="91425" wrap="square" tIns="45700">
+          <a:bodyPr spcFirstLastPara="1" wrap="square" lIns="91425" tIns="45700" rIns="91425" bIns="45700" anchor="t" anchorCtr="0">
             <a:normAutofit/>
           </a:bodyPr>
           <a:lstStyle>
-            <a:lvl1pPr indent="-342900" lvl="0" marL="457200" algn="l">
+            <a:lvl1pPr marL="457200" lvl="0" indent="-342900" algn="l">
               <a:lnSpc>
                 <a:spcPct val="90000"/>
               </a:lnSpc>
@@ -6326,7 +6495,7 @@
               <a:buChar char="•"/>
               <a:defRPr/>
             </a:lvl1pPr>
-            <a:lvl2pPr indent="-342900" lvl="1" marL="914400" algn="l">
+            <a:lvl2pPr marL="914400" lvl="1" indent="-342900" algn="l">
               <a:lnSpc>
                 <a:spcPct val="90000"/>
               </a:lnSpc>
@@ -6343,7 +6512,7 @@
               <a:buChar char="•"/>
               <a:defRPr/>
             </a:lvl2pPr>
-            <a:lvl3pPr indent="-342900" lvl="2" marL="1371600" algn="l">
+            <a:lvl3pPr marL="1371600" lvl="2" indent="-342900" algn="l">
               <a:lnSpc>
                 <a:spcPct val="90000"/>
               </a:lnSpc>
@@ -6360,7 +6529,7 @@
               <a:buChar char="•"/>
               <a:defRPr/>
             </a:lvl3pPr>
-            <a:lvl4pPr indent="-342900" lvl="3" marL="1828800" algn="l">
+            <a:lvl4pPr marL="1828800" lvl="3" indent="-342900" algn="l">
               <a:lnSpc>
                 <a:spcPct val="90000"/>
               </a:lnSpc>
@@ -6377,7 +6546,7 @@
               <a:buChar char="•"/>
               <a:defRPr/>
             </a:lvl4pPr>
-            <a:lvl5pPr indent="-342900" lvl="4" marL="2286000" algn="l">
+            <a:lvl5pPr marL="2286000" lvl="4" indent="-342900" algn="l">
               <a:lnSpc>
                 <a:spcPct val="90000"/>
               </a:lnSpc>
@@ -6394,7 +6563,7 @@
               <a:buChar char="•"/>
               <a:defRPr/>
             </a:lvl5pPr>
-            <a:lvl6pPr indent="-342900" lvl="5" marL="2743200" algn="l">
+            <a:lvl6pPr marL="2743200" lvl="5" indent="-342900" algn="l">
               <a:lnSpc>
                 <a:spcPct val="90000"/>
               </a:lnSpc>
@@ -6411,7 +6580,7 @@
               <a:buChar char="•"/>
               <a:defRPr/>
             </a:lvl6pPr>
-            <a:lvl7pPr indent="-342900" lvl="6" marL="3200400" algn="l">
+            <a:lvl7pPr marL="3200400" lvl="6" indent="-342900" algn="l">
               <a:lnSpc>
                 <a:spcPct val="90000"/>
               </a:lnSpc>
@@ -6428,7 +6597,7 @@
               <a:buChar char="•"/>
               <a:defRPr/>
             </a:lvl7pPr>
-            <a:lvl8pPr indent="-342900" lvl="7" marL="3657600" algn="l">
+            <a:lvl8pPr marL="3657600" lvl="7" indent="-342900" algn="l">
               <a:lnSpc>
                 <a:spcPct val="90000"/>
               </a:lnSpc>
@@ -6445,7 +6614,7 @@
               <a:buChar char="•"/>
               <a:defRPr/>
             </a:lvl8pPr>
-            <a:lvl9pPr indent="-342900" lvl="8" marL="4114800" algn="l">
+            <a:lvl9pPr marL="4114800" lvl="8" indent="-342900" algn="l">
               <a:lnSpc>
                 <a:spcPct val="90000"/>
               </a:lnSpc>
@@ -6463,15 +6632,19 @@
               <a:defRPr/>
             </a:lvl9pPr>
           </a:lstStyle>
-          <a:p/>
+          <a:p>
+            <a:endParaRPr/>
+          </a:p>
         </p:txBody>
       </p:sp>
       <p:sp>
         <p:nvSpPr>
           <p:cNvPr id="37" name="Google Shape;37;p8"/>
-          <p:cNvSpPr txBox="1"/>
+          <p:cNvSpPr txBox="1">
+            <a:spLocks noGrp="1"/>
+          </p:cNvSpPr>
           <p:nvPr>
-            <p:ph idx="10" type="dt"/>
+            <p:ph type="dt" idx="10"/>
           </p:nvPr>
         </p:nvSpPr>
         <p:spPr>
@@ -6488,7 +6661,7 @@
           </a:ln>
         </p:spPr>
         <p:txBody>
-          <a:bodyPr anchorCtr="0" anchor="ctr" bIns="45700" lIns="91425" spcFirstLastPara="1" rIns="91425" wrap="square" tIns="45700">
+          <a:bodyPr spcFirstLastPara="1" wrap="square" lIns="91425" tIns="45700" rIns="91425" bIns="45700" anchor="ctr" anchorCtr="0">
             <a:noAutofit/>
           </a:bodyPr>
           <a:lstStyle>
@@ -6592,15 +6765,19 @@
               <a:defRPr/>
             </a:lvl9pPr>
           </a:lstStyle>
-          <a:p/>
+          <a:p>
+            <a:endParaRPr/>
+          </a:p>
         </p:txBody>
       </p:sp>
       <p:sp>
         <p:nvSpPr>
           <p:cNvPr id="38" name="Google Shape;38;p8"/>
-          <p:cNvSpPr txBox="1"/>
+          <p:cNvSpPr txBox="1">
+            <a:spLocks noGrp="1"/>
+          </p:cNvSpPr>
           <p:nvPr>
-            <p:ph idx="11" type="ftr"/>
+            <p:ph type="ftr" idx="11"/>
           </p:nvPr>
         </p:nvSpPr>
         <p:spPr>
@@ -6617,7 +6794,7 @@
           </a:ln>
         </p:spPr>
         <p:txBody>
-          <a:bodyPr anchorCtr="0" anchor="ctr" bIns="45700" lIns="91425" spcFirstLastPara="1" rIns="91425" wrap="square" tIns="45700">
+          <a:bodyPr spcFirstLastPara="1" wrap="square" lIns="91425" tIns="45700" rIns="91425" bIns="45700" anchor="ctr" anchorCtr="0">
             <a:noAutofit/>
           </a:bodyPr>
           <a:lstStyle>
@@ -6721,15 +6898,19 @@
               <a:defRPr/>
             </a:lvl9pPr>
           </a:lstStyle>
-          <a:p/>
+          <a:p>
+            <a:endParaRPr/>
+          </a:p>
         </p:txBody>
       </p:sp>
       <p:sp>
         <p:nvSpPr>
           <p:cNvPr id="39" name="Google Shape;39;p8"/>
-          <p:cNvSpPr txBox="1"/>
+          <p:cNvSpPr txBox="1">
+            <a:spLocks noGrp="1"/>
+          </p:cNvSpPr>
           <p:nvPr>
-            <p:ph idx="12" type="sldNum"/>
+            <p:ph type="sldNum" idx="12"/>
           </p:nvPr>
         </p:nvSpPr>
         <p:spPr>
@@ -6746,67 +6927,67 @@
           </a:ln>
         </p:spPr>
         <p:txBody>
-          <a:bodyPr anchorCtr="0" anchor="ctr" bIns="45700" lIns="91425" spcFirstLastPara="1" rIns="91425" wrap="square" tIns="45700">
+          <a:bodyPr spcFirstLastPara="1" wrap="square" lIns="91425" tIns="45700" rIns="91425" bIns="45700" anchor="ctr" anchorCtr="0">
             <a:noAutofit/>
           </a:bodyPr>
           <a:lstStyle>
-            <a:lvl1pPr indent="0" lvl="0" marL="0" algn="r">
+            <a:lvl1pPr marL="0" lvl="0" indent="0" algn="r">
               <a:spcBef>
                 <a:spcPts val="0"/>
               </a:spcBef>
               <a:buNone/>
               <a:defRPr/>
             </a:lvl1pPr>
-            <a:lvl2pPr indent="0" lvl="1" marL="0" algn="r">
+            <a:lvl2pPr marL="0" lvl="1" indent="0" algn="r">
               <a:spcBef>
                 <a:spcPts val="0"/>
               </a:spcBef>
               <a:buNone/>
               <a:defRPr/>
             </a:lvl2pPr>
-            <a:lvl3pPr indent="0" lvl="2" marL="0" algn="r">
+            <a:lvl3pPr marL="0" lvl="2" indent="0" algn="r">
               <a:spcBef>
                 <a:spcPts val="0"/>
               </a:spcBef>
               <a:buNone/>
               <a:defRPr/>
             </a:lvl3pPr>
-            <a:lvl4pPr indent="0" lvl="3" marL="0" algn="r">
+            <a:lvl4pPr marL="0" lvl="3" indent="0" algn="r">
               <a:spcBef>
                 <a:spcPts val="0"/>
               </a:spcBef>
               <a:buNone/>
               <a:defRPr/>
             </a:lvl4pPr>
-            <a:lvl5pPr indent="0" lvl="4" marL="0" algn="r">
+            <a:lvl5pPr marL="0" lvl="4" indent="0" algn="r">
               <a:spcBef>
                 <a:spcPts val="0"/>
               </a:spcBef>
               <a:buNone/>
               <a:defRPr/>
             </a:lvl5pPr>
-            <a:lvl6pPr indent="0" lvl="5" marL="0" algn="r">
+            <a:lvl6pPr marL="0" lvl="5" indent="0" algn="r">
               <a:spcBef>
                 <a:spcPts val="0"/>
               </a:spcBef>
               <a:buNone/>
               <a:defRPr/>
             </a:lvl6pPr>
-            <a:lvl7pPr indent="0" lvl="6" marL="0" algn="r">
+            <a:lvl7pPr marL="0" lvl="6" indent="0" algn="r">
               <a:spcBef>
                 <a:spcPts val="0"/>
               </a:spcBef>
               <a:buNone/>
               <a:defRPr/>
             </a:lvl7pPr>
-            <a:lvl8pPr indent="0" lvl="7" marL="0" algn="r">
+            <a:lvl8pPr marL="0" lvl="7" indent="0" algn="r">
               <a:spcBef>
                 <a:spcPts val="0"/>
               </a:spcBef>
               <a:buNone/>
               <a:defRPr/>
             </a:lvl8pPr>
-            <a:lvl9pPr indent="0" lvl="8" marL="0" algn="r">
+            <a:lvl9pPr marL="0" lvl="8" indent="0" algn="r">
               <a:spcBef>
                 <a:spcPts val="0"/>
               </a:spcBef>
@@ -6815,7 +6996,7 @@
             </a:lvl9pPr>
           </a:lstStyle>
           <a:p>
-            <a:pPr indent="0" lvl="0" marL="0" rtl="0" algn="r">
+            <a:pPr marL="0" lvl="0" indent="0" algn="r" rtl="0">
               <a:spcBef>
                 <a:spcPts val="0"/>
               </a:spcBef>
@@ -6841,11 +7022,11 @@
 </file>
 
 <file path=ppt/slideLayouts/slideLayout5.xml><?xml version="1.0" encoding="utf-8"?>
-<p:sldLayout xmlns:a="http://schemas.openxmlformats.org/drawingml/2006/main" xmlns:r="http://schemas.openxmlformats.org/officeDocument/2006/relationships" xmlns:mc="http://schemas.openxmlformats.org/markup-compatibility/2006" xmlns:mv="urn:schemas-microsoft-com:mac:vml" xmlns:p="http://schemas.openxmlformats.org/presentationml/2006/main" xmlns:c="http://schemas.openxmlformats.org/drawingml/2006/chart" xmlns:dgm="http://schemas.openxmlformats.org/drawingml/2006/diagram" xmlns:o="urn:schemas-microsoft-com:office:office" xmlns:v="urn:schemas-microsoft-com:vml" xmlns:pvml="urn:schemas-microsoft-com:office:powerpoint" xmlns:com="http://schemas.openxmlformats.org/drawingml/2006/compatibility" xmlns:p14="http://schemas.microsoft.com/office/powerpoint/2010/main" xmlns:p15="http://schemas.microsoft.com/office/powerpoint/2012/main" xmlns:ahyp="http://schemas.microsoft.com/office/drawing/2018/hyperlinkcolor" matchingName="Comparison" type="twoTxTwoObj">
+<p:sldLayout xmlns:a="http://schemas.openxmlformats.org/drawingml/2006/main" xmlns:r="http://schemas.openxmlformats.org/officeDocument/2006/relationships" xmlns:p="http://schemas.openxmlformats.org/presentationml/2006/main" matchingName="Comparison" type="twoTxTwoObj">
   <p:cSld name="TWO_OBJECTS_WITH_TEXT">
     <p:spTree>
       <p:nvGrpSpPr>
-        <p:cNvPr id="40" name="Shape 40"/>
+        <p:cNvPr id="1" name="Shape 40"/>
         <p:cNvGrpSpPr/>
         <p:nvPr/>
       </p:nvGrpSpPr>
@@ -6860,7 +7041,9 @@
       <p:sp>
         <p:nvSpPr>
           <p:cNvPr id="41" name="Google Shape;41;p9"/>
-          <p:cNvSpPr txBox="1"/>
+          <p:cNvSpPr txBox="1">
+            <a:spLocks noGrp="1"/>
+          </p:cNvSpPr>
           <p:nvPr>
             <p:ph type="title"/>
           </p:nvPr>
@@ -6879,7 +7062,7 @@
           </a:ln>
         </p:spPr>
         <p:txBody>
-          <a:bodyPr anchorCtr="0" anchor="ctr" bIns="45700" lIns="91425" spcFirstLastPara="1" rIns="91425" wrap="square" tIns="45700">
+          <a:bodyPr spcFirstLastPara="1" wrap="square" lIns="91425" tIns="45700" rIns="91425" bIns="45700" anchor="ctr" anchorCtr="0">
             <a:normAutofit/>
           </a:bodyPr>
           <a:lstStyle>
@@ -6989,15 +7172,19 @@
               <a:defRPr/>
             </a:lvl9pPr>
           </a:lstStyle>
-          <a:p/>
+          <a:p>
+            <a:endParaRPr/>
+          </a:p>
         </p:txBody>
       </p:sp>
       <p:sp>
         <p:nvSpPr>
           <p:cNvPr id="42" name="Google Shape;42;p9"/>
-          <p:cNvSpPr txBox="1"/>
+          <p:cNvSpPr txBox="1">
+            <a:spLocks noGrp="1"/>
+          </p:cNvSpPr>
           <p:nvPr>
-            <p:ph idx="1" type="body"/>
+            <p:ph type="body" idx="1"/>
           </p:nvPr>
         </p:nvSpPr>
         <p:spPr>
@@ -7014,11 +7201,11 @@
           </a:ln>
         </p:spPr>
         <p:txBody>
-          <a:bodyPr anchorCtr="0" anchor="b" bIns="45700" lIns="91425" spcFirstLastPara="1" rIns="91425" wrap="square" tIns="45700">
+          <a:bodyPr spcFirstLastPara="1" wrap="square" lIns="91425" tIns="45700" rIns="91425" bIns="45700" anchor="b" anchorCtr="0">
             <a:normAutofit/>
           </a:bodyPr>
           <a:lstStyle>
-            <a:lvl1pPr indent="-228600" lvl="0" marL="457200" algn="l">
+            <a:lvl1pPr marL="457200" lvl="0" indent="-228600" algn="l">
               <a:lnSpc>
                 <a:spcPct val="90000"/>
               </a:lnSpc>
@@ -7033,9 +7220,9 @@
               </a:buClr>
               <a:buSzPts val="2400"/>
               <a:buNone/>
-              <a:defRPr b="1" sz="2400"/>
+              <a:defRPr sz="2400" b="1"/>
             </a:lvl1pPr>
-            <a:lvl2pPr indent="-228600" lvl="1" marL="914400" algn="l">
+            <a:lvl2pPr marL="914400" lvl="1" indent="-228600" algn="l">
               <a:lnSpc>
                 <a:spcPct val="90000"/>
               </a:lnSpc>
@@ -7050,9 +7237,9 @@
               </a:buClr>
               <a:buSzPts val="2000"/>
               <a:buNone/>
-              <a:defRPr b="1" sz="2000"/>
+              <a:defRPr sz="2000" b="1"/>
             </a:lvl2pPr>
-            <a:lvl3pPr indent="-228600" lvl="2" marL="1371600" algn="l">
+            <a:lvl3pPr marL="1371600" lvl="2" indent="-228600" algn="l">
               <a:lnSpc>
                 <a:spcPct val="90000"/>
               </a:lnSpc>
@@ -7067,9 +7254,9 @@
               </a:buClr>
               <a:buSzPts val="1800"/>
               <a:buNone/>
-              <a:defRPr b="1" sz="1800"/>
+              <a:defRPr sz="1800" b="1"/>
             </a:lvl3pPr>
-            <a:lvl4pPr indent="-228600" lvl="3" marL="1828800" algn="l">
+            <a:lvl4pPr marL="1828800" lvl="3" indent="-228600" algn="l">
               <a:lnSpc>
                 <a:spcPct val="90000"/>
               </a:lnSpc>
@@ -7084,9 +7271,9 @@
               </a:buClr>
               <a:buSzPts val="1600"/>
               <a:buNone/>
-              <a:defRPr b="1" sz="1600"/>
+              <a:defRPr sz="1600" b="1"/>
             </a:lvl4pPr>
-            <a:lvl5pPr indent="-228600" lvl="4" marL="2286000" algn="l">
+            <a:lvl5pPr marL="2286000" lvl="4" indent="-228600" algn="l">
               <a:lnSpc>
                 <a:spcPct val="90000"/>
               </a:lnSpc>
@@ -7101,9 +7288,9 @@
               </a:buClr>
               <a:buSzPts val="1600"/>
               <a:buNone/>
-              <a:defRPr b="1" sz="1600"/>
+              <a:defRPr sz="1600" b="1"/>
             </a:lvl5pPr>
-            <a:lvl6pPr indent="-228600" lvl="5" marL="2743200" algn="l">
+            <a:lvl6pPr marL="2743200" lvl="5" indent="-228600" algn="l">
               <a:lnSpc>
                 <a:spcPct val="90000"/>
               </a:lnSpc>
@@ -7118,9 +7305,9 @@
               </a:buClr>
               <a:buSzPts val="1600"/>
               <a:buNone/>
-              <a:defRPr b="1" sz="1600"/>
+              <a:defRPr sz="1600" b="1"/>
             </a:lvl6pPr>
-            <a:lvl7pPr indent="-228600" lvl="6" marL="3200400" algn="l">
+            <a:lvl7pPr marL="3200400" lvl="6" indent="-228600" algn="l">
               <a:lnSpc>
                 <a:spcPct val="90000"/>
               </a:lnSpc>
@@ -7135,9 +7322,9 @@
               </a:buClr>
               <a:buSzPts val="1600"/>
               <a:buNone/>
-              <a:defRPr b="1" sz="1600"/>
+              <a:defRPr sz="1600" b="1"/>
             </a:lvl7pPr>
-            <a:lvl8pPr indent="-228600" lvl="7" marL="3657600" algn="l">
+            <a:lvl8pPr marL="3657600" lvl="7" indent="-228600" algn="l">
               <a:lnSpc>
                 <a:spcPct val="90000"/>
               </a:lnSpc>
@@ -7152,9 +7339,9 @@
               </a:buClr>
               <a:buSzPts val="1600"/>
               <a:buNone/>
-              <a:defRPr b="1" sz="1600"/>
+              <a:defRPr sz="1600" b="1"/>
             </a:lvl8pPr>
-            <a:lvl9pPr indent="-228600" lvl="8" marL="4114800" algn="l">
+            <a:lvl9pPr marL="4114800" lvl="8" indent="-228600" algn="l">
               <a:lnSpc>
                 <a:spcPct val="90000"/>
               </a:lnSpc>
@@ -7169,18 +7356,22 @@
               </a:buClr>
               <a:buSzPts val="1600"/>
               <a:buNone/>
-              <a:defRPr b="1" sz="1600"/>
+              <a:defRPr sz="1600" b="1"/>
             </a:lvl9pPr>
           </a:lstStyle>
-          <a:p/>
+          <a:p>
+            <a:endParaRPr/>
+          </a:p>
         </p:txBody>
       </p:sp>
       <p:sp>
         <p:nvSpPr>
           <p:cNvPr id="43" name="Google Shape;43;p9"/>
-          <p:cNvSpPr txBox="1"/>
+          <p:cNvSpPr txBox="1">
+            <a:spLocks noGrp="1"/>
+          </p:cNvSpPr>
           <p:nvPr>
-            <p:ph idx="2" type="body"/>
+            <p:ph type="body" idx="2"/>
           </p:nvPr>
         </p:nvSpPr>
         <p:spPr>
@@ -7197,11 +7388,11 @@
           </a:ln>
         </p:spPr>
         <p:txBody>
-          <a:bodyPr anchorCtr="0" anchor="t" bIns="45700" lIns="91425" spcFirstLastPara="1" rIns="91425" wrap="square" tIns="45700">
+          <a:bodyPr spcFirstLastPara="1" wrap="square" lIns="91425" tIns="45700" rIns="91425" bIns="45700" anchor="t" anchorCtr="0">
             <a:normAutofit/>
           </a:bodyPr>
           <a:lstStyle>
-            <a:lvl1pPr indent="-342900" lvl="0" marL="457200" algn="l">
+            <a:lvl1pPr marL="457200" lvl="0" indent="-342900" algn="l">
               <a:lnSpc>
                 <a:spcPct val="90000"/>
               </a:lnSpc>
@@ -7218,7 +7409,7 @@
               <a:buChar char="•"/>
               <a:defRPr/>
             </a:lvl1pPr>
-            <a:lvl2pPr indent="-342900" lvl="1" marL="914400" algn="l">
+            <a:lvl2pPr marL="914400" lvl="1" indent="-342900" algn="l">
               <a:lnSpc>
                 <a:spcPct val="90000"/>
               </a:lnSpc>
@@ -7235,7 +7426,7 @@
               <a:buChar char="•"/>
               <a:defRPr/>
             </a:lvl2pPr>
-            <a:lvl3pPr indent="-342900" lvl="2" marL="1371600" algn="l">
+            <a:lvl3pPr marL="1371600" lvl="2" indent="-342900" algn="l">
               <a:lnSpc>
                 <a:spcPct val="90000"/>
               </a:lnSpc>
@@ -7252,7 +7443,7 @@
               <a:buChar char="•"/>
               <a:defRPr/>
             </a:lvl3pPr>
-            <a:lvl4pPr indent="-342900" lvl="3" marL="1828800" algn="l">
+            <a:lvl4pPr marL="1828800" lvl="3" indent="-342900" algn="l">
               <a:lnSpc>
                 <a:spcPct val="90000"/>
               </a:lnSpc>
@@ -7269,7 +7460,7 @@
               <a:buChar char="•"/>
               <a:defRPr/>
             </a:lvl4pPr>
-            <a:lvl5pPr indent="-342900" lvl="4" marL="2286000" algn="l">
+            <a:lvl5pPr marL="2286000" lvl="4" indent="-342900" algn="l">
               <a:lnSpc>
                 <a:spcPct val="90000"/>
               </a:lnSpc>
@@ -7286,7 +7477,7 @@
               <a:buChar char="•"/>
               <a:defRPr/>
             </a:lvl5pPr>
-            <a:lvl6pPr indent="-342900" lvl="5" marL="2743200" algn="l">
+            <a:lvl6pPr marL="2743200" lvl="5" indent="-342900" algn="l">
               <a:lnSpc>
                 <a:spcPct val="90000"/>
               </a:lnSpc>
@@ -7303,7 +7494,7 @@
               <a:buChar char="•"/>
               <a:defRPr/>
             </a:lvl6pPr>
-            <a:lvl7pPr indent="-342900" lvl="6" marL="3200400" algn="l">
+            <a:lvl7pPr marL="3200400" lvl="6" indent="-342900" algn="l">
               <a:lnSpc>
                 <a:spcPct val="90000"/>
               </a:lnSpc>
@@ -7320,7 +7511,7 @@
               <a:buChar char="•"/>
               <a:defRPr/>
             </a:lvl7pPr>
-            <a:lvl8pPr indent="-342900" lvl="7" marL="3657600" algn="l">
+            <a:lvl8pPr marL="3657600" lvl="7" indent="-342900" algn="l">
               <a:lnSpc>
                 <a:spcPct val="90000"/>
               </a:lnSpc>
@@ -7337,7 +7528,7 @@
               <a:buChar char="•"/>
               <a:defRPr/>
             </a:lvl8pPr>
-            <a:lvl9pPr indent="-342900" lvl="8" marL="4114800" algn="l">
+            <a:lvl9pPr marL="4114800" lvl="8" indent="-342900" algn="l">
               <a:lnSpc>
                 <a:spcPct val="90000"/>
               </a:lnSpc>
@@ -7355,15 +7546,19 @@
               <a:defRPr/>
             </a:lvl9pPr>
           </a:lstStyle>
-          <a:p/>
+          <a:p>
+            <a:endParaRPr/>
+          </a:p>
         </p:txBody>
       </p:sp>
       <p:sp>
         <p:nvSpPr>
           <p:cNvPr id="44" name="Google Shape;44;p9"/>
-          <p:cNvSpPr txBox="1"/>
+          <p:cNvSpPr txBox="1">
+            <a:spLocks noGrp="1"/>
+          </p:cNvSpPr>
           <p:nvPr>
-            <p:ph idx="3" type="body"/>
+            <p:ph type="body" idx="3"/>
           </p:nvPr>
         </p:nvSpPr>
         <p:spPr>
@@ -7380,11 +7575,11 @@
           </a:ln>
         </p:spPr>
         <p:txBody>
-          <a:bodyPr anchorCtr="0" anchor="b" bIns="45700" lIns="91425" spcFirstLastPara="1" rIns="91425" wrap="square" tIns="45700">
+          <a:bodyPr spcFirstLastPara="1" wrap="square" lIns="91425" tIns="45700" rIns="91425" bIns="45700" anchor="b" anchorCtr="0">
             <a:normAutofit/>
           </a:bodyPr>
           <a:lstStyle>
-            <a:lvl1pPr indent="-228600" lvl="0" marL="457200" algn="l">
+            <a:lvl1pPr marL="457200" lvl="0" indent="-228600" algn="l">
               <a:lnSpc>
                 <a:spcPct val="90000"/>
               </a:lnSpc>
@@ -7399,9 +7594,9 @@
               </a:buClr>
               <a:buSzPts val="2400"/>
               <a:buNone/>
-              <a:defRPr b="1" sz="2400"/>
+              <a:defRPr sz="2400" b="1"/>
             </a:lvl1pPr>
-            <a:lvl2pPr indent="-228600" lvl="1" marL="914400" algn="l">
+            <a:lvl2pPr marL="914400" lvl="1" indent="-228600" algn="l">
               <a:lnSpc>
                 <a:spcPct val="90000"/>
               </a:lnSpc>
@@ -7416,9 +7611,9 @@
               </a:buClr>
               <a:buSzPts val="2000"/>
               <a:buNone/>
-              <a:defRPr b="1" sz="2000"/>
+              <a:defRPr sz="2000" b="1"/>
             </a:lvl2pPr>
-            <a:lvl3pPr indent="-228600" lvl="2" marL="1371600" algn="l">
+            <a:lvl3pPr marL="1371600" lvl="2" indent="-228600" algn="l">
               <a:lnSpc>
                 <a:spcPct val="90000"/>
               </a:lnSpc>
@@ -7433,9 +7628,9 @@
               </a:buClr>
               <a:buSzPts val="1800"/>
               <a:buNone/>
-              <a:defRPr b="1" sz="1800"/>
+              <a:defRPr sz="1800" b="1"/>
             </a:lvl3pPr>
-            <a:lvl4pPr indent="-228600" lvl="3" marL="1828800" algn="l">
+            <a:lvl4pPr marL="1828800" lvl="3" indent="-228600" algn="l">
               <a:lnSpc>
                 <a:spcPct val="90000"/>
               </a:lnSpc>
@@ -7450,9 +7645,9 @@
               </a:buClr>
               <a:buSzPts val="1600"/>
               <a:buNone/>
-              <a:defRPr b="1" sz="1600"/>
+              <a:defRPr sz="1600" b="1"/>
             </a:lvl4pPr>
-            <a:lvl5pPr indent="-228600" lvl="4" marL="2286000" algn="l">
+            <a:lvl5pPr marL="2286000" lvl="4" indent="-228600" algn="l">
               <a:lnSpc>
                 <a:spcPct val="90000"/>
               </a:lnSpc>
@@ -7467,9 +7662,9 @@
               </a:buClr>
               <a:buSzPts val="1600"/>
               <a:buNone/>
-              <a:defRPr b="1" sz="1600"/>
+              <a:defRPr sz="1600" b="1"/>
             </a:lvl5pPr>
-            <a:lvl6pPr indent="-228600" lvl="5" marL="2743200" algn="l">
+            <a:lvl6pPr marL="2743200" lvl="5" indent="-228600" algn="l">
               <a:lnSpc>
                 <a:spcPct val="90000"/>
               </a:lnSpc>
@@ -7484,9 +7679,9 @@
               </a:buClr>
               <a:buSzPts val="1600"/>
               <a:buNone/>
-              <a:defRPr b="1" sz="1600"/>
+              <a:defRPr sz="1600" b="1"/>
             </a:lvl6pPr>
-            <a:lvl7pPr indent="-228600" lvl="6" marL="3200400" algn="l">
+            <a:lvl7pPr marL="3200400" lvl="6" indent="-228600" algn="l">
               <a:lnSpc>
                 <a:spcPct val="90000"/>
               </a:lnSpc>
@@ -7501,9 +7696,9 @@
               </a:buClr>
               <a:buSzPts val="1600"/>
               <a:buNone/>
-              <a:defRPr b="1" sz="1600"/>
+              <a:defRPr sz="1600" b="1"/>
             </a:lvl7pPr>
-            <a:lvl8pPr indent="-228600" lvl="7" marL="3657600" algn="l">
+            <a:lvl8pPr marL="3657600" lvl="7" indent="-228600" algn="l">
               <a:lnSpc>
                 <a:spcPct val="90000"/>
               </a:lnSpc>
@@ -7518,9 +7713,9 @@
               </a:buClr>
               <a:buSzPts val="1600"/>
               <a:buNone/>
-              <a:defRPr b="1" sz="1600"/>
+              <a:defRPr sz="1600" b="1"/>
             </a:lvl8pPr>
-            <a:lvl9pPr indent="-228600" lvl="8" marL="4114800" algn="l">
+            <a:lvl9pPr marL="4114800" lvl="8" indent="-228600" algn="l">
               <a:lnSpc>
                 <a:spcPct val="90000"/>
               </a:lnSpc>
@@ -7535,18 +7730,22 @@
               </a:buClr>
               <a:buSzPts val="1600"/>
               <a:buNone/>
-              <a:defRPr b="1" sz="1600"/>
+              <a:defRPr sz="1600" b="1"/>
             </a:lvl9pPr>
           </a:lstStyle>
-          <a:p/>
+          <a:p>
+            <a:endParaRPr/>
+          </a:p>
         </p:txBody>
       </p:sp>
       <p:sp>
         <p:nvSpPr>
           <p:cNvPr id="45" name="Google Shape;45;p9"/>
-          <p:cNvSpPr txBox="1"/>
+          <p:cNvSpPr txBox="1">
+            <a:spLocks noGrp="1"/>
+          </p:cNvSpPr>
           <p:nvPr>
-            <p:ph idx="4" type="body"/>
+            <p:ph type="body" idx="4"/>
           </p:nvPr>
         </p:nvSpPr>
         <p:spPr>
@@ -7563,11 +7762,11 @@
           </a:ln>
         </p:spPr>
         <p:txBody>
-          <a:bodyPr anchorCtr="0" anchor="t" bIns="45700" lIns="91425" spcFirstLastPara="1" rIns="91425" wrap="square" tIns="45700">
+          <a:bodyPr spcFirstLastPara="1" wrap="square" lIns="91425" tIns="45700" rIns="91425" bIns="45700" anchor="t" anchorCtr="0">
             <a:normAutofit/>
           </a:bodyPr>
           <a:lstStyle>
-            <a:lvl1pPr indent="-342900" lvl="0" marL="457200" algn="l">
+            <a:lvl1pPr marL="457200" lvl="0" indent="-342900" algn="l">
               <a:lnSpc>
                 <a:spcPct val="90000"/>
               </a:lnSpc>
@@ -7584,7 +7783,7 @@
               <a:buChar char="•"/>
               <a:defRPr/>
             </a:lvl1pPr>
-            <a:lvl2pPr indent="-342900" lvl="1" marL="914400" algn="l">
+            <a:lvl2pPr marL="914400" lvl="1" indent="-342900" algn="l">
               <a:lnSpc>
                 <a:spcPct val="90000"/>
               </a:lnSpc>
@@ -7601,7 +7800,7 @@
               <a:buChar char="•"/>
               <a:defRPr/>
             </a:lvl2pPr>
-            <a:lvl3pPr indent="-342900" lvl="2" marL="1371600" algn="l">
+            <a:lvl3pPr marL="1371600" lvl="2" indent="-342900" algn="l">
               <a:lnSpc>
                 <a:spcPct val="90000"/>
               </a:lnSpc>
@@ -7618,7 +7817,7 @@
               <a:buChar char="•"/>
               <a:defRPr/>
             </a:lvl3pPr>
-            <a:lvl4pPr indent="-342900" lvl="3" marL="1828800" algn="l">
+            <a:lvl4pPr marL="1828800" lvl="3" indent="-342900" algn="l">
               <a:lnSpc>
                 <a:spcPct val="90000"/>
               </a:lnSpc>
@@ -7635,7 +7834,7 @@
               <a:buChar char="•"/>
               <a:defRPr/>
             </a:lvl4pPr>
-            <a:lvl5pPr indent="-342900" lvl="4" marL="2286000" algn="l">
+            <a:lvl5pPr marL="2286000" lvl="4" indent="-342900" algn="l">
               <a:lnSpc>
                 <a:spcPct val="90000"/>
               </a:lnSpc>
@@ -7652,7 +7851,7 @@
               <a:buChar char="•"/>
               <a:defRPr/>
             </a:lvl5pPr>
-            <a:lvl6pPr indent="-342900" lvl="5" marL="2743200" algn="l">
+            <a:lvl6pPr marL="2743200" lvl="5" indent="-342900" algn="l">
               <a:lnSpc>
                 <a:spcPct val="90000"/>
               </a:lnSpc>
@@ -7669,7 +7868,7 @@
               <a:buChar char="•"/>
               <a:defRPr/>
             </a:lvl6pPr>
-            <a:lvl7pPr indent="-342900" lvl="6" marL="3200400" algn="l">
+            <a:lvl7pPr marL="3200400" lvl="6" indent="-342900" algn="l">
               <a:lnSpc>
                 <a:spcPct val="90000"/>
               </a:lnSpc>
@@ -7686,7 +7885,7 @@
               <a:buChar char="•"/>
               <a:defRPr/>
             </a:lvl7pPr>
-            <a:lvl8pPr indent="-342900" lvl="7" marL="3657600" algn="l">
+            <a:lvl8pPr marL="3657600" lvl="7" indent="-342900" algn="l">
               <a:lnSpc>
                 <a:spcPct val="90000"/>
               </a:lnSpc>
@@ -7703,7 +7902,7 @@
               <a:buChar char="•"/>
               <a:defRPr/>
             </a:lvl8pPr>
-            <a:lvl9pPr indent="-342900" lvl="8" marL="4114800" algn="l">
+            <a:lvl9pPr marL="4114800" lvl="8" indent="-342900" algn="l">
               <a:lnSpc>
                 <a:spcPct val="90000"/>
               </a:lnSpc>
@@ -7721,15 +7920,19 @@
               <a:defRPr/>
             </a:lvl9pPr>
           </a:lstStyle>
-          <a:p/>
+          <a:p>
+            <a:endParaRPr/>
+          </a:p>
         </p:txBody>
       </p:sp>
       <p:sp>
         <p:nvSpPr>
           <p:cNvPr id="46" name="Google Shape;46;p9"/>
-          <p:cNvSpPr txBox="1"/>
+          <p:cNvSpPr txBox="1">
+            <a:spLocks noGrp="1"/>
+          </p:cNvSpPr>
           <p:nvPr>
-            <p:ph idx="10" type="dt"/>
+            <p:ph type="dt" idx="10"/>
           </p:nvPr>
         </p:nvSpPr>
         <p:spPr>
@@ -7746,7 +7949,7 @@
           </a:ln>
         </p:spPr>
         <p:txBody>
-          <a:bodyPr anchorCtr="0" anchor="ctr" bIns="45700" lIns="91425" spcFirstLastPara="1" rIns="91425" wrap="square" tIns="45700">
+          <a:bodyPr spcFirstLastPara="1" wrap="square" lIns="91425" tIns="45700" rIns="91425" bIns="45700" anchor="ctr" anchorCtr="0">
             <a:noAutofit/>
           </a:bodyPr>
           <a:lstStyle>
@@ -7850,15 +8053,19 @@
               <a:defRPr/>
             </a:lvl9pPr>
           </a:lstStyle>
-          <a:p/>
+          <a:p>
+            <a:endParaRPr/>
+          </a:p>
         </p:txBody>
       </p:sp>
       <p:sp>
         <p:nvSpPr>
           <p:cNvPr id="47" name="Google Shape;47;p9"/>
-          <p:cNvSpPr txBox="1"/>
+          <p:cNvSpPr txBox="1">
+            <a:spLocks noGrp="1"/>
+          </p:cNvSpPr>
           <p:nvPr>
-            <p:ph idx="11" type="ftr"/>
+            <p:ph type="ftr" idx="11"/>
           </p:nvPr>
         </p:nvSpPr>
         <p:spPr>
@@ -7875,7 +8082,7 @@
           </a:ln>
         </p:spPr>
         <p:txBody>
-          <a:bodyPr anchorCtr="0" anchor="ctr" bIns="45700" lIns="91425" spcFirstLastPara="1" rIns="91425" wrap="square" tIns="45700">
+          <a:bodyPr spcFirstLastPara="1" wrap="square" lIns="91425" tIns="45700" rIns="91425" bIns="45700" anchor="ctr" anchorCtr="0">
             <a:noAutofit/>
           </a:bodyPr>
           <a:lstStyle>
@@ -7979,15 +8186,19 @@
               <a:defRPr/>
             </a:lvl9pPr>
           </a:lstStyle>
-          <a:p/>
+          <a:p>
+            <a:endParaRPr/>
+          </a:p>
         </p:txBody>
       </p:sp>
       <p:sp>
         <p:nvSpPr>
           <p:cNvPr id="48" name="Google Shape;48;p9"/>
-          <p:cNvSpPr txBox="1"/>
+          <p:cNvSpPr txBox="1">
+            <a:spLocks noGrp="1"/>
+          </p:cNvSpPr>
           <p:nvPr>
-            <p:ph idx="12" type="sldNum"/>
+            <p:ph type="sldNum" idx="12"/>
           </p:nvPr>
         </p:nvSpPr>
         <p:spPr>
@@ -8004,67 +8215,67 @@
           </a:ln>
         </p:spPr>
         <p:txBody>
-          <a:bodyPr anchorCtr="0" anchor="ctr" bIns="45700" lIns="91425" spcFirstLastPara="1" rIns="91425" wrap="square" tIns="45700">
+          <a:bodyPr spcFirstLastPara="1" wrap="square" lIns="91425" tIns="45700" rIns="91425" bIns="45700" anchor="ctr" anchorCtr="0">
             <a:noAutofit/>
           </a:bodyPr>
           <a:lstStyle>
-            <a:lvl1pPr indent="0" lvl="0" marL="0" algn="r">
+            <a:lvl1pPr marL="0" lvl="0" indent="0" algn="r">
               <a:spcBef>
                 <a:spcPts val="0"/>
               </a:spcBef>
               <a:buNone/>
               <a:defRPr/>
             </a:lvl1pPr>
-            <a:lvl2pPr indent="0" lvl="1" marL="0" algn="r">
+            <a:lvl2pPr marL="0" lvl="1" indent="0" algn="r">
               <a:spcBef>
                 <a:spcPts val="0"/>
               </a:spcBef>
               <a:buNone/>
               <a:defRPr/>
             </a:lvl2pPr>
-            <a:lvl3pPr indent="0" lvl="2" marL="0" algn="r">
+            <a:lvl3pPr marL="0" lvl="2" indent="0" algn="r">
               <a:spcBef>
                 <a:spcPts val="0"/>
               </a:spcBef>
               <a:buNone/>
               <a:defRPr/>
             </a:lvl3pPr>
-            <a:lvl4pPr indent="0" lvl="3" marL="0" algn="r">
+            <a:lvl4pPr marL="0" lvl="3" indent="0" algn="r">
               <a:spcBef>
                 <a:spcPts val="0"/>
               </a:spcBef>
               <a:buNone/>
               <a:defRPr/>
             </a:lvl4pPr>
-            <a:lvl5pPr indent="0" lvl="4" marL="0" algn="r">
+            <a:lvl5pPr marL="0" lvl="4" indent="0" algn="r">
               <a:spcBef>
                 <a:spcPts val="0"/>
               </a:spcBef>
               <a:buNone/>
               <a:defRPr/>
             </a:lvl5pPr>
-            <a:lvl6pPr indent="0" lvl="5" marL="0" algn="r">
+            <a:lvl6pPr marL="0" lvl="5" indent="0" algn="r">
               <a:spcBef>
                 <a:spcPts val="0"/>
               </a:spcBef>
               <a:buNone/>
               <a:defRPr/>
             </a:lvl6pPr>
-            <a:lvl7pPr indent="0" lvl="6" marL="0" algn="r">
+            <a:lvl7pPr marL="0" lvl="6" indent="0" algn="r">
               <a:spcBef>
                 <a:spcPts val="0"/>
               </a:spcBef>
               <a:buNone/>
               <a:defRPr/>
             </a:lvl7pPr>
-            <a:lvl8pPr indent="0" lvl="7" marL="0" algn="r">
+            <a:lvl8pPr marL="0" lvl="7" indent="0" algn="r">
               <a:spcBef>
                 <a:spcPts val="0"/>
               </a:spcBef>
               <a:buNone/>
               <a:defRPr/>
             </a:lvl8pPr>
-            <a:lvl9pPr indent="0" lvl="8" marL="0" algn="r">
+            <a:lvl9pPr marL="0" lvl="8" indent="0" algn="r">
               <a:spcBef>
                 <a:spcPts val="0"/>
               </a:spcBef>
@@ -8073,7 +8284,7 @@
             </a:lvl9pPr>
           </a:lstStyle>
           <a:p>
-            <a:pPr indent="0" lvl="0" marL="0" rtl="0" algn="r">
+            <a:pPr marL="0" lvl="0" indent="0" algn="r" rtl="0">
               <a:spcBef>
                 <a:spcPts val="0"/>
               </a:spcBef>
@@ -8099,11 +8310,11 @@
 </file>
 
 <file path=ppt/slideLayouts/slideLayout6.xml><?xml version="1.0" encoding="utf-8"?>
-<p:sldLayout xmlns:a="http://schemas.openxmlformats.org/drawingml/2006/main" xmlns:r="http://schemas.openxmlformats.org/officeDocument/2006/relationships" xmlns:mc="http://schemas.openxmlformats.org/markup-compatibility/2006" xmlns:mv="urn:schemas-microsoft-com:mac:vml" xmlns:p="http://schemas.openxmlformats.org/presentationml/2006/main" xmlns:c="http://schemas.openxmlformats.org/drawingml/2006/chart" xmlns:dgm="http://schemas.openxmlformats.org/drawingml/2006/diagram" xmlns:o="urn:schemas-microsoft-com:office:office" xmlns:v="urn:schemas-microsoft-com:vml" xmlns:pvml="urn:schemas-microsoft-com:office:powerpoint" xmlns:com="http://schemas.openxmlformats.org/drawingml/2006/compatibility" xmlns:p14="http://schemas.microsoft.com/office/powerpoint/2010/main" xmlns:p15="http://schemas.microsoft.com/office/powerpoint/2012/main" xmlns:ahyp="http://schemas.microsoft.com/office/drawing/2018/hyperlinkcolor" matchingName="Title Only" type="titleOnly">
+<p:sldLayout xmlns:a="http://schemas.openxmlformats.org/drawingml/2006/main" xmlns:r="http://schemas.openxmlformats.org/officeDocument/2006/relationships" xmlns:p="http://schemas.openxmlformats.org/presentationml/2006/main" matchingName="Title Only" type="titleOnly">
   <p:cSld name="TITLE_ONLY">
     <p:spTree>
       <p:nvGrpSpPr>
-        <p:cNvPr id="49" name="Shape 49"/>
+        <p:cNvPr id="1" name="Shape 49"/>
         <p:cNvGrpSpPr/>
         <p:nvPr/>
       </p:nvGrpSpPr>
@@ -8118,7 +8329,9 @@
       <p:sp>
         <p:nvSpPr>
           <p:cNvPr id="50" name="Google Shape;50;p10"/>
-          <p:cNvSpPr txBox="1"/>
+          <p:cNvSpPr txBox="1">
+            <a:spLocks noGrp="1"/>
+          </p:cNvSpPr>
           <p:nvPr>
             <p:ph type="title"/>
           </p:nvPr>
@@ -8137,7 +8350,7 @@
           </a:ln>
         </p:spPr>
         <p:txBody>
-          <a:bodyPr anchorCtr="0" anchor="ctr" bIns="45700" lIns="91425" spcFirstLastPara="1" rIns="91425" wrap="square" tIns="45700">
+          <a:bodyPr spcFirstLastPara="1" wrap="square" lIns="91425" tIns="45700" rIns="91425" bIns="45700" anchor="ctr" anchorCtr="0">
             <a:normAutofit/>
           </a:bodyPr>
           <a:lstStyle>
@@ -8247,15 +8460,19 @@
               <a:defRPr/>
             </a:lvl9pPr>
           </a:lstStyle>
-          <a:p/>
+          <a:p>
+            <a:endParaRPr/>
+          </a:p>
         </p:txBody>
       </p:sp>
       <p:sp>
         <p:nvSpPr>
           <p:cNvPr id="51" name="Google Shape;51;p10"/>
-          <p:cNvSpPr txBox="1"/>
+          <p:cNvSpPr txBox="1">
+            <a:spLocks noGrp="1"/>
+          </p:cNvSpPr>
           <p:nvPr>
-            <p:ph idx="10" type="dt"/>
+            <p:ph type="dt" idx="10"/>
           </p:nvPr>
         </p:nvSpPr>
         <p:spPr>
@@ -8272,7 +8489,7 @@
           </a:ln>
         </p:spPr>
         <p:txBody>
-          <a:bodyPr anchorCtr="0" anchor="ctr" bIns="45700" lIns="91425" spcFirstLastPara="1" rIns="91425" wrap="square" tIns="45700">
+          <a:bodyPr spcFirstLastPara="1" wrap="square" lIns="91425" tIns="45700" rIns="91425" bIns="45700" anchor="ctr" anchorCtr="0">
             <a:noAutofit/>
           </a:bodyPr>
           <a:lstStyle>
@@ -8376,15 +8593,19 @@
               <a:defRPr/>
             </a:lvl9pPr>
           </a:lstStyle>
-          <a:p/>
+          <a:p>
+            <a:endParaRPr/>
+          </a:p>
         </p:txBody>
       </p:sp>
       <p:sp>
         <p:nvSpPr>
           <p:cNvPr id="52" name="Google Shape;52;p10"/>
-          <p:cNvSpPr txBox="1"/>
+          <p:cNvSpPr txBox="1">
+            <a:spLocks noGrp="1"/>
+          </p:cNvSpPr>
           <p:nvPr>
-            <p:ph idx="11" type="ftr"/>
+            <p:ph type="ftr" idx="11"/>
           </p:nvPr>
         </p:nvSpPr>
         <p:spPr>
@@ -8401,7 +8622,7 @@
           </a:ln>
         </p:spPr>
         <p:txBody>
-          <a:bodyPr anchorCtr="0" anchor="ctr" bIns="45700" lIns="91425" spcFirstLastPara="1" rIns="91425" wrap="square" tIns="45700">
+          <a:bodyPr spcFirstLastPara="1" wrap="square" lIns="91425" tIns="45700" rIns="91425" bIns="45700" anchor="ctr" anchorCtr="0">
             <a:noAutofit/>
           </a:bodyPr>
           <a:lstStyle>
@@ -8505,15 +8726,19 @@
               <a:defRPr/>
             </a:lvl9pPr>
           </a:lstStyle>
-          <a:p/>
+          <a:p>
+            <a:endParaRPr/>
+          </a:p>
         </p:txBody>
       </p:sp>
       <p:sp>
         <p:nvSpPr>
           <p:cNvPr id="53" name="Google Shape;53;p10"/>
-          <p:cNvSpPr txBox="1"/>
+          <p:cNvSpPr txBox="1">
+            <a:spLocks noGrp="1"/>
+          </p:cNvSpPr>
           <p:nvPr>
-            <p:ph idx="12" type="sldNum"/>
+            <p:ph type="sldNum" idx="12"/>
           </p:nvPr>
         </p:nvSpPr>
         <p:spPr>
@@ -8530,67 +8755,67 @@
           </a:ln>
         </p:spPr>
         <p:txBody>
-          <a:bodyPr anchorCtr="0" anchor="ctr" bIns="45700" lIns="91425" spcFirstLastPara="1" rIns="91425" wrap="square" tIns="45700">
+          <a:bodyPr spcFirstLastPara="1" wrap="square" lIns="91425" tIns="45700" rIns="91425" bIns="45700" anchor="ctr" anchorCtr="0">
             <a:noAutofit/>
           </a:bodyPr>
           <a:lstStyle>
-            <a:lvl1pPr indent="0" lvl="0" marL="0" algn="r">
+            <a:lvl1pPr marL="0" lvl="0" indent="0" algn="r">
               <a:spcBef>
                 <a:spcPts val="0"/>
               </a:spcBef>
               <a:buNone/>
               <a:defRPr/>
             </a:lvl1pPr>
-            <a:lvl2pPr indent="0" lvl="1" marL="0" algn="r">
+            <a:lvl2pPr marL="0" lvl="1" indent="0" algn="r">
               <a:spcBef>
                 <a:spcPts val="0"/>
               </a:spcBef>
               <a:buNone/>
               <a:defRPr/>
             </a:lvl2pPr>
-            <a:lvl3pPr indent="0" lvl="2" marL="0" algn="r">
+            <a:lvl3pPr marL="0" lvl="2" indent="0" algn="r">
               <a:spcBef>
                 <a:spcPts val="0"/>
               </a:spcBef>
               <a:buNone/>
               <a:defRPr/>
             </a:lvl3pPr>
-            <a:lvl4pPr indent="0" lvl="3" marL="0" algn="r">
+            <a:lvl4pPr marL="0" lvl="3" indent="0" algn="r">
               <a:spcBef>
                 <a:spcPts val="0"/>
               </a:spcBef>
               <a:buNone/>
               <a:defRPr/>
             </a:lvl4pPr>
-            <a:lvl5pPr indent="0" lvl="4" marL="0" algn="r">
+            <a:lvl5pPr marL="0" lvl="4" indent="0" algn="r">
               <a:spcBef>
                 <a:spcPts val="0"/>
               </a:spcBef>
               <a:buNone/>
               <a:defRPr/>
             </a:lvl5pPr>
-            <a:lvl6pPr indent="0" lvl="5" marL="0" algn="r">
+            <a:lvl6pPr marL="0" lvl="5" indent="0" algn="r">
               <a:spcBef>
                 <a:spcPts val="0"/>
               </a:spcBef>
               <a:buNone/>
               <a:defRPr/>
             </a:lvl6pPr>
-            <a:lvl7pPr indent="0" lvl="6" marL="0" algn="r">
+            <a:lvl7pPr marL="0" lvl="6" indent="0" algn="r">
               <a:spcBef>
                 <a:spcPts val="0"/>
               </a:spcBef>
               <a:buNone/>
               <a:defRPr/>
             </a:lvl7pPr>
-            <a:lvl8pPr indent="0" lvl="7" marL="0" algn="r">
+            <a:lvl8pPr marL="0" lvl="7" indent="0" algn="r">
               <a:spcBef>
                 <a:spcPts val="0"/>
               </a:spcBef>
               <a:buNone/>
               <a:defRPr/>
             </a:lvl8pPr>
-            <a:lvl9pPr indent="0" lvl="8" marL="0" algn="r">
+            <a:lvl9pPr marL="0" lvl="8" indent="0" algn="r">
               <a:spcBef>
                 <a:spcPts val="0"/>
               </a:spcBef>
@@ -8599,7 +8824,7 @@
             </a:lvl9pPr>
           </a:lstStyle>
           <a:p>
-            <a:pPr indent="0" lvl="0" marL="0" rtl="0" algn="r">
+            <a:pPr marL="0" lvl="0" indent="0" algn="r" rtl="0">
               <a:spcBef>
                 <a:spcPts val="0"/>
               </a:spcBef>
@@ -8625,11 +8850,11 @@
 </file>
 
 <file path=ppt/slideLayouts/slideLayout7.xml><?xml version="1.0" encoding="utf-8"?>
-<p:sldLayout xmlns:a="http://schemas.openxmlformats.org/drawingml/2006/main" xmlns:r="http://schemas.openxmlformats.org/officeDocument/2006/relationships" xmlns:mc="http://schemas.openxmlformats.org/markup-compatibility/2006" xmlns:mv="urn:schemas-microsoft-com:mac:vml" xmlns:p="http://schemas.openxmlformats.org/presentationml/2006/main" xmlns:c="http://schemas.openxmlformats.org/drawingml/2006/chart" xmlns:dgm="http://schemas.openxmlformats.org/drawingml/2006/diagram" xmlns:o="urn:schemas-microsoft-com:office:office" xmlns:v="urn:schemas-microsoft-com:vml" xmlns:pvml="urn:schemas-microsoft-com:office:powerpoint" xmlns:com="http://schemas.openxmlformats.org/drawingml/2006/compatibility" xmlns:p14="http://schemas.microsoft.com/office/powerpoint/2010/main" xmlns:p15="http://schemas.microsoft.com/office/powerpoint/2012/main" xmlns:ahyp="http://schemas.microsoft.com/office/drawing/2018/hyperlinkcolor" matchingName="Blank" type="blank">
+<p:sldLayout xmlns:a="http://schemas.openxmlformats.org/drawingml/2006/main" xmlns:r="http://schemas.openxmlformats.org/officeDocument/2006/relationships" xmlns:p="http://schemas.openxmlformats.org/presentationml/2006/main" matchingName="Blank" type="blank">
   <p:cSld name="BLANK">
     <p:spTree>
       <p:nvGrpSpPr>
-        <p:cNvPr id="54" name="Shape 54"/>
+        <p:cNvPr id="1" name="Shape 54"/>
         <p:cNvGrpSpPr/>
         <p:nvPr/>
       </p:nvGrpSpPr>
@@ -8644,9 +8869,11 @@
       <p:sp>
         <p:nvSpPr>
           <p:cNvPr id="55" name="Google Shape;55;p11"/>
-          <p:cNvSpPr txBox="1"/>
+          <p:cNvSpPr txBox="1">
+            <a:spLocks noGrp="1"/>
+          </p:cNvSpPr>
           <p:nvPr>
-            <p:ph idx="10" type="dt"/>
+            <p:ph type="dt" idx="10"/>
           </p:nvPr>
         </p:nvSpPr>
         <p:spPr>
@@ -8663,7 +8890,7 @@
           </a:ln>
         </p:spPr>
         <p:txBody>
-          <a:bodyPr anchorCtr="0" anchor="ctr" bIns="45700" lIns="91425" spcFirstLastPara="1" rIns="91425" wrap="square" tIns="45700">
+          <a:bodyPr spcFirstLastPara="1" wrap="square" lIns="91425" tIns="45700" rIns="91425" bIns="45700" anchor="ctr" anchorCtr="0">
             <a:noAutofit/>
           </a:bodyPr>
           <a:lstStyle>
@@ -8767,15 +8994,19 @@
               <a:defRPr/>
             </a:lvl9pPr>
           </a:lstStyle>
-          <a:p/>
+          <a:p>
+            <a:endParaRPr/>
+          </a:p>
         </p:txBody>
       </p:sp>
       <p:sp>
         <p:nvSpPr>
           <p:cNvPr id="56" name="Google Shape;56;p11"/>
-          <p:cNvSpPr txBox="1"/>
+          <p:cNvSpPr txBox="1">
+            <a:spLocks noGrp="1"/>
+          </p:cNvSpPr>
           <p:nvPr>
-            <p:ph idx="11" type="ftr"/>
+            <p:ph type="ftr" idx="11"/>
           </p:nvPr>
         </p:nvSpPr>
         <p:spPr>
@@ -8792,7 +9023,7 @@
           </a:ln>
         </p:spPr>
         <p:txBody>
-          <a:bodyPr anchorCtr="0" anchor="ctr" bIns="45700" lIns="91425" spcFirstLastPara="1" rIns="91425" wrap="square" tIns="45700">
+          <a:bodyPr spcFirstLastPara="1" wrap="square" lIns="91425" tIns="45700" rIns="91425" bIns="45700" anchor="ctr" anchorCtr="0">
             <a:noAutofit/>
           </a:bodyPr>
           <a:lstStyle>
@@ -8896,15 +9127,19 @@
               <a:defRPr/>
             </a:lvl9pPr>
           </a:lstStyle>
-          <a:p/>
+          <a:p>
+            <a:endParaRPr/>
+          </a:p>
         </p:txBody>
       </p:sp>
       <p:sp>
         <p:nvSpPr>
           <p:cNvPr id="57" name="Google Shape;57;p11"/>
-          <p:cNvSpPr txBox="1"/>
+          <p:cNvSpPr txBox="1">
+            <a:spLocks noGrp="1"/>
+          </p:cNvSpPr>
           <p:nvPr>
-            <p:ph idx="12" type="sldNum"/>
+            <p:ph type="sldNum" idx="12"/>
           </p:nvPr>
         </p:nvSpPr>
         <p:spPr>
@@ -8921,67 +9156,67 @@
           </a:ln>
         </p:spPr>
         <p:txBody>
-          <a:bodyPr anchorCtr="0" anchor="ctr" bIns="45700" lIns="91425" spcFirstLastPara="1" rIns="91425" wrap="square" tIns="45700">
+          <a:bodyPr spcFirstLastPara="1" wrap="square" lIns="91425" tIns="45700" rIns="91425" bIns="45700" anchor="ctr" anchorCtr="0">
             <a:noAutofit/>
           </a:bodyPr>
           <a:lstStyle>
-            <a:lvl1pPr indent="0" lvl="0" marL="0" algn="r">
+            <a:lvl1pPr marL="0" lvl="0" indent="0" algn="r">
               <a:spcBef>
                 <a:spcPts val="0"/>
               </a:spcBef>
               <a:buNone/>
               <a:defRPr/>
             </a:lvl1pPr>
-            <a:lvl2pPr indent="0" lvl="1" marL="0" algn="r">
+            <a:lvl2pPr marL="0" lvl="1" indent="0" algn="r">
               <a:spcBef>
                 <a:spcPts val="0"/>
               </a:spcBef>
               <a:buNone/>
               <a:defRPr/>
             </a:lvl2pPr>
-            <a:lvl3pPr indent="0" lvl="2" marL="0" algn="r">
+            <a:lvl3pPr marL="0" lvl="2" indent="0" algn="r">
               <a:spcBef>
                 <a:spcPts val="0"/>
               </a:spcBef>
               <a:buNone/>
               <a:defRPr/>
             </a:lvl3pPr>
-            <a:lvl4pPr indent="0" lvl="3" marL="0" algn="r">
+            <a:lvl4pPr marL="0" lvl="3" indent="0" algn="r">
               <a:spcBef>
                 <a:spcPts val="0"/>
               </a:spcBef>
               <a:buNone/>
               <a:defRPr/>
             </a:lvl4pPr>
-            <a:lvl5pPr indent="0" lvl="4" marL="0" algn="r">
+            <a:lvl5pPr marL="0" lvl="4" indent="0" algn="r">
               <a:spcBef>
                 <a:spcPts val="0"/>
               </a:spcBef>
               <a:buNone/>
               <a:defRPr/>
             </a:lvl5pPr>
-            <a:lvl6pPr indent="0" lvl="5" marL="0" algn="r">
+            <a:lvl6pPr marL="0" lvl="5" indent="0" algn="r">
               <a:spcBef>
                 <a:spcPts val="0"/>
               </a:spcBef>
               <a:buNone/>
               <a:defRPr/>
             </a:lvl6pPr>
-            <a:lvl7pPr indent="0" lvl="6" marL="0" algn="r">
+            <a:lvl7pPr marL="0" lvl="6" indent="0" algn="r">
               <a:spcBef>
                 <a:spcPts val="0"/>
               </a:spcBef>
               <a:buNone/>
               <a:defRPr/>
             </a:lvl7pPr>
-            <a:lvl8pPr indent="0" lvl="7" marL="0" algn="r">
+            <a:lvl8pPr marL="0" lvl="7" indent="0" algn="r">
               <a:spcBef>
                 <a:spcPts val="0"/>
               </a:spcBef>
               <a:buNone/>
               <a:defRPr/>
             </a:lvl8pPr>
-            <a:lvl9pPr indent="0" lvl="8" marL="0" algn="r">
+            <a:lvl9pPr marL="0" lvl="8" indent="0" algn="r">
               <a:spcBef>
                 <a:spcPts val="0"/>
               </a:spcBef>
@@ -8990,7 +9225,7 @@
             </a:lvl9pPr>
           </a:lstStyle>
           <a:p>
-            <a:pPr indent="0" lvl="0" marL="0" rtl="0" algn="r">
+            <a:pPr marL="0" lvl="0" indent="0" algn="r" rtl="0">
               <a:spcBef>
                 <a:spcPts val="0"/>
               </a:spcBef>
@@ -9016,11 +9251,11 @@
 </file>
 
 <file path=ppt/slideLayouts/slideLayout8.xml><?xml version="1.0" encoding="utf-8"?>
-<p:sldLayout xmlns:a="http://schemas.openxmlformats.org/drawingml/2006/main" xmlns:r="http://schemas.openxmlformats.org/officeDocument/2006/relationships" xmlns:mc="http://schemas.openxmlformats.org/markup-compatibility/2006" xmlns:mv="urn:schemas-microsoft-com:mac:vml" xmlns:p="http://schemas.openxmlformats.org/presentationml/2006/main" xmlns:c="http://schemas.openxmlformats.org/drawingml/2006/chart" xmlns:dgm="http://schemas.openxmlformats.org/drawingml/2006/diagram" xmlns:o="urn:schemas-microsoft-com:office:office" xmlns:v="urn:schemas-microsoft-com:vml" xmlns:pvml="urn:schemas-microsoft-com:office:powerpoint" xmlns:com="http://schemas.openxmlformats.org/drawingml/2006/compatibility" xmlns:p14="http://schemas.microsoft.com/office/powerpoint/2010/main" xmlns:p15="http://schemas.microsoft.com/office/powerpoint/2012/main" xmlns:ahyp="http://schemas.microsoft.com/office/drawing/2018/hyperlinkcolor" matchingName="Content with Caption" type="objTx">
+<p:sldLayout xmlns:a="http://schemas.openxmlformats.org/drawingml/2006/main" xmlns:r="http://schemas.openxmlformats.org/officeDocument/2006/relationships" xmlns:p="http://schemas.openxmlformats.org/presentationml/2006/main" matchingName="Content with Caption" type="objTx">
   <p:cSld name="OBJECT_WITH_CAPTION_TEXT">
     <p:spTree>
       <p:nvGrpSpPr>
-        <p:cNvPr id="58" name="Shape 58"/>
+        <p:cNvPr id="1" name="Shape 58"/>
         <p:cNvGrpSpPr/>
         <p:nvPr/>
       </p:nvGrpSpPr>
@@ -9035,7 +9270,9 @@
       <p:sp>
         <p:nvSpPr>
           <p:cNvPr id="59" name="Google Shape;59;p12"/>
-          <p:cNvSpPr txBox="1"/>
+          <p:cNvSpPr txBox="1">
+            <a:spLocks noGrp="1"/>
+          </p:cNvSpPr>
           <p:nvPr>
             <p:ph type="title"/>
           </p:nvPr>
@@ -9054,7 +9291,7 @@
           </a:ln>
         </p:spPr>
         <p:txBody>
-          <a:bodyPr anchorCtr="0" anchor="b" bIns="45700" lIns="91425" spcFirstLastPara="1" rIns="91425" wrap="square" tIns="45700">
+          <a:bodyPr spcFirstLastPara="1" wrap="square" lIns="91425" tIns="45700" rIns="91425" bIns="45700" anchor="b" anchorCtr="0">
             <a:normAutofit/>
           </a:bodyPr>
           <a:lstStyle>
@@ -9165,15 +9402,19 @@
               <a:defRPr/>
             </a:lvl9pPr>
           </a:lstStyle>
-          <a:p/>
+          <a:p>
+            <a:endParaRPr/>
+          </a:p>
         </p:txBody>
       </p:sp>
       <p:sp>
         <p:nvSpPr>
           <p:cNvPr id="60" name="Google Shape;60;p12"/>
-          <p:cNvSpPr txBox="1"/>
+          <p:cNvSpPr txBox="1">
+            <a:spLocks noGrp="1"/>
+          </p:cNvSpPr>
           <p:nvPr>
-            <p:ph idx="1" type="body"/>
+            <p:ph type="body" idx="1"/>
           </p:nvPr>
         </p:nvSpPr>
         <p:spPr>
@@ -9190,11 +9431,11 @@
           </a:ln>
         </p:spPr>
         <p:txBody>
-          <a:bodyPr anchorCtr="0" anchor="t" bIns="45700" lIns="91425" spcFirstLastPara="1" rIns="91425" wrap="square" tIns="45700">
+          <a:bodyPr spcFirstLastPara="1" wrap="square" lIns="91425" tIns="45700" rIns="91425" bIns="45700" anchor="t" anchorCtr="0">
             <a:normAutofit/>
           </a:bodyPr>
           <a:lstStyle>
-            <a:lvl1pPr indent="-431800" lvl="0" marL="457200" algn="l">
+            <a:lvl1pPr marL="457200" lvl="0" indent="-431800" algn="l">
               <a:lnSpc>
                 <a:spcPct val="90000"/>
               </a:lnSpc>
@@ -9211,7 +9452,7 @@
               <a:buChar char="•"/>
               <a:defRPr sz="3200"/>
             </a:lvl1pPr>
-            <a:lvl2pPr indent="-406400" lvl="1" marL="914400" algn="l">
+            <a:lvl2pPr marL="914400" lvl="1" indent="-406400" algn="l">
               <a:lnSpc>
                 <a:spcPct val="90000"/>
               </a:lnSpc>
@@ -9228,7 +9469,7 @@
               <a:buChar char="•"/>
               <a:defRPr sz="2800"/>
             </a:lvl2pPr>
-            <a:lvl3pPr indent="-381000" lvl="2" marL="1371600" algn="l">
+            <a:lvl3pPr marL="1371600" lvl="2" indent="-381000" algn="l">
               <a:lnSpc>
                 <a:spcPct val="90000"/>
               </a:lnSpc>
@@ -9245,7 +9486,7 @@
               <a:buChar char="•"/>
               <a:defRPr sz="2400"/>
             </a:lvl3pPr>
-            <a:lvl4pPr indent="-355600" lvl="3" marL="1828800" algn="l">
+            <a:lvl4pPr marL="1828800" lvl="3" indent="-355600" algn="l">
               <a:lnSpc>
                 <a:spcPct val="90000"/>
               </a:lnSpc>
@@ -9262,7 +9503,7 @@
               <a:buChar char="•"/>
               <a:defRPr sz="2000"/>
             </a:lvl4pPr>
-            <a:lvl5pPr indent="-355600" lvl="4" marL="2286000" algn="l">
+            <a:lvl5pPr marL="2286000" lvl="4" indent="-355600" algn="l">
               <a:lnSpc>
                 <a:spcPct val="90000"/>
               </a:lnSpc>
@@ -9279,7 +9520,7 @@
               <a:buChar char="•"/>
               <a:defRPr sz="2000"/>
             </a:lvl5pPr>
-            <a:lvl6pPr indent="-355600" lvl="5" marL="2743200" algn="l">
+            <a:lvl6pPr marL="2743200" lvl="5" indent="-355600" algn="l">
               <a:lnSpc>
                 <a:spcPct val="90000"/>
               </a:lnSpc>
@@ -9296,7 +9537,7 @@
               <a:buChar char="•"/>
               <a:defRPr sz="2000"/>
             </a:lvl6pPr>
-            <a:lvl7pPr indent="-355600" lvl="6" marL="3200400" algn="l">
+            <a:lvl7pPr marL="3200400" lvl="6" indent="-355600" algn="l">
               <a:lnSpc>
                 <a:spcPct val="90000"/>
               </a:lnSpc>
@@ -9313,7 +9554,7 @@
               <a:buChar char="•"/>
               <a:defRPr sz="2000"/>
             </a:lvl7pPr>
-            <a:lvl8pPr indent="-355600" lvl="7" marL="3657600" algn="l">
+            <a:lvl8pPr marL="3657600" lvl="7" indent="-355600" algn="l">
               <a:lnSpc>
                 <a:spcPct val="90000"/>
               </a:lnSpc>
@@ -9330,7 +9571,7 @@
               <a:buChar char="•"/>
               <a:defRPr sz="2000"/>
             </a:lvl8pPr>
-            <a:lvl9pPr indent="-355600" lvl="8" marL="4114800" algn="l">
+            <a:lvl9pPr marL="4114800" lvl="8" indent="-355600" algn="l">
               <a:lnSpc>
                 <a:spcPct val="90000"/>
               </a:lnSpc>
@@ -9348,15 +9589,19 @@
               <a:defRPr sz="2000"/>
             </a:lvl9pPr>
           </a:lstStyle>
-          <a:p/>
+          <a:p>
+            <a:endParaRPr/>
+          </a:p>
         </p:txBody>
       </p:sp>
       <p:sp>
         <p:nvSpPr>
           <p:cNvPr id="61" name="Google Shape;61;p12"/>
-          <p:cNvSpPr txBox="1"/>
+          <p:cNvSpPr txBox="1">
+            <a:spLocks noGrp="1"/>
+          </p:cNvSpPr>
           <p:nvPr>
-            <p:ph idx="2" type="body"/>
+            <p:ph type="body" idx="2"/>
           </p:nvPr>
         </p:nvSpPr>
         <p:spPr>
@@ -9373,11 +9618,11 @@
           </a:ln>
         </p:spPr>
         <p:txBody>
-          <a:bodyPr anchorCtr="0" anchor="t" bIns="45700" lIns="91425" spcFirstLastPara="1" rIns="91425" wrap="square" tIns="45700">
+          <a:bodyPr spcFirstLastPara="1" wrap="square" lIns="91425" tIns="45700" rIns="91425" bIns="45700" anchor="t" anchorCtr="0">
             <a:normAutofit/>
           </a:bodyPr>
           <a:lstStyle>
-            <a:lvl1pPr indent="-228600" lvl="0" marL="457200" algn="l">
+            <a:lvl1pPr marL="457200" lvl="0" indent="-228600" algn="l">
               <a:lnSpc>
                 <a:spcPct val="90000"/>
               </a:lnSpc>
@@ -9394,7 +9639,7 @@
               <a:buNone/>
               <a:defRPr sz="1600"/>
             </a:lvl1pPr>
-            <a:lvl2pPr indent="-228600" lvl="1" marL="914400" algn="l">
+            <a:lvl2pPr marL="914400" lvl="1" indent="-228600" algn="l">
               <a:lnSpc>
                 <a:spcPct val="90000"/>
               </a:lnSpc>
@@ -9411,7 +9656,7 @@
               <a:buNone/>
               <a:defRPr sz="1400"/>
             </a:lvl2pPr>
-            <a:lvl3pPr indent="-228600" lvl="2" marL="1371600" algn="l">
+            <a:lvl3pPr marL="1371600" lvl="2" indent="-228600" algn="l">
               <a:lnSpc>
                 <a:spcPct val="90000"/>
               </a:lnSpc>
@@ -9428,7 +9673,7 @@
               <a:buNone/>
               <a:defRPr sz="1200"/>
             </a:lvl3pPr>
-            <a:lvl4pPr indent="-228600" lvl="3" marL="1828800" algn="l">
+            <a:lvl4pPr marL="1828800" lvl="3" indent="-228600" algn="l">
               <a:lnSpc>
                 <a:spcPct val="90000"/>
               </a:lnSpc>
@@ -9445,7 +9690,7 @@
               <a:buNone/>
               <a:defRPr sz="1000"/>
             </a:lvl4pPr>
-            <a:lvl5pPr indent="-228600" lvl="4" marL="2286000" algn="l">
+            <a:lvl5pPr marL="2286000" lvl="4" indent="-228600" algn="l">
               <a:lnSpc>
                 <a:spcPct val="90000"/>
               </a:lnSpc>
@@ -9462,7 +9707,7 @@
               <a:buNone/>
               <a:defRPr sz="1000"/>
             </a:lvl5pPr>
-            <a:lvl6pPr indent="-228600" lvl="5" marL="2743200" algn="l">
+            <a:lvl6pPr marL="2743200" lvl="5" indent="-228600" algn="l">
               <a:lnSpc>
                 <a:spcPct val="90000"/>
               </a:lnSpc>
@@ -9479,7 +9724,7 @@
               <a:buNone/>
               <a:defRPr sz="1000"/>
             </a:lvl6pPr>
-            <a:lvl7pPr indent="-228600" lvl="6" marL="3200400" algn="l">
+            <a:lvl7pPr marL="3200400" lvl="6" indent="-228600" algn="l">
               <a:lnSpc>
                 <a:spcPct val="90000"/>
               </a:lnSpc>
@@ -9496,7 +9741,7 @@
               <a:buNone/>
               <a:defRPr sz="1000"/>
             </a:lvl7pPr>
-            <a:lvl8pPr indent="-228600" lvl="7" marL="3657600" algn="l">
+            <a:lvl8pPr marL="3657600" lvl="7" indent="-228600" algn="l">
               <a:lnSpc>
                 <a:spcPct val="90000"/>
               </a:lnSpc>
@@ -9513,7 +9758,7 @@
               <a:buNone/>
               <a:defRPr sz="1000"/>
             </a:lvl8pPr>
-            <a:lvl9pPr indent="-228600" lvl="8" marL="4114800" algn="l">
+            <a:lvl9pPr marL="4114800" lvl="8" indent="-228600" algn="l">
               <a:lnSpc>
                 <a:spcPct val="90000"/>
               </a:lnSpc>
@@ -9531,15 +9776,19 @@
               <a:defRPr sz="1000"/>
             </a:lvl9pPr>
           </a:lstStyle>
-          <a:p/>
+          <a:p>
+            <a:endParaRPr/>
+          </a:p>
         </p:txBody>
       </p:sp>
       <p:sp>
         <p:nvSpPr>
           <p:cNvPr id="62" name="Google Shape;62;p12"/>
-          <p:cNvSpPr txBox="1"/>
+          <p:cNvSpPr txBox="1">
+            <a:spLocks noGrp="1"/>
+          </p:cNvSpPr>
           <p:nvPr>
-            <p:ph idx="10" type="dt"/>
+            <p:ph type="dt" idx="10"/>
           </p:nvPr>
         </p:nvSpPr>
         <p:spPr>
@@ -9556,7 +9805,7 @@
           </a:ln>
         </p:spPr>
         <p:txBody>
-          <a:bodyPr anchorCtr="0" anchor="ctr" bIns="45700" lIns="91425" spcFirstLastPara="1" rIns="91425" wrap="square" tIns="45700">
+          <a:bodyPr spcFirstLastPara="1" wrap="square" lIns="91425" tIns="45700" rIns="91425" bIns="45700" anchor="ctr" anchorCtr="0">
             <a:noAutofit/>
           </a:bodyPr>
           <a:lstStyle>
@@ -9660,15 +9909,19 @@
               <a:defRPr/>
             </a:lvl9pPr>
           </a:lstStyle>
-          <a:p/>
+          <a:p>
+            <a:endParaRPr/>
+          </a:p>
         </p:txBody>
       </p:sp>
       <p:sp>
         <p:nvSpPr>
           <p:cNvPr id="63" name="Google Shape;63;p12"/>
-          <p:cNvSpPr txBox="1"/>
+          <p:cNvSpPr txBox="1">
+            <a:spLocks noGrp="1"/>
+          </p:cNvSpPr>
           <p:nvPr>
-            <p:ph idx="11" type="ftr"/>
+            <p:ph type="ftr" idx="11"/>
           </p:nvPr>
         </p:nvSpPr>
         <p:spPr>
@@ -9685,7 +9938,7 @@
           </a:ln>
         </p:spPr>
         <p:txBody>
-          <a:bodyPr anchorCtr="0" anchor="ctr" bIns="45700" lIns="91425" spcFirstLastPara="1" rIns="91425" wrap="square" tIns="45700">
+          <a:bodyPr spcFirstLastPara="1" wrap="square" lIns="91425" tIns="45700" rIns="91425" bIns="45700" anchor="ctr" anchorCtr="0">
             <a:noAutofit/>
           </a:bodyPr>
           <a:lstStyle>
@@ -9789,15 +10042,19 @@
               <a:defRPr/>
             </a:lvl9pPr>
           </a:lstStyle>
-          <a:p/>
+          <a:p>
+            <a:endParaRPr/>
+          </a:p>
         </p:txBody>
       </p:sp>
       <p:sp>
         <p:nvSpPr>
           <p:cNvPr id="64" name="Google Shape;64;p12"/>
-          <p:cNvSpPr txBox="1"/>
+          <p:cNvSpPr txBox="1">
+            <a:spLocks noGrp="1"/>
+          </p:cNvSpPr>
           <p:nvPr>
-            <p:ph idx="12" type="sldNum"/>
+            <p:ph type="sldNum" idx="12"/>
           </p:nvPr>
         </p:nvSpPr>
         <p:spPr>
@@ -9814,67 +10071,67 @@
           </a:ln>
         </p:spPr>
         <p:txBody>
-          <a:bodyPr anchorCtr="0" anchor="ctr" bIns="45700" lIns="91425" spcFirstLastPara="1" rIns="91425" wrap="square" tIns="45700">
+          <a:bodyPr spcFirstLastPara="1" wrap="square" lIns="91425" tIns="45700" rIns="91425" bIns="45700" anchor="ctr" anchorCtr="0">
             <a:noAutofit/>
           </a:bodyPr>
           <a:lstStyle>
-            <a:lvl1pPr indent="0" lvl="0" marL="0" algn="r">
+            <a:lvl1pPr marL="0" lvl="0" indent="0" algn="r">
               <a:spcBef>
                 <a:spcPts val="0"/>
               </a:spcBef>
               <a:buNone/>
               <a:defRPr/>
             </a:lvl1pPr>
-            <a:lvl2pPr indent="0" lvl="1" marL="0" algn="r">
+            <a:lvl2pPr marL="0" lvl="1" indent="0" algn="r">
               <a:spcBef>
                 <a:spcPts val="0"/>
               </a:spcBef>
               <a:buNone/>
               <a:defRPr/>
             </a:lvl2pPr>
-            <a:lvl3pPr indent="0" lvl="2" marL="0" algn="r">
+            <a:lvl3pPr marL="0" lvl="2" indent="0" algn="r">
               <a:spcBef>
                 <a:spcPts val="0"/>
               </a:spcBef>
               <a:buNone/>
               <a:defRPr/>
             </a:lvl3pPr>
-            <a:lvl4pPr indent="0" lvl="3" marL="0" algn="r">
+            <a:lvl4pPr marL="0" lvl="3" indent="0" algn="r">
               <a:spcBef>
                 <a:spcPts val="0"/>
               </a:spcBef>
               <a:buNone/>
               <a:defRPr/>
             </a:lvl4pPr>
-            <a:lvl5pPr indent="0" lvl="4" marL="0" algn="r">
+            <a:lvl5pPr marL="0" lvl="4" indent="0" algn="r">
               <a:spcBef>
                 <a:spcPts val="0"/>
               </a:spcBef>
               <a:buNone/>
               <a:defRPr/>
             </a:lvl5pPr>
-            <a:lvl6pPr indent="0" lvl="5" marL="0" algn="r">
+            <a:lvl6pPr marL="0" lvl="5" indent="0" algn="r">
               <a:spcBef>
                 <a:spcPts val="0"/>
               </a:spcBef>
               <a:buNone/>
               <a:defRPr/>
             </a:lvl6pPr>
-            <a:lvl7pPr indent="0" lvl="6" marL="0" algn="r">
+            <a:lvl7pPr marL="0" lvl="6" indent="0" algn="r">
               <a:spcBef>
                 <a:spcPts val="0"/>
               </a:spcBef>
               <a:buNone/>
               <a:defRPr/>
             </a:lvl7pPr>
-            <a:lvl8pPr indent="0" lvl="7" marL="0" algn="r">
+            <a:lvl8pPr marL="0" lvl="7" indent="0" algn="r">
               <a:spcBef>
                 <a:spcPts val="0"/>
               </a:spcBef>
               <a:buNone/>
               <a:defRPr/>
             </a:lvl8pPr>
-            <a:lvl9pPr indent="0" lvl="8" marL="0" algn="r">
+            <a:lvl9pPr marL="0" lvl="8" indent="0" algn="r">
               <a:spcBef>
                 <a:spcPts val="0"/>
               </a:spcBef>
@@ -9883,7 +10140,7 @@
             </a:lvl9pPr>
           </a:lstStyle>
           <a:p>
-            <a:pPr indent="0" lvl="0" marL="0" rtl="0" algn="r">
+            <a:pPr marL="0" lvl="0" indent="0" algn="r" rtl="0">
               <a:spcBef>
                 <a:spcPts val="0"/>
               </a:spcBef>
@@ -9909,11 +10166,11 @@
 </file>
 
 <file path=ppt/slideLayouts/slideLayout9.xml><?xml version="1.0" encoding="utf-8"?>
-<p:sldLayout xmlns:a="http://schemas.openxmlformats.org/drawingml/2006/main" xmlns:r="http://schemas.openxmlformats.org/officeDocument/2006/relationships" xmlns:mc="http://schemas.openxmlformats.org/markup-compatibility/2006" xmlns:mv="urn:schemas-microsoft-com:mac:vml" xmlns:p="http://schemas.openxmlformats.org/presentationml/2006/main" xmlns:c="http://schemas.openxmlformats.org/drawingml/2006/chart" xmlns:dgm="http://schemas.openxmlformats.org/drawingml/2006/diagram" xmlns:o="urn:schemas-microsoft-com:office:office" xmlns:v="urn:schemas-microsoft-com:vml" xmlns:pvml="urn:schemas-microsoft-com:office:powerpoint" xmlns:com="http://schemas.openxmlformats.org/drawingml/2006/compatibility" xmlns:p14="http://schemas.microsoft.com/office/powerpoint/2010/main" xmlns:p15="http://schemas.microsoft.com/office/powerpoint/2012/main" xmlns:ahyp="http://schemas.microsoft.com/office/drawing/2018/hyperlinkcolor" matchingName="Picture with Caption" type="picTx">
+<p:sldLayout xmlns:a="http://schemas.openxmlformats.org/drawingml/2006/main" xmlns:r="http://schemas.openxmlformats.org/officeDocument/2006/relationships" xmlns:p="http://schemas.openxmlformats.org/presentationml/2006/main" matchingName="Picture with Caption" type="picTx">
   <p:cSld name="PICTURE_WITH_CAPTION_TEXT">
     <p:spTree>
       <p:nvGrpSpPr>
-        <p:cNvPr id="65" name="Shape 65"/>
+        <p:cNvPr id="1" name="Shape 65"/>
         <p:cNvGrpSpPr/>
         <p:nvPr/>
       </p:nvGrpSpPr>
@@ -9928,7 +10185,9 @@
       <p:sp>
         <p:nvSpPr>
           <p:cNvPr id="66" name="Google Shape;66;p13"/>
-          <p:cNvSpPr txBox="1"/>
+          <p:cNvSpPr txBox="1">
+            <a:spLocks noGrp="1"/>
+          </p:cNvSpPr>
           <p:nvPr>
             <p:ph type="title"/>
           </p:nvPr>
@@ -9947,7 +10206,7 @@
           </a:ln>
         </p:spPr>
         <p:txBody>
-          <a:bodyPr anchorCtr="0" anchor="b" bIns="45700" lIns="91425" spcFirstLastPara="1" rIns="91425" wrap="square" tIns="45700">
+          <a:bodyPr spcFirstLastPara="1" wrap="square" lIns="91425" tIns="45700" rIns="91425" bIns="45700" anchor="b" anchorCtr="0">
             <a:normAutofit/>
           </a:bodyPr>
           <a:lstStyle>
@@ -10058,15 +10317,19 @@
               <a:defRPr/>
             </a:lvl9pPr>
           </a:lstStyle>
-          <a:p/>
+          <a:p>
+            <a:endParaRPr/>
+          </a:p>
         </p:txBody>
       </p:sp>
       <p:sp>
         <p:nvSpPr>
           <p:cNvPr id="67" name="Google Shape;67;p13"/>
-          <p:cNvSpPr/>
+          <p:cNvSpPr>
+            <a:spLocks noGrp="1"/>
+          </p:cNvSpPr>
           <p:nvPr>
-            <p:ph idx="2" type="pic"/>
+            <p:ph type="pic" idx="2"/>
           </p:nvPr>
         </p:nvSpPr>
         <p:spPr>
@@ -10086,9 +10349,11 @@
       <p:sp>
         <p:nvSpPr>
           <p:cNvPr id="68" name="Google Shape;68;p13"/>
-          <p:cNvSpPr txBox="1"/>
+          <p:cNvSpPr txBox="1">
+            <a:spLocks noGrp="1"/>
+          </p:cNvSpPr>
           <p:nvPr>
-            <p:ph idx="1" type="body"/>
+            <p:ph type="body" idx="1"/>
           </p:nvPr>
         </p:nvSpPr>
         <p:spPr>
@@ -10105,11 +10370,11 @@
           </a:ln>
         </p:spPr>
         <p:txBody>
-          <a:bodyPr anchorCtr="0" anchor="t" bIns="45700" lIns="91425" spcFirstLastPara="1" rIns="91425" wrap="square" tIns="45700">
+          <a:bodyPr spcFirstLastPara="1" wrap="square" lIns="91425" tIns="45700" rIns="91425" bIns="45700" anchor="t" anchorCtr="0">
             <a:normAutofit/>
           </a:bodyPr>
           <a:lstStyle>
-            <a:lvl1pPr indent="-228600" lvl="0" marL="457200" algn="l">
+            <a:lvl1pPr marL="457200" lvl="0" indent="-228600" algn="l">
               <a:lnSpc>
                 <a:spcPct val="90000"/>
               </a:lnSpc>
@@ -10126,7 +10391,7 @@
               <a:buNone/>
               <a:defRPr sz="1600"/>
             </a:lvl1pPr>
-            <a:lvl2pPr indent="-228600" lvl="1" marL="914400" algn="l">
+            <a:lvl2pPr marL="914400" lvl="1" indent="-228600" algn="l">
               <a:lnSpc>
                 <a:spcPct val="90000"/>
               </a:lnSpc>
@@ -10143,7 +10408,7 @@
               <a:buNone/>
               <a:defRPr sz="1400"/>
             </a:lvl2pPr>
-            <a:lvl3pPr indent="-228600" lvl="2" marL="1371600" algn="l">
+            <a:lvl3pPr marL="1371600" lvl="2" indent="-228600" algn="l">
               <a:lnSpc>
                 <a:spcPct val="90000"/>
               </a:lnSpc>
@@ -10160,7 +10425,7 @@
               <a:buNone/>
               <a:defRPr sz="1200"/>
             </a:lvl3pPr>
-            <a:lvl4pPr indent="-228600" lvl="3" marL="1828800" algn="l">
+            <a:lvl4pPr marL="1828800" lvl="3" indent="-228600" algn="l">
               <a:lnSpc>
                 <a:spcPct val="90000"/>
               </a:lnSpc>
@@ -10177,7 +10442,7 @@
               <a:buNone/>
               <a:defRPr sz="1000"/>
             </a:lvl4pPr>
-            <a:lvl5pPr indent="-228600" lvl="4" marL="2286000" algn="l">
+            <a:lvl5pPr marL="2286000" lvl="4" indent="-228600" algn="l">
               <a:lnSpc>
                 <a:spcPct val="90000"/>
               </a:lnSpc>
@@ -10194,7 +10459,7 @@
               <a:buNone/>
               <a:defRPr sz="1000"/>
             </a:lvl5pPr>
-            <a:lvl6pPr indent="-228600" lvl="5" marL="2743200" algn="l">
+            <a:lvl6pPr marL="2743200" lvl="5" indent="-228600" algn="l">
               <a:lnSpc>
                 <a:spcPct val="90000"/>
               </a:lnSpc>
@@ -10211,7 +10476,7 @@
               <a:buNone/>
               <a:defRPr sz="1000"/>
             </a:lvl6pPr>
-            <a:lvl7pPr indent="-228600" lvl="6" marL="3200400" algn="l">
+            <a:lvl7pPr marL="3200400" lvl="6" indent="-228600" algn="l">
               <a:lnSpc>
                 <a:spcPct val="90000"/>
               </a:lnSpc>
@@ -10228,7 +10493,7 @@
               <a:buNone/>
               <a:defRPr sz="1000"/>
             </a:lvl7pPr>
-            <a:lvl8pPr indent="-228600" lvl="7" marL="3657600" algn="l">
+            <a:lvl8pPr marL="3657600" lvl="7" indent="-228600" algn="l">
               <a:lnSpc>
                 <a:spcPct val="90000"/>
               </a:lnSpc>
@@ -10245,7 +10510,7 @@
               <a:buNone/>
               <a:defRPr sz="1000"/>
             </a:lvl8pPr>
-            <a:lvl9pPr indent="-228600" lvl="8" marL="4114800" algn="l">
+            <a:lvl9pPr marL="4114800" lvl="8" indent="-228600" algn="l">
               <a:lnSpc>
                 <a:spcPct val="90000"/>
               </a:lnSpc>
@@ -10263,15 +10528,19 @@
               <a:defRPr sz="1000"/>
             </a:lvl9pPr>
           </a:lstStyle>
-          <a:p/>
+          <a:p>
+            <a:endParaRPr/>
+          </a:p>
         </p:txBody>
       </p:sp>
       <p:sp>
         <p:nvSpPr>
           <p:cNvPr id="69" name="Google Shape;69;p13"/>
-          <p:cNvSpPr txBox="1"/>
+          <p:cNvSpPr txBox="1">
+            <a:spLocks noGrp="1"/>
+          </p:cNvSpPr>
           <p:nvPr>
-            <p:ph idx="10" type="dt"/>
+            <p:ph type="dt" idx="10"/>
           </p:nvPr>
         </p:nvSpPr>
         <p:spPr>
@@ -10288,7 +10557,7 @@
           </a:ln>
         </p:spPr>
         <p:txBody>
-          <a:bodyPr anchorCtr="0" anchor="ctr" bIns="45700" lIns="91425" spcFirstLastPara="1" rIns="91425" wrap="square" tIns="45700">
+          <a:bodyPr spcFirstLastPara="1" wrap="square" lIns="91425" tIns="45700" rIns="91425" bIns="45700" anchor="ctr" anchorCtr="0">
             <a:noAutofit/>
           </a:bodyPr>
           <a:lstStyle>
@@ -10392,15 +10661,19 @@
               <a:defRPr/>
             </a:lvl9pPr>
           </a:lstStyle>
-          <a:p/>
+          <a:p>
+            <a:endParaRPr/>
+          </a:p>
         </p:txBody>
       </p:sp>
       <p:sp>
         <p:nvSpPr>
           <p:cNvPr id="70" name="Google Shape;70;p13"/>
-          <p:cNvSpPr txBox="1"/>
+          <p:cNvSpPr txBox="1">
+            <a:spLocks noGrp="1"/>
+          </p:cNvSpPr>
           <p:nvPr>
-            <p:ph idx="11" type="ftr"/>
+            <p:ph type="ftr" idx="11"/>
           </p:nvPr>
         </p:nvSpPr>
         <p:spPr>
@@ -10417,7 +10690,7 @@
           </a:ln>
         </p:spPr>
         <p:txBody>
-          <a:bodyPr anchorCtr="0" anchor="ctr" bIns="45700" lIns="91425" spcFirstLastPara="1" rIns="91425" wrap="square" tIns="45700">
+          <a:bodyPr spcFirstLastPara="1" wrap="square" lIns="91425" tIns="45700" rIns="91425" bIns="45700" anchor="ctr" anchorCtr="0">
             <a:noAutofit/>
           </a:bodyPr>
           <a:lstStyle>
@@ -10521,15 +10794,19 @@
               <a:defRPr/>
             </a:lvl9pPr>
           </a:lstStyle>
-          <a:p/>
+          <a:p>
+            <a:endParaRPr/>
+          </a:p>
         </p:txBody>
       </p:sp>
       <p:sp>
         <p:nvSpPr>
           <p:cNvPr id="71" name="Google Shape;71;p13"/>
-          <p:cNvSpPr txBox="1"/>
+          <p:cNvSpPr txBox="1">
+            <a:spLocks noGrp="1"/>
+          </p:cNvSpPr>
           <p:nvPr>
-            <p:ph idx="12" type="sldNum"/>
+            <p:ph type="sldNum" idx="12"/>
           </p:nvPr>
         </p:nvSpPr>
         <p:spPr>
@@ -10546,67 +10823,67 @@
           </a:ln>
         </p:spPr>
         <p:txBody>
-          <a:bodyPr anchorCtr="0" anchor="ctr" bIns="45700" lIns="91425" spcFirstLastPara="1" rIns="91425" wrap="square" tIns="45700">
+          <a:bodyPr spcFirstLastPara="1" wrap="square" lIns="91425" tIns="45700" rIns="91425" bIns="45700" anchor="ctr" anchorCtr="0">
             <a:noAutofit/>
           </a:bodyPr>
           <a:lstStyle>
-            <a:lvl1pPr indent="0" lvl="0" marL="0" algn="r">
+            <a:lvl1pPr marL="0" lvl="0" indent="0" algn="r">
               <a:spcBef>
                 <a:spcPts val="0"/>
               </a:spcBef>
               <a:buNone/>
               <a:defRPr/>
             </a:lvl1pPr>
-            <a:lvl2pPr indent="0" lvl="1" marL="0" algn="r">
+            <a:lvl2pPr marL="0" lvl="1" indent="0" algn="r">
               <a:spcBef>
                 <a:spcPts val="0"/>
               </a:spcBef>
               <a:buNone/>
               <a:defRPr/>
             </a:lvl2pPr>
-            <a:lvl3pPr indent="0" lvl="2" marL="0" algn="r">
+            <a:lvl3pPr marL="0" lvl="2" indent="0" algn="r">
               <a:spcBef>
                 <a:spcPts val="0"/>
               </a:spcBef>
               <a:buNone/>
               <a:defRPr/>
             </a:lvl3pPr>
-            <a:lvl4pPr indent="0" lvl="3" marL="0" algn="r">
+            <a:lvl4pPr marL="0" lvl="3" indent="0" algn="r">
               <a:spcBef>
                 <a:spcPts val="0"/>
               </a:spcBef>
               <a:buNone/>
               <a:defRPr/>
             </a:lvl4pPr>
-            <a:lvl5pPr indent="0" lvl="4" marL="0" algn="r">
+            <a:lvl5pPr marL="0" lvl="4" indent="0" algn="r">
               <a:spcBef>
                 <a:spcPts val="0"/>
               </a:spcBef>
               <a:buNone/>
               <a:defRPr/>
             </a:lvl5pPr>
-            <a:lvl6pPr indent="0" lvl="5" marL="0" algn="r">
+            <a:lvl6pPr marL="0" lvl="5" indent="0" algn="r">
               <a:spcBef>
                 <a:spcPts val="0"/>
               </a:spcBef>
               <a:buNone/>
               <a:defRPr/>
             </a:lvl6pPr>
-            <a:lvl7pPr indent="0" lvl="6" marL="0" algn="r">
+            <a:lvl7pPr marL="0" lvl="6" indent="0" algn="r">
               <a:spcBef>
                 <a:spcPts val="0"/>
               </a:spcBef>
               <a:buNone/>
               <a:defRPr/>
             </a:lvl7pPr>
-            <a:lvl8pPr indent="0" lvl="7" marL="0" algn="r">
+            <a:lvl8pPr marL="0" lvl="7" indent="0" algn="r">
               <a:spcBef>
                 <a:spcPts val="0"/>
               </a:spcBef>
               <a:buNone/>
               <a:defRPr/>
             </a:lvl8pPr>
-            <a:lvl9pPr indent="0" lvl="8" marL="0" algn="r">
+            <a:lvl9pPr marL="0" lvl="8" indent="0" algn="r">
               <a:spcBef>
                 <a:spcPts val="0"/>
               </a:spcBef>
@@ -10615,7 +10892,7 @@
             </a:lvl9pPr>
           </a:lstStyle>
           <a:p>
-            <a:pPr indent="0" lvl="0" marL="0" rtl="0" algn="r">
+            <a:pPr marL="0" lvl="0" indent="0" algn="r" rtl="0">
               <a:spcBef>
                 <a:spcPts val="0"/>
               </a:spcBef>
@@ -10641,18 +10918,19 @@
 </file>
 
 <file path=ppt/slideMasters/slideMaster1.xml><?xml version="1.0" encoding="utf-8"?>
-<p:sldMaster xmlns:a="http://schemas.openxmlformats.org/drawingml/2006/main" xmlns:r="http://schemas.openxmlformats.org/officeDocument/2006/relationships" xmlns:mc="http://schemas.openxmlformats.org/markup-compatibility/2006" xmlns:mv="urn:schemas-microsoft-com:mac:vml" xmlns:p="http://schemas.openxmlformats.org/presentationml/2006/main" xmlns:c="http://schemas.openxmlformats.org/drawingml/2006/chart" xmlns:dgm="http://schemas.openxmlformats.org/drawingml/2006/diagram" xmlns:o="urn:schemas-microsoft-com:office:office" xmlns:v="urn:schemas-microsoft-com:vml" xmlns:pvml="urn:schemas-microsoft-com:office:powerpoint" xmlns:com="http://schemas.openxmlformats.org/drawingml/2006/compatibility" xmlns:p14="http://schemas.microsoft.com/office/powerpoint/2010/main" xmlns:p15="http://schemas.microsoft.com/office/powerpoint/2012/main" xmlns:ahyp="http://schemas.microsoft.com/office/drawing/2018/hyperlinkcolor">
+<p:sldMaster xmlns:a="http://schemas.openxmlformats.org/drawingml/2006/main" xmlns:r="http://schemas.openxmlformats.org/officeDocument/2006/relationships" xmlns:p="http://schemas.openxmlformats.org/presentationml/2006/main">
   <p:cSld>
     <p:bg>
       <p:bgPr>
         <a:solidFill>
           <a:schemeClr val="lt1"/>
         </a:solidFill>
+        <a:effectLst/>
       </p:bgPr>
     </p:bg>
     <p:spTree>
       <p:nvGrpSpPr>
-        <p:cNvPr id="9" name="Shape 9"/>
+        <p:cNvPr id="1" name="Shape 9"/>
         <p:cNvGrpSpPr/>
         <p:nvPr/>
       </p:nvGrpSpPr>
@@ -10667,7 +10945,9 @@
       <p:sp>
         <p:nvSpPr>
           <p:cNvPr id="10" name="Google Shape;10;p4"/>
-          <p:cNvSpPr txBox="1"/>
+          <p:cNvSpPr txBox="1">
+            <a:spLocks noGrp="1"/>
+          </p:cNvSpPr>
           <p:nvPr>
             <p:ph type="title"/>
           </p:nvPr>
@@ -10686,11 +10966,11 @@
           </a:ln>
         </p:spPr>
         <p:txBody>
-          <a:bodyPr anchorCtr="0" anchor="ctr" bIns="45700" lIns="91425" spcFirstLastPara="1" rIns="91425" wrap="square" tIns="45700">
+          <a:bodyPr spcFirstLastPara="1" wrap="square" lIns="91425" tIns="45700" rIns="91425" bIns="45700" anchor="ctr" anchorCtr="0">
             <a:normAutofit/>
           </a:bodyPr>
           <a:lstStyle>
-            <a:lvl1pPr lvl="0" marR="0" rtl="0" algn="l">
+            <a:lvl1pPr marR="0" lvl="0" algn="l" rtl="0">
               <a:lnSpc>
                 <a:spcPct val="90000"/>
               </a:lnSpc>
@@ -10706,7 +10986,7 @@
               <a:buSzPts val="4400"/>
               <a:buFont typeface="Calibri"/>
               <a:buNone/>
-              <a:defRPr b="0" i="0" sz="4400" u="none" cap="none" strike="noStrike">
+              <a:defRPr sz="4400" b="0" i="0" u="none" strike="noStrike" cap="none">
                 <a:solidFill>
                   <a:schemeClr val="dk1"/>
                 </a:solidFill>
@@ -10805,15 +11085,19 @@
               <a:defRPr sz="1800"/>
             </a:lvl9pPr>
           </a:lstStyle>
-          <a:p/>
+          <a:p>
+            <a:endParaRPr/>
+          </a:p>
         </p:txBody>
       </p:sp>
       <p:sp>
         <p:nvSpPr>
           <p:cNvPr id="11" name="Google Shape;11;p4"/>
-          <p:cNvSpPr txBox="1"/>
+          <p:cNvSpPr txBox="1">
+            <a:spLocks noGrp="1"/>
+          </p:cNvSpPr>
           <p:nvPr>
-            <p:ph idx="1" type="body"/>
+            <p:ph type="body" idx="1"/>
           </p:nvPr>
         </p:nvSpPr>
         <p:spPr>
@@ -10830,11 +11114,11 @@
           </a:ln>
         </p:spPr>
         <p:txBody>
-          <a:bodyPr anchorCtr="0" anchor="t" bIns="45700" lIns="91425" spcFirstLastPara="1" rIns="91425" wrap="square" tIns="45700">
+          <a:bodyPr spcFirstLastPara="1" wrap="square" lIns="91425" tIns="45700" rIns="91425" bIns="45700" anchor="t" anchorCtr="0">
             <a:normAutofit/>
           </a:bodyPr>
           <a:lstStyle>
-            <a:lvl1pPr indent="-406400" lvl="0" marL="457200" marR="0" rtl="0" algn="l">
+            <a:lvl1pPr marL="457200" marR="0" lvl="0" indent="-406400" algn="l" rtl="0">
               <a:lnSpc>
                 <a:spcPct val="90000"/>
               </a:lnSpc>
@@ -10850,7 +11134,7 @@
               <a:buSzPts val="2800"/>
               <a:buFont typeface="Arial"/>
               <a:buChar char="•"/>
-              <a:defRPr b="0" i="0" sz="2800" u="none" cap="none" strike="noStrike">
+              <a:defRPr sz="2800" b="0" i="0" u="none" strike="noStrike" cap="none">
                 <a:solidFill>
                   <a:schemeClr val="dk1"/>
                 </a:solidFill>
@@ -10860,7 +11144,7 @@
                 <a:sym typeface="Calibri"/>
               </a:defRPr>
             </a:lvl1pPr>
-            <a:lvl2pPr indent="-381000" lvl="1" marL="914400" marR="0" rtl="0" algn="l">
+            <a:lvl2pPr marL="914400" marR="0" lvl="1" indent="-381000" algn="l" rtl="0">
               <a:lnSpc>
                 <a:spcPct val="90000"/>
               </a:lnSpc>
@@ -10876,7 +11160,7 @@
               <a:buSzPts val="2400"/>
               <a:buFont typeface="Arial"/>
               <a:buChar char="•"/>
-              <a:defRPr b="0" i="0" sz="2400" u="none" cap="none" strike="noStrike">
+              <a:defRPr sz="2400" b="0" i="0" u="none" strike="noStrike" cap="none">
                 <a:solidFill>
                   <a:schemeClr val="dk1"/>
                 </a:solidFill>
@@ -10886,7 +11170,7 @@
                 <a:sym typeface="Calibri"/>
               </a:defRPr>
             </a:lvl2pPr>
-            <a:lvl3pPr indent="-355600" lvl="2" marL="1371600" marR="0" rtl="0" algn="l">
+            <a:lvl3pPr marL="1371600" marR="0" lvl="2" indent="-355600" algn="l" rtl="0">
               <a:lnSpc>
                 <a:spcPct val="90000"/>
               </a:lnSpc>
@@ -10902,7 +11186,7 @@
               <a:buSzPts val="2000"/>
               <a:buFont typeface="Arial"/>
               <a:buChar char="•"/>
-              <a:defRPr b="0" i="0" sz="2000" u="none" cap="none" strike="noStrike">
+              <a:defRPr sz="2000" b="0" i="0" u="none" strike="noStrike" cap="none">
                 <a:solidFill>
                   <a:schemeClr val="dk1"/>
                 </a:solidFill>
@@ -10912,7 +11196,7 @@
                 <a:sym typeface="Calibri"/>
               </a:defRPr>
             </a:lvl3pPr>
-            <a:lvl4pPr indent="-342900" lvl="3" marL="1828800" marR="0" rtl="0" algn="l">
+            <a:lvl4pPr marL="1828800" marR="0" lvl="3" indent="-342900" algn="l" rtl="0">
               <a:lnSpc>
                 <a:spcPct val="90000"/>
               </a:lnSpc>
@@ -10928,7 +11212,7 @@
               <a:buSzPts val="1800"/>
               <a:buFont typeface="Arial"/>
               <a:buChar char="•"/>
-              <a:defRPr b="0" i="0" sz="1800" u="none" cap="none" strike="noStrike">
+              <a:defRPr sz="1800" b="0" i="0" u="none" strike="noStrike" cap="none">
                 <a:solidFill>
                   <a:schemeClr val="dk1"/>
                 </a:solidFill>
@@ -10938,7 +11222,7 @@
                 <a:sym typeface="Calibri"/>
               </a:defRPr>
             </a:lvl4pPr>
-            <a:lvl5pPr indent="-342900" lvl="4" marL="2286000" marR="0" rtl="0" algn="l">
+            <a:lvl5pPr marL="2286000" marR="0" lvl="4" indent="-342900" algn="l" rtl="0">
               <a:lnSpc>
                 <a:spcPct val="90000"/>
               </a:lnSpc>
@@ -10954,7 +11238,7 @@
               <a:buSzPts val="1800"/>
               <a:buFont typeface="Arial"/>
               <a:buChar char="•"/>
-              <a:defRPr b="0" i="0" sz="1800" u="none" cap="none" strike="noStrike">
+              <a:defRPr sz="1800" b="0" i="0" u="none" strike="noStrike" cap="none">
                 <a:solidFill>
                   <a:schemeClr val="dk1"/>
                 </a:solidFill>
@@ -10964,7 +11248,7 @@
                 <a:sym typeface="Calibri"/>
               </a:defRPr>
             </a:lvl5pPr>
-            <a:lvl6pPr indent="-342900" lvl="5" marL="2743200" marR="0" rtl="0" algn="l">
+            <a:lvl6pPr marL="2743200" marR="0" lvl="5" indent="-342900" algn="l" rtl="0">
               <a:lnSpc>
                 <a:spcPct val="90000"/>
               </a:lnSpc>
@@ -10980,7 +11264,7 @@
               <a:buSzPts val="1800"/>
               <a:buFont typeface="Arial"/>
               <a:buChar char="•"/>
-              <a:defRPr b="0" i="0" sz="1800" u="none" cap="none" strike="noStrike">
+              <a:defRPr sz="1800" b="0" i="0" u="none" strike="noStrike" cap="none">
                 <a:solidFill>
                   <a:schemeClr val="dk1"/>
                 </a:solidFill>
@@ -10990,7 +11274,7 @@
                 <a:sym typeface="Calibri"/>
               </a:defRPr>
             </a:lvl6pPr>
-            <a:lvl7pPr indent="-342900" lvl="6" marL="3200400" marR="0" rtl="0" algn="l">
+            <a:lvl7pPr marL="3200400" marR="0" lvl="6" indent="-342900" algn="l" rtl="0">
               <a:lnSpc>
                 <a:spcPct val="90000"/>
               </a:lnSpc>
@@ -11006,7 +11290,7 @@
               <a:buSzPts val="1800"/>
               <a:buFont typeface="Arial"/>
               <a:buChar char="•"/>
-              <a:defRPr b="0" i="0" sz="1800" u="none" cap="none" strike="noStrike">
+              <a:defRPr sz="1800" b="0" i="0" u="none" strike="noStrike" cap="none">
                 <a:solidFill>
                   <a:schemeClr val="dk1"/>
                 </a:solidFill>
@@ -11016,7 +11300,7 @@
                 <a:sym typeface="Calibri"/>
               </a:defRPr>
             </a:lvl7pPr>
-            <a:lvl8pPr indent="-342900" lvl="7" marL="3657600" marR="0" rtl="0" algn="l">
+            <a:lvl8pPr marL="3657600" marR="0" lvl="7" indent="-342900" algn="l" rtl="0">
               <a:lnSpc>
                 <a:spcPct val="90000"/>
               </a:lnSpc>
@@ -11032,7 +11316,7 @@
               <a:buSzPts val="1800"/>
               <a:buFont typeface="Arial"/>
               <a:buChar char="•"/>
-              <a:defRPr b="0" i="0" sz="1800" u="none" cap="none" strike="noStrike">
+              <a:defRPr sz="1800" b="0" i="0" u="none" strike="noStrike" cap="none">
                 <a:solidFill>
                   <a:schemeClr val="dk1"/>
                 </a:solidFill>
@@ -11042,7 +11326,7 @@
                 <a:sym typeface="Calibri"/>
               </a:defRPr>
             </a:lvl8pPr>
-            <a:lvl9pPr indent="-342900" lvl="8" marL="4114800" marR="0" rtl="0" algn="l">
+            <a:lvl9pPr marL="4114800" marR="0" lvl="8" indent="-342900" algn="l" rtl="0">
               <a:lnSpc>
                 <a:spcPct val="90000"/>
               </a:lnSpc>
@@ -11058,7 +11342,7 @@
               <a:buSzPts val="1800"/>
               <a:buFont typeface="Arial"/>
               <a:buChar char="•"/>
-              <a:defRPr b="0" i="0" sz="1800" u="none" cap="none" strike="noStrike">
+              <a:defRPr sz="1800" b="0" i="0" u="none" strike="noStrike" cap="none">
                 <a:solidFill>
                   <a:schemeClr val="dk1"/>
                 </a:solidFill>
@@ -11069,15 +11353,19 @@
               </a:defRPr>
             </a:lvl9pPr>
           </a:lstStyle>
-          <a:p/>
+          <a:p>
+            <a:endParaRPr/>
+          </a:p>
         </p:txBody>
       </p:sp>
       <p:sp>
         <p:nvSpPr>
           <p:cNvPr id="12" name="Google Shape;12;p4"/>
-          <p:cNvSpPr txBox="1"/>
+          <p:cNvSpPr txBox="1">
+            <a:spLocks noGrp="1"/>
+          </p:cNvSpPr>
           <p:nvPr>
-            <p:ph idx="10" type="dt"/>
+            <p:ph type="dt" idx="10"/>
           </p:nvPr>
         </p:nvSpPr>
         <p:spPr>
@@ -11094,20 +11382,20 @@
           </a:ln>
         </p:spPr>
         <p:txBody>
-          <a:bodyPr anchorCtr="0" anchor="ctr" bIns="45700" lIns="91425" spcFirstLastPara="1" rIns="91425" wrap="square" tIns="45700">
+          <a:bodyPr spcFirstLastPara="1" wrap="square" lIns="91425" tIns="45700" rIns="91425" bIns="45700" anchor="ctr" anchorCtr="0">
             <a:noAutofit/>
           </a:bodyPr>
           <a:lstStyle>
-            <a:lvl1pPr lvl="0" marR="0" rtl="0" algn="l">
-              <a:spcBef>
-                <a:spcPts val="0"/>
-              </a:spcBef>
-              <a:spcAft>
-                <a:spcPts val="0"/>
-              </a:spcAft>
-              <a:buSzPts val="1400"/>
-              <a:buNone/>
-              <a:defRPr b="0" i="0" sz="1200" u="none" cap="none" strike="noStrike">
+            <a:lvl1pPr marR="0" lvl="0" algn="l" rtl="0">
+              <a:spcBef>
+                <a:spcPts val="0"/>
+              </a:spcBef>
+              <a:spcAft>
+                <a:spcPts val="0"/>
+              </a:spcAft>
+              <a:buSzPts val="1400"/>
+              <a:buNone/>
+              <a:defRPr sz="1200" b="0" i="0" u="none" strike="noStrike" cap="none">
                 <a:solidFill>
                   <a:srgbClr val="888888"/>
                 </a:solidFill>
@@ -11117,16 +11405,16 @@
                 <a:sym typeface="Calibri"/>
               </a:defRPr>
             </a:lvl1pPr>
-            <a:lvl2pPr lvl="1" marR="0" rtl="0" algn="l">
-              <a:spcBef>
-                <a:spcPts val="0"/>
-              </a:spcBef>
-              <a:spcAft>
-                <a:spcPts val="0"/>
-              </a:spcAft>
-              <a:buSzPts val="1400"/>
-              <a:buNone/>
-              <a:defRPr b="0" i="0" sz="1800" u="none" cap="none" strike="noStrike">
+            <a:lvl2pPr marR="0" lvl="1" algn="l" rtl="0">
+              <a:spcBef>
+                <a:spcPts val="0"/>
+              </a:spcBef>
+              <a:spcAft>
+                <a:spcPts val="0"/>
+              </a:spcAft>
+              <a:buSzPts val="1400"/>
+              <a:buNone/>
+              <a:defRPr sz="1800" b="0" i="0" u="none" strike="noStrike" cap="none">
                 <a:solidFill>
                   <a:schemeClr val="dk1"/>
                 </a:solidFill>
@@ -11136,16 +11424,16 @@
                 <a:sym typeface="Calibri"/>
               </a:defRPr>
             </a:lvl2pPr>
-            <a:lvl3pPr lvl="2" marR="0" rtl="0" algn="l">
-              <a:spcBef>
-                <a:spcPts val="0"/>
-              </a:spcBef>
-              <a:spcAft>
-                <a:spcPts val="0"/>
-              </a:spcAft>
-              <a:buSzPts val="1400"/>
-              <a:buNone/>
-              <a:defRPr b="0" i="0" sz="1800" u="none" cap="none" strike="noStrike">
+            <a:lvl3pPr marR="0" lvl="2" algn="l" rtl="0">
+              <a:spcBef>
+                <a:spcPts val="0"/>
+              </a:spcBef>
+              <a:spcAft>
+                <a:spcPts val="0"/>
+              </a:spcAft>
+              <a:buSzPts val="1400"/>
+              <a:buNone/>
+              <a:defRPr sz="1800" b="0" i="0" u="none" strike="noStrike" cap="none">
                 <a:solidFill>
                   <a:schemeClr val="dk1"/>
                 </a:solidFill>
@@ -11155,16 +11443,16 @@
                 <a:sym typeface="Calibri"/>
               </a:defRPr>
             </a:lvl3pPr>
-            <a:lvl4pPr lvl="3" marR="0" rtl="0" algn="l">
-              <a:spcBef>
-                <a:spcPts val="0"/>
-              </a:spcBef>
-              <a:spcAft>
-                <a:spcPts val="0"/>
-              </a:spcAft>
-              <a:buSzPts val="1400"/>
-              <a:buNone/>
-              <a:defRPr b="0" i="0" sz="1800" u="none" cap="none" strike="noStrike">
+            <a:lvl4pPr marR="0" lvl="3" algn="l" rtl="0">
+              <a:spcBef>
+                <a:spcPts val="0"/>
+              </a:spcBef>
+              <a:spcAft>
+                <a:spcPts val="0"/>
+              </a:spcAft>
+              <a:buSzPts val="1400"/>
+              <a:buNone/>
+              <a:defRPr sz="1800" b="0" i="0" u="none" strike="noStrike" cap="none">
                 <a:solidFill>
                   <a:schemeClr val="dk1"/>
                 </a:solidFill>
@@ -11174,16 +11462,16 @@
                 <a:sym typeface="Calibri"/>
               </a:defRPr>
             </a:lvl4pPr>
-            <a:lvl5pPr lvl="4" marR="0" rtl="0" algn="l">
-              <a:spcBef>
-                <a:spcPts val="0"/>
-              </a:spcBef>
-              <a:spcAft>
-                <a:spcPts val="0"/>
-              </a:spcAft>
-              <a:buSzPts val="1400"/>
-              <a:buNone/>
-              <a:defRPr b="0" i="0" sz="1800" u="none" cap="none" strike="noStrike">
+            <a:lvl5pPr marR="0" lvl="4" algn="l" rtl="0">
+              <a:spcBef>
+                <a:spcPts val="0"/>
+              </a:spcBef>
+              <a:spcAft>
+                <a:spcPts val="0"/>
+              </a:spcAft>
+              <a:buSzPts val="1400"/>
+              <a:buNone/>
+              <a:defRPr sz="1800" b="0" i="0" u="none" strike="noStrike" cap="none">
                 <a:solidFill>
                   <a:schemeClr val="dk1"/>
                 </a:solidFill>
@@ -11193,16 +11481,16 @@
                 <a:sym typeface="Calibri"/>
               </a:defRPr>
             </a:lvl5pPr>
-            <a:lvl6pPr lvl="5" marR="0" rtl="0" algn="l">
-              <a:spcBef>
-                <a:spcPts val="0"/>
-              </a:spcBef>
-              <a:spcAft>
-                <a:spcPts val="0"/>
-              </a:spcAft>
-              <a:buSzPts val="1400"/>
-              <a:buNone/>
-              <a:defRPr b="0" i="0" sz="1800" u="none" cap="none" strike="noStrike">
+            <a:lvl6pPr marR="0" lvl="5" algn="l" rtl="0">
+              <a:spcBef>
+                <a:spcPts val="0"/>
+              </a:spcBef>
+              <a:spcAft>
+                <a:spcPts val="0"/>
+              </a:spcAft>
+              <a:buSzPts val="1400"/>
+              <a:buNone/>
+              <a:defRPr sz="1800" b="0" i="0" u="none" strike="noStrike" cap="none">
                 <a:solidFill>
                   <a:schemeClr val="dk1"/>
                 </a:solidFill>
@@ -11212,16 +11500,16 @@
                 <a:sym typeface="Calibri"/>
               </a:defRPr>
             </a:lvl6pPr>
-            <a:lvl7pPr lvl="6" marR="0" rtl="0" algn="l">
-              <a:spcBef>
-                <a:spcPts val="0"/>
-              </a:spcBef>
-              <a:spcAft>
-                <a:spcPts val="0"/>
-              </a:spcAft>
-              <a:buSzPts val="1400"/>
-              <a:buNone/>
-              <a:defRPr b="0" i="0" sz="1800" u="none" cap="none" strike="noStrike">
+            <a:lvl7pPr marR="0" lvl="6" algn="l" rtl="0">
+              <a:spcBef>
+                <a:spcPts val="0"/>
+              </a:spcBef>
+              <a:spcAft>
+                <a:spcPts val="0"/>
+              </a:spcAft>
+              <a:buSzPts val="1400"/>
+              <a:buNone/>
+              <a:defRPr sz="1800" b="0" i="0" u="none" strike="noStrike" cap="none">
                 <a:solidFill>
                   <a:schemeClr val="dk1"/>
                 </a:solidFill>
@@ -11231,16 +11519,16 @@
                 <a:sym typeface="Calibri"/>
               </a:defRPr>
             </a:lvl7pPr>
-            <a:lvl8pPr lvl="7" marR="0" rtl="0" algn="l">
-              <a:spcBef>
-                <a:spcPts val="0"/>
-              </a:spcBef>
-              <a:spcAft>
-                <a:spcPts val="0"/>
-              </a:spcAft>
-              <a:buSzPts val="1400"/>
-              <a:buNone/>
-              <a:defRPr b="0" i="0" sz="1800" u="none" cap="none" strike="noStrike">
+            <a:lvl8pPr marR="0" lvl="7" algn="l" rtl="0">
+              <a:spcBef>
+                <a:spcPts val="0"/>
+              </a:spcBef>
+              <a:spcAft>
+                <a:spcPts val="0"/>
+              </a:spcAft>
+              <a:buSzPts val="1400"/>
+              <a:buNone/>
+              <a:defRPr sz="1800" b="0" i="0" u="none" strike="noStrike" cap="none">
                 <a:solidFill>
                   <a:schemeClr val="dk1"/>
                 </a:solidFill>
@@ -11250,16 +11538,16 @@
                 <a:sym typeface="Calibri"/>
               </a:defRPr>
             </a:lvl8pPr>
-            <a:lvl9pPr lvl="8" marR="0" rtl="0" algn="l">
-              <a:spcBef>
-                <a:spcPts val="0"/>
-              </a:spcBef>
-              <a:spcAft>
-                <a:spcPts val="0"/>
-              </a:spcAft>
-              <a:buSzPts val="1400"/>
-              <a:buNone/>
-              <a:defRPr b="0" i="0" sz="1800" u="none" cap="none" strike="noStrike">
+            <a:lvl9pPr marR="0" lvl="8" algn="l" rtl="0">
+              <a:spcBef>
+                <a:spcPts val="0"/>
+              </a:spcBef>
+              <a:spcAft>
+                <a:spcPts val="0"/>
+              </a:spcAft>
+              <a:buSzPts val="1400"/>
+              <a:buNone/>
+              <a:defRPr sz="1800" b="0" i="0" u="none" strike="noStrike" cap="none">
                 <a:solidFill>
                   <a:schemeClr val="dk1"/>
                 </a:solidFill>
@@ -11270,15 +11558,19 @@
               </a:defRPr>
             </a:lvl9pPr>
           </a:lstStyle>
-          <a:p/>
+          <a:p>
+            <a:endParaRPr/>
+          </a:p>
         </p:txBody>
       </p:sp>
       <p:sp>
         <p:nvSpPr>
           <p:cNvPr id="13" name="Google Shape;13;p4"/>
-          <p:cNvSpPr txBox="1"/>
+          <p:cNvSpPr txBox="1">
+            <a:spLocks noGrp="1"/>
+          </p:cNvSpPr>
           <p:nvPr>
-            <p:ph idx="11" type="ftr"/>
+            <p:ph type="ftr" idx="11"/>
           </p:nvPr>
         </p:nvSpPr>
         <p:spPr>
@@ -11295,20 +11587,20 @@
           </a:ln>
         </p:spPr>
         <p:txBody>
-          <a:bodyPr anchorCtr="0" anchor="ctr" bIns="45700" lIns="91425" spcFirstLastPara="1" rIns="91425" wrap="square" tIns="45700">
+          <a:bodyPr spcFirstLastPara="1" wrap="square" lIns="91425" tIns="45700" rIns="91425" bIns="45700" anchor="ctr" anchorCtr="0">
             <a:noAutofit/>
           </a:bodyPr>
           <a:lstStyle>
-            <a:lvl1pPr lvl="0" marR="0" rtl="0" algn="ctr">
-              <a:spcBef>
-                <a:spcPts val="0"/>
-              </a:spcBef>
-              <a:spcAft>
-                <a:spcPts val="0"/>
-              </a:spcAft>
-              <a:buSzPts val="1400"/>
-              <a:buNone/>
-              <a:defRPr b="0" i="0" sz="1200" u="none" cap="none" strike="noStrike">
+            <a:lvl1pPr marR="0" lvl="0" algn="ctr" rtl="0">
+              <a:spcBef>
+                <a:spcPts val="0"/>
+              </a:spcBef>
+              <a:spcAft>
+                <a:spcPts val="0"/>
+              </a:spcAft>
+              <a:buSzPts val="1400"/>
+              <a:buNone/>
+              <a:defRPr sz="1200" b="0" i="0" u="none" strike="noStrike" cap="none">
                 <a:solidFill>
                   <a:srgbClr val="888888"/>
                 </a:solidFill>
@@ -11318,16 +11610,16 @@
                 <a:sym typeface="Calibri"/>
               </a:defRPr>
             </a:lvl1pPr>
-            <a:lvl2pPr lvl="1" marR="0" rtl="0" algn="l">
-              <a:spcBef>
-                <a:spcPts val="0"/>
-              </a:spcBef>
-              <a:spcAft>
-                <a:spcPts val="0"/>
-              </a:spcAft>
-              <a:buSzPts val="1400"/>
-              <a:buNone/>
-              <a:defRPr b="0" i="0" sz="1800" u="none" cap="none" strike="noStrike">
+            <a:lvl2pPr marR="0" lvl="1" algn="l" rtl="0">
+              <a:spcBef>
+                <a:spcPts val="0"/>
+              </a:spcBef>
+              <a:spcAft>
+                <a:spcPts val="0"/>
+              </a:spcAft>
+              <a:buSzPts val="1400"/>
+              <a:buNone/>
+              <a:defRPr sz="1800" b="0" i="0" u="none" strike="noStrike" cap="none">
                 <a:solidFill>
                   <a:schemeClr val="dk1"/>
                 </a:solidFill>
@@ -11337,16 +11629,16 @@
                 <a:sym typeface="Calibri"/>
               </a:defRPr>
             </a:lvl2pPr>
-            <a:lvl3pPr lvl="2" marR="0" rtl="0" algn="l">
-              <a:spcBef>
-                <a:spcPts val="0"/>
-              </a:spcBef>
-              <a:spcAft>
-                <a:spcPts val="0"/>
-              </a:spcAft>
-              <a:buSzPts val="1400"/>
-              <a:buNone/>
-              <a:defRPr b="0" i="0" sz="1800" u="none" cap="none" strike="noStrike">
+            <a:lvl3pPr marR="0" lvl="2" algn="l" rtl="0">
+              <a:spcBef>
+                <a:spcPts val="0"/>
+              </a:spcBef>
+              <a:spcAft>
+                <a:spcPts val="0"/>
+              </a:spcAft>
+              <a:buSzPts val="1400"/>
+              <a:buNone/>
+              <a:defRPr sz="1800" b="0" i="0" u="none" strike="noStrike" cap="none">
                 <a:solidFill>
                   <a:schemeClr val="dk1"/>
                 </a:solidFill>
@@ -11356,16 +11648,16 @@
                 <a:sym typeface="Calibri"/>
               </a:defRPr>
             </a:lvl3pPr>
-            <a:lvl4pPr lvl="3" marR="0" rtl="0" algn="l">
-              <a:spcBef>
-                <a:spcPts val="0"/>
-              </a:spcBef>
-              <a:spcAft>
-                <a:spcPts val="0"/>
-              </a:spcAft>
-              <a:buSzPts val="1400"/>
-              <a:buNone/>
-              <a:defRPr b="0" i="0" sz="1800" u="none" cap="none" strike="noStrike">
+            <a:lvl4pPr marR="0" lvl="3" algn="l" rtl="0">
+              <a:spcBef>
+                <a:spcPts val="0"/>
+              </a:spcBef>
+              <a:spcAft>
+                <a:spcPts val="0"/>
+              </a:spcAft>
+              <a:buSzPts val="1400"/>
+              <a:buNone/>
+              <a:defRPr sz="1800" b="0" i="0" u="none" strike="noStrike" cap="none">
                 <a:solidFill>
                   <a:schemeClr val="dk1"/>
                 </a:solidFill>
@@ -11375,16 +11667,16 @@
                 <a:sym typeface="Calibri"/>
               </a:defRPr>
             </a:lvl4pPr>
-            <a:lvl5pPr lvl="4" marR="0" rtl="0" algn="l">
-              <a:spcBef>
-                <a:spcPts val="0"/>
-              </a:spcBef>
-              <a:spcAft>
-                <a:spcPts val="0"/>
-              </a:spcAft>
-              <a:buSzPts val="1400"/>
-              <a:buNone/>
-              <a:defRPr b="0" i="0" sz="1800" u="none" cap="none" strike="noStrike">
+            <a:lvl5pPr marR="0" lvl="4" algn="l" rtl="0">
+              <a:spcBef>
+                <a:spcPts val="0"/>
+              </a:spcBef>
+              <a:spcAft>
+                <a:spcPts val="0"/>
+              </a:spcAft>
+              <a:buSzPts val="1400"/>
+              <a:buNone/>
+              <a:defRPr sz="1800" b="0" i="0" u="none" strike="noStrike" cap="none">
                 <a:solidFill>
                   <a:schemeClr val="dk1"/>
                 </a:solidFill>
@@ -11394,16 +11686,16 @@
                 <a:sym typeface="Calibri"/>
               </a:defRPr>
             </a:lvl5pPr>
-            <a:lvl6pPr lvl="5" marR="0" rtl="0" algn="l">
-              <a:spcBef>
-                <a:spcPts val="0"/>
-              </a:spcBef>
-              <a:spcAft>
-                <a:spcPts val="0"/>
-              </a:spcAft>
-              <a:buSzPts val="1400"/>
-              <a:buNone/>
-              <a:defRPr b="0" i="0" sz="1800" u="none" cap="none" strike="noStrike">
+            <a:lvl6pPr marR="0" lvl="5" algn="l" rtl="0">
+              <a:spcBef>
+                <a:spcPts val="0"/>
+              </a:spcBef>
+              <a:spcAft>
+                <a:spcPts val="0"/>
+              </a:spcAft>
+              <a:buSzPts val="1400"/>
+              <a:buNone/>
+              <a:defRPr sz="1800" b="0" i="0" u="none" strike="noStrike" cap="none">
                 <a:solidFill>
                   <a:schemeClr val="dk1"/>
                 </a:solidFill>
@@ -11413,16 +11705,16 @@
                 <a:sym typeface="Calibri"/>
               </a:defRPr>
             </a:lvl6pPr>
-            <a:lvl7pPr lvl="6" marR="0" rtl="0" algn="l">
-              <a:spcBef>
-                <a:spcPts val="0"/>
-              </a:spcBef>
-              <a:spcAft>
-                <a:spcPts val="0"/>
-              </a:spcAft>
-              <a:buSzPts val="1400"/>
-              <a:buNone/>
-              <a:defRPr b="0" i="0" sz="1800" u="none" cap="none" strike="noStrike">
+            <a:lvl7pPr marR="0" lvl="6" algn="l" rtl="0">
+              <a:spcBef>
+                <a:spcPts val="0"/>
+              </a:spcBef>
+              <a:spcAft>
+                <a:spcPts val="0"/>
+              </a:spcAft>
+              <a:buSzPts val="1400"/>
+              <a:buNone/>
+              <a:defRPr sz="1800" b="0" i="0" u="none" strike="noStrike" cap="none">
                 <a:solidFill>
                   <a:schemeClr val="dk1"/>
                 </a:solidFill>
@@ -11432,16 +11724,16 @@
                 <a:sym typeface="Calibri"/>
               </a:defRPr>
             </a:lvl7pPr>
-            <a:lvl8pPr lvl="7" marR="0" rtl="0" algn="l">
-              <a:spcBef>
-                <a:spcPts val="0"/>
-              </a:spcBef>
-              <a:spcAft>
-                <a:spcPts val="0"/>
-              </a:spcAft>
-              <a:buSzPts val="1400"/>
-              <a:buNone/>
-              <a:defRPr b="0" i="0" sz="1800" u="none" cap="none" strike="noStrike">
+            <a:lvl8pPr marR="0" lvl="7" algn="l" rtl="0">
+              <a:spcBef>
+                <a:spcPts val="0"/>
+              </a:spcBef>
+              <a:spcAft>
+                <a:spcPts val="0"/>
+              </a:spcAft>
+              <a:buSzPts val="1400"/>
+              <a:buNone/>
+              <a:defRPr sz="1800" b="0" i="0" u="none" strike="noStrike" cap="none">
                 <a:solidFill>
                   <a:schemeClr val="dk1"/>
                 </a:solidFill>
@@ -11451,16 +11743,16 @@
                 <a:sym typeface="Calibri"/>
               </a:defRPr>
             </a:lvl8pPr>
-            <a:lvl9pPr lvl="8" marR="0" rtl="0" algn="l">
-              <a:spcBef>
-                <a:spcPts val="0"/>
-              </a:spcBef>
-              <a:spcAft>
-                <a:spcPts val="0"/>
-              </a:spcAft>
-              <a:buSzPts val="1400"/>
-              <a:buNone/>
-              <a:defRPr b="0" i="0" sz="1800" u="none" cap="none" strike="noStrike">
+            <a:lvl9pPr marR="0" lvl="8" algn="l" rtl="0">
+              <a:spcBef>
+                <a:spcPts val="0"/>
+              </a:spcBef>
+              <a:spcAft>
+                <a:spcPts val="0"/>
+              </a:spcAft>
+              <a:buSzPts val="1400"/>
+              <a:buNone/>
+              <a:defRPr sz="1800" b="0" i="0" u="none" strike="noStrike" cap="none">
                 <a:solidFill>
                   <a:schemeClr val="dk1"/>
                 </a:solidFill>
@@ -11471,15 +11763,19 @@
               </a:defRPr>
             </a:lvl9pPr>
           </a:lstStyle>
-          <a:p/>
+          <a:p>
+            <a:endParaRPr/>
+          </a:p>
         </p:txBody>
       </p:sp>
       <p:sp>
         <p:nvSpPr>
           <p:cNvPr id="14" name="Google Shape;14;p4"/>
-          <p:cNvSpPr txBox="1"/>
+          <p:cNvSpPr txBox="1">
+            <a:spLocks noGrp="1"/>
+          </p:cNvSpPr>
           <p:nvPr>
-            <p:ph idx="12" type="sldNum"/>
+            <p:ph type="sldNum" idx="12"/>
           </p:nvPr>
         </p:nvSpPr>
         <p:spPr>
@@ -11496,16 +11792,16 @@
           </a:ln>
         </p:spPr>
         <p:txBody>
-          <a:bodyPr anchorCtr="0" anchor="ctr" bIns="45700" lIns="91425" spcFirstLastPara="1" rIns="91425" wrap="square" tIns="45700">
+          <a:bodyPr spcFirstLastPara="1" wrap="square" lIns="91425" tIns="45700" rIns="91425" bIns="45700" anchor="ctr" anchorCtr="0">
             <a:noAutofit/>
           </a:bodyPr>
           <a:lstStyle>
-            <a:lvl1pPr indent="0" lvl="0" marL="0" marR="0" rtl="0" algn="r">
-              <a:spcBef>
-                <a:spcPts val="0"/>
-              </a:spcBef>
-              <a:buNone/>
-              <a:defRPr b="0" i="0" sz="1200" u="none" cap="none" strike="noStrike">
+            <a:lvl1pPr marL="0" marR="0" lvl="0" indent="0" algn="r" rtl="0">
+              <a:spcBef>
+                <a:spcPts val="0"/>
+              </a:spcBef>
+              <a:buNone/>
+              <a:defRPr sz="1200" b="0" i="0" u="none" strike="noStrike" cap="none">
                 <a:solidFill>
                   <a:srgbClr val="888888"/>
                 </a:solidFill>
@@ -11515,12 +11811,12 @@
                 <a:sym typeface="Calibri"/>
               </a:defRPr>
             </a:lvl1pPr>
-            <a:lvl2pPr indent="0" lvl="1" marL="0" marR="0" rtl="0" algn="r">
-              <a:spcBef>
-                <a:spcPts val="0"/>
-              </a:spcBef>
-              <a:buNone/>
-              <a:defRPr b="0" i="0" sz="1200" u="none" cap="none" strike="noStrike">
+            <a:lvl2pPr marL="0" marR="0" lvl="1" indent="0" algn="r" rtl="0">
+              <a:spcBef>
+                <a:spcPts val="0"/>
+              </a:spcBef>
+              <a:buNone/>
+              <a:defRPr sz="1200" b="0" i="0" u="none" strike="noStrike" cap="none">
                 <a:solidFill>
                   <a:srgbClr val="888888"/>
                 </a:solidFill>
@@ -11530,12 +11826,12 @@
                 <a:sym typeface="Calibri"/>
               </a:defRPr>
             </a:lvl2pPr>
-            <a:lvl3pPr indent="0" lvl="2" marL="0" marR="0" rtl="0" algn="r">
-              <a:spcBef>
-                <a:spcPts val="0"/>
-              </a:spcBef>
-              <a:buNone/>
-              <a:defRPr b="0" i="0" sz="1200" u="none" cap="none" strike="noStrike">
+            <a:lvl3pPr marL="0" marR="0" lvl="2" indent="0" algn="r" rtl="0">
+              <a:spcBef>
+                <a:spcPts val="0"/>
+              </a:spcBef>
+              <a:buNone/>
+              <a:defRPr sz="1200" b="0" i="0" u="none" strike="noStrike" cap="none">
                 <a:solidFill>
                   <a:srgbClr val="888888"/>
                 </a:solidFill>
@@ -11545,12 +11841,12 @@
                 <a:sym typeface="Calibri"/>
               </a:defRPr>
             </a:lvl3pPr>
-            <a:lvl4pPr indent="0" lvl="3" marL="0" marR="0" rtl="0" algn="r">
-              <a:spcBef>
-                <a:spcPts val="0"/>
-              </a:spcBef>
-              <a:buNone/>
-              <a:defRPr b="0" i="0" sz="1200" u="none" cap="none" strike="noStrike">
+            <a:lvl4pPr marL="0" marR="0" lvl="3" indent="0" algn="r" rtl="0">
+              <a:spcBef>
+                <a:spcPts val="0"/>
+              </a:spcBef>
+              <a:buNone/>
+              <a:defRPr sz="1200" b="0" i="0" u="none" strike="noStrike" cap="none">
                 <a:solidFill>
                   <a:srgbClr val="888888"/>
                 </a:solidFill>
@@ -11560,12 +11856,12 @@
                 <a:sym typeface="Calibri"/>
               </a:defRPr>
             </a:lvl4pPr>
-            <a:lvl5pPr indent="0" lvl="4" marL="0" marR="0" rtl="0" algn="r">
-              <a:spcBef>
-                <a:spcPts val="0"/>
-              </a:spcBef>
-              <a:buNone/>
-              <a:defRPr b="0" i="0" sz="1200" u="none" cap="none" strike="noStrike">
+            <a:lvl5pPr marL="0" marR="0" lvl="4" indent="0" algn="r" rtl="0">
+              <a:spcBef>
+                <a:spcPts val="0"/>
+              </a:spcBef>
+              <a:buNone/>
+              <a:defRPr sz="1200" b="0" i="0" u="none" strike="noStrike" cap="none">
                 <a:solidFill>
                   <a:srgbClr val="888888"/>
                 </a:solidFill>
@@ -11575,12 +11871,12 @@
                 <a:sym typeface="Calibri"/>
               </a:defRPr>
             </a:lvl5pPr>
-            <a:lvl6pPr indent="0" lvl="5" marL="0" marR="0" rtl="0" algn="r">
-              <a:spcBef>
-                <a:spcPts val="0"/>
-              </a:spcBef>
-              <a:buNone/>
-              <a:defRPr b="0" i="0" sz="1200" u="none" cap="none" strike="noStrike">
+            <a:lvl6pPr marL="0" marR="0" lvl="5" indent="0" algn="r" rtl="0">
+              <a:spcBef>
+                <a:spcPts val="0"/>
+              </a:spcBef>
+              <a:buNone/>
+              <a:defRPr sz="1200" b="0" i="0" u="none" strike="noStrike" cap="none">
                 <a:solidFill>
                   <a:srgbClr val="888888"/>
                 </a:solidFill>
@@ -11590,12 +11886,12 @@
                 <a:sym typeface="Calibri"/>
               </a:defRPr>
             </a:lvl6pPr>
-            <a:lvl7pPr indent="0" lvl="6" marL="0" marR="0" rtl="0" algn="r">
-              <a:spcBef>
-                <a:spcPts val="0"/>
-              </a:spcBef>
-              <a:buNone/>
-              <a:defRPr b="0" i="0" sz="1200" u="none" cap="none" strike="noStrike">
+            <a:lvl7pPr marL="0" marR="0" lvl="6" indent="0" algn="r" rtl="0">
+              <a:spcBef>
+                <a:spcPts val="0"/>
+              </a:spcBef>
+              <a:buNone/>
+              <a:defRPr sz="1200" b="0" i="0" u="none" strike="noStrike" cap="none">
                 <a:solidFill>
                   <a:srgbClr val="888888"/>
                 </a:solidFill>
@@ -11605,12 +11901,12 @@
                 <a:sym typeface="Calibri"/>
               </a:defRPr>
             </a:lvl7pPr>
-            <a:lvl8pPr indent="0" lvl="7" marL="0" marR="0" rtl="0" algn="r">
-              <a:spcBef>
-                <a:spcPts val="0"/>
-              </a:spcBef>
-              <a:buNone/>
-              <a:defRPr b="0" i="0" sz="1200" u="none" cap="none" strike="noStrike">
+            <a:lvl8pPr marL="0" marR="0" lvl="7" indent="0" algn="r" rtl="0">
+              <a:spcBef>
+                <a:spcPts val="0"/>
+              </a:spcBef>
+              <a:buNone/>
+              <a:defRPr sz="1200" b="0" i="0" u="none" strike="noStrike" cap="none">
                 <a:solidFill>
                   <a:srgbClr val="888888"/>
                 </a:solidFill>
@@ -11620,12 +11916,12 @@
                 <a:sym typeface="Calibri"/>
               </a:defRPr>
             </a:lvl8pPr>
-            <a:lvl9pPr indent="0" lvl="8" marL="0" marR="0" rtl="0" algn="r">
-              <a:spcBef>
-                <a:spcPts val="0"/>
-              </a:spcBef>
-              <a:buNone/>
-              <a:defRPr b="0" i="0" sz="1200" u="none" cap="none" strike="noStrike">
+            <a:lvl9pPr marL="0" marR="0" lvl="8" indent="0" algn="r" rtl="0">
+              <a:spcBef>
+                <a:spcPts val="0"/>
+              </a:spcBef>
+              <a:buNone/>
+              <a:defRPr sz="1200" b="0" i="0" u="none" strike="noStrike" cap="none">
                 <a:solidFill>
                   <a:srgbClr val="888888"/>
                 </a:solidFill>
@@ -11637,7 +11933,7 @@
             </a:lvl9pPr>
           </a:lstStyle>
           <a:p>
-            <a:pPr indent="0" lvl="0" marL="0" rtl="0" algn="r">
+            <a:pPr marL="0" lvl="0" indent="0" algn="r" rtl="0">
               <a:spcBef>
                 <a:spcPts val="0"/>
               </a:spcBef>
@@ -11656,7 +11952,7 @@
       </p:sp>
     </p:spTree>
   </p:cSld>
-  <p:clrMap accent1="accent1" accent2="accent2" accent3="accent3" accent4="accent4" accent5="accent5" accent6="accent6" bg1="lt1" bg2="dk2" tx1="dk1" tx2="lt2" folHlink="folHlink" hlink="hlink"/>
+  <p:clrMap bg1="lt1" tx1="dk1" bg2="dk2" tx2="lt2" accent1="accent1" accent2="accent2" accent3="accent3" accent4="accent4" accent5="accent5" accent6="accent6" hlink="hlink" folHlink="folHlink"/>
   <p:sldLayoutIdLst>
     <p:sldLayoutId id="2147483649" r:id="rId1"/>
     <p:sldLayoutId id="2147483650" r:id="rId2"/>
@@ -11670,10 +11966,10 @@
     <p:sldLayoutId id="2147483658" r:id="rId10"/>
     <p:sldLayoutId id="2147483659" r:id="rId11"/>
   </p:sldLayoutIdLst>
-  <p:hf dt="0" ftr="0" hdr="0" sldNum="0"/>
+  <p:hf sldNum="0" hdr="0" ftr="0" dt="0"/>
   <p:txStyles>
     <p:titleStyle>
-      <a:defPPr lvl="0" marR="0" rtl="0" algn="l">
+      <a:defPPr marR="0" lvl="0" algn="l" rtl="0">
         <a:lnSpc>
           <a:spcPct val="100000"/>
         </a:lnSpc>
@@ -11684,7 +11980,7 @@
           <a:spcPts val="0"/>
         </a:spcAft>
       </a:defPPr>
-      <a:lvl1pPr lvl="0" marR="0" rtl="0" algn="l">
+      <a:lvl1pPr marR="0" lvl="0" algn="l" rtl="0">
         <a:lnSpc>
           <a:spcPct val="100000"/>
         </a:lnSpc>
@@ -11698,7 +11994,7 @@
           <a:srgbClr val="000000"/>
         </a:buClr>
         <a:buFont typeface="Arial"/>
-        <a:defRPr b="0" i="0" sz="1400" u="none" cap="none" strike="noStrike">
+        <a:defRPr sz="1400" b="0" i="0" u="none" strike="noStrike" cap="none">
           <a:solidFill>
             <a:srgbClr val="000000"/>
           </a:solidFill>
@@ -11708,7 +12004,7 @@
           <a:sym typeface="Arial"/>
         </a:defRPr>
       </a:lvl1pPr>
-      <a:lvl2pPr lvl="1" marR="0" rtl="0" algn="l">
+      <a:lvl2pPr marR="0" lvl="1" algn="l" rtl="0">
         <a:lnSpc>
           <a:spcPct val="100000"/>
         </a:lnSpc>
@@ -11722,7 +12018,7 @@
           <a:srgbClr val="000000"/>
         </a:buClr>
         <a:buFont typeface="Arial"/>
-        <a:defRPr b="0" i="0" sz="1400" u="none" cap="none" strike="noStrike">
+        <a:defRPr sz="1400" b="0" i="0" u="none" strike="noStrike" cap="none">
           <a:solidFill>
             <a:srgbClr val="000000"/>
           </a:solidFill>
@@ -11732,7 +12028,7 @@
           <a:sym typeface="Arial"/>
         </a:defRPr>
       </a:lvl2pPr>
-      <a:lvl3pPr lvl="2" marR="0" rtl="0" algn="l">
+      <a:lvl3pPr marR="0" lvl="2" algn="l" rtl="0">
         <a:lnSpc>
           <a:spcPct val="100000"/>
         </a:lnSpc>
@@ -11746,7 +12042,7 @@
           <a:srgbClr val="000000"/>
         </a:buClr>
         <a:buFont typeface="Arial"/>
-        <a:defRPr b="0" i="0" sz="1400" u="none" cap="none" strike="noStrike">
+        <a:defRPr sz="1400" b="0" i="0" u="none" strike="noStrike" cap="none">
           <a:solidFill>
             <a:srgbClr val="000000"/>
           </a:solidFill>
@@ -11756,7 +12052,7 @@
           <a:sym typeface="Arial"/>
         </a:defRPr>
       </a:lvl3pPr>
-      <a:lvl4pPr lvl="3" marR="0" rtl="0" algn="l">
+      <a:lvl4pPr marR="0" lvl="3" algn="l" rtl="0">
         <a:lnSpc>
           <a:spcPct val="100000"/>
         </a:lnSpc>
@@ -11770,7 +12066,7 @@
           <a:srgbClr val="000000"/>
         </a:buClr>
         <a:buFont typeface="Arial"/>
-        <a:defRPr b="0" i="0" sz="1400" u="none" cap="none" strike="noStrike">
+        <a:defRPr sz="1400" b="0" i="0" u="none" strike="noStrike" cap="none">
           <a:solidFill>
             <a:srgbClr val="000000"/>
           </a:solidFill>
@@ -11780,7 +12076,7 @@
           <a:sym typeface="Arial"/>
         </a:defRPr>
       </a:lvl4pPr>
-      <a:lvl5pPr lvl="4" marR="0" rtl="0" algn="l">
+      <a:lvl5pPr marR="0" lvl="4" algn="l" rtl="0">
         <a:lnSpc>
           <a:spcPct val="100000"/>
         </a:lnSpc>
@@ -11794,7 +12090,7 @@
           <a:srgbClr val="000000"/>
         </a:buClr>
         <a:buFont typeface="Arial"/>
-        <a:defRPr b="0" i="0" sz="1400" u="none" cap="none" strike="noStrike">
+        <a:defRPr sz="1400" b="0" i="0" u="none" strike="noStrike" cap="none">
           <a:solidFill>
             <a:srgbClr val="000000"/>
           </a:solidFill>
@@ -11804,7 +12100,7 @@
           <a:sym typeface="Arial"/>
         </a:defRPr>
       </a:lvl5pPr>
-      <a:lvl6pPr lvl="5" marR="0" rtl="0" algn="l">
+      <a:lvl6pPr marR="0" lvl="5" algn="l" rtl="0">
         <a:lnSpc>
           <a:spcPct val="100000"/>
         </a:lnSpc>
@@ -11818,7 +12114,7 @@
           <a:srgbClr val="000000"/>
         </a:buClr>
         <a:buFont typeface="Arial"/>
-        <a:defRPr b="0" i="0" sz="1400" u="none" cap="none" strike="noStrike">
+        <a:defRPr sz="1400" b="0" i="0" u="none" strike="noStrike" cap="none">
           <a:solidFill>
             <a:srgbClr val="000000"/>
           </a:solidFill>
@@ -11828,7 +12124,7 @@
           <a:sym typeface="Arial"/>
         </a:defRPr>
       </a:lvl6pPr>
-      <a:lvl7pPr lvl="6" marR="0" rtl="0" algn="l">
+      <a:lvl7pPr marR="0" lvl="6" algn="l" rtl="0">
         <a:lnSpc>
           <a:spcPct val="100000"/>
         </a:lnSpc>
@@ -11842,7 +12138,7 @@
           <a:srgbClr val="000000"/>
         </a:buClr>
         <a:buFont typeface="Arial"/>
-        <a:defRPr b="0" i="0" sz="1400" u="none" cap="none" strike="noStrike">
+        <a:defRPr sz="1400" b="0" i="0" u="none" strike="noStrike" cap="none">
           <a:solidFill>
             <a:srgbClr val="000000"/>
           </a:solidFill>
@@ -11852,7 +12148,7 @@
           <a:sym typeface="Arial"/>
         </a:defRPr>
       </a:lvl7pPr>
-      <a:lvl8pPr lvl="7" marR="0" rtl="0" algn="l">
+      <a:lvl8pPr marR="0" lvl="7" algn="l" rtl="0">
         <a:lnSpc>
           <a:spcPct val="100000"/>
         </a:lnSpc>
@@ -11866,7 +12162,7 @@
           <a:srgbClr val="000000"/>
         </a:buClr>
         <a:buFont typeface="Arial"/>
-        <a:defRPr b="0" i="0" sz="1400" u="none" cap="none" strike="noStrike">
+        <a:defRPr sz="1400" b="0" i="0" u="none" strike="noStrike" cap="none">
           <a:solidFill>
             <a:srgbClr val="000000"/>
           </a:solidFill>
@@ -11876,7 +12172,7 @@
           <a:sym typeface="Arial"/>
         </a:defRPr>
       </a:lvl8pPr>
-      <a:lvl9pPr lvl="8" marR="0" rtl="0" algn="l">
+      <a:lvl9pPr marR="0" lvl="8" algn="l" rtl="0">
         <a:lnSpc>
           <a:spcPct val="100000"/>
         </a:lnSpc>
@@ -11890,7 +12186,7 @@
           <a:srgbClr val="000000"/>
         </a:buClr>
         <a:buFont typeface="Arial"/>
-        <a:defRPr b="0" i="0" sz="1400" u="none" cap="none" strike="noStrike">
+        <a:defRPr sz="1400" b="0" i="0" u="none" strike="noStrike" cap="none">
           <a:solidFill>
             <a:srgbClr val="000000"/>
           </a:solidFill>
@@ -11902,7 +12198,7 @@
       </a:lvl9pPr>
     </p:titleStyle>
     <p:bodyStyle>
-      <a:defPPr lvl="0" marR="0" rtl="0" algn="l">
+      <a:defPPr marR="0" lvl="0" algn="l" rtl="0">
         <a:lnSpc>
           <a:spcPct val="100000"/>
         </a:lnSpc>
@@ -11913,7 +12209,7 @@
           <a:spcPts val="0"/>
         </a:spcAft>
       </a:defPPr>
-      <a:lvl1pPr lvl="0" marR="0" rtl="0" algn="l">
+      <a:lvl1pPr marR="0" lvl="0" algn="l" rtl="0">
         <a:lnSpc>
           <a:spcPct val="100000"/>
         </a:lnSpc>
@@ -11927,7 +12223,7 @@
           <a:srgbClr val="000000"/>
         </a:buClr>
         <a:buFont typeface="Arial"/>
-        <a:defRPr b="0" i="0" sz="1400" u="none" cap="none" strike="noStrike">
+        <a:defRPr sz="1400" b="0" i="0" u="none" strike="noStrike" cap="none">
           <a:solidFill>
             <a:srgbClr val="000000"/>
           </a:solidFill>
@@ -11937,7 +12233,7 @@
           <a:sym typeface="Arial"/>
         </a:defRPr>
       </a:lvl1pPr>
-      <a:lvl2pPr lvl="1" marR="0" rtl="0" algn="l">
+      <a:lvl2pPr marR="0" lvl="1" algn="l" rtl="0">
         <a:lnSpc>
           <a:spcPct val="100000"/>
         </a:lnSpc>
@@ -11951,7 +12247,7 @@
           <a:srgbClr val="000000"/>
         </a:buClr>
         <a:buFont typeface="Arial"/>
-        <a:defRPr b="0" i="0" sz="1400" u="none" cap="none" strike="noStrike">
+        <a:defRPr sz="1400" b="0" i="0" u="none" strike="noStrike" cap="none">
           <a:solidFill>
             <a:srgbClr val="000000"/>
           </a:solidFill>
@@ -11961,7 +12257,7 @@
           <a:sym typeface="Arial"/>
         </a:defRPr>
       </a:lvl2pPr>
-      <a:lvl3pPr lvl="2" marR="0" rtl="0" algn="l">
+      <a:lvl3pPr marR="0" lvl="2" algn="l" rtl="0">
         <a:lnSpc>
           <a:spcPct val="100000"/>
         </a:lnSpc>
@@ -11975,7 +12271,7 @@
           <a:srgbClr val="000000"/>
         </a:buClr>
         <a:buFont typeface="Arial"/>
-        <a:defRPr b="0" i="0" sz="1400" u="none" cap="none" strike="noStrike">
+        <a:defRPr sz="1400" b="0" i="0" u="none" strike="noStrike" cap="none">
           <a:solidFill>
             <a:srgbClr val="000000"/>
           </a:solidFill>
@@ -11985,7 +12281,7 @@
           <a:sym typeface="Arial"/>
         </a:defRPr>
       </a:lvl3pPr>
-      <a:lvl4pPr lvl="3" marR="0" rtl="0" algn="l">
+      <a:lvl4pPr marR="0" lvl="3" algn="l" rtl="0">
         <a:lnSpc>
           <a:spcPct val="100000"/>
         </a:lnSpc>
@@ -11999,7 +12295,7 @@
           <a:srgbClr val="000000"/>
         </a:buClr>
         <a:buFont typeface="Arial"/>
-        <a:defRPr b="0" i="0" sz="1400" u="none" cap="none" strike="noStrike">
+        <a:defRPr sz="1400" b="0" i="0" u="none" strike="noStrike" cap="none">
           <a:solidFill>
             <a:srgbClr val="000000"/>
           </a:solidFill>
@@ -12009,7 +12305,7 @@
           <a:sym typeface="Arial"/>
         </a:defRPr>
       </a:lvl4pPr>
-      <a:lvl5pPr lvl="4" marR="0" rtl="0" algn="l">
+      <a:lvl5pPr marR="0" lvl="4" algn="l" rtl="0">
         <a:lnSpc>
           <a:spcPct val="100000"/>
         </a:lnSpc>
@@ -12023,7 +12319,7 @@
           <a:srgbClr val="000000"/>
         </a:buClr>
         <a:buFont typeface="Arial"/>
-        <a:defRPr b="0" i="0" sz="1400" u="none" cap="none" strike="noStrike">
+        <a:defRPr sz="1400" b="0" i="0" u="none" strike="noStrike" cap="none">
           <a:solidFill>
             <a:srgbClr val="000000"/>
           </a:solidFill>
@@ -12033,7 +12329,7 @@
           <a:sym typeface="Arial"/>
         </a:defRPr>
       </a:lvl5pPr>
-      <a:lvl6pPr lvl="5" marR="0" rtl="0" algn="l">
+      <a:lvl6pPr marR="0" lvl="5" algn="l" rtl="0">
         <a:lnSpc>
           <a:spcPct val="100000"/>
         </a:lnSpc>
@@ -12047,7 +12343,7 @@
           <a:srgbClr val="000000"/>
         </a:buClr>
         <a:buFont typeface="Arial"/>
-        <a:defRPr b="0" i="0" sz="1400" u="none" cap="none" strike="noStrike">
+        <a:defRPr sz="1400" b="0" i="0" u="none" strike="noStrike" cap="none">
           <a:solidFill>
             <a:srgbClr val="000000"/>
           </a:solidFill>
@@ -12057,7 +12353,7 @@
           <a:sym typeface="Arial"/>
         </a:defRPr>
       </a:lvl6pPr>
-      <a:lvl7pPr lvl="6" marR="0" rtl="0" algn="l">
+      <a:lvl7pPr marR="0" lvl="6" algn="l" rtl="0">
         <a:lnSpc>
           <a:spcPct val="100000"/>
         </a:lnSpc>
@@ -12071,7 +12367,7 @@
           <a:srgbClr val="000000"/>
         </a:buClr>
         <a:buFont typeface="Arial"/>
-        <a:defRPr b="0" i="0" sz="1400" u="none" cap="none" strike="noStrike">
+        <a:defRPr sz="1400" b="0" i="0" u="none" strike="noStrike" cap="none">
           <a:solidFill>
             <a:srgbClr val="000000"/>
           </a:solidFill>
@@ -12081,7 +12377,7 @@
           <a:sym typeface="Arial"/>
         </a:defRPr>
       </a:lvl7pPr>
-      <a:lvl8pPr lvl="7" marR="0" rtl="0" algn="l">
+      <a:lvl8pPr marR="0" lvl="7" algn="l" rtl="0">
         <a:lnSpc>
           <a:spcPct val="100000"/>
         </a:lnSpc>
@@ -12095,7 +12391,7 @@
           <a:srgbClr val="000000"/>
         </a:buClr>
         <a:buFont typeface="Arial"/>
-        <a:defRPr b="0" i="0" sz="1400" u="none" cap="none" strike="noStrike">
+        <a:defRPr sz="1400" b="0" i="0" u="none" strike="noStrike" cap="none">
           <a:solidFill>
             <a:srgbClr val="000000"/>
           </a:solidFill>
@@ -12105,7 +12401,7 @@
           <a:sym typeface="Arial"/>
         </a:defRPr>
       </a:lvl8pPr>
-      <a:lvl9pPr lvl="8" marR="0" rtl="0" algn="l">
+      <a:lvl9pPr marR="0" lvl="8" algn="l" rtl="0">
         <a:lnSpc>
           <a:spcPct val="100000"/>
         </a:lnSpc>
@@ -12119,7 +12415,7 @@
           <a:srgbClr val="000000"/>
         </a:buClr>
         <a:buFont typeface="Arial"/>
-        <a:defRPr b="0" i="0" sz="1400" u="none" cap="none" strike="noStrike">
+        <a:defRPr sz="1400" b="0" i="0" u="none" strike="noStrike" cap="none">
           <a:solidFill>
             <a:srgbClr val="000000"/>
           </a:solidFill>
@@ -12131,7 +12427,7 @@
       </a:lvl9pPr>
     </p:bodyStyle>
     <p:otherStyle>
-      <a:defPPr lvl="0" marR="0" rtl="0" algn="l">
+      <a:defPPr marR="0" lvl="0" algn="l" rtl="0">
         <a:lnSpc>
           <a:spcPct val="100000"/>
         </a:lnSpc>
@@ -12142,7 +12438,7 @@
           <a:spcPts val="0"/>
         </a:spcAft>
       </a:defPPr>
-      <a:lvl1pPr lvl="0" marR="0" rtl="0" algn="l">
+      <a:lvl1pPr marR="0" lvl="0" algn="l" rtl="0">
         <a:lnSpc>
           <a:spcPct val="100000"/>
         </a:lnSpc>
@@ -12156,7 +12452,7 @@
           <a:srgbClr val="000000"/>
         </a:buClr>
         <a:buFont typeface="Arial"/>
-        <a:defRPr b="0" i="0" sz="1400" u="none" cap="none" strike="noStrike">
+        <a:defRPr sz="1400" b="0" i="0" u="none" strike="noStrike" cap="none">
           <a:solidFill>
             <a:srgbClr val="000000"/>
           </a:solidFill>
@@ -12166,7 +12462,7 @@
           <a:sym typeface="Arial"/>
         </a:defRPr>
       </a:lvl1pPr>
-      <a:lvl2pPr lvl="1" marR="0" rtl="0" algn="l">
+      <a:lvl2pPr marR="0" lvl="1" algn="l" rtl="0">
         <a:lnSpc>
           <a:spcPct val="100000"/>
         </a:lnSpc>
@@ -12180,7 +12476,7 @@
           <a:srgbClr val="000000"/>
         </a:buClr>
         <a:buFont typeface="Arial"/>
-        <a:defRPr b="0" i="0" sz="1400" u="none" cap="none" strike="noStrike">
+        <a:defRPr sz="1400" b="0" i="0" u="none" strike="noStrike" cap="none">
           <a:solidFill>
             <a:srgbClr val="000000"/>
           </a:solidFill>
@@ -12190,7 +12486,7 @@
           <a:sym typeface="Arial"/>
         </a:defRPr>
       </a:lvl2pPr>
-      <a:lvl3pPr lvl="2" marR="0" rtl="0" algn="l">
+      <a:lvl3pPr marR="0" lvl="2" algn="l" rtl="0">
         <a:lnSpc>
           <a:spcPct val="100000"/>
         </a:lnSpc>
@@ -12204,7 +12500,7 @@
           <a:srgbClr val="000000"/>
         </a:buClr>
         <a:buFont typeface="Arial"/>
-        <a:defRPr b="0" i="0" sz="1400" u="none" cap="none" strike="noStrike">
+        <a:defRPr sz="1400" b="0" i="0" u="none" strike="noStrike" cap="none">
           <a:solidFill>
             <a:srgbClr val="000000"/>
           </a:solidFill>
@@ -12214,7 +12510,7 @@
           <a:sym typeface="Arial"/>
         </a:defRPr>
       </a:lvl3pPr>
-      <a:lvl4pPr lvl="3" marR="0" rtl="0" algn="l">
+      <a:lvl4pPr marR="0" lvl="3" algn="l" rtl="0">
         <a:lnSpc>
           <a:spcPct val="100000"/>
         </a:lnSpc>
@@ -12228,7 +12524,7 @@
           <a:srgbClr val="000000"/>
         </a:buClr>
         <a:buFont typeface="Arial"/>
-        <a:defRPr b="0" i="0" sz="1400" u="none" cap="none" strike="noStrike">
+        <a:defRPr sz="1400" b="0" i="0" u="none" strike="noStrike" cap="none">
           <a:solidFill>
             <a:srgbClr val="000000"/>
           </a:solidFill>
@@ -12238,7 +12534,7 @@
           <a:sym typeface="Arial"/>
         </a:defRPr>
       </a:lvl4pPr>
-      <a:lvl5pPr lvl="4" marR="0" rtl="0" algn="l">
+      <a:lvl5pPr marR="0" lvl="4" algn="l" rtl="0">
         <a:lnSpc>
           <a:spcPct val="100000"/>
         </a:lnSpc>
@@ -12252,7 +12548,7 @@
           <a:srgbClr val="000000"/>
         </a:buClr>
         <a:buFont typeface="Arial"/>
-        <a:defRPr b="0" i="0" sz="1400" u="none" cap="none" strike="noStrike">
+        <a:defRPr sz="1400" b="0" i="0" u="none" strike="noStrike" cap="none">
           <a:solidFill>
             <a:srgbClr val="000000"/>
           </a:solidFill>
@@ -12262,7 +12558,7 @@
           <a:sym typeface="Arial"/>
         </a:defRPr>
       </a:lvl5pPr>
-      <a:lvl6pPr lvl="5" marR="0" rtl="0" algn="l">
+      <a:lvl6pPr marR="0" lvl="5" algn="l" rtl="0">
         <a:lnSpc>
           <a:spcPct val="100000"/>
         </a:lnSpc>
@@ -12276,7 +12572,7 @@
           <a:srgbClr val="000000"/>
         </a:buClr>
         <a:buFont typeface="Arial"/>
-        <a:defRPr b="0" i="0" sz="1400" u="none" cap="none" strike="noStrike">
+        <a:defRPr sz="1400" b="0" i="0" u="none" strike="noStrike" cap="none">
           <a:solidFill>
             <a:srgbClr val="000000"/>
           </a:solidFill>
@@ -12286,7 +12582,7 @@
           <a:sym typeface="Arial"/>
         </a:defRPr>
       </a:lvl6pPr>
-      <a:lvl7pPr lvl="6" marR="0" rtl="0" algn="l">
+      <a:lvl7pPr marR="0" lvl="6" algn="l" rtl="0">
         <a:lnSpc>
           <a:spcPct val="100000"/>
         </a:lnSpc>
@@ -12300,7 +12596,7 @@
           <a:srgbClr val="000000"/>
         </a:buClr>
         <a:buFont typeface="Arial"/>
-        <a:defRPr b="0" i="0" sz="1400" u="none" cap="none" strike="noStrike">
+        <a:defRPr sz="1400" b="0" i="0" u="none" strike="noStrike" cap="none">
           <a:solidFill>
             <a:srgbClr val="000000"/>
           </a:solidFill>
@@ -12310,7 +12606,7 @@
           <a:sym typeface="Arial"/>
         </a:defRPr>
       </a:lvl7pPr>
-      <a:lvl8pPr lvl="7" marR="0" rtl="0" algn="l">
+      <a:lvl8pPr marR="0" lvl="7" algn="l" rtl="0">
         <a:lnSpc>
           <a:spcPct val="100000"/>
         </a:lnSpc>
@@ -12324,7 +12620,7 @@
           <a:srgbClr val="000000"/>
         </a:buClr>
         <a:buFont typeface="Arial"/>
-        <a:defRPr b="0" i="0" sz="1400" u="none" cap="none" strike="noStrike">
+        <a:defRPr sz="1400" b="0" i="0" u="none" strike="noStrike" cap="none">
           <a:solidFill>
             <a:srgbClr val="000000"/>
           </a:solidFill>
@@ -12334,7 +12630,7 @@
           <a:sym typeface="Arial"/>
         </a:defRPr>
       </a:lvl8pPr>
-      <a:lvl9pPr lvl="8" marR="0" rtl="0" algn="l">
+      <a:lvl9pPr marR="0" lvl="8" algn="l" rtl="0">
         <a:lnSpc>
           <a:spcPct val="100000"/>
         </a:lnSpc>
@@ -12348,7 +12644,7 @@
           <a:srgbClr val="000000"/>
         </a:buClr>
         <a:buFont typeface="Arial"/>
-        <a:defRPr b="0" i="0" sz="1400" u="none" cap="none" strike="noStrike">
+        <a:defRPr sz="1400" b="0" i="0" u="none" strike="noStrike" cap="none">
           <a:solidFill>
             <a:srgbClr val="000000"/>
           </a:solidFill>
@@ -12364,11 +12660,11 @@
 </file>
 
 <file path=ppt/slides/slide1.xml><?xml version="1.0" encoding="utf-8"?>
-<p:sld xmlns:a="http://schemas.openxmlformats.org/drawingml/2006/main" xmlns:r="http://schemas.openxmlformats.org/officeDocument/2006/relationships" xmlns:mc="http://schemas.openxmlformats.org/markup-compatibility/2006" xmlns:mv="urn:schemas-microsoft-com:mac:vml" xmlns:p="http://schemas.openxmlformats.org/presentationml/2006/main" xmlns:c="http://schemas.openxmlformats.org/drawingml/2006/chart" xmlns:dgm="http://schemas.openxmlformats.org/drawingml/2006/diagram" xmlns:o="urn:schemas-microsoft-com:office:office" xmlns:v="urn:schemas-microsoft-com:vml" xmlns:pvml="urn:schemas-microsoft-com:office:powerpoint" xmlns:com="http://schemas.openxmlformats.org/drawingml/2006/compatibility" xmlns:p14="http://schemas.microsoft.com/office/powerpoint/2010/main" xmlns:p15="http://schemas.microsoft.com/office/powerpoint/2012/main" xmlns:ahyp="http://schemas.microsoft.com/office/drawing/2018/hyperlinkcolor">
+<p:sld xmlns:a="http://schemas.openxmlformats.org/drawingml/2006/main" xmlns:r="http://schemas.openxmlformats.org/officeDocument/2006/relationships" xmlns:p="http://schemas.openxmlformats.org/presentationml/2006/main">
   <p:cSld>
     <p:spTree>
       <p:nvGrpSpPr>
-        <p:cNvPr id="88" name="Shape 88"/>
+        <p:cNvPr id="1" name="Shape 88"/>
         <p:cNvGrpSpPr/>
         <p:nvPr/>
       </p:nvGrpSpPr>
@@ -12402,12 +12698,12 @@
           </a:ln>
         </p:spPr>
         <p:txBody>
-          <a:bodyPr anchorCtr="0" anchor="ctr" bIns="45700" lIns="91425" spcFirstLastPara="1" rIns="91425" wrap="square" tIns="45700">
+          <a:bodyPr spcFirstLastPara="1" wrap="square" lIns="91425" tIns="45700" rIns="91425" bIns="45700" anchor="ctr" anchorCtr="0">
             <a:noAutofit/>
           </a:bodyPr>
           <a:lstStyle/>
           <a:p>
-            <a:pPr indent="0" lvl="0" marL="0" marR="0" rtl="0" algn="ctr">
+            <a:pPr marL="0" marR="0" lvl="0" indent="0" algn="ctr" rtl="0">
               <a:spcBef>
                 <a:spcPts val="0"/>
               </a:spcBef>
@@ -12416,10 +12712,7 @@
               </a:spcAft>
               <a:buNone/>
             </a:pPr>
-            <a:r>
-              <a:t/>
-            </a:r>
-            <a:endParaRPr b="0" i="0" sz="1800" u="none" cap="none" strike="noStrike">
+            <a:endParaRPr sz="1800" b="0" i="0" u="none" strike="noStrike" cap="none">
               <a:solidFill>
                 <a:schemeClr val="lt1"/>
               </a:solidFill>
@@ -12434,9 +12727,11 @@
       <p:sp>
         <p:nvSpPr>
           <p:cNvPr id="90" name="Google Shape;90;p1"/>
-          <p:cNvSpPr txBox="1"/>
+          <p:cNvSpPr txBox="1">
+            <a:spLocks noGrp="1"/>
+          </p:cNvSpPr>
           <p:nvPr>
-            <p:ph idx="1" type="subTitle"/>
+            <p:ph type="subTitle" idx="1"/>
           </p:nvPr>
         </p:nvSpPr>
         <p:spPr>
@@ -12453,12 +12748,12 @@
           </a:ln>
         </p:spPr>
         <p:txBody>
-          <a:bodyPr anchorCtr="0" anchor="ctr" bIns="45700" lIns="91425" spcFirstLastPara="1" rIns="91425" wrap="square" tIns="45700">
+          <a:bodyPr spcFirstLastPara="1" wrap="square" lIns="91425" tIns="45700" rIns="91425" bIns="45700" anchor="ctr" anchorCtr="0">
             <a:noAutofit/>
           </a:bodyPr>
           <a:lstStyle/>
           <a:p>
-            <a:pPr indent="0" lvl="0" marL="0" rtl="0" algn="ctr">
+            <a:pPr marL="0" lvl="0" indent="0" algn="ctr" rtl="0">
               <a:lnSpc>
                 <a:spcPct val="90000"/>
               </a:lnSpc>
@@ -12476,11 +12771,7 @@
             </a:pPr>
             <a:r>
               <a:rPr lang="en-US" sz="3600"/>
-              <a:t>U5 - Clase 8 - Versionado de c</a:t>
-            </a:r>
-            <a:r>
-              <a:rPr lang="en-US" sz="3600"/>
-              <a:t>ódigo</a:t>
+              <a:t>U5 - Clase 8 - Versionado de código</a:t>
             </a:r>
             <a:endParaRPr sz="3600"/>
           </a:p>
@@ -12496,7 +12787,7 @@
           <a:blip r:embed="rId3">
             <a:alphaModFix/>
           </a:blip>
-          <a:srcRect b="0" l="0" r="0" t="0"/>
+          <a:srcRect/>
           <a:stretch/>
         </p:blipFill>
         <p:spPr>
@@ -12533,12 +12824,12 @@
           </a:ln>
         </p:spPr>
         <p:txBody>
-          <a:bodyPr anchorCtr="0" anchor="ctr" bIns="45700" lIns="91425" spcFirstLastPara="1" rIns="91425" wrap="square" tIns="45700">
+          <a:bodyPr spcFirstLastPara="1" wrap="square" lIns="91425" tIns="45700" rIns="91425" bIns="45700" anchor="ctr" anchorCtr="0">
             <a:normAutofit/>
           </a:bodyPr>
           <a:lstStyle/>
           <a:p>
-            <a:pPr indent="0" lvl="0" marL="0" marR="0" rtl="0" algn="r">
+            <a:pPr marL="0" marR="0" lvl="0" indent="0" algn="r" rtl="0">
               <a:lnSpc>
                 <a:spcPct val="90000"/>
               </a:lnSpc>
@@ -12556,7 +12847,7 @@
               <a:buNone/>
             </a:pPr>
             <a:r>
-              <a:rPr b="0" i="0" lang="en-US" sz="2400" u="none" cap="none" strike="noStrike">
+              <a:rPr lang="en-US" sz="2400" b="0" i="0" u="none" strike="noStrike" cap="none">
                 <a:solidFill>
                   <a:schemeClr val="dk1"/>
                 </a:solidFill>
@@ -12580,11 +12871,11 @@
 </file>
 
 <file path=ppt/slides/slide2.xml><?xml version="1.0" encoding="utf-8"?>
-<p:sld xmlns:a="http://schemas.openxmlformats.org/drawingml/2006/main" xmlns:r="http://schemas.openxmlformats.org/officeDocument/2006/relationships" xmlns:mc="http://schemas.openxmlformats.org/markup-compatibility/2006" xmlns:mv="urn:schemas-microsoft-com:mac:vml" xmlns:p="http://schemas.openxmlformats.org/presentationml/2006/main" xmlns:c="http://schemas.openxmlformats.org/drawingml/2006/chart" xmlns:dgm="http://schemas.openxmlformats.org/drawingml/2006/diagram" xmlns:o="urn:schemas-microsoft-com:office:office" xmlns:v="urn:schemas-microsoft-com:vml" xmlns:pvml="urn:schemas-microsoft-com:office:powerpoint" xmlns:com="http://schemas.openxmlformats.org/drawingml/2006/compatibility" xmlns:p14="http://schemas.microsoft.com/office/powerpoint/2010/main" xmlns:p15="http://schemas.microsoft.com/office/powerpoint/2012/main" xmlns:ahyp="http://schemas.microsoft.com/office/drawing/2018/hyperlinkcolor">
+<p:sld xmlns:a="http://schemas.openxmlformats.org/drawingml/2006/main" xmlns:r="http://schemas.openxmlformats.org/officeDocument/2006/relationships" xmlns:p="http://schemas.openxmlformats.org/presentationml/2006/main">
   <p:cSld>
     <p:spTree>
       <p:nvGrpSpPr>
-        <p:cNvPr id="96" name="Shape 96"/>
+        <p:cNvPr id="1" name="Shape 96"/>
         <p:cNvGrpSpPr/>
         <p:nvPr/>
       </p:nvGrpSpPr>
@@ -12616,12 +12907,12 @@
           </a:ln>
         </p:spPr>
         <p:txBody>
-          <a:bodyPr anchorCtr="0" anchor="ctr" bIns="45700" lIns="91425" spcFirstLastPara="1" rIns="91425" wrap="square" tIns="45700">
+          <a:bodyPr spcFirstLastPara="1" wrap="square" lIns="91425" tIns="45700" rIns="91425" bIns="45700" anchor="ctr" anchorCtr="0">
             <a:normAutofit/>
           </a:bodyPr>
           <a:lstStyle/>
           <a:p>
-            <a:pPr indent="0" lvl="0" marL="0" marR="0" rtl="0" algn="l">
+            <a:pPr marL="0" marR="0" lvl="0" indent="0" algn="l" rtl="0">
               <a:lnSpc>
                 <a:spcPct val="90000"/>
               </a:lnSpc>
@@ -12650,7 +12941,7 @@
               </a:rPr>
               <a:t>Control de versiones</a:t>
             </a:r>
-            <a:endParaRPr b="0" i="0" sz="3200" u="none" cap="none" strike="noStrike">
+            <a:endParaRPr sz="3200" b="0" i="0" u="none" strike="noStrike" cap="none">
               <a:solidFill>
                 <a:schemeClr val="dk1"/>
               </a:solidFill>
@@ -12682,12 +12973,12 @@
           </a:ln>
         </p:spPr>
         <p:txBody>
-          <a:bodyPr anchorCtr="0" anchor="ctr" bIns="45700" lIns="91425" spcFirstLastPara="1" rIns="91425" wrap="square" tIns="45700">
+          <a:bodyPr spcFirstLastPara="1" wrap="square" lIns="91425" tIns="45700" rIns="91425" bIns="45700" anchor="ctr" anchorCtr="0">
             <a:normAutofit/>
           </a:bodyPr>
           <a:lstStyle/>
           <a:p>
-            <a:pPr indent="0" lvl="0" marL="0" marR="0" rtl="0" algn="l">
+            <a:pPr marL="0" marR="0" lvl="0" indent="0" algn="l" rtl="0">
               <a:lnSpc>
                 <a:spcPct val="90000"/>
               </a:lnSpc>
@@ -12705,7 +12996,7 @@
               <a:buNone/>
             </a:pPr>
             <a:r>
-              <a:rPr b="0" i="0" lang="en-US" sz="1600" u="none" cap="none" strike="noStrike">
+              <a:rPr lang="en-US" sz="1600" b="0" i="0" u="none" strike="noStrike" cap="none">
                 <a:solidFill>
                   <a:schemeClr val="dk1"/>
                 </a:solidFill>
@@ -12730,7 +13021,7 @@
           <a:blip r:embed="rId3">
             <a:alphaModFix/>
           </a:blip>
-          <a:srcRect b="0" l="0" r="0" t="0"/>
+          <a:srcRect/>
           <a:stretch/>
         </p:blipFill>
         <p:spPr>
@@ -12767,12 +13058,12 @@
           </a:ln>
         </p:spPr>
         <p:txBody>
-          <a:bodyPr anchorCtr="0" anchor="t" bIns="91425" lIns="91425" spcFirstLastPara="1" rIns="91425" wrap="square" tIns="91425">
+          <a:bodyPr spcFirstLastPara="1" wrap="square" lIns="91425" tIns="91425" rIns="91425" bIns="91425" anchor="t" anchorCtr="0">
             <a:spAutoFit/>
           </a:bodyPr>
           <a:lstStyle/>
           <a:p>
-            <a:pPr indent="-317500" lvl="0" marL="457200" rtl="0" algn="just">
+            <a:pPr marL="457200" lvl="0" indent="-317500" algn="just" rtl="0">
               <a:spcBef>
                 <a:spcPts val="0"/>
               </a:spcBef>
@@ -12787,7 +13078,7 @@
               <a:buChar char="●"/>
             </a:pPr>
             <a:r>
-              <a:rPr b="1" lang="en-US">
+              <a:rPr lang="en-US" b="1">
                 <a:solidFill>
                   <a:srgbClr val="091E42"/>
                 </a:solidFill>
@@ -12815,7 +13106,7 @@
             </a:endParaRPr>
           </a:p>
           <a:p>
-            <a:pPr indent="-317500" lvl="1" marL="914400" rtl="0" algn="just">
+            <a:pPr marL="914400" lvl="1" indent="-317500" algn="just" rtl="0">
               <a:spcBef>
                 <a:spcPts val="0"/>
               </a:spcBef>
@@ -12842,22 +13133,7 @@
                 <a:cs typeface="Roboto"/>
                 <a:sym typeface="Roboto"/>
               </a:rPr>
-              <a:t>Archivos</a:t>
-            </a:r>
-            <a:r>
-              <a:rPr lang="en-US">
-                <a:solidFill>
-                  <a:srgbClr val="091E42"/>
-                </a:solidFill>
-                <a:highlight>
-                  <a:srgbClr val="FFFFFF"/>
-                </a:highlight>
-                <a:latin typeface="Roboto"/>
-                <a:ea typeface="Roboto"/>
-                <a:cs typeface="Roboto"/>
-                <a:sym typeface="Roboto"/>
-              </a:rPr>
-              <a:t> de texto, imágenes, documentación, entre otros.</a:t>
+              <a:t>Archivos de texto, imágenes, documentación, entre otros.</a:t>
             </a:r>
             <a:endParaRPr>
               <a:solidFill>
@@ -12873,7 +13149,7 @@
             </a:endParaRPr>
           </a:p>
           <a:p>
-            <a:pPr indent="-317500" lvl="0" marL="457200" rtl="0" algn="just">
+            <a:pPr marL="457200" lvl="0" indent="-317500" algn="just" rtl="0">
               <a:spcBef>
                 <a:spcPts val="0"/>
               </a:spcBef>
@@ -12888,7 +13164,7 @@
               <a:buChar char="●"/>
             </a:pPr>
             <a:r>
-              <a:rPr b="1" lang="en-US">
+              <a:rPr lang="en-US" b="1">
                 <a:solidFill>
                   <a:srgbClr val="091E42"/>
                 </a:solidFill>
@@ -12916,7 +13192,7 @@
             </a:endParaRPr>
           </a:p>
           <a:p>
-            <a:pPr indent="-317500" lvl="1" marL="914400" rtl="0" algn="just">
+            <a:pPr marL="914400" lvl="1" indent="-317500" algn="just" rtl="0">
               <a:spcBef>
                 <a:spcPts val="0"/>
               </a:spcBef>
@@ -12959,7 +13235,7 @@
             </a:endParaRPr>
           </a:p>
           <a:p>
-            <a:pPr indent="-317500" lvl="0" marL="457200" rtl="0" algn="just">
+            <a:pPr marL="457200" lvl="0" indent="-317500" algn="just" rtl="0">
               <a:spcBef>
                 <a:spcPts val="0"/>
               </a:spcBef>
@@ -12974,7 +13250,7 @@
               <a:buChar char="●"/>
             </a:pPr>
             <a:r>
-              <a:rPr b="1" lang="en-US">
+              <a:rPr lang="en-US" b="1">
                 <a:solidFill>
                   <a:srgbClr val="091E42"/>
                 </a:solidFill>
@@ -13002,7 +13278,7 @@
             </a:endParaRPr>
           </a:p>
           <a:p>
-            <a:pPr indent="-317500" lvl="1" marL="914400" rtl="0" algn="just">
+            <a:pPr marL="914400" lvl="1" indent="-317500" algn="just" rtl="0">
               <a:spcBef>
                 <a:spcPts val="0"/>
               </a:spcBef>
@@ -13068,12 +13344,12 @@
           </a:ln>
         </p:spPr>
         <p:txBody>
-          <a:bodyPr anchorCtr="0" anchor="ctr" bIns="91425" lIns="91425" spcFirstLastPara="1" rIns="91425" wrap="square" tIns="91425">
+          <a:bodyPr spcFirstLastPara="1" wrap="square" lIns="91425" tIns="91425" rIns="91425" bIns="91425" anchor="ctr" anchorCtr="0">
             <a:noAutofit/>
           </a:bodyPr>
           <a:lstStyle/>
           <a:p>
-            <a:pPr indent="0" lvl="0" marL="0" rtl="0" algn="l">
+            <a:pPr marL="0" lvl="0" indent="0" algn="l" rtl="0">
               <a:spcBef>
                 <a:spcPts val="0"/>
               </a:spcBef>
@@ -13128,12 +13404,12 @@
           </a:ln>
         </p:spPr>
         <p:txBody>
-          <a:bodyPr anchorCtr="0" anchor="ctr" bIns="91425" lIns="91425" spcFirstLastPara="1" rIns="91425" wrap="square" tIns="91425">
+          <a:bodyPr spcFirstLastPara="1" wrap="square" lIns="91425" tIns="91425" rIns="91425" bIns="91425" anchor="ctr" anchorCtr="0">
             <a:noAutofit/>
           </a:bodyPr>
           <a:lstStyle/>
           <a:p>
-            <a:pPr indent="0" lvl="0" marL="0" rtl="0" algn="l">
+            <a:pPr marL="0" lvl="0" indent="0" algn="l" rtl="0">
               <a:spcBef>
                 <a:spcPts val="0"/>
               </a:spcBef>
@@ -13186,12 +13462,12 @@
           </a:ln>
         </p:spPr>
         <p:txBody>
-          <a:bodyPr anchorCtr="0" anchor="t" bIns="91425" lIns="91425" spcFirstLastPara="1" rIns="91425" wrap="square" tIns="91425">
+          <a:bodyPr spcFirstLastPara="1" wrap="square" lIns="91425" tIns="91425" rIns="91425" bIns="91425" anchor="t" anchorCtr="0">
             <a:spAutoFit/>
           </a:bodyPr>
           <a:lstStyle/>
           <a:p>
-            <a:pPr indent="-317500" lvl="0" marL="457200" rtl="0" algn="just">
+            <a:pPr marL="457200" lvl="0" indent="-317500" algn="just" rtl="0">
               <a:spcBef>
                 <a:spcPts val="0"/>
               </a:spcBef>
@@ -13206,7 +13482,7 @@
               <a:buChar char="●"/>
             </a:pPr>
             <a:r>
-              <a:rPr b="1" lang="en-US">
+              <a:rPr lang="en-US" b="1">
                 <a:solidFill>
                   <a:srgbClr val="091E42"/>
                 </a:solidFill>
@@ -13234,7 +13510,7 @@
             </a:endParaRPr>
           </a:p>
           <a:p>
-            <a:pPr indent="-317500" lvl="0" marL="457200" rtl="0" algn="just">
+            <a:pPr marL="457200" lvl="0" indent="-317500" algn="just" rtl="0">
               <a:spcBef>
                 <a:spcPts val="0"/>
               </a:spcBef>
@@ -13249,7 +13525,7 @@
               <a:buChar char="●"/>
             </a:pPr>
             <a:r>
-              <a:rPr b="1" lang="en-US">
+              <a:rPr lang="en-US" b="1">
                 <a:solidFill>
                   <a:srgbClr val="091E42"/>
                 </a:solidFill>
@@ -13277,7 +13553,7 @@
             </a:endParaRPr>
           </a:p>
           <a:p>
-            <a:pPr indent="-317500" lvl="0" marL="457200" rtl="0" algn="just">
+            <a:pPr marL="457200" lvl="0" indent="-317500" algn="just" rtl="0">
               <a:spcBef>
                 <a:spcPts val="0"/>
               </a:spcBef>
@@ -13292,7 +13568,7 @@
               <a:buChar char="●"/>
             </a:pPr>
             <a:r>
-              <a:rPr b="1" lang="en-US">
+              <a:rPr lang="en-US" b="1">
                 <a:solidFill>
                   <a:srgbClr val="091E42"/>
                 </a:solidFill>
@@ -13358,11 +13634,11 @@
 </file>
 
 <file path=ppt/slides/slide3.xml><?xml version="1.0" encoding="utf-8"?>
-<p:sld xmlns:a="http://schemas.openxmlformats.org/drawingml/2006/main" xmlns:r="http://schemas.openxmlformats.org/officeDocument/2006/relationships" xmlns:mc="http://schemas.openxmlformats.org/markup-compatibility/2006" xmlns:mv="urn:schemas-microsoft-com:mac:vml" xmlns:p="http://schemas.openxmlformats.org/presentationml/2006/main" xmlns:c="http://schemas.openxmlformats.org/drawingml/2006/chart" xmlns:dgm="http://schemas.openxmlformats.org/drawingml/2006/diagram" xmlns:o="urn:schemas-microsoft-com:office:office" xmlns:v="urn:schemas-microsoft-com:vml" xmlns:pvml="urn:schemas-microsoft-com:office:powerpoint" xmlns:com="http://schemas.openxmlformats.org/drawingml/2006/compatibility" xmlns:p14="http://schemas.microsoft.com/office/powerpoint/2010/main" xmlns:p15="http://schemas.microsoft.com/office/powerpoint/2012/main" xmlns:ahyp="http://schemas.microsoft.com/office/drawing/2018/hyperlinkcolor">
+<p:sld xmlns:a="http://schemas.openxmlformats.org/drawingml/2006/main" xmlns:r="http://schemas.openxmlformats.org/officeDocument/2006/relationships" xmlns:p="http://schemas.openxmlformats.org/presentationml/2006/main">
   <p:cSld>
     <p:spTree>
       <p:nvGrpSpPr>
-        <p:cNvPr id="108" name="Shape 108"/>
+        <p:cNvPr id="1" name="Shape 108"/>
         <p:cNvGrpSpPr/>
         <p:nvPr/>
       </p:nvGrpSpPr>
@@ -13394,12 +13670,12 @@
           </a:ln>
         </p:spPr>
         <p:txBody>
-          <a:bodyPr anchorCtr="0" anchor="ctr" bIns="45700" lIns="91425" spcFirstLastPara="1" rIns="91425" wrap="square" tIns="45700">
+          <a:bodyPr spcFirstLastPara="1" wrap="square" lIns="91425" tIns="45700" rIns="91425" bIns="45700" anchor="ctr" anchorCtr="0">
             <a:normAutofit/>
           </a:bodyPr>
           <a:lstStyle/>
           <a:p>
-            <a:pPr indent="0" lvl="0" marL="0" marR="0" rtl="0" algn="l">
+            <a:pPr marL="0" marR="0" lvl="0" indent="0" algn="l" rtl="0">
               <a:lnSpc>
                 <a:spcPct val="90000"/>
               </a:lnSpc>
@@ -13428,7 +13704,7 @@
               </a:rPr>
               <a:t>Git / GitHub</a:t>
             </a:r>
-            <a:endParaRPr b="0" i="0" sz="3200" u="none" cap="none" strike="noStrike">
+            <a:endParaRPr sz="3200" b="0" i="0" u="none" strike="noStrike" cap="none">
               <a:solidFill>
                 <a:schemeClr val="dk1"/>
               </a:solidFill>
@@ -13460,12 +13736,12 @@
           </a:ln>
         </p:spPr>
         <p:txBody>
-          <a:bodyPr anchorCtr="0" anchor="ctr" bIns="45700" lIns="91425" spcFirstLastPara="1" rIns="91425" wrap="square" tIns="45700">
+          <a:bodyPr spcFirstLastPara="1" wrap="square" lIns="91425" tIns="45700" rIns="91425" bIns="45700" anchor="ctr" anchorCtr="0">
             <a:normAutofit/>
           </a:bodyPr>
           <a:lstStyle/>
           <a:p>
-            <a:pPr indent="0" lvl="0" marL="0" marR="0" rtl="0" algn="l">
+            <a:pPr marL="0" marR="0" lvl="0" indent="0" algn="l" rtl="0">
               <a:lnSpc>
                 <a:spcPct val="90000"/>
               </a:lnSpc>
@@ -13483,7 +13759,7 @@
               <a:buNone/>
             </a:pPr>
             <a:r>
-              <a:rPr b="0" i="0" lang="en-US" sz="1600" u="none" cap="none" strike="noStrike">
+              <a:rPr lang="en-US" sz="1600" b="0" i="0" u="none" strike="noStrike" cap="none">
                 <a:solidFill>
                   <a:schemeClr val="dk1"/>
                 </a:solidFill>
@@ -13508,7 +13784,7 @@
           <a:blip r:embed="rId3">
             <a:alphaModFix/>
           </a:blip>
-          <a:srcRect b="0" l="0" r="0" t="0"/>
+          <a:srcRect/>
           <a:stretch/>
         </p:blipFill>
         <p:spPr>
@@ -13545,12 +13821,12 @@
           </a:ln>
         </p:spPr>
         <p:txBody>
-          <a:bodyPr anchorCtr="0" anchor="t" bIns="91425" lIns="91425" spcFirstLastPara="1" rIns="91425" wrap="square" tIns="91425">
+          <a:bodyPr spcFirstLastPara="1" wrap="square" lIns="91425" tIns="91425" rIns="91425" bIns="91425" anchor="t" anchorCtr="0">
             <a:spAutoFit/>
           </a:bodyPr>
           <a:lstStyle/>
           <a:p>
-            <a:pPr indent="0" lvl="0" marL="0" rtl="0" algn="l">
+            <a:pPr marL="0" lvl="0" indent="0" algn="l" rtl="0">
               <a:spcBef>
                 <a:spcPts val="0"/>
               </a:spcBef>
@@ -13587,23 +13863,23 @@
             <a:avLst/>
           </a:prstGeom>
           <a:noFill/>
-          <a:ln cap="flat" cmpd="sng" w="9525">
+          <a:ln w="9525" cap="flat" cmpd="sng">
             <a:solidFill>
               <a:schemeClr val="accent2"/>
             </a:solidFill>
             <a:prstDash val="solid"/>
             <a:round/>
-            <a:headEnd len="sm" w="sm" type="none"/>
-            <a:tailEnd len="sm" w="sm" type="none"/>
+            <a:headEnd type="none" w="sm" len="sm"/>
+            <a:tailEnd type="none" w="sm" len="sm"/>
           </a:ln>
         </p:spPr>
         <p:txBody>
-          <a:bodyPr anchorCtr="0" anchor="t" bIns="91425" lIns="91425" spcFirstLastPara="1" rIns="91425" wrap="square" tIns="91425">
+          <a:bodyPr spcFirstLastPara="1" wrap="square" lIns="91425" tIns="91425" rIns="91425" bIns="91425" anchor="t" anchorCtr="0">
             <a:spAutoFit/>
           </a:bodyPr>
           <a:lstStyle/>
           <a:p>
-            <a:pPr indent="0" lvl="0" marL="0" rtl="0" algn="ctr">
+            <a:pPr marL="0" lvl="0" indent="0" algn="ctr" rtl="0">
               <a:lnSpc>
                 <a:spcPct val="115000"/>
               </a:lnSpc>
@@ -13616,7 +13892,7 @@
               <a:buNone/>
             </a:pPr>
             <a:r>
-              <a:rPr b="1" lang="en-US">
+              <a:rPr lang="en-US" b="1">
                 <a:solidFill>
                   <a:srgbClr val="434343"/>
                 </a:solidFill>
@@ -13715,12 +13991,12 @@
           </a:ln>
         </p:spPr>
         <p:txBody>
-          <a:bodyPr anchorCtr="0" anchor="t" bIns="91425" lIns="91425" spcFirstLastPara="1" rIns="91425" wrap="square" tIns="91425">
+          <a:bodyPr spcFirstLastPara="1" wrap="square" lIns="91425" tIns="91425" rIns="91425" bIns="91425" anchor="t" anchorCtr="0">
             <a:spAutoFit/>
           </a:bodyPr>
           <a:lstStyle/>
           <a:p>
-            <a:pPr indent="0" lvl="0" marL="0" rtl="0" algn="just">
+            <a:pPr marL="0" lvl="0" indent="0" algn="just" rtl="0">
               <a:lnSpc>
                 <a:spcPct val="115000"/>
               </a:lnSpc>
@@ -13733,7 +14009,7 @@
               <a:buNone/>
             </a:pPr>
             <a:r>
-              <a:rPr b="1" lang="en-US">
+              <a:rPr lang="en-US" b="1">
                 <a:solidFill>
                   <a:srgbClr val="434343"/>
                 </a:solidFill>
@@ -13788,12 +14064,12 @@
           </a:ln>
         </p:spPr>
         <p:txBody>
-          <a:bodyPr anchorCtr="0" anchor="t" bIns="91425" lIns="91425" spcFirstLastPara="1" rIns="91425" wrap="square" tIns="91425">
+          <a:bodyPr spcFirstLastPara="1" wrap="square" lIns="91425" tIns="91425" rIns="91425" bIns="91425" anchor="t" anchorCtr="0">
             <a:spAutoFit/>
           </a:bodyPr>
           <a:lstStyle/>
           <a:p>
-            <a:pPr indent="0" lvl="0" marL="0" rtl="0" algn="l">
+            <a:pPr marL="0" lvl="0" indent="0" algn="l" rtl="0">
               <a:spcBef>
                 <a:spcPts val="0"/>
               </a:spcBef>
@@ -13803,7 +14079,7 @@
               <a:buNone/>
             </a:pPr>
             <a:r>
-              <a:rPr b="1" lang="en-US" sz="4300">
+              <a:rPr lang="en-US" sz="4300" b="1">
                 <a:solidFill>
                   <a:schemeClr val="dk1"/>
                 </a:solidFill>
@@ -13814,7 +14090,7 @@
               </a:rPr>
               <a:t>!=</a:t>
             </a:r>
-            <a:endParaRPr b="1" sz="4300">
+            <a:endParaRPr sz="4300" b="1">
               <a:solidFill>
                 <a:schemeClr val="dk1"/>
               </a:solidFill>
@@ -13846,12 +14122,12 @@
           </a:ln>
         </p:spPr>
         <p:txBody>
-          <a:bodyPr anchorCtr="0" anchor="t" bIns="91425" lIns="91425" spcFirstLastPara="1" rIns="91425" wrap="square" tIns="91425">
+          <a:bodyPr spcFirstLastPara="1" wrap="square" lIns="91425" tIns="91425" rIns="91425" bIns="91425" anchor="t" anchorCtr="0">
             <a:spAutoFit/>
           </a:bodyPr>
           <a:lstStyle/>
           <a:p>
-            <a:pPr indent="0" lvl="0" marL="0" rtl="0" algn="just">
+            <a:pPr marL="0" lvl="0" indent="0" algn="just" rtl="0">
               <a:lnSpc>
                 <a:spcPct val="115000"/>
               </a:lnSpc>
@@ -13864,7 +14140,7 @@
               <a:buNone/>
             </a:pPr>
             <a:r>
-              <a:rPr b="1" lang="en-US">
+              <a:rPr lang="en-US" b="1">
                 <a:solidFill>
                   <a:srgbClr val="434343"/>
                 </a:solidFill>
@@ -13912,30 +14188,30 @@
           </a:xfrm>
           <a:prstGeom prst="rightArrow">
             <a:avLst>
-              <a:gd fmla="val 50000" name="adj1"/>
-              <a:gd fmla="val 50000" name="adj2"/>
+              <a:gd name="adj1" fmla="val 50000"/>
+              <a:gd name="adj2" fmla="val 50000"/>
             </a:avLst>
           </a:prstGeom>
           <a:solidFill>
             <a:schemeClr val="accent2"/>
           </a:solidFill>
-          <a:ln cap="flat" cmpd="sng" w="9525">
+          <a:ln w="9525" cap="flat" cmpd="sng">
             <a:solidFill>
               <a:schemeClr val="accent2"/>
             </a:solidFill>
             <a:prstDash val="solid"/>
             <a:round/>
-            <a:headEnd len="sm" w="sm" type="none"/>
-            <a:tailEnd len="sm" w="sm" type="none"/>
+            <a:headEnd type="none" w="sm" len="sm"/>
+            <a:tailEnd type="none" w="sm" len="sm"/>
           </a:ln>
         </p:spPr>
         <p:txBody>
-          <a:bodyPr anchorCtr="0" anchor="ctr" bIns="91425" lIns="91425" spcFirstLastPara="1" rIns="91425" wrap="square" tIns="91425">
+          <a:bodyPr spcFirstLastPara="1" wrap="square" lIns="91425" tIns="91425" rIns="91425" bIns="91425" anchor="ctr" anchorCtr="0">
             <a:noAutofit/>
           </a:bodyPr>
           <a:lstStyle/>
           <a:p>
-            <a:pPr indent="0" lvl="0" marL="0" rtl="0" algn="ctr">
+            <a:pPr marL="0" lvl="0" indent="0" algn="ctr" rtl="0">
               <a:spcBef>
                 <a:spcPts val="0"/>
               </a:spcBef>
@@ -13944,9 +14220,6 @@
               </a:spcAft>
               <a:buNone/>
             </a:pPr>
-            <a:r>
-              <a:t/>
-            </a:r>
             <a:endParaRPr>
               <a:latin typeface="Calibri"/>
               <a:ea typeface="Calibri"/>
@@ -13976,12 +14249,12 @@
           </a:ln>
         </p:spPr>
         <p:txBody>
-          <a:bodyPr anchorCtr="0" anchor="t" bIns="91425" lIns="91425" spcFirstLastPara="1" rIns="91425" wrap="square" tIns="91425">
+          <a:bodyPr spcFirstLastPara="1" wrap="square" lIns="91425" tIns="91425" rIns="91425" bIns="91425" anchor="t" anchorCtr="0">
             <a:spAutoFit/>
           </a:bodyPr>
           <a:lstStyle/>
           <a:p>
-            <a:pPr indent="0" lvl="0" marL="0" rtl="0" algn="ctr">
+            <a:pPr marL="0" lvl="0" indent="0" algn="ctr" rtl="0">
               <a:spcBef>
                 <a:spcPts val="0"/>
               </a:spcBef>
@@ -14034,12 +14307,12 @@
           </a:ln>
         </p:spPr>
         <p:txBody>
-          <a:bodyPr anchorCtr="0" anchor="t" bIns="91425" lIns="91425" spcFirstLastPara="1" rIns="91425" wrap="square" tIns="91425">
+          <a:bodyPr spcFirstLastPara="1" wrap="square" lIns="91425" tIns="91425" rIns="91425" bIns="91425" anchor="t" anchorCtr="0">
             <a:spAutoFit/>
           </a:bodyPr>
           <a:lstStyle/>
           <a:p>
-            <a:pPr indent="0" lvl="0" marL="0" rtl="0" algn="just">
+            <a:pPr marL="0" lvl="0" indent="0" algn="just" rtl="0">
               <a:spcBef>
                 <a:spcPts val="0"/>
               </a:spcBef>
@@ -14061,7 +14334,7 @@
               <a:t>En </a:t>
             </a:r>
             <a:r>
-              <a:rPr b="1" lang="en-US">
+              <a:rPr lang="en-US" b="1">
                 <a:solidFill>
                   <a:srgbClr val="434343"/>
                 </a:solidFill>
@@ -14082,19 +14355,7 @@
                 <a:cs typeface="Calibri"/>
                 <a:sym typeface="Calibri"/>
               </a:rPr>
-              <a:t> tambi</a:t>
-            </a:r>
-            <a:r>
-              <a:rPr lang="en-US">
-                <a:solidFill>
-                  <a:srgbClr val="434343"/>
-                </a:solidFill>
-                <a:latin typeface="Calibri"/>
-                <a:ea typeface="Calibri"/>
-                <a:cs typeface="Calibri"/>
-                <a:sym typeface="Calibri"/>
-              </a:rPr>
-              <a:t>én existe el control de versiones y es muy útil para prototipado rápido. Sin embargo, para proyectos más grandes y colaborativos, GitHub es más detallado, flexible y escalable.</a:t>
+              <a:t> también existe el control de versiones y es muy útil para prototipado rápido. Sin embargo, para proyectos más grandes y colaborativos, GitHub es más detallado, flexible y escalable.</a:t>
             </a:r>
             <a:endParaRPr>
               <a:solidFill>
@@ -14117,11 +14378,11 @@
 </file>
 
 <file path=ppt/slides/slide4.xml><?xml version="1.0" encoding="utf-8"?>
-<p:sld xmlns:a="http://schemas.openxmlformats.org/drawingml/2006/main" xmlns:r="http://schemas.openxmlformats.org/officeDocument/2006/relationships" xmlns:mc="http://schemas.openxmlformats.org/markup-compatibility/2006" xmlns:mv="urn:schemas-microsoft-com:mac:vml" xmlns:p="http://schemas.openxmlformats.org/presentationml/2006/main" xmlns:c="http://schemas.openxmlformats.org/drawingml/2006/chart" xmlns:dgm="http://schemas.openxmlformats.org/drawingml/2006/diagram" xmlns:o="urn:schemas-microsoft-com:office:office" xmlns:v="urn:schemas-microsoft-com:vml" xmlns:pvml="urn:schemas-microsoft-com:office:powerpoint" xmlns:com="http://schemas.openxmlformats.org/drawingml/2006/compatibility" xmlns:p14="http://schemas.microsoft.com/office/powerpoint/2010/main" xmlns:p15="http://schemas.microsoft.com/office/powerpoint/2012/main" xmlns:ahyp="http://schemas.microsoft.com/office/drawing/2018/hyperlinkcolor">
+<p:sld xmlns:a="http://schemas.openxmlformats.org/drawingml/2006/main" xmlns:r="http://schemas.openxmlformats.org/officeDocument/2006/relationships" xmlns:p="http://schemas.openxmlformats.org/presentationml/2006/main">
   <p:cSld>
     <p:spTree>
       <p:nvGrpSpPr>
-        <p:cNvPr id="125" name="Shape 125"/>
+        <p:cNvPr id="1" name="Shape 125"/>
         <p:cNvGrpSpPr/>
         <p:nvPr/>
       </p:nvGrpSpPr>
@@ -14143,7 +14404,7 @@
           <a:blip r:embed="rId3">
             <a:alphaModFix/>
           </a:blip>
-          <a:srcRect b="14853" l="0" r="9297" t="19830"/>
+          <a:srcRect t="19830" r="9297" b="14853"/>
           <a:stretch/>
         </p:blipFill>
         <p:spPr>
@@ -14180,12 +14441,12 @@
           </a:ln>
         </p:spPr>
         <p:txBody>
-          <a:bodyPr anchorCtr="0" anchor="ctr" bIns="45700" lIns="91425" spcFirstLastPara="1" rIns="91425" wrap="square" tIns="45700">
+          <a:bodyPr spcFirstLastPara="1" wrap="square" lIns="91425" tIns="45700" rIns="91425" bIns="45700" anchor="ctr" anchorCtr="0">
             <a:normAutofit/>
           </a:bodyPr>
           <a:lstStyle/>
           <a:p>
-            <a:pPr indent="0" lvl="0" marL="0" marR="0" rtl="0" algn="l">
+            <a:pPr marL="0" marR="0" lvl="0" indent="0" algn="l" rtl="0">
               <a:lnSpc>
                 <a:spcPct val="90000"/>
               </a:lnSpc>
@@ -14214,7 +14475,7 @@
               </a:rPr>
               <a:t>Creación de un repositorio en </a:t>
             </a:r>
-            <a:endParaRPr b="0" i="0" sz="3200" u="none" cap="none" strike="noStrike">
+            <a:endParaRPr sz="3200" b="0" i="0" u="none" strike="noStrike" cap="none">
               <a:solidFill>
                 <a:schemeClr val="dk1"/>
               </a:solidFill>
@@ -14246,12 +14507,12 @@
           </a:ln>
         </p:spPr>
         <p:txBody>
-          <a:bodyPr anchorCtr="0" anchor="ctr" bIns="45700" lIns="91425" spcFirstLastPara="1" rIns="91425" wrap="square" tIns="45700">
+          <a:bodyPr spcFirstLastPara="1" wrap="square" lIns="91425" tIns="45700" rIns="91425" bIns="45700" anchor="ctr" anchorCtr="0">
             <a:normAutofit/>
           </a:bodyPr>
           <a:lstStyle/>
           <a:p>
-            <a:pPr indent="0" lvl="0" marL="0" marR="0" rtl="0" algn="l">
+            <a:pPr marL="0" marR="0" lvl="0" indent="0" algn="l" rtl="0">
               <a:lnSpc>
                 <a:spcPct val="90000"/>
               </a:lnSpc>
@@ -14269,7 +14530,7 @@
               <a:buNone/>
             </a:pPr>
             <a:r>
-              <a:rPr b="0" i="0" lang="en-US" sz="1600" u="none" cap="none" strike="noStrike">
+              <a:rPr lang="en-US" sz="1600" b="0" i="0" u="none" strike="noStrike" cap="none">
                 <a:solidFill>
                   <a:schemeClr val="dk1"/>
                 </a:solidFill>
@@ -14294,7 +14555,7 @@
           <a:blip r:embed="rId4">
             <a:alphaModFix/>
           </a:blip>
-          <a:srcRect b="0" l="0" r="0" t="0"/>
+          <a:srcRect/>
           <a:stretch/>
         </p:blipFill>
         <p:spPr>
@@ -14321,7 +14582,7 @@
           <a:blip r:embed="rId5">
             <a:alphaModFix/>
           </a:blip>
-          <a:srcRect b="0" l="7192" r="0" t="0"/>
+          <a:srcRect l="7192"/>
           <a:stretch/>
         </p:blipFill>
         <p:spPr>
@@ -14358,12 +14619,12 @@
           </a:ln>
         </p:spPr>
         <p:txBody>
-          <a:bodyPr anchorCtr="0" anchor="t" bIns="91425" lIns="91425" spcFirstLastPara="1" rIns="91425" wrap="square" tIns="91425">
+          <a:bodyPr spcFirstLastPara="1" wrap="square" lIns="91425" tIns="91425" rIns="91425" bIns="91425" anchor="t" anchorCtr="0">
             <a:spAutoFit/>
           </a:bodyPr>
           <a:lstStyle/>
           <a:p>
-            <a:pPr indent="-317500" lvl="0" marL="457200" rtl="0" algn="l">
+            <a:pPr marL="457200" lvl="0" indent="-317500" algn="l" rtl="0">
               <a:spcBef>
                 <a:spcPts val="0"/>
               </a:spcBef>
@@ -14389,7 +14650,7 @@
             <a:endParaRPr/>
           </a:p>
           <a:p>
-            <a:pPr indent="-317500" lvl="0" marL="457200" rtl="0" algn="l">
+            <a:pPr marL="457200" lvl="0" indent="-317500" algn="l" rtl="0">
               <a:spcBef>
                 <a:spcPts val="0"/>
               </a:spcBef>
@@ -14406,7 +14667,7 @@
             <a:endParaRPr/>
           </a:p>
           <a:p>
-            <a:pPr indent="-317500" lvl="0" marL="457200" rtl="0" algn="l">
+            <a:pPr marL="457200" lvl="0" indent="-317500" algn="l" rtl="0">
               <a:spcBef>
                 <a:spcPts val="0"/>
               </a:spcBef>
@@ -14437,27 +14698,27 @@
           </a:xfrm>
           <a:prstGeom prst="roundRect">
             <a:avLst>
-              <a:gd fmla="val 16667" name="adj"/>
+              <a:gd name="adj" fmla="val 16667"/>
             </a:avLst>
           </a:prstGeom>
           <a:noFill/>
-          <a:ln cap="flat" cmpd="sng" w="19050">
+          <a:ln w="19050" cap="flat" cmpd="sng">
             <a:solidFill>
               <a:schemeClr val="accent2"/>
             </a:solidFill>
             <a:prstDash val="solid"/>
             <a:round/>
-            <a:headEnd len="sm" w="sm" type="none"/>
-            <a:tailEnd len="sm" w="sm" type="none"/>
+            <a:headEnd type="none" w="sm" len="sm"/>
+            <a:tailEnd type="none" w="sm" len="sm"/>
           </a:ln>
         </p:spPr>
         <p:txBody>
-          <a:bodyPr anchorCtr="0" anchor="ctr" bIns="91425" lIns="91425" spcFirstLastPara="1" rIns="91425" wrap="square" tIns="91425">
+          <a:bodyPr spcFirstLastPara="1" wrap="square" lIns="91425" tIns="91425" rIns="91425" bIns="91425" anchor="ctr" anchorCtr="0">
             <a:noAutofit/>
           </a:bodyPr>
           <a:lstStyle/>
           <a:p>
-            <a:pPr indent="0" lvl="0" marL="0" rtl="0" algn="ctr">
+            <a:pPr marL="0" lvl="0" indent="0" algn="ctr" rtl="0">
               <a:spcBef>
                 <a:spcPts val="0"/>
               </a:spcBef>
@@ -14466,9 +14727,6 @@
               </a:spcAft>
               <a:buNone/>
             </a:pPr>
-            <a:r>
-              <a:t/>
-            </a:r>
             <a:endParaRPr>
               <a:latin typeface="Calibri"/>
               <a:ea typeface="Calibri"/>
@@ -14488,7 +14746,7 @@
           <a:blip r:embed="rId7">
             <a:alphaModFix/>
           </a:blip>
-          <a:srcRect b="0" l="0" r="0" t="5793"/>
+          <a:srcRect t="5793"/>
           <a:stretch/>
         </p:blipFill>
         <p:spPr>
@@ -14518,30 +14776,30 @@
           </a:xfrm>
           <a:prstGeom prst="rightArrow">
             <a:avLst>
-              <a:gd fmla="val 50000" name="adj1"/>
-              <a:gd fmla="val 50000" name="adj2"/>
+              <a:gd name="adj1" fmla="val 50000"/>
+              <a:gd name="adj2" fmla="val 50000"/>
             </a:avLst>
           </a:prstGeom>
           <a:solidFill>
             <a:schemeClr val="accent2"/>
           </a:solidFill>
-          <a:ln cap="flat" cmpd="sng" w="9525">
+          <a:ln w="9525" cap="flat" cmpd="sng">
             <a:solidFill>
               <a:schemeClr val="accent2"/>
             </a:solidFill>
             <a:prstDash val="solid"/>
             <a:round/>
-            <a:headEnd len="sm" w="sm" type="none"/>
-            <a:tailEnd len="sm" w="sm" type="none"/>
+            <a:headEnd type="none" w="sm" len="sm"/>
+            <a:tailEnd type="none" w="sm" len="sm"/>
           </a:ln>
         </p:spPr>
         <p:txBody>
-          <a:bodyPr anchorCtr="0" anchor="ctr" bIns="91425" lIns="91425" spcFirstLastPara="1" rIns="91425" wrap="square" tIns="91425">
+          <a:bodyPr spcFirstLastPara="1" wrap="square" lIns="91425" tIns="91425" rIns="91425" bIns="91425" anchor="ctr" anchorCtr="0">
             <a:noAutofit/>
           </a:bodyPr>
           <a:lstStyle/>
           <a:p>
-            <a:pPr indent="0" lvl="0" marL="0" rtl="0" algn="ctr">
+            <a:pPr marL="0" lvl="0" indent="0" algn="ctr" rtl="0">
               <a:spcBef>
                 <a:spcPts val="0"/>
               </a:spcBef>
@@ -14550,9 +14808,6 @@
               </a:spcAft>
               <a:buNone/>
             </a:pPr>
-            <a:r>
-              <a:t/>
-            </a:r>
             <a:endParaRPr>
               <a:latin typeface="Calibri"/>
               <a:ea typeface="Calibri"/>
@@ -14575,27 +14830,27 @@
           </a:xfrm>
           <a:prstGeom prst="roundRect">
             <a:avLst>
-              <a:gd fmla="val 16667" name="adj"/>
+              <a:gd name="adj" fmla="val 16667"/>
             </a:avLst>
           </a:prstGeom>
           <a:noFill/>
-          <a:ln cap="flat" cmpd="sng" w="19050">
+          <a:ln w="19050" cap="flat" cmpd="sng">
             <a:solidFill>
               <a:schemeClr val="accent2"/>
             </a:solidFill>
             <a:prstDash val="solid"/>
             <a:round/>
-            <a:headEnd len="sm" w="sm" type="none"/>
-            <a:tailEnd len="sm" w="sm" type="none"/>
+            <a:headEnd type="none" w="sm" len="sm"/>
+            <a:tailEnd type="none" w="sm" len="sm"/>
           </a:ln>
         </p:spPr>
         <p:txBody>
-          <a:bodyPr anchorCtr="0" anchor="ctr" bIns="91425" lIns="91425" spcFirstLastPara="1" rIns="91425" wrap="square" tIns="91425">
+          <a:bodyPr spcFirstLastPara="1" wrap="square" lIns="91425" tIns="91425" rIns="91425" bIns="91425" anchor="ctr" anchorCtr="0">
             <a:noAutofit/>
           </a:bodyPr>
           <a:lstStyle/>
           <a:p>
-            <a:pPr indent="0" lvl="0" marL="0" rtl="0" algn="ctr">
+            <a:pPr marL="0" lvl="0" indent="0" algn="ctr" rtl="0">
               <a:spcBef>
                 <a:spcPts val="0"/>
               </a:spcBef>
@@ -14604,9 +14859,6 @@
               </a:spcAft>
               <a:buNone/>
             </a:pPr>
-            <a:r>
-              <a:t/>
-            </a:r>
             <a:endParaRPr>
               <a:latin typeface="Calibri"/>
               <a:ea typeface="Calibri"/>
@@ -14636,12 +14888,12 @@
           </a:ln>
         </p:spPr>
         <p:txBody>
-          <a:bodyPr anchorCtr="0" anchor="t" bIns="91425" lIns="91425" spcFirstLastPara="1" rIns="91425" wrap="square" tIns="91425">
+          <a:bodyPr spcFirstLastPara="1" wrap="square" lIns="91425" tIns="91425" rIns="91425" bIns="91425" anchor="t" anchorCtr="0">
             <a:spAutoFit/>
           </a:bodyPr>
           <a:lstStyle/>
           <a:p>
-            <a:pPr indent="0" lvl="0" marL="0" rtl="0" algn="l">
+            <a:pPr marL="0" lvl="0" indent="0" algn="l" rtl="0">
               <a:spcBef>
                 <a:spcPts val="0"/>
               </a:spcBef>
@@ -14673,7 +14925,7 @@
             </a:endParaRPr>
           </a:p>
           <a:p>
-            <a:pPr indent="0" lvl="0" marL="0" rtl="0" algn="l">
+            <a:pPr marL="0" lvl="0" indent="0" algn="l" rtl="0">
               <a:spcBef>
                 <a:spcPts val="0"/>
               </a:spcBef>
@@ -14716,7 +14968,7 @@
           <a:blip r:embed="rId8">
             <a:alphaModFix/>
           </a:blip>
-          <a:srcRect b="0" l="0" r="0" t="7604"/>
+          <a:srcRect t="7604"/>
           <a:stretch/>
         </p:blipFill>
         <p:spPr>
@@ -14746,30 +14998,30 @@
           </a:xfrm>
           <a:prstGeom prst="rightArrow">
             <a:avLst>
-              <a:gd fmla="val 50000" name="adj1"/>
-              <a:gd fmla="val 50000" name="adj2"/>
+              <a:gd name="adj1" fmla="val 50000"/>
+              <a:gd name="adj2" fmla="val 50000"/>
             </a:avLst>
           </a:prstGeom>
           <a:solidFill>
             <a:schemeClr val="accent2"/>
           </a:solidFill>
-          <a:ln cap="flat" cmpd="sng" w="9525">
+          <a:ln w="9525" cap="flat" cmpd="sng">
             <a:solidFill>
               <a:schemeClr val="accent2"/>
             </a:solidFill>
             <a:prstDash val="solid"/>
             <a:round/>
-            <a:headEnd len="sm" w="sm" type="none"/>
-            <a:tailEnd len="sm" w="sm" type="none"/>
+            <a:headEnd type="none" w="sm" len="sm"/>
+            <a:tailEnd type="none" w="sm" len="sm"/>
           </a:ln>
         </p:spPr>
         <p:txBody>
-          <a:bodyPr anchorCtr="0" anchor="ctr" bIns="91425" lIns="91425" spcFirstLastPara="1" rIns="91425" wrap="square" tIns="91425">
+          <a:bodyPr spcFirstLastPara="1" wrap="square" lIns="91425" tIns="91425" rIns="91425" bIns="91425" anchor="ctr" anchorCtr="0">
             <a:noAutofit/>
           </a:bodyPr>
           <a:lstStyle/>
           <a:p>
-            <a:pPr indent="0" lvl="0" marL="0" rtl="0" algn="ctr">
+            <a:pPr marL="0" lvl="0" indent="0" algn="ctr" rtl="0">
               <a:spcBef>
                 <a:spcPts val="0"/>
               </a:spcBef>
@@ -14778,9 +15030,6 @@
               </a:spcAft>
               <a:buNone/>
             </a:pPr>
-            <a:r>
-              <a:t/>
-            </a:r>
             <a:endParaRPr>
               <a:latin typeface="Calibri"/>
               <a:ea typeface="Calibri"/>
@@ -14803,27 +15052,27 @@
           </a:xfrm>
           <a:prstGeom prst="roundRect">
             <a:avLst>
-              <a:gd fmla="val 16667" name="adj"/>
+              <a:gd name="adj" fmla="val 16667"/>
             </a:avLst>
           </a:prstGeom>
           <a:noFill/>
-          <a:ln cap="flat" cmpd="sng" w="19050">
+          <a:ln w="19050" cap="flat" cmpd="sng">
             <a:solidFill>
               <a:schemeClr val="accent2"/>
             </a:solidFill>
             <a:prstDash val="solid"/>
             <a:round/>
-            <a:headEnd len="sm" w="sm" type="none"/>
-            <a:tailEnd len="sm" w="sm" type="none"/>
+            <a:headEnd type="none" w="sm" len="sm"/>
+            <a:tailEnd type="none" w="sm" len="sm"/>
           </a:ln>
         </p:spPr>
         <p:txBody>
-          <a:bodyPr anchorCtr="0" anchor="ctr" bIns="91425" lIns="91425" spcFirstLastPara="1" rIns="91425" wrap="square" tIns="91425">
+          <a:bodyPr spcFirstLastPara="1" wrap="square" lIns="91425" tIns="91425" rIns="91425" bIns="91425" anchor="ctr" anchorCtr="0">
             <a:noAutofit/>
           </a:bodyPr>
           <a:lstStyle/>
           <a:p>
-            <a:pPr indent="0" lvl="0" marL="0" rtl="0" algn="ctr">
+            <a:pPr marL="0" lvl="0" indent="0" algn="ctr" rtl="0">
               <a:spcBef>
                 <a:spcPts val="0"/>
               </a:spcBef>
@@ -14832,9 +15081,6 @@
               </a:spcAft>
               <a:buNone/>
             </a:pPr>
-            <a:r>
-              <a:t/>
-            </a:r>
             <a:endParaRPr>
               <a:latin typeface="Calibri"/>
               <a:ea typeface="Calibri"/>
@@ -14864,12 +15110,12 @@
           </a:ln>
         </p:spPr>
         <p:txBody>
-          <a:bodyPr anchorCtr="0" anchor="t" bIns="91425" lIns="91425" spcFirstLastPara="1" rIns="91425" wrap="square" tIns="91425">
+          <a:bodyPr spcFirstLastPara="1" wrap="square" lIns="91425" tIns="91425" rIns="91425" bIns="91425" anchor="t" anchorCtr="0">
             <a:spAutoFit/>
           </a:bodyPr>
           <a:lstStyle/>
           <a:p>
-            <a:pPr indent="0" lvl="0" marL="0" rtl="0" algn="r">
+            <a:pPr marL="0" lvl="0" indent="0" algn="r" rtl="0">
               <a:spcBef>
                 <a:spcPts val="0"/>
               </a:spcBef>
@@ -14901,7 +15147,7 @@
             </a:endParaRPr>
           </a:p>
           <a:p>
-            <a:pPr indent="0" lvl="0" marL="0" rtl="0" algn="l">
+            <a:pPr marL="0" lvl="0" indent="0" algn="l" rtl="0">
               <a:spcBef>
                 <a:spcPts val="0"/>
               </a:spcBef>
@@ -14910,9 +15156,6 @@
               </a:spcAft>
               <a:buNone/>
             </a:pPr>
-            <a:r>
-              <a:t/>
-            </a:r>
             <a:endParaRPr>
               <a:solidFill>
                 <a:schemeClr val="accent2"/>
@@ -14934,11 +15177,11 @@
 </file>
 
 <file path=ppt/slides/slide5.xml><?xml version="1.0" encoding="utf-8"?>
-<p:sld xmlns:a="http://schemas.openxmlformats.org/drawingml/2006/main" xmlns:r="http://schemas.openxmlformats.org/officeDocument/2006/relationships" xmlns:mc="http://schemas.openxmlformats.org/markup-compatibility/2006" xmlns:mv="urn:schemas-microsoft-com:mac:vml" xmlns:p="http://schemas.openxmlformats.org/presentationml/2006/main" xmlns:c="http://schemas.openxmlformats.org/drawingml/2006/chart" xmlns:dgm="http://schemas.openxmlformats.org/drawingml/2006/diagram" xmlns:o="urn:schemas-microsoft-com:office:office" xmlns:v="urn:schemas-microsoft-com:vml" xmlns:pvml="urn:schemas-microsoft-com:office:powerpoint" xmlns:com="http://schemas.openxmlformats.org/drawingml/2006/compatibility" xmlns:p14="http://schemas.microsoft.com/office/powerpoint/2010/main" xmlns:p15="http://schemas.microsoft.com/office/powerpoint/2012/main" xmlns:ahyp="http://schemas.microsoft.com/office/drawing/2018/hyperlinkcolor">
+<p:sld xmlns:a="http://schemas.openxmlformats.org/drawingml/2006/main" xmlns:r="http://schemas.openxmlformats.org/officeDocument/2006/relationships" xmlns:p="http://schemas.openxmlformats.org/presentationml/2006/main">
   <p:cSld>
     <p:spTree>
       <p:nvGrpSpPr>
-        <p:cNvPr id="144" name="Shape 144"/>
+        <p:cNvPr id="1" name="Shape 144"/>
         <p:cNvGrpSpPr/>
         <p:nvPr/>
       </p:nvGrpSpPr>
@@ -14970,12 +15213,12 @@
           </a:ln>
         </p:spPr>
         <p:txBody>
-          <a:bodyPr anchorCtr="0" anchor="ctr" bIns="45700" lIns="91425" spcFirstLastPara="1" rIns="91425" wrap="square" tIns="45700">
+          <a:bodyPr spcFirstLastPara="1" wrap="square" lIns="91425" tIns="45700" rIns="91425" bIns="45700" anchor="ctr" anchorCtr="0">
             <a:normAutofit/>
           </a:bodyPr>
           <a:lstStyle/>
           <a:p>
-            <a:pPr indent="0" lvl="0" marL="0" marR="0" rtl="0" algn="l">
+            <a:pPr marL="0" marR="0" lvl="0" indent="0" algn="l" rtl="0">
               <a:lnSpc>
                 <a:spcPct val="90000"/>
               </a:lnSpc>
@@ -15004,7 +15247,7 @@
               </a:rPr>
               <a:t>Git commits</a:t>
             </a:r>
-            <a:endParaRPr b="0" i="0" sz="3200" u="none" cap="none" strike="noStrike">
+            <a:endParaRPr sz="3200" b="0" i="0" u="none" strike="noStrike" cap="none">
               <a:solidFill>
                 <a:schemeClr val="dk1"/>
               </a:solidFill>
@@ -15036,12 +15279,12 @@
           </a:ln>
         </p:spPr>
         <p:txBody>
-          <a:bodyPr anchorCtr="0" anchor="ctr" bIns="45700" lIns="91425" spcFirstLastPara="1" rIns="91425" wrap="square" tIns="45700">
+          <a:bodyPr spcFirstLastPara="1" wrap="square" lIns="91425" tIns="45700" rIns="91425" bIns="45700" anchor="ctr" anchorCtr="0">
             <a:normAutofit/>
           </a:bodyPr>
           <a:lstStyle/>
           <a:p>
-            <a:pPr indent="0" lvl="0" marL="0" marR="0" rtl="0" algn="l">
+            <a:pPr marL="0" marR="0" lvl="0" indent="0" algn="l" rtl="0">
               <a:lnSpc>
                 <a:spcPct val="90000"/>
               </a:lnSpc>
@@ -15059,7 +15302,7 @@
               <a:buNone/>
             </a:pPr>
             <a:r>
-              <a:rPr b="0" i="0" lang="en-US" sz="1600" u="none" cap="none" strike="noStrike">
+              <a:rPr lang="en-US" sz="1600" b="0" i="0" u="none" strike="noStrike" cap="none">
                 <a:solidFill>
                   <a:schemeClr val="dk1"/>
                 </a:solidFill>
@@ -15084,7 +15327,7 @@
           <a:blip r:embed="rId3">
             <a:alphaModFix/>
           </a:blip>
-          <a:srcRect b="0" l="0" r="0" t="0"/>
+          <a:srcRect/>
           <a:stretch/>
         </p:blipFill>
         <p:spPr>
@@ -15121,12 +15364,12 @@
           </a:ln>
         </p:spPr>
         <p:txBody>
-          <a:bodyPr anchorCtr="0" anchor="t" bIns="91425" lIns="91425" spcFirstLastPara="1" rIns="91425" wrap="square" tIns="91425">
+          <a:bodyPr spcFirstLastPara="1" wrap="square" lIns="91425" tIns="91425" rIns="91425" bIns="91425" anchor="t" anchorCtr="0">
             <a:spAutoFit/>
           </a:bodyPr>
           <a:lstStyle/>
           <a:p>
-            <a:pPr indent="0" lvl="0" marL="0" rtl="0" algn="just">
+            <a:pPr marL="0" lvl="0" indent="0" algn="just" rtl="0">
               <a:spcBef>
                 <a:spcPts val="0"/>
               </a:spcBef>
@@ -15148,7 +15391,7 @@
               <a:t>Un “</a:t>
             </a:r>
             <a:r>
-              <a:rPr b="1" lang="en-US" sz="1800">
+              <a:rPr lang="en-US" sz="1800" b="1">
                 <a:solidFill>
                   <a:schemeClr val="dk1"/>
                 </a:solidFill>
@@ -15172,7 +15415,7 @@
               <a:t>” es un “</a:t>
             </a:r>
             <a:r>
-              <a:rPr b="1" lang="en-US" sz="1800">
+              <a:rPr lang="en-US" sz="1800" b="1">
                 <a:solidFill>
                   <a:schemeClr val="dk1"/>
                 </a:solidFill>
@@ -15206,7 +15449,7 @@
             </a:endParaRPr>
           </a:p>
           <a:p>
-            <a:pPr indent="0" lvl="0" marL="0" rtl="0" algn="just">
+            <a:pPr marL="0" lvl="0" indent="0" algn="just" rtl="0">
               <a:spcBef>
                 <a:spcPts val="0"/>
               </a:spcBef>
@@ -15215,9 +15458,6 @@
               </a:spcAft>
               <a:buNone/>
             </a:pPr>
-            <a:r>
-              <a:t/>
-            </a:r>
             <a:endParaRPr sz="1800">
               <a:solidFill>
                 <a:schemeClr val="dk1"/>
@@ -15229,7 +15469,7 @@
             </a:endParaRPr>
           </a:p>
           <a:p>
-            <a:pPr indent="0" lvl="0" marL="0" rtl="0" algn="just">
+            <a:pPr marL="0" lvl="0" indent="0" algn="just" rtl="0">
               <a:spcBef>
                 <a:spcPts val="0"/>
               </a:spcBef>
@@ -15251,7 +15491,7 @@
               <a:t>Cada </a:t>
             </a:r>
             <a:r>
-              <a:rPr b="1" lang="en-US" sz="1800">
+              <a:rPr lang="en-US" sz="1800" b="1">
                 <a:solidFill>
                   <a:schemeClr val="dk1"/>
                 </a:solidFill>
@@ -15285,7 +15525,7 @@
             </a:endParaRPr>
           </a:p>
           <a:p>
-            <a:pPr indent="-342900" lvl="0" marL="457200" rtl="0" algn="just">
+            <a:pPr marL="457200" lvl="0" indent="-342900" algn="just" rtl="0">
               <a:spcBef>
                 <a:spcPts val="0"/>
               </a:spcBef>
@@ -15300,7 +15540,7 @@
               <a:buChar char="●"/>
             </a:pPr>
             <a:r>
-              <a:rPr b="1" lang="en-US" sz="1800">
+              <a:rPr lang="en-US" sz="1800" b="1">
                 <a:solidFill>
                   <a:schemeClr val="dk1"/>
                 </a:solidFill>
@@ -15334,7 +15574,7 @@
             </a:endParaRPr>
           </a:p>
           <a:p>
-            <a:pPr indent="-342900" lvl="0" marL="457200" rtl="0" algn="just">
+            <a:pPr marL="457200" lvl="0" indent="-342900" algn="just" rtl="0">
               <a:spcBef>
                 <a:spcPts val="0"/>
               </a:spcBef>
@@ -15349,7 +15589,7 @@
               <a:buChar char="●"/>
             </a:pPr>
             <a:r>
-              <a:rPr b="1" lang="en-US" sz="1800">
+              <a:rPr lang="en-US" sz="1800" b="1">
                 <a:solidFill>
                   <a:schemeClr val="dk1"/>
                 </a:solidFill>
@@ -15404,12 +15644,12 @@
           </a:ln>
         </p:spPr>
         <p:txBody>
-          <a:bodyPr anchorCtr="0" anchor="t" bIns="91425" lIns="91425" spcFirstLastPara="1" rIns="91425" wrap="square" tIns="91425">
+          <a:bodyPr spcFirstLastPara="1" wrap="square" lIns="91425" tIns="91425" rIns="91425" bIns="91425" anchor="t" anchorCtr="0">
             <a:spAutoFit/>
           </a:bodyPr>
           <a:lstStyle/>
           <a:p>
-            <a:pPr indent="0" lvl="0" marL="0" rtl="0" algn="l">
+            <a:pPr marL="0" lvl="0" indent="0" algn="l" rtl="0">
               <a:spcBef>
                 <a:spcPts val="0"/>
               </a:spcBef>
@@ -15477,14 +15717,14 @@
             <a:avLst/>
           </a:prstGeom>
           <a:noFill/>
-          <a:ln cap="flat" cmpd="sng" w="9525">
+          <a:ln w="9525" cap="flat" cmpd="sng">
             <a:solidFill>
               <a:schemeClr val="accent2"/>
             </a:solidFill>
             <a:prstDash val="solid"/>
             <a:round/>
-            <a:headEnd len="med" w="med" type="none"/>
-            <a:tailEnd len="med" w="med" type="oval"/>
+            <a:headEnd type="none" w="med" len="med"/>
+            <a:tailEnd type="oval" w="med" len="med"/>
           </a:ln>
         </p:spPr>
       </p:cxnSp>
@@ -15501,7 +15741,7 @@
           </a:xfrm>
           <a:prstGeom prst="roundRect">
             <a:avLst>
-              <a:gd fmla="val 16667" name="adj"/>
+              <a:gd name="adj" fmla="val 16667"/>
             </a:avLst>
           </a:prstGeom>
           <a:noFill/>
@@ -15510,12 +15750,12 @@
           </a:ln>
         </p:spPr>
         <p:txBody>
-          <a:bodyPr anchorCtr="0" anchor="ctr" bIns="91425" lIns="91425" spcFirstLastPara="1" rIns="91425" wrap="square" tIns="91425">
+          <a:bodyPr spcFirstLastPara="1" wrap="square" lIns="91425" tIns="91425" rIns="91425" bIns="91425" anchor="ctr" anchorCtr="0">
             <a:noAutofit/>
           </a:bodyPr>
           <a:lstStyle/>
           <a:p>
-            <a:pPr indent="0" lvl="0" marL="0" rtl="0" algn="ctr">
+            <a:pPr marL="0" lvl="0" indent="0" algn="ctr" rtl="0">
               <a:spcBef>
                 <a:spcPts val="0"/>
               </a:spcBef>
@@ -15524,9 +15764,6 @@
               </a:spcAft>
               <a:buNone/>
             </a:pPr>
-            <a:r>
-              <a:t/>
-            </a:r>
             <a:endParaRPr>
               <a:latin typeface="Calibri"/>
               <a:ea typeface="Calibri"/>
@@ -15577,27 +15814,27 @@
           </a:xfrm>
           <a:prstGeom prst="roundRect">
             <a:avLst>
-              <a:gd fmla="val 16667" name="adj"/>
+              <a:gd name="adj" fmla="val 16667"/>
             </a:avLst>
           </a:prstGeom>
           <a:noFill/>
-          <a:ln cap="flat" cmpd="sng" w="19050">
+          <a:ln w="19050" cap="flat" cmpd="sng">
             <a:solidFill>
               <a:schemeClr val="accent2"/>
             </a:solidFill>
             <a:prstDash val="solid"/>
             <a:round/>
-            <a:headEnd len="sm" w="sm" type="none"/>
-            <a:tailEnd len="sm" w="sm" type="none"/>
+            <a:headEnd type="none" w="sm" len="sm"/>
+            <a:tailEnd type="none" w="sm" len="sm"/>
           </a:ln>
         </p:spPr>
         <p:txBody>
-          <a:bodyPr anchorCtr="0" anchor="ctr" bIns="91425" lIns="91425" spcFirstLastPara="1" rIns="91425" wrap="square" tIns="91425">
+          <a:bodyPr spcFirstLastPara="1" wrap="square" lIns="91425" tIns="91425" rIns="91425" bIns="91425" anchor="ctr" anchorCtr="0">
             <a:noAutofit/>
           </a:bodyPr>
           <a:lstStyle/>
           <a:p>
-            <a:pPr indent="0" lvl="0" marL="0" rtl="0" algn="ctr">
+            <a:pPr marL="0" lvl="0" indent="0" algn="ctr" rtl="0">
               <a:spcBef>
                 <a:spcPts val="0"/>
               </a:spcBef>
@@ -15606,9 +15843,6 @@
               </a:spcAft>
               <a:buNone/>
             </a:pPr>
-            <a:r>
-              <a:t/>
-            </a:r>
             <a:endParaRPr>
               <a:latin typeface="Calibri"/>
               <a:ea typeface="Calibri"/>
@@ -15687,30 +15921,30 @@
           </a:xfrm>
           <a:prstGeom prst="rightArrow">
             <a:avLst>
-              <a:gd fmla="val 50000" name="adj1"/>
-              <a:gd fmla="val 50000" name="adj2"/>
+              <a:gd name="adj1" fmla="val 50000"/>
+              <a:gd name="adj2" fmla="val 50000"/>
             </a:avLst>
           </a:prstGeom>
           <a:solidFill>
             <a:schemeClr val="accent2"/>
           </a:solidFill>
-          <a:ln cap="flat" cmpd="sng" w="9525">
+          <a:ln w="9525" cap="flat" cmpd="sng">
             <a:solidFill>
               <a:schemeClr val="accent2"/>
             </a:solidFill>
             <a:prstDash val="solid"/>
             <a:round/>
-            <a:headEnd len="sm" w="sm" type="none"/>
-            <a:tailEnd len="sm" w="sm" type="none"/>
+            <a:headEnd type="none" w="sm" len="sm"/>
+            <a:tailEnd type="none" w="sm" len="sm"/>
           </a:ln>
         </p:spPr>
         <p:txBody>
-          <a:bodyPr anchorCtr="0" anchor="ctr" bIns="91425" lIns="91425" spcFirstLastPara="1" rIns="91425" wrap="square" tIns="91425">
+          <a:bodyPr spcFirstLastPara="1" wrap="square" lIns="91425" tIns="91425" rIns="91425" bIns="91425" anchor="ctr" anchorCtr="0">
             <a:noAutofit/>
           </a:bodyPr>
           <a:lstStyle/>
           <a:p>
-            <a:pPr indent="0" lvl="0" marL="0" rtl="0" algn="ctr">
+            <a:pPr marL="0" lvl="0" indent="0" algn="ctr" rtl="0">
               <a:spcBef>
                 <a:spcPts val="0"/>
               </a:spcBef>
@@ -15719,9 +15953,6 @@
               </a:spcAft>
               <a:buNone/>
             </a:pPr>
-            <a:r>
-              <a:t/>
-            </a:r>
             <a:endParaRPr>
               <a:latin typeface="Calibri"/>
               <a:ea typeface="Calibri"/>
@@ -15744,30 +15975,30 @@
           </a:xfrm>
           <a:prstGeom prst="rightArrow">
             <a:avLst>
-              <a:gd fmla="val 50000" name="adj1"/>
-              <a:gd fmla="val 50000" name="adj2"/>
+              <a:gd name="adj1" fmla="val 50000"/>
+              <a:gd name="adj2" fmla="val 50000"/>
             </a:avLst>
           </a:prstGeom>
           <a:solidFill>
             <a:schemeClr val="accent2"/>
           </a:solidFill>
-          <a:ln cap="flat" cmpd="sng" w="9525">
+          <a:ln w="9525" cap="flat" cmpd="sng">
             <a:solidFill>
               <a:schemeClr val="accent2"/>
             </a:solidFill>
             <a:prstDash val="solid"/>
             <a:round/>
-            <a:headEnd len="sm" w="sm" type="none"/>
-            <a:tailEnd len="sm" w="sm" type="none"/>
+            <a:headEnd type="none" w="sm" len="sm"/>
+            <a:tailEnd type="none" w="sm" len="sm"/>
           </a:ln>
         </p:spPr>
         <p:txBody>
-          <a:bodyPr anchorCtr="0" anchor="ctr" bIns="91425" lIns="91425" spcFirstLastPara="1" rIns="91425" wrap="square" tIns="91425">
+          <a:bodyPr spcFirstLastPara="1" wrap="square" lIns="91425" tIns="91425" rIns="91425" bIns="91425" anchor="ctr" anchorCtr="0">
             <a:noAutofit/>
           </a:bodyPr>
           <a:lstStyle/>
           <a:p>
-            <a:pPr indent="0" lvl="0" marL="0" rtl="0" algn="ctr">
+            <a:pPr marL="0" lvl="0" indent="0" algn="ctr" rtl="0">
               <a:spcBef>
                 <a:spcPts val="0"/>
               </a:spcBef>
@@ -15776,9 +16007,6 @@
               </a:spcAft>
               <a:buNone/>
             </a:pPr>
-            <a:r>
-              <a:t/>
-            </a:r>
             <a:endParaRPr>
               <a:latin typeface="Calibri"/>
               <a:ea typeface="Calibri"/>
@@ -15797,11 +16025,11 @@
 </file>
 
 <file path=ppt/slides/slide6.xml><?xml version="1.0" encoding="utf-8"?>
-<p:sld xmlns:a="http://schemas.openxmlformats.org/drawingml/2006/main" xmlns:r="http://schemas.openxmlformats.org/officeDocument/2006/relationships" xmlns:mc="http://schemas.openxmlformats.org/markup-compatibility/2006" xmlns:mv="urn:schemas-microsoft-com:mac:vml" xmlns:p="http://schemas.openxmlformats.org/presentationml/2006/main" xmlns:c="http://schemas.openxmlformats.org/drawingml/2006/chart" xmlns:dgm="http://schemas.openxmlformats.org/drawingml/2006/diagram" xmlns:o="urn:schemas-microsoft-com:office:office" xmlns:v="urn:schemas-microsoft-com:vml" xmlns:pvml="urn:schemas-microsoft-com:office:powerpoint" xmlns:com="http://schemas.openxmlformats.org/drawingml/2006/compatibility" xmlns:p14="http://schemas.microsoft.com/office/powerpoint/2010/main" xmlns:p15="http://schemas.microsoft.com/office/powerpoint/2012/main" xmlns:ahyp="http://schemas.microsoft.com/office/drawing/2018/hyperlinkcolor">
+<p:sld xmlns:a="http://schemas.openxmlformats.org/drawingml/2006/main" xmlns:r="http://schemas.openxmlformats.org/officeDocument/2006/relationships" xmlns:p="http://schemas.openxmlformats.org/presentationml/2006/main">
   <p:cSld>
     <p:spTree>
       <p:nvGrpSpPr>
-        <p:cNvPr id="161" name="Shape 161"/>
+        <p:cNvPr id="1" name="Shape 161"/>
         <p:cNvGrpSpPr/>
         <p:nvPr/>
       </p:nvGrpSpPr>
@@ -15861,12 +16089,12 @@
           </a:ln>
         </p:spPr>
         <p:txBody>
-          <a:bodyPr anchorCtr="0" anchor="ctr" bIns="45700" lIns="91425" spcFirstLastPara="1" rIns="91425" wrap="square" tIns="45700">
+          <a:bodyPr spcFirstLastPara="1" wrap="square" lIns="91425" tIns="45700" rIns="91425" bIns="45700" anchor="ctr" anchorCtr="0">
             <a:normAutofit/>
           </a:bodyPr>
           <a:lstStyle/>
           <a:p>
-            <a:pPr indent="0" lvl="0" marL="0" marR="0" rtl="0" algn="l">
+            <a:pPr marL="0" marR="0" lvl="0" indent="0" algn="l" rtl="0">
               <a:lnSpc>
                 <a:spcPct val="90000"/>
               </a:lnSpc>
@@ -15895,7 +16123,7 @@
               </a:rPr>
               <a:t>Versionado en Github desde Google Colab</a:t>
             </a:r>
-            <a:endParaRPr b="0" i="0" sz="3200" u="none" cap="none" strike="noStrike">
+            <a:endParaRPr sz="3200" b="0" i="0" u="none" strike="noStrike" cap="none">
               <a:solidFill>
                 <a:schemeClr val="dk1"/>
               </a:solidFill>
@@ -15927,12 +16155,12 @@
           </a:ln>
         </p:spPr>
         <p:txBody>
-          <a:bodyPr anchorCtr="0" anchor="ctr" bIns="45700" lIns="91425" spcFirstLastPara="1" rIns="91425" wrap="square" tIns="45700">
+          <a:bodyPr spcFirstLastPara="1" wrap="square" lIns="91425" tIns="45700" rIns="91425" bIns="45700" anchor="ctr" anchorCtr="0">
             <a:normAutofit/>
           </a:bodyPr>
           <a:lstStyle/>
           <a:p>
-            <a:pPr indent="0" lvl="0" marL="0" marR="0" rtl="0" algn="l">
+            <a:pPr marL="0" marR="0" lvl="0" indent="0" algn="l" rtl="0">
               <a:lnSpc>
                 <a:spcPct val="90000"/>
               </a:lnSpc>
@@ -15950,7 +16178,7 @@
               <a:buNone/>
             </a:pPr>
             <a:r>
-              <a:rPr b="0" i="0" lang="en-US" sz="1600" u="none" cap="none" strike="noStrike">
+              <a:rPr lang="en-US" sz="1600" b="0" i="0" u="none" strike="noStrike" cap="none">
                 <a:solidFill>
                   <a:schemeClr val="dk1"/>
                 </a:solidFill>
@@ -15975,7 +16203,7 @@
           <a:blip r:embed="rId4">
             <a:alphaModFix/>
           </a:blip>
-          <a:srcRect b="0" l="0" r="0" t="0"/>
+          <a:srcRect/>
           <a:stretch/>
         </p:blipFill>
         <p:spPr>
@@ -16002,7 +16230,7 @@
           <a:blip r:embed="rId5">
             <a:alphaModFix/>
           </a:blip>
-          <a:srcRect b="36756" l="0" r="0" t="0"/>
+          <a:srcRect b="36756"/>
           <a:stretch/>
         </p:blipFill>
         <p:spPr>
@@ -16032,27 +16260,27 @@
           </a:xfrm>
           <a:prstGeom prst="roundRect">
             <a:avLst>
-              <a:gd fmla="val 16667" name="adj"/>
+              <a:gd name="adj" fmla="val 16667"/>
             </a:avLst>
           </a:prstGeom>
           <a:noFill/>
-          <a:ln cap="flat" cmpd="sng" w="19050">
+          <a:ln w="19050" cap="flat" cmpd="sng">
             <a:solidFill>
               <a:schemeClr val="accent2"/>
             </a:solidFill>
             <a:prstDash val="solid"/>
             <a:round/>
-            <a:headEnd len="sm" w="sm" type="none"/>
-            <a:tailEnd len="sm" w="sm" type="none"/>
+            <a:headEnd type="none" w="sm" len="sm"/>
+            <a:tailEnd type="none" w="sm" len="sm"/>
           </a:ln>
         </p:spPr>
         <p:txBody>
-          <a:bodyPr anchorCtr="0" anchor="ctr" bIns="91425" lIns="91425" spcFirstLastPara="1" rIns="91425" wrap="square" tIns="91425">
+          <a:bodyPr spcFirstLastPara="1" wrap="square" lIns="91425" tIns="91425" rIns="91425" bIns="91425" anchor="ctr" anchorCtr="0">
             <a:noAutofit/>
           </a:bodyPr>
           <a:lstStyle/>
           <a:p>
-            <a:pPr indent="0" lvl="0" marL="0" rtl="0" algn="ctr">
+            <a:pPr marL="0" lvl="0" indent="0" algn="ctr" rtl="0">
               <a:spcBef>
                 <a:spcPts val="0"/>
               </a:spcBef>
@@ -16061,9 +16289,6 @@
               </a:spcAft>
               <a:buNone/>
             </a:pPr>
-            <a:r>
-              <a:t/>
-            </a:r>
             <a:endParaRPr>
               <a:latin typeface="Calibri"/>
               <a:ea typeface="Calibri"/>
@@ -16083,7 +16308,7 @@
           <p:nvPr/>
         </p:nvCxnSpPr>
         <p:spPr>
-          <a:xfrm flipH="1" rot="-5400000">
+          <a:xfrm rot="-5400000" flipH="1">
             <a:off x="-18225" y="2728925"/>
             <a:ext cx="2658300" cy="620400"/>
           </a:xfrm>
@@ -16091,14 +16316,14 @@
             <a:avLst/>
           </a:prstGeom>
           <a:noFill/>
-          <a:ln cap="flat" cmpd="sng" w="19050">
+          <a:ln w="19050" cap="flat" cmpd="sng">
             <a:solidFill>
               <a:schemeClr val="accent2"/>
             </a:solidFill>
             <a:prstDash val="solid"/>
             <a:round/>
-            <a:headEnd len="med" w="med" type="none"/>
-            <a:tailEnd len="med" w="med" type="oval"/>
+            <a:headEnd type="none" w="med" len="med"/>
+            <a:tailEnd type="oval" w="med" len="med"/>
           </a:ln>
         </p:spPr>
       </p:cxnSp>
@@ -16115,27 +16340,27 @@
           </a:xfrm>
           <a:prstGeom prst="roundRect">
             <a:avLst>
-              <a:gd fmla="val 16667" name="adj"/>
+              <a:gd name="adj" fmla="val 16667"/>
             </a:avLst>
           </a:prstGeom>
           <a:noFill/>
-          <a:ln cap="flat" cmpd="sng" w="19050">
+          <a:ln w="19050" cap="flat" cmpd="sng">
             <a:solidFill>
               <a:schemeClr val="accent2"/>
             </a:solidFill>
             <a:prstDash val="solid"/>
             <a:round/>
-            <a:headEnd len="sm" w="sm" type="none"/>
-            <a:tailEnd len="sm" w="sm" type="none"/>
+            <a:headEnd type="none" w="sm" len="sm"/>
+            <a:tailEnd type="none" w="sm" len="sm"/>
           </a:ln>
         </p:spPr>
         <p:txBody>
-          <a:bodyPr anchorCtr="0" anchor="ctr" bIns="91425" lIns="91425" spcFirstLastPara="1" rIns="91425" wrap="square" tIns="91425">
+          <a:bodyPr spcFirstLastPara="1" wrap="square" lIns="91425" tIns="91425" rIns="91425" bIns="91425" anchor="ctr" anchorCtr="0">
             <a:noAutofit/>
           </a:bodyPr>
           <a:lstStyle/>
           <a:p>
-            <a:pPr indent="0" lvl="0" marL="0" rtl="0" algn="ctr">
+            <a:pPr marL="0" lvl="0" indent="0" algn="ctr" rtl="0">
               <a:spcBef>
                 <a:spcPts val="0"/>
               </a:spcBef>
@@ -16144,9 +16369,6 @@
               </a:spcAft>
               <a:buNone/>
             </a:pPr>
-            <a:r>
-              <a:t/>
-            </a:r>
             <a:endParaRPr>
               <a:latin typeface="Calibri"/>
               <a:ea typeface="Calibri"/>
@@ -16176,12 +16398,12 @@
           </a:ln>
         </p:spPr>
         <p:txBody>
-          <a:bodyPr anchorCtr="0" anchor="t" bIns="91425" lIns="91425" spcFirstLastPara="1" rIns="91425" wrap="square" tIns="91425">
+          <a:bodyPr spcFirstLastPara="1" wrap="square" lIns="91425" tIns="91425" rIns="91425" bIns="91425" anchor="t" anchorCtr="0">
             <a:spAutoFit/>
           </a:bodyPr>
           <a:lstStyle/>
           <a:p>
-            <a:pPr indent="0" lvl="0" marL="0" rtl="0" algn="l">
+            <a:pPr marL="0" lvl="0" indent="0" algn="l" rtl="0">
               <a:spcBef>
                 <a:spcPts val="0"/>
               </a:spcBef>
@@ -16227,27 +16449,27 @@
           </a:xfrm>
           <a:prstGeom prst="roundRect">
             <a:avLst>
-              <a:gd fmla="val 16667" name="adj"/>
+              <a:gd name="adj" fmla="val 16667"/>
             </a:avLst>
           </a:prstGeom>
           <a:noFill/>
-          <a:ln cap="flat" cmpd="sng" w="19050">
+          <a:ln w="19050" cap="flat" cmpd="sng">
             <a:solidFill>
               <a:schemeClr val="accent2"/>
             </a:solidFill>
             <a:prstDash val="solid"/>
             <a:round/>
-            <a:headEnd len="sm" w="sm" type="none"/>
-            <a:tailEnd len="sm" w="sm" type="none"/>
+            <a:headEnd type="none" w="sm" len="sm"/>
+            <a:tailEnd type="none" w="sm" len="sm"/>
           </a:ln>
         </p:spPr>
         <p:txBody>
-          <a:bodyPr anchorCtr="0" anchor="ctr" bIns="91425" lIns="91425" spcFirstLastPara="1" rIns="91425" wrap="square" tIns="91425">
+          <a:bodyPr spcFirstLastPara="1" wrap="square" lIns="91425" tIns="91425" rIns="91425" bIns="91425" anchor="ctr" anchorCtr="0">
             <a:noAutofit/>
           </a:bodyPr>
           <a:lstStyle/>
           <a:p>
-            <a:pPr indent="0" lvl="0" marL="0" rtl="0" algn="ctr">
+            <a:pPr marL="0" lvl="0" indent="0" algn="ctr" rtl="0">
               <a:spcBef>
                 <a:spcPts val="0"/>
               </a:spcBef>
@@ -16256,9 +16478,6 @@
               </a:spcAft>
               <a:buNone/>
             </a:pPr>
-            <a:r>
-              <a:t/>
-            </a:r>
             <a:endParaRPr>
               <a:latin typeface="Calibri"/>
               <a:ea typeface="Calibri"/>
@@ -16309,30 +16528,30 @@
           </a:xfrm>
           <a:prstGeom prst="rightArrow">
             <a:avLst>
-              <a:gd fmla="val 50000" name="adj1"/>
-              <a:gd fmla="val 50000" name="adj2"/>
+              <a:gd name="adj1" fmla="val 50000"/>
+              <a:gd name="adj2" fmla="val 50000"/>
             </a:avLst>
           </a:prstGeom>
           <a:solidFill>
             <a:schemeClr val="accent2"/>
           </a:solidFill>
-          <a:ln cap="flat" cmpd="sng" w="9525">
+          <a:ln w="9525" cap="flat" cmpd="sng">
             <a:solidFill>
               <a:schemeClr val="accent2"/>
             </a:solidFill>
             <a:prstDash val="solid"/>
             <a:round/>
-            <a:headEnd len="sm" w="sm" type="none"/>
-            <a:tailEnd len="sm" w="sm" type="none"/>
+            <a:headEnd type="none" w="sm" len="sm"/>
+            <a:tailEnd type="none" w="sm" len="sm"/>
           </a:ln>
         </p:spPr>
         <p:txBody>
-          <a:bodyPr anchorCtr="0" anchor="ctr" bIns="91425" lIns="91425" spcFirstLastPara="1" rIns="91425" wrap="square" tIns="91425">
+          <a:bodyPr spcFirstLastPara="1" wrap="square" lIns="91425" tIns="91425" rIns="91425" bIns="91425" anchor="ctr" anchorCtr="0">
             <a:noAutofit/>
           </a:bodyPr>
           <a:lstStyle/>
           <a:p>
-            <a:pPr indent="0" lvl="0" marL="0" rtl="0" algn="ctr">
+            <a:pPr marL="0" lvl="0" indent="0" algn="ctr" rtl="0">
               <a:spcBef>
                 <a:spcPts val="0"/>
               </a:spcBef>
@@ -16341,9 +16560,6 @@
               </a:spcAft>
               <a:buNone/>
             </a:pPr>
-            <a:r>
-              <a:t/>
-            </a:r>
             <a:endParaRPr>
               <a:latin typeface="Calibri"/>
               <a:ea typeface="Calibri"/>
@@ -16370,23 +16586,23 @@
           <a:solidFill>
             <a:schemeClr val="lt1"/>
           </a:solidFill>
-          <a:ln cap="flat" cmpd="sng" w="9525">
+          <a:ln w="9525" cap="flat" cmpd="sng">
             <a:solidFill>
               <a:schemeClr val="accent2"/>
             </a:solidFill>
             <a:prstDash val="solid"/>
             <a:round/>
-            <a:headEnd len="sm" w="sm" type="none"/>
-            <a:tailEnd len="sm" w="sm" type="none"/>
+            <a:headEnd type="none" w="sm" len="sm"/>
+            <a:tailEnd type="none" w="sm" len="sm"/>
           </a:ln>
         </p:spPr>
         <p:txBody>
-          <a:bodyPr anchorCtr="0" anchor="t" bIns="91425" lIns="91425" spcFirstLastPara="1" rIns="91425" wrap="square" tIns="91425">
+          <a:bodyPr spcFirstLastPara="1" wrap="square" lIns="91425" tIns="91425" rIns="91425" bIns="91425" anchor="t" anchorCtr="0">
             <a:spAutoFit/>
           </a:bodyPr>
           <a:lstStyle/>
           <a:p>
-            <a:pPr indent="0" lvl="0" marL="0" rtl="0" algn="l">
+            <a:pPr marL="0" lvl="0" indent="0" algn="l" rtl="0">
               <a:spcBef>
                 <a:spcPts val="0"/>
               </a:spcBef>
@@ -16428,11 +16644,11 @@
 </file>
 
 <file path=ppt/slides/slide7.xml><?xml version="1.0" encoding="utf-8"?>
-<p:sld xmlns:a="http://schemas.openxmlformats.org/drawingml/2006/main" xmlns:r="http://schemas.openxmlformats.org/officeDocument/2006/relationships" xmlns:mc="http://schemas.openxmlformats.org/markup-compatibility/2006" xmlns:mv="urn:schemas-microsoft-com:mac:vml" xmlns:p="http://schemas.openxmlformats.org/presentationml/2006/main" xmlns:c="http://schemas.openxmlformats.org/drawingml/2006/chart" xmlns:dgm="http://schemas.openxmlformats.org/drawingml/2006/diagram" xmlns:o="urn:schemas-microsoft-com:office:office" xmlns:v="urn:schemas-microsoft-com:vml" xmlns:pvml="urn:schemas-microsoft-com:office:powerpoint" xmlns:com="http://schemas.openxmlformats.org/drawingml/2006/compatibility" xmlns:p14="http://schemas.microsoft.com/office/powerpoint/2010/main" xmlns:p15="http://schemas.microsoft.com/office/powerpoint/2012/main" xmlns:ahyp="http://schemas.microsoft.com/office/drawing/2018/hyperlinkcolor">
+<p:sld xmlns:a="http://schemas.openxmlformats.org/drawingml/2006/main" xmlns:r="http://schemas.openxmlformats.org/officeDocument/2006/relationships" xmlns:p="http://schemas.openxmlformats.org/presentationml/2006/main">
   <p:cSld>
     <p:spTree>
       <p:nvGrpSpPr>
-        <p:cNvPr id="178" name="Shape 178"/>
+        <p:cNvPr id="1" name="Shape 178"/>
         <p:cNvGrpSpPr/>
         <p:nvPr/>
       </p:nvGrpSpPr>
@@ -16464,12 +16680,12 @@
           </a:ln>
         </p:spPr>
         <p:txBody>
-          <a:bodyPr anchorCtr="0" anchor="ctr" bIns="45700" lIns="91425" spcFirstLastPara="1" rIns="91425" wrap="square" tIns="45700">
+          <a:bodyPr spcFirstLastPara="1" wrap="square" lIns="91425" tIns="45700" rIns="91425" bIns="45700" anchor="ctr" anchorCtr="0">
             <a:normAutofit/>
           </a:bodyPr>
           <a:lstStyle/>
           <a:p>
-            <a:pPr indent="0" lvl="0" marL="0" marR="0" rtl="0" algn="l">
+            <a:pPr marL="0" marR="0" lvl="0" indent="0" algn="l" rtl="0">
               <a:lnSpc>
                 <a:spcPct val="90000"/>
               </a:lnSpc>
@@ -16530,12 +16746,12 @@
           </a:ln>
         </p:spPr>
         <p:txBody>
-          <a:bodyPr anchorCtr="0" anchor="ctr" bIns="45700" lIns="91425" spcFirstLastPara="1" rIns="91425" wrap="square" tIns="45700">
+          <a:bodyPr spcFirstLastPara="1" wrap="square" lIns="91425" tIns="45700" rIns="91425" bIns="45700" anchor="ctr" anchorCtr="0">
             <a:normAutofit/>
           </a:bodyPr>
           <a:lstStyle/>
           <a:p>
-            <a:pPr indent="0" lvl="0" marL="0" marR="0" rtl="0" algn="l">
+            <a:pPr marL="0" marR="0" lvl="0" indent="0" algn="l" rtl="0">
               <a:lnSpc>
                 <a:spcPct val="90000"/>
               </a:lnSpc>
@@ -16553,7 +16769,7 @@
               <a:buNone/>
             </a:pPr>
             <a:r>
-              <a:rPr b="0" i="0" lang="en-US" sz="1600" u="none" cap="none" strike="noStrike">
+              <a:rPr lang="en-US" sz="1600" b="0" i="0" u="none" strike="noStrike" cap="none">
                 <a:solidFill>
                   <a:schemeClr val="dk1"/>
                 </a:solidFill>
@@ -16578,7 +16794,7 @@
           <a:blip r:embed="rId3">
             <a:alphaModFix/>
           </a:blip>
-          <a:srcRect b="0" l="0" r="0" t="0"/>
+          <a:srcRect/>
           <a:stretch/>
         </p:blipFill>
         <p:spPr>
@@ -16615,12 +16831,12 @@
           </a:ln>
         </p:spPr>
         <p:txBody>
-          <a:bodyPr anchorCtr="0" anchor="t" bIns="91425" lIns="91425" spcFirstLastPara="1" rIns="91425" wrap="square" tIns="91425">
+          <a:bodyPr spcFirstLastPara="1" wrap="square" lIns="91425" tIns="91425" rIns="91425" bIns="91425" anchor="t" anchorCtr="0">
             <a:spAutoFit/>
           </a:bodyPr>
           <a:lstStyle/>
           <a:p>
-            <a:pPr indent="0" lvl="0" marL="0" rtl="0" algn="l">
+            <a:pPr marL="0" lvl="0" indent="0" algn="l" rtl="0">
               <a:spcBef>
                 <a:spcPts val="0"/>
               </a:spcBef>
@@ -16631,16 +16847,12 @@
             </a:pPr>
             <a:r>
               <a:rPr lang="en-US"/>
-              <a:t>Para realizar commits y versionado m</a:t>
-            </a:r>
-            <a:r>
-              <a:rPr lang="en-US"/>
-              <a:t>ás avanzado, existen 2 alternativas:</a:t>
+              <a:t>Para realizar commits y versionado más avanzado, existen 2 alternativas:</a:t>
             </a:r>
             <a:endParaRPr/>
           </a:p>
           <a:p>
-            <a:pPr indent="-317500" lvl="0" marL="457200" rtl="0" algn="l">
+            <a:pPr marL="457200" lvl="0" indent="-317500" algn="l" rtl="0">
               <a:spcBef>
                 <a:spcPts val="0"/>
               </a:spcBef>
@@ -16670,7 +16882,7 @@
             <a:endParaRPr/>
           </a:p>
           <a:p>
-            <a:pPr indent="-317500" lvl="0" marL="457200" rtl="0" algn="l">
+            <a:pPr marL="457200" lvl="0" indent="-317500" algn="l" rtl="0">
               <a:spcBef>
                 <a:spcPts val="0"/>
               </a:spcBef>
@@ -16688,6 +16900,36 @@
           </a:p>
         </p:txBody>
       </p:sp>
+      <p:pic>
+        <p:nvPicPr>
+          <p:cNvPr id="3" name="Picture 2">
+            <a:extLst>
+              <a:ext uri="{FF2B5EF4-FFF2-40B4-BE49-F238E27FC236}">
+                <a16:creationId xmlns:a16="http://schemas.microsoft.com/office/drawing/2014/main" id="{001262EC-5896-62B0-FE05-6652B3A6F0DF}"/>
+              </a:ext>
+            </a:extLst>
+          </p:cNvPr>
+          <p:cNvPicPr>
+            <a:picLocks noChangeAspect="1"/>
+          </p:cNvPicPr>
+          <p:nvPr/>
+        </p:nvPicPr>
+        <p:blipFill>
+          <a:blip r:embed="rId5"/>
+          <a:stretch>
+            <a:fillRect/>
+          </a:stretch>
+        </p:blipFill>
+        <p:spPr>
+          <a:xfrm>
+            <a:off x="1066800" y="2022951"/>
+            <a:ext cx="7772400" cy="2812097"/>
+          </a:xfrm>
+          <a:prstGeom prst="rect">
+            <a:avLst/>
+          </a:prstGeom>
+        </p:spPr>
+      </p:pic>
     </p:spTree>
   </p:cSld>
   <p:clrMapOvr>
@@ -16697,11 +16939,11 @@
 </file>
 
 <file path=ppt/slides/slide8.xml><?xml version="1.0" encoding="utf-8"?>
-<p:sld xmlns:a="http://schemas.openxmlformats.org/drawingml/2006/main" xmlns:r="http://schemas.openxmlformats.org/officeDocument/2006/relationships" xmlns:mc="http://schemas.openxmlformats.org/markup-compatibility/2006" xmlns:mv="urn:schemas-microsoft-com:mac:vml" xmlns:p="http://schemas.openxmlformats.org/presentationml/2006/main" xmlns:c="http://schemas.openxmlformats.org/drawingml/2006/chart" xmlns:dgm="http://schemas.openxmlformats.org/drawingml/2006/diagram" xmlns:o="urn:schemas-microsoft-com:office:office" xmlns:v="urn:schemas-microsoft-com:vml" xmlns:pvml="urn:schemas-microsoft-com:office:powerpoint" xmlns:com="http://schemas.openxmlformats.org/drawingml/2006/compatibility" xmlns:p14="http://schemas.microsoft.com/office/powerpoint/2010/main" xmlns:p15="http://schemas.microsoft.com/office/powerpoint/2012/main" xmlns:ahyp="http://schemas.microsoft.com/office/drawing/2018/hyperlinkcolor">
+<p:sld xmlns:a="http://schemas.openxmlformats.org/drawingml/2006/main" xmlns:r="http://schemas.openxmlformats.org/officeDocument/2006/relationships" xmlns:p="http://schemas.openxmlformats.org/presentationml/2006/main">
   <p:cSld>
     <p:spTree>
       <p:nvGrpSpPr>
-        <p:cNvPr id="187" name="Shape 187"/>
+        <p:cNvPr id="1" name="Shape 187"/>
         <p:cNvGrpSpPr/>
         <p:nvPr/>
       </p:nvGrpSpPr>
@@ -16735,12 +16977,12 @@
           </a:ln>
         </p:spPr>
         <p:txBody>
-          <a:bodyPr anchorCtr="0" anchor="ctr" bIns="45700" lIns="91425" spcFirstLastPara="1" rIns="91425" wrap="square" tIns="45700">
+          <a:bodyPr spcFirstLastPara="1" wrap="square" lIns="91425" tIns="45700" rIns="91425" bIns="45700" anchor="ctr" anchorCtr="0">
             <a:noAutofit/>
           </a:bodyPr>
           <a:lstStyle/>
           <a:p>
-            <a:pPr indent="0" lvl="0" marL="0" marR="0" rtl="0" algn="ctr">
+            <a:pPr marL="0" marR="0" lvl="0" indent="0" algn="ctr" rtl="0">
               <a:lnSpc>
                 <a:spcPct val="100000"/>
               </a:lnSpc>
@@ -16757,10 +16999,7 @@
               <a:buFont typeface="Calibri"/>
               <a:buNone/>
             </a:pPr>
-            <a:r>
-              <a:t/>
-            </a:r>
-            <a:endParaRPr b="0" i="0" sz="1800" u="none" cap="none" strike="noStrike">
+            <a:endParaRPr sz="1800" b="0" i="0" u="none" strike="noStrike" cap="none">
               <a:solidFill>
                 <a:srgbClr val="FFFFFF"/>
               </a:solidFill>
@@ -16792,12 +17031,12 @@
           </a:ln>
         </p:spPr>
         <p:txBody>
-          <a:bodyPr anchorCtr="0" anchor="t" bIns="45700" lIns="91425" spcFirstLastPara="1" rIns="91425" wrap="square" tIns="45700">
+          <a:bodyPr spcFirstLastPara="1" wrap="square" lIns="91425" tIns="45700" rIns="91425" bIns="45700" anchor="t" anchorCtr="0">
             <a:spAutoFit/>
           </a:bodyPr>
           <a:lstStyle/>
           <a:p>
-            <a:pPr indent="0" lvl="0" marL="0" marR="0" rtl="0" algn="ctr">
+            <a:pPr marL="0" marR="0" lvl="0" indent="0" algn="ctr" rtl="0">
               <a:lnSpc>
                 <a:spcPct val="100000"/>
               </a:lnSpc>
@@ -16815,7 +17054,7 @@
               <a:buNone/>
             </a:pPr>
             <a:r>
-              <a:rPr b="0" i="0" lang="en-US" sz="3600" u="none" cap="none" strike="noStrike">
+              <a:rPr lang="en-US" sz="3600" b="0" i="0" u="none" strike="noStrike" cap="none">
                 <a:solidFill>
                   <a:srgbClr val="000000"/>
                 </a:solidFill>
@@ -16826,7 +17065,7 @@
               </a:rPr>
               <a:t>¡Muchas gracias por su atención!</a:t>
             </a:r>
-            <a:endParaRPr b="1" i="0" sz="3600" u="none" cap="none" strike="noStrike">
+            <a:endParaRPr sz="3600" b="1" i="0" u="none" strike="noStrike" cap="none">
               <a:solidFill>
                 <a:srgbClr val="000000"/>
               </a:solidFill>
@@ -16848,7 +17087,7 @@
           <a:blip r:embed="rId3">
             <a:alphaModFix/>
           </a:blip>
-          <a:srcRect b="0" l="0" r="0" t="0"/>
+          <a:srcRect/>
           <a:stretch/>
         </p:blipFill>
         <p:spPr>
@@ -16874,7 +17113,7 @@
 </file>
 
 <file path=ppt/theme/theme1.xml><?xml version="1.0" encoding="utf-8"?>
-<a:theme xmlns:a="http://schemas.openxmlformats.org/drawingml/2006/main" xmlns:r="http://schemas.openxmlformats.org/officeDocument/2006/relationships" name="Office Theme">
+<a:theme xmlns:a="http://schemas.openxmlformats.org/drawingml/2006/main" name="Office Theme">
   <a:themeElements>
     <a:clrScheme name="Office Theme">
       <a:dk1>
@@ -17149,11 +17388,13 @@
       </a:bgFillStyleLst>
     </a:fmtScheme>
   </a:themeElements>
+  <a:objectDefaults/>
+  <a:extraClrSchemeLst/>
 </a:theme>
 </file>
 
 <file path=ppt/theme/theme2.xml><?xml version="1.0" encoding="utf-8"?>
-<a:theme xmlns:a="http://schemas.openxmlformats.org/drawingml/2006/main" xmlns:r="http://schemas.openxmlformats.org/officeDocument/2006/relationships" name="Office Theme">
+<a:theme xmlns:a="http://schemas.openxmlformats.org/drawingml/2006/main" name="Office Theme">
   <a:themeElements>
     <a:clrScheme name="Office">
       <a:dk1>
@@ -17428,5 +17669,7 @@
       </a:bgFillStyleLst>
     </a:fmtScheme>
   </a:themeElements>
+  <a:objectDefaults/>
+  <a:extraClrSchemeLst/>
 </a:theme>
 </file>